--- a/Physic01_k10/Ch01_Mo_dau/b03_thuchanhtinhsaiso/b3_thuchanhtinhsaiso.pptx
+++ b/Physic01_k10/Ch01_Mo_dau/b03_thuchanhtinhsaiso/b3_thuchanhtinhsaiso.pptx
@@ -23,6 +23,7 @@
     <p:sldId id="1442" r:id="rId15"/>
     <p:sldId id="1443" r:id="rId16"/>
     <p:sldId id="1445" r:id="rId18"/>
+    <p:sldId id="1446" r:id="rId19"/>
   </p:sldIdLst>
   <p:sldSz cx="12192000" cy="6858000"/>
   <p:notesSz cx="6858000" cy="9144000"/>
@@ -3224,7 +3225,7 @@
         <a:spcBef>
           <a:spcPts val="1000"/>
         </a:spcBef>
-        <a:buFont typeface="Arial" panose="020B0604020202020204" pitchFamily="34" charset="0"/>
+        <a:buFont typeface="Arial" panose="020B0704020202020204" pitchFamily="34" charset="0"/>
         <a:buChar char="•"/>
         <a:defRPr sz="2800" kern="1200">
           <a:solidFill>
@@ -3242,7 +3243,7 @@
         <a:spcBef>
           <a:spcPts val="500"/>
         </a:spcBef>
-        <a:buFont typeface="Arial" panose="020B0604020202020204" pitchFamily="34" charset="0"/>
+        <a:buFont typeface="Arial" panose="020B0704020202020204" pitchFamily="34" charset="0"/>
         <a:buChar char="•"/>
         <a:defRPr sz="2400" kern="1200">
           <a:solidFill>
@@ -3260,7 +3261,7 @@
         <a:spcBef>
           <a:spcPts val="500"/>
         </a:spcBef>
-        <a:buFont typeface="Arial" panose="020B0604020202020204" pitchFamily="34" charset="0"/>
+        <a:buFont typeface="Arial" panose="020B0704020202020204" pitchFamily="34" charset="0"/>
         <a:buChar char="•"/>
         <a:defRPr sz="2000" kern="1200">
           <a:solidFill>
@@ -3278,7 +3279,7 @@
         <a:spcBef>
           <a:spcPts val="500"/>
         </a:spcBef>
-        <a:buFont typeface="Arial" panose="020B0604020202020204" pitchFamily="34" charset="0"/>
+        <a:buFont typeface="Arial" panose="020B0704020202020204" pitchFamily="34" charset="0"/>
         <a:buChar char="•"/>
         <a:defRPr sz="1800" kern="1200">
           <a:solidFill>
@@ -3296,7 +3297,7 @@
         <a:spcBef>
           <a:spcPts val="500"/>
         </a:spcBef>
-        <a:buFont typeface="Arial" panose="020B0604020202020204" pitchFamily="34" charset="0"/>
+        <a:buFont typeface="Arial" panose="020B0704020202020204" pitchFamily="34" charset="0"/>
         <a:buChar char="•"/>
         <a:defRPr sz="1800" kern="1200">
           <a:solidFill>
@@ -3314,7 +3315,7 @@
         <a:spcBef>
           <a:spcPts val="500"/>
         </a:spcBef>
-        <a:buFont typeface="Arial" panose="020B0604020202020204" pitchFamily="34" charset="0"/>
+        <a:buFont typeface="Arial" panose="020B0704020202020204" pitchFamily="34" charset="0"/>
         <a:buChar char="•"/>
         <a:defRPr sz="1800" kern="1200">
           <a:solidFill>
@@ -3332,7 +3333,7 @@
         <a:spcBef>
           <a:spcPts val="500"/>
         </a:spcBef>
-        <a:buFont typeface="Arial" panose="020B0604020202020204" pitchFamily="34" charset="0"/>
+        <a:buFont typeface="Arial" panose="020B0704020202020204" pitchFamily="34" charset="0"/>
         <a:buChar char="•"/>
         <a:defRPr sz="1800" kern="1200">
           <a:solidFill>
@@ -3350,7 +3351,7 @@
         <a:spcBef>
           <a:spcPts val="500"/>
         </a:spcBef>
-        <a:buFont typeface="Arial" panose="020B0604020202020204" pitchFamily="34" charset="0"/>
+        <a:buFont typeface="Arial" panose="020B0704020202020204" pitchFamily="34" charset="0"/>
         <a:buChar char="•"/>
         <a:defRPr sz="1800" kern="1200">
           <a:solidFill>
@@ -3368,7 +3369,7 @@
         <a:spcBef>
           <a:spcPts val="500"/>
         </a:spcBef>
-        <a:buFont typeface="Arial" panose="020B0604020202020204" pitchFamily="34" charset="0"/>
+        <a:buFont typeface="Arial" panose="020B0704020202020204" pitchFamily="34" charset="0"/>
         <a:buChar char="•"/>
         <a:defRPr sz="1800" kern="1200">
           <a:solidFill>
@@ -3726,8 +3727,8 @@
                 <a:solidFill>
                   <a:schemeClr val="tx1"/>
                 </a:solidFill>
-                <a:latin typeface="Arial" panose="020B0604020202020204" pitchFamily="34" charset="0"/>
-                <a:cs typeface="Arial" panose="020B0604020202020204" pitchFamily="34" charset="0"/>
+                <a:latin typeface="Arial" panose="020B0704020202020204" pitchFamily="34" charset="0"/>
+                <a:cs typeface="Arial" panose="020B0704020202020204" pitchFamily="34" charset="0"/>
               </a:defRPr>
             </a:lvl1pPr>
             <a:lvl2pPr marL="742950" indent="-285750">
@@ -3735,8 +3736,8 @@
                 <a:solidFill>
                   <a:schemeClr val="tx1"/>
                 </a:solidFill>
-                <a:latin typeface="Arial" panose="020B0604020202020204" pitchFamily="34" charset="0"/>
-                <a:cs typeface="Arial" panose="020B0604020202020204" pitchFamily="34" charset="0"/>
+                <a:latin typeface="Arial" panose="020B0704020202020204" pitchFamily="34" charset="0"/>
+                <a:cs typeface="Arial" panose="020B0704020202020204" pitchFamily="34" charset="0"/>
               </a:defRPr>
             </a:lvl2pPr>
             <a:lvl3pPr marL="1143000" indent="-228600">
@@ -3744,8 +3745,8 @@
                 <a:solidFill>
                   <a:schemeClr val="tx1"/>
                 </a:solidFill>
-                <a:latin typeface="Arial" panose="020B0604020202020204" pitchFamily="34" charset="0"/>
-                <a:cs typeface="Arial" panose="020B0604020202020204" pitchFamily="34" charset="0"/>
+                <a:latin typeface="Arial" panose="020B0704020202020204" pitchFamily="34" charset="0"/>
+                <a:cs typeface="Arial" panose="020B0704020202020204" pitchFamily="34" charset="0"/>
               </a:defRPr>
             </a:lvl3pPr>
             <a:lvl4pPr marL="1600200" indent="-228600">
@@ -3753,8 +3754,8 @@
                 <a:solidFill>
                   <a:schemeClr val="tx1"/>
                 </a:solidFill>
-                <a:latin typeface="Arial" panose="020B0604020202020204" pitchFamily="34" charset="0"/>
-                <a:cs typeface="Arial" panose="020B0604020202020204" pitchFamily="34" charset="0"/>
+                <a:latin typeface="Arial" panose="020B0704020202020204" pitchFamily="34" charset="0"/>
+                <a:cs typeface="Arial" panose="020B0704020202020204" pitchFamily="34" charset="0"/>
               </a:defRPr>
             </a:lvl4pPr>
             <a:lvl5pPr marL="2057400" indent="-228600">
@@ -3762,8 +3763,8 @@
                 <a:solidFill>
                   <a:schemeClr val="tx1"/>
                 </a:solidFill>
-                <a:latin typeface="Arial" panose="020B0604020202020204" pitchFamily="34" charset="0"/>
-                <a:cs typeface="Arial" panose="020B0604020202020204" pitchFamily="34" charset="0"/>
+                <a:latin typeface="Arial" panose="020B0704020202020204" pitchFamily="34" charset="0"/>
+                <a:cs typeface="Arial" panose="020B0704020202020204" pitchFamily="34" charset="0"/>
               </a:defRPr>
             </a:lvl5pPr>
             <a:lvl6pPr marL="2514600" indent="-228600" eaLnBrk="0" fontAlgn="base" hangingPunct="0">
@@ -3777,8 +3778,8 @@
                 <a:solidFill>
                   <a:schemeClr val="tx1"/>
                 </a:solidFill>
-                <a:latin typeface="Arial" panose="020B0604020202020204" pitchFamily="34" charset="0"/>
-                <a:cs typeface="Arial" panose="020B0604020202020204" pitchFamily="34" charset="0"/>
+                <a:latin typeface="Arial" panose="020B0704020202020204" pitchFamily="34" charset="0"/>
+                <a:cs typeface="Arial" panose="020B0704020202020204" pitchFamily="34" charset="0"/>
               </a:defRPr>
             </a:lvl6pPr>
             <a:lvl7pPr marL="2971800" indent="-228600" eaLnBrk="0" fontAlgn="base" hangingPunct="0">
@@ -3792,8 +3793,8 @@
                 <a:solidFill>
                   <a:schemeClr val="tx1"/>
                 </a:solidFill>
-                <a:latin typeface="Arial" panose="020B0604020202020204" pitchFamily="34" charset="0"/>
-                <a:cs typeface="Arial" panose="020B0604020202020204" pitchFamily="34" charset="0"/>
+                <a:latin typeface="Arial" panose="020B0704020202020204" pitchFamily="34" charset="0"/>
+                <a:cs typeface="Arial" panose="020B0704020202020204" pitchFamily="34" charset="0"/>
               </a:defRPr>
             </a:lvl7pPr>
             <a:lvl8pPr marL="3429000" indent="-228600" eaLnBrk="0" fontAlgn="base" hangingPunct="0">
@@ -3807,8 +3808,8 @@
                 <a:solidFill>
                   <a:schemeClr val="tx1"/>
                 </a:solidFill>
-                <a:latin typeface="Arial" panose="020B0604020202020204" pitchFamily="34" charset="0"/>
-                <a:cs typeface="Arial" panose="020B0604020202020204" pitchFamily="34" charset="0"/>
+                <a:latin typeface="Arial" panose="020B0704020202020204" pitchFamily="34" charset="0"/>
+                <a:cs typeface="Arial" panose="020B0704020202020204" pitchFamily="34" charset="0"/>
               </a:defRPr>
             </a:lvl8pPr>
             <a:lvl9pPr marL="3886200" indent="-228600" eaLnBrk="0" fontAlgn="base" hangingPunct="0">
@@ -3822,8 +3823,8 @@
                 <a:solidFill>
                   <a:schemeClr val="tx1"/>
                 </a:solidFill>
-                <a:latin typeface="Arial" panose="020B0604020202020204" pitchFamily="34" charset="0"/>
-                <a:cs typeface="Arial" panose="020B0604020202020204" pitchFamily="34" charset="0"/>
+                <a:latin typeface="Arial" panose="020B0704020202020204" pitchFamily="34" charset="0"/>
+                <a:cs typeface="Arial" panose="020B0704020202020204" pitchFamily="34" charset="0"/>
               </a:defRPr>
             </a:lvl9pPr>
           </a:lstStyle>
@@ -3887,8 +3888,8 @@
                 <a:solidFill>
                   <a:schemeClr val="tx1"/>
                 </a:solidFill>
-                <a:latin typeface="Arial" panose="020B0604020202020204" pitchFamily="34" charset="0"/>
-                <a:cs typeface="Arial" panose="020B0604020202020204" pitchFamily="34" charset="0"/>
+                <a:latin typeface="Arial" panose="020B0704020202020204" pitchFamily="34" charset="0"/>
+                <a:cs typeface="Arial" panose="020B0704020202020204" pitchFamily="34" charset="0"/>
               </a:defRPr>
             </a:lvl1pPr>
             <a:lvl2pPr marL="742950" indent="-285750">
@@ -3896,8 +3897,8 @@
                 <a:solidFill>
                   <a:schemeClr val="tx1"/>
                 </a:solidFill>
-                <a:latin typeface="Arial" panose="020B0604020202020204" pitchFamily="34" charset="0"/>
-                <a:cs typeface="Arial" panose="020B0604020202020204" pitchFamily="34" charset="0"/>
+                <a:latin typeface="Arial" panose="020B0704020202020204" pitchFamily="34" charset="0"/>
+                <a:cs typeface="Arial" panose="020B0704020202020204" pitchFamily="34" charset="0"/>
               </a:defRPr>
             </a:lvl2pPr>
             <a:lvl3pPr marL="1143000" indent="-228600">
@@ -3905,8 +3906,8 @@
                 <a:solidFill>
                   <a:schemeClr val="tx1"/>
                 </a:solidFill>
-                <a:latin typeface="Arial" panose="020B0604020202020204" pitchFamily="34" charset="0"/>
-                <a:cs typeface="Arial" panose="020B0604020202020204" pitchFamily="34" charset="0"/>
+                <a:latin typeface="Arial" panose="020B0704020202020204" pitchFamily="34" charset="0"/>
+                <a:cs typeface="Arial" panose="020B0704020202020204" pitchFamily="34" charset="0"/>
               </a:defRPr>
             </a:lvl3pPr>
             <a:lvl4pPr marL="1600200" indent="-228600">
@@ -3914,8 +3915,8 @@
                 <a:solidFill>
                   <a:schemeClr val="tx1"/>
                 </a:solidFill>
-                <a:latin typeface="Arial" panose="020B0604020202020204" pitchFamily="34" charset="0"/>
-                <a:cs typeface="Arial" panose="020B0604020202020204" pitchFamily="34" charset="0"/>
+                <a:latin typeface="Arial" panose="020B0704020202020204" pitchFamily="34" charset="0"/>
+                <a:cs typeface="Arial" panose="020B0704020202020204" pitchFamily="34" charset="0"/>
               </a:defRPr>
             </a:lvl4pPr>
             <a:lvl5pPr marL="2057400" indent="-228600">
@@ -3923,8 +3924,8 @@
                 <a:solidFill>
                   <a:schemeClr val="tx1"/>
                 </a:solidFill>
-                <a:latin typeface="Arial" panose="020B0604020202020204" pitchFamily="34" charset="0"/>
-                <a:cs typeface="Arial" panose="020B0604020202020204" pitchFamily="34" charset="0"/>
+                <a:latin typeface="Arial" panose="020B0704020202020204" pitchFamily="34" charset="0"/>
+                <a:cs typeface="Arial" panose="020B0704020202020204" pitchFamily="34" charset="0"/>
               </a:defRPr>
             </a:lvl5pPr>
             <a:lvl6pPr marL="2514600" indent="-228600" eaLnBrk="0" fontAlgn="base" hangingPunct="0">
@@ -3938,8 +3939,8 @@
                 <a:solidFill>
                   <a:schemeClr val="tx1"/>
                 </a:solidFill>
-                <a:latin typeface="Arial" panose="020B0604020202020204" pitchFamily="34" charset="0"/>
-                <a:cs typeface="Arial" panose="020B0604020202020204" pitchFamily="34" charset="0"/>
+                <a:latin typeface="Arial" panose="020B0704020202020204" pitchFamily="34" charset="0"/>
+                <a:cs typeface="Arial" panose="020B0704020202020204" pitchFamily="34" charset="0"/>
               </a:defRPr>
             </a:lvl6pPr>
             <a:lvl7pPr marL="2971800" indent="-228600" eaLnBrk="0" fontAlgn="base" hangingPunct="0">
@@ -3953,8 +3954,8 @@
                 <a:solidFill>
                   <a:schemeClr val="tx1"/>
                 </a:solidFill>
-                <a:latin typeface="Arial" panose="020B0604020202020204" pitchFamily="34" charset="0"/>
-                <a:cs typeface="Arial" panose="020B0604020202020204" pitchFamily="34" charset="0"/>
+                <a:latin typeface="Arial" panose="020B0704020202020204" pitchFamily="34" charset="0"/>
+                <a:cs typeface="Arial" panose="020B0704020202020204" pitchFamily="34" charset="0"/>
               </a:defRPr>
             </a:lvl7pPr>
             <a:lvl8pPr marL="3429000" indent="-228600" eaLnBrk="0" fontAlgn="base" hangingPunct="0">
@@ -3968,8 +3969,8 @@
                 <a:solidFill>
                   <a:schemeClr val="tx1"/>
                 </a:solidFill>
-                <a:latin typeface="Arial" panose="020B0604020202020204" pitchFamily="34" charset="0"/>
-                <a:cs typeface="Arial" panose="020B0604020202020204" pitchFamily="34" charset="0"/>
+                <a:latin typeface="Arial" panose="020B0704020202020204" pitchFamily="34" charset="0"/>
+                <a:cs typeface="Arial" panose="020B0704020202020204" pitchFamily="34" charset="0"/>
               </a:defRPr>
             </a:lvl8pPr>
             <a:lvl9pPr marL="3886200" indent="-228600" eaLnBrk="0" fontAlgn="base" hangingPunct="0">
@@ -3983,8 +3984,8 @@
                 <a:solidFill>
                   <a:schemeClr val="tx1"/>
                 </a:solidFill>
-                <a:latin typeface="Arial" panose="020B0604020202020204" pitchFamily="34" charset="0"/>
-                <a:cs typeface="Arial" panose="020B0604020202020204" pitchFamily="34" charset="0"/>
+                <a:latin typeface="Arial" panose="020B0704020202020204" pitchFamily="34" charset="0"/>
+                <a:cs typeface="Arial" panose="020B0704020202020204" pitchFamily="34" charset="0"/>
               </a:defRPr>
             </a:lvl9pPr>
           </a:lstStyle>
@@ -4061,8 +4062,8 @@
                 <a:solidFill>
                   <a:schemeClr val="tx1"/>
                 </a:solidFill>
-                <a:latin typeface="Arial" panose="020B0604020202020204" pitchFamily="34" charset="0"/>
-                <a:cs typeface="Arial" panose="020B0604020202020204" pitchFamily="34" charset="0"/>
+                <a:latin typeface="Arial" panose="020B0704020202020204" pitchFamily="34" charset="0"/>
+                <a:cs typeface="Arial" panose="020B0704020202020204" pitchFamily="34" charset="0"/>
               </a:defRPr>
             </a:lvl1pPr>
             <a:lvl2pPr marL="742950" indent="-285750">
@@ -4070,8 +4071,8 @@
                 <a:solidFill>
                   <a:schemeClr val="tx1"/>
                 </a:solidFill>
-                <a:latin typeface="Arial" panose="020B0604020202020204" pitchFamily="34" charset="0"/>
-                <a:cs typeface="Arial" panose="020B0604020202020204" pitchFamily="34" charset="0"/>
+                <a:latin typeface="Arial" panose="020B0704020202020204" pitchFamily="34" charset="0"/>
+                <a:cs typeface="Arial" panose="020B0704020202020204" pitchFamily="34" charset="0"/>
               </a:defRPr>
             </a:lvl2pPr>
             <a:lvl3pPr marL="1143000" indent="-228600">
@@ -4079,8 +4080,8 @@
                 <a:solidFill>
                   <a:schemeClr val="tx1"/>
                 </a:solidFill>
-                <a:latin typeface="Arial" panose="020B0604020202020204" pitchFamily="34" charset="0"/>
-                <a:cs typeface="Arial" panose="020B0604020202020204" pitchFamily="34" charset="0"/>
+                <a:latin typeface="Arial" panose="020B0704020202020204" pitchFamily="34" charset="0"/>
+                <a:cs typeface="Arial" panose="020B0704020202020204" pitchFamily="34" charset="0"/>
               </a:defRPr>
             </a:lvl3pPr>
             <a:lvl4pPr marL="1600200" indent="-228600">
@@ -4088,8 +4089,8 @@
                 <a:solidFill>
                   <a:schemeClr val="tx1"/>
                 </a:solidFill>
-                <a:latin typeface="Arial" panose="020B0604020202020204" pitchFamily="34" charset="0"/>
-                <a:cs typeface="Arial" panose="020B0604020202020204" pitchFamily="34" charset="0"/>
+                <a:latin typeface="Arial" panose="020B0704020202020204" pitchFamily="34" charset="0"/>
+                <a:cs typeface="Arial" panose="020B0704020202020204" pitchFamily="34" charset="0"/>
               </a:defRPr>
             </a:lvl4pPr>
             <a:lvl5pPr marL="2057400" indent="-228600">
@@ -4097,8 +4098,8 @@
                 <a:solidFill>
                   <a:schemeClr val="tx1"/>
                 </a:solidFill>
-                <a:latin typeface="Arial" panose="020B0604020202020204" pitchFamily="34" charset="0"/>
-                <a:cs typeface="Arial" panose="020B0604020202020204" pitchFamily="34" charset="0"/>
+                <a:latin typeface="Arial" panose="020B0704020202020204" pitchFamily="34" charset="0"/>
+                <a:cs typeface="Arial" panose="020B0704020202020204" pitchFamily="34" charset="0"/>
               </a:defRPr>
             </a:lvl5pPr>
             <a:lvl6pPr marL="2514600" indent="-228600" eaLnBrk="0" fontAlgn="base" hangingPunct="0">
@@ -4112,8 +4113,8 @@
                 <a:solidFill>
                   <a:schemeClr val="tx1"/>
                 </a:solidFill>
-                <a:latin typeface="Arial" panose="020B0604020202020204" pitchFamily="34" charset="0"/>
-                <a:cs typeface="Arial" panose="020B0604020202020204" pitchFamily="34" charset="0"/>
+                <a:latin typeface="Arial" panose="020B0704020202020204" pitchFamily="34" charset="0"/>
+                <a:cs typeface="Arial" panose="020B0704020202020204" pitchFamily="34" charset="0"/>
               </a:defRPr>
             </a:lvl6pPr>
             <a:lvl7pPr marL="2971800" indent="-228600" eaLnBrk="0" fontAlgn="base" hangingPunct="0">
@@ -4127,8 +4128,8 @@
                 <a:solidFill>
                   <a:schemeClr val="tx1"/>
                 </a:solidFill>
-                <a:latin typeface="Arial" panose="020B0604020202020204" pitchFamily="34" charset="0"/>
-                <a:cs typeface="Arial" panose="020B0604020202020204" pitchFamily="34" charset="0"/>
+                <a:latin typeface="Arial" panose="020B0704020202020204" pitchFamily="34" charset="0"/>
+                <a:cs typeface="Arial" panose="020B0704020202020204" pitchFamily="34" charset="0"/>
               </a:defRPr>
             </a:lvl7pPr>
             <a:lvl8pPr marL="3429000" indent="-228600" eaLnBrk="0" fontAlgn="base" hangingPunct="0">
@@ -4142,8 +4143,8 @@
                 <a:solidFill>
                   <a:schemeClr val="tx1"/>
                 </a:solidFill>
-                <a:latin typeface="Arial" panose="020B0604020202020204" pitchFamily="34" charset="0"/>
-                <a:cs typeface="Arial" panose="020B0604020202020204" pitchFamily="34" charset="0"/>
+                <a:latin typeface="Arial" panose="020B0704020202020204" pitchFamily="34" charset="0"/>
+                <a:cs typeface="Arial" panose="020B0704020202020204" pitchFamily="34" charset="0"/>
               </a:defRPr>
             </a:lvl8pPr>
             <a:lvl9pPr marL="3886200" indent="-228600" eaLnBrk="0" fontAlgn="base" hangingPunct="0">
@@ -4157,8 +4158,8 @@
                 <a:solidFill>
                   <a:schemeClr val="tx1"/>
                 </a:solidFill>
-                <a:latin typeface="Arial" panose="020B0604020202020204" pitchFamily="34" charset="0"/>
-                <a:cs typeface="Arial" panose="020B0604020202020204" pitchFamily="34" charset="0"/>
+                <a:latin typeface="Arial" panose="020B0704020202020204" pitchFamily="34" charset="0"/>
+                <a:cs typeface="Arial" panose="020B0704020202020204" pitchFamily="34" charset="0"/>
               </a:defRPr>
             </a:lvl9pPr>
           </a:lstStyle>
@@ -4393,8 +4394,8 @@
                       </a:srgbClr>
                     </a:outerShdw>
                   </a:effectLst>
-                  <a:latin typeface="Arial" panose="020B0604020202020204" pitchFamily="34" charset="0"/>
-                  <a:cs typeface="Arial" panose="020B0604020202020204" pitchFamily="34" charset="0"/>
+                  <a:latin typeface="Arial" panose="020B0704020202020204" pitchFamily="34" charset="0"/>
+                  <a:cs typeface="Arial" panose="020B0704020202020204" pitchFamily="34" charset="0"/>
                 </a:rPr>
                 <a:t>II</a:t>
               </a:r>
@@ -4421,8 +4422,8 @@
                     </a:srgbClr>
                   </a:outerShdw>
                 </a:effectLst>
-                <a:latin typeface="Arial" panose="020B0604020202020204" pitchFamily="34" charset="0"/>
-                <a:cs typeface="Arial" panose="020B0604020202020204" pitchFamily="34" charset="0"/>
+                <a:latin typeface="Arial" panose="020B0704020202020204" pitchFamily="34" charset="0"/>
+                <a:cs typeface="Arial" panose="020B0704020202020204" pitchFamily="34" charset="0"/>
               </a:endParaRPr>
             </a:p>
           </p:txBody>
@@ -4459,7 +4460,7 @@
                   <a:solidFill>
                     <a:schemeClr val="tx1"/>
                   </a:solidFill>
-                  <a:latin typeface="Arial" panose="020B0604020202020204" pitchFamily="34" charset="0"/>
+                  <a:latin typeface="Arial" panose="020B0704020202020204" pitchFamily="34" charset="0"/>
                 </a:defRPr>
               </a:lvl1pPr>
               <a:lvl2pPr marL="742950" indent="-285750" defTabSz="1095375">
@@ -4467,7 +4468,7 @@
                   <a:solidFill>
                     <a:schemeClr val="tx1"/>
                   </a:solidFill>
-                  <a:latin typeface="Arial" panose="020B0604020202020204" pitchFamily="34" charset="0"/>
+                  <a:latin typeface="Arial" panose="020B0704020202020204" pitchFamily="34" charset="0"/>
                 </a:defRPr>
               </a:lvl2pPr>
               <a:lvl3pPr marL="1143000" indent="-228600" defTabSz="1095375">
@@ -4475,7 +4476,7 @@
                   <a:solidFill>
                     <a:schemeClr val="tx1"/>
                   </a:solidFill>
-                  <a:latin typeface="Arial" panose="020B0604020202020204" pitchFamily="34" charset="0"/>
+                  <a:latin typeface="Arial" panose="020B0704020202020204" pitchFamily="34" charset="0"/>
                 </a:defRPr>
               </a:lvl3pPr>
               <a:lvl4pPr marL="1600200" indent="-228600" defTabSz="1095375">
@@ -4483,7 +4484,7 @@
                   <a:solidFill>
                     <a:schemeClr val="tx1"/>
                   </a:solidFill>
-                  <a:latin typeface="Arial" panose="020B0604020202020204" pitchFamily="34" charset="0"/>
+                  <a:latin typeface="Arial" panose="020B0704020202020204" pitchFamily="34" charset="0"/>
                 </a:defRPr>
               </a:lvl4pPr>
               <a:lvl5pPr marL="2057400" indent="-228600" defTabSz="1095375">
@@ -4491,7 +4492,7 @@
                   <a:solidFill>
                     <a:schemeClr val="tx1"/>
                   </a:solidFill>
-                  <a:latin typeface="Arial" panose="020B0604020202020204" pitchFamily="34" charset="0"/>
+                  <a:latin typeface="Arial" panose="020B0704020202020204" pitchFamily="34" charset="0"/>
                 </a:defRPr>
               </a:lvl5pPr>
               <a:lvl6pPr marL="2514600" indent="-228600" defTabSz="1095375" fontAlgn="base">
@@ -4505,7 +4506,7 @@
                   <a:solidFill>
                     <a:schemeClr val="tx1"/>
                   </a:solidFill>
-                  <a:latin typeface="Arial" panose="020B0604020202020204" pitchFamily="34" charset="0"/>
+                  <a:latin typeface="Arial" panose="020B0704020202020204" pitchFamily="34" charset="0"/>
                 </a:defRPr>
               </a:lvl6pPr>
               <a:lvl7pPr marL="2971800" indent="-228600" defTabSz="1095375" fontAlgn="base">
@@ -4519,7 +4520,7 @@
                   <a:solidFill>
                     <a:schemeClr val="tx1"/>
                   </a:solidFill>
-                  <a:latin typeface="Arial" panose="020B0604020202020204" pitchFamily="34" charset="0"/>
+                  <a:latin typeface="Arial" panose="020B0704020202020204" pitchFamily="34" charset="0"/>
                 </a:defRPr>
               </a:lvl7pPr>
               <a:lvl8pPr marL="3429000" indent="-228600" defTabSz="1095375" fontAlgn="base">
@@ -4533,7 +4534,7 @@
                   <a:solidFill>
                     <a:schemeClr val="tx1"/>
                   </a:solidFill>
-                  <a:latin typeface="Arial" panose="020B0604020202020204" pitchFamily="34" charset="0"/>
+                  <a:latin typeface="Arial" panose="020B0704020202020204" pitchFamily="34" charset="0"/>
                 </a:defRPr>
               </a:lvl8pPr>
               <a:lvl9pPr marL="3886200" indent="-228600" defTabSz="1095375" fontAlgn="base">
@@ -4547,7 +4548,7 @@
                   <a:solidFill>
                     <a:schemeClr val="tx1"/>
                   </a:solidFill>
-                  <a:latin typeface="Arial" panose="020B0604020202020204" pitchFamily="34" charset="0"/>
+                  <a:latin typeface="Arial" panose="020B0704020202020204" pitchFamily="34" charset="0"/>
                 </a:defRPr>
               </a:lvl9pPr>
             </a:lstStyle>
@@ -4561,12 +4562,12 @@
               </a:pPr>
               <a:r>
                 <a:rPr lang="en-US" sz="2800" i="1">
-                  <a:cs typeface="Arial" panose="020B0604020202020204" pitchFamily="34" charset="0"/>
+                  <a:cs typeface="Arial" panose="020B0704020202020204" pitchFamily="34" charset="0"/>
                 </a:rPr>
                 <a:t>Sai số phép đo</a:t>
               </a:r>
               <a:endParaRPr lang="en-US" sz="2800" dirty="0">
-                <a:cs typeface="Arial" panose="020B0604020202020204" pitchFamily="34" charset="0"/>
+                <a:cs typeface="Arial" panose="020B0704020202020204" pitchFamily="34" charset="0"/>
               </a:endParaRPr>
             </a:p>
           </p:txBody>
@@ -4626,7 +4627,7 @@
                 <a:solidFill>
                   <a:schemeClr val="tx1"/>
                 </a:solidFill>
-                <a:latin typeface="Arial" panose="020B0604020202020204" pitchFamily="34" charset="0"/>
+                <a:latin typeface="Arial" panose="020B0704020202020204" pitchFamily="34" charset="0"/>
               </a:defRPr>
             </a:lvl1pPr>
             <a:lvl2pPr marL="742950" indent="-285750">
@@ -4638,7 +4639,7 @@
                 <a:solidFill>
                   <a:schemeClr val="tx1"/>
                 </a:solidFill>
-                <a:latin typeface="Arial" panose="020B0604020202020204" pitchFamily="34" charset="0"/>
+                <a:latin typeface="Arial" panose="020B0704020202020204" pitchFamily="34" charset="0"/>
               </a:defRPr>
             </a:lvl2pPr>
             <a:lvl3pPr marL="1143000" indent="-228600">
@@ -4650,7 +4651,7 @@
                 <a:solidFill>
                   <a:schemeClr val="tx1"/>
                 </a:solidFill>
-                <a:latin typeface="Arial" panose="020B0604020202020204" pitchFamily="34" charset="0"/>
+                <a:latin typeface="Arial" panose="020B0704020202020204" pitchFamily="34" charset="0"/>
               </a:defRPr>
             </a:lvl3pPr>
             <a:lvl4pPr marL="1600200" indent="-228600">
@@ -4662,7 +4663,7 @@
                 <a:solidFill>
                   <a:schemeClr val="tx1"/>
                 </a:solidFill>
-                <a:latin typeface="Arial" panose="020B0604020202020204" pitchFamily="34" charset="0"/>
+                <a:latin typeface="Arial" panose="020B0704020202020204" pitchFamily="34" charset="0"/>
               </a:defRPr>
             </a:lvl4pPr>
             <a:lvl5pPr marL="2057400" indent="-228600">
@@ -4674,7 +4675,7 @@
                 <a:solidFill>
                   <a:schemeClr val="tx1"/>
                 </a:solidFill>
-                <a:latin typeface="Arial" panose="020B0604020202020204" pitchFamily="34" charset="0"/>
+                <a:latin typeface="Arial" panose="020B0704020202020204" pitchFamily="34" charset="0"/>
               </a:defRPr>
             </a:lvl5pPr>
             <a:lvl6pPr marL="2514600" indent="-228600" eaLnBrk="0" fontAlgn="base" hangingPunct="0">
@@ -4689,7 +4690,7 @@
                 <a:solidFill>
                   <a:schemeClr val="tx1"/>
                 </a:solidFill>
-                <a:latin typeface="Arial" panose="020B0604020202020204" pitchFamily="34" charset="0"/>
+                <a:latin typeface="Arial" panose="020B0704020202020204" pitchFamily="34" charset="0"/>
               </a:defRPr>
             </a:lvl6pPr>
             <a:lvl7pPr marL="2971800" indent="-228600" eaLnBrk="0" fontAlgn="base" hangingPunct="0">
@@ -4704,7 +4705,7 @@
                 <a:solidFill>
                   <a:schemeClr val="tx1"/>
                 </a:solidFill>
-                <a:latin typeface="Arial" panose="020B0604020202020204" pitchFamily="34" charset="0"/>
+                <a:latin typeface="Arial" panose="020B0704020202020204" pitchFamily="34" charset="0"/>
               </a:defRPr>
             </a:lvl7pPr>
             <a:lvl8pPr marL="3429000" indent="-228600" eaLnBrk="0" fontAlgn="base" hangingPunct="0">
@@ -4719,7 +4720,7 @@
                 <a:solidFill>
                   <a:schemeClr val="tx1"/>
                 </a:solidFill>
-                <a:latin typeface="Arial" panose="020B0604020202020204" pitchFamily="34" charset="0"/>
+                <a:latin typeface="Arial" panose="020B0704020202020204" pitchFamily="34" charset="0"/>
               </a:defRPr>
             </a:lvl8pPr>
             <a:lvl9pPr marL="3886200" indent="-228600" eaLnBrk="0" fontAlgn="base" hangingPunct="0">
@@ -4734,7 +4735,7 @@
                 <a:solidFill>
                   <a:schemeClr val="tx1"/>
                 </a:solidFill>
-                <a:latin typeface="Arial" panose="020B0604020202020204" pitchFamily="34" charset="0"/>
+                <a:latin typeface="Arial" panose="020B0704020202020204" pitchFamily="34" charset="0"/>
               </a:defRPr>
             </a:lvl9pPr>
           </a:lstStyle>
@@ -4752,7 +4753,7 @@
                 <a:solidFill>
                   <a:srgbClr val="0070C0"/>
                 </a:solidFill>
-                <a:cs typeface="Arial" panose="020B0604020202020204" pitchFamily="34" charset="0"/>
+                <a:cs typeface="Arial" panose="020B0704020202020204" pitchFamily="34" charset="0"/>
               </a:rPr>
               <a:t>2. Cách xác định sai số</a:t>
             </a:r>
@@ -4760,7 +4761,7 @@
               <a:solidFill>
                 <a:srgbClr val="0070C0"/>
               </a:solidFill>
-              <a:cs typeface="Arial" panose="020B0604020202020204" pitchFamily="34" charset="0"/>
+              <a:cs typeface="Arial" panose="020B0704020202020204" pitchFamily="34" charset="0"/>
             </a:endParaRPr>
           </a:p>
         </p:txBody>
@@ -4866,7 +4867,7 @@
                             <a:srgbClr val="000000"/>
                           </a:solidFill>
                           <a:latin typeface="Cambria Math" panose="02040503050406030204" pitchFamily="18" charset="0"/>
-                          <a:cs typeface="Arial" panose="020B0604020202020204" pitchFamily="34" charset="0"/>
+                          <a:cs typeface="Arial" panose="020B0704020202020204" pitchFamily="34" charset="0"/>
                           <a:sym typeface="Symbol" panose="05050102010706020507" pitchFamily="18" charset="2"/>
                         </a:rPr>
                         <m:t></m:t>
@@ -4877,7 +4878,7 @@
                             <a:srgbClr val="000000"/>
                           </a:solidFill>
                           <a:latin typeface="Cambria Math" panose="02040503050406030204" pitchFamily="18" charset="0"/>
-                          <a:cs typeface="Arial" panose="020B0604020202020204" pitchFamily="34" charset="0"/>
+                          <a:cs typeface="Arial" panose="020B0704020202020204" pitchFamily="34" charset="0"/>
                         </a:rPr>
                         <m:t>𝐴</m:t>
                       </m:r>
@@ -4887,7 +4888,7 @@
                             <a:srgbClr val="000000"/>
                           </a:solidFill>
                           <a:latin typeface="Cambria Math" panose="02040503050406030204" pitchFamily="18" charset="0"/>
-                          <a:cs typeface="Arial" panose="020B0604020202020204" pitchFamily="34" charset="0"/>
+                          <a:cs typeface="Arial" panose="020B0704020202020204" pitchFamily="34" charset="0"/>
                         </a:rPr>
                         <m:t> </m:t>
                       </m:r>
@@ -4899,9 +4900,9 @@
                         <a:srgbClr val="000000"/>
                       </a:solidFill>
                       <a:effectLst/>
-                      <a:latin typeface="Arial" panose="020B0604020202020204" pitchFamily="34" charset="0"/>
+                      <a:latin typeface="Arial" panose="020B0704020202020204" pitchFamily="34" charset="0"/>
                       <a:ea typeface="Times New Roman" panose="02020603050405020304" pitchFamily="18" charset="0"/>
-                      <a:cs typeface="Arial" panose="020B0604020202020204" pitchFamily="34" charset="0"/>
+                      <a:cs typeface="Arial" panose="020B0704020202020204" pitchFamily="34" charset="0"/>
                     </a:rPr>
                     <a:t>=</a:t>
                   </a:r>
@@ -4910,7 +4911,7 @@
                       <a:solidFill>
                         <a:srgbClr val="000000"/>
                       </a:solidFill>
-                      <a:cs typeface="Arial" panose="020B0604020202020204" pitchFamily="34" charset="0"/>
+                      <a:cs typeface="Arial" panose="020B0704020202020204" pitchFamily="34" charset="0"/>
                     </a:rPr>
                     <a:t> </a:t>
                   </a:r>
@@ -4925,7 +4926,7 @@
                                 <a:srgbClr val="000000"/>
                               </a:solidFill>
                               <a:latin typeface="Cambria Math" panose="02040503050406030204"/>
-                              <a:cs typeface="Arial" panose="020B0604020202020204" pitchFamily="34" charset="0"/>
+                              <a:cs typeface="Arial" panose="020B0704020202020204" pitchFamily="34" charset="0"/>
                             </a:rPr>
                           </m:ctrlPr>
                         </m:accPr>
@@ -4936,7 +4937,7 @@
                                 <a:srgbClr val="000000"/>
                               </a:solidFill>
                               <a:latin typeface="Cambria Math" panose="02040503050406030204" pitchFamily="18" charset="0"/>
-                              <a:cs typeface="Arial" panose="020B0604020202020204" pitchFamily="34" charset="0"/>
+                              <a:cs typeface="Arial" panose="020B0704020202020204" pitchFamily="34" charset="0"/>
                               <a:sym typeface="Symbol" panose="05050102010706020507" pitchFamily="18" charset="2"/>
                             </a:rPr>
                             <m:t></m:t>
@@ -4947,7 +4948,7 @@
                                 <a:srgbClr val="000000"/>
                               </a:solidFill>
                               <a:latin typeface="Cambria Math" panose="02040503050406030204" pitchFamily="18" charset="0"/>
-                              <a:cs typeface="Arial" panose="020B0604020202020204" pitchFamily="34" charset="0"/>
+                              <a:cs typeface="Arial" panose="020B0704020202020204" pitchFamily="34" charset="0"/>
                             </a:rPr>
                             <m:t>𝐴</m:t>
                           </m:r>
@@ -4961,9 +4962,9 @@
                         <a:srgbClr val="000000"/>
                       </a:solidFill>
                       <a:effectLst/>
-                      <a:latin typeface="Arial" panose="020B0604020202020204" pitchFamily="34" charset="0"/>
+                      <a:latin typeface="Arial" panose="020B0704020202020204" pitchFamily="34" charset="0"/>
                       <a:ea typeface="Times New Roman" panose="02020603050405020304" pitchFamily="18" charset="0"/>
-                      <a:cs typeface="Arial" panose="020B0604020202020204" pitchFamily="34" charset="0"/>
+                      <a:cs typeface="Arial" panose="020B0704020202020204" pitchFamily="34" charset="0"/>
                     </a:rPr>
                     <a:t> +</a:t>
                   </a:r>
@@ -4972,7 +4973,7 @@
                       <a:solidFill>
                         <a:srgbClr val="000000"/>
                       </a:solidFill>
-                      <a:cs typeface="Arial" panose="020B0604020202020204" pitchFamily="34" charset="0"/>
+                      <a:cs typeface="Arial" panose="020B0704020202020204" pitchFamily="34" charset="0"/>
                       <a:sym typeface="Symbol" panose="05050102010706020507" pitchFamily="18" charset="2"/>
                     </a:rPr>
                     <a:t> </a:t>
@@ -4985,7 +4986,7 @@
                             <a:srgbClr val="000000"/>
                           </a:solidFill>
                           <a:latin typeface="Cambria Math" panose="02040503050406030204" pitchFamily="18" charset="0"/>
-                          <a:cs typeface="Arial" panose="020B0604020202020204" pitchFamily="34" charset="0"/>
+                          <a:cs typeface="Arial" panose="020B0704020202020204" pitchFamily="34" charset="0"/>
                           <a:sym typeface="Symbol" panose="05050102010706020507" pitchFamily="18" charset="2"/>
                         </a:rPr>
                         <m:t></m:t>
@@ -4996,7 +4997,7 @@
                             <a:srgbClr val="000000"/>
                           </a:solidFill>
                           <a:latin typeface="Cambria Math" panose="02040503050406030204" pitchFamily="18" charset="0"/>
-                          <a:cs typeface="Arial" panose="020B0604020202020204" pitchFamily="34" charset="0"/>
+                          <a:cs typeface="Arial" panose="020B0704020202020204" pitchFamily="34" charset="0"/>
                         </a:rPr>
                         <m:t>𝐴</m:t>
                       </m:r>
@@ -5008,9 +5009,9 @@
                         <a:srgbClr val="000000"/>
                       </a:solidFill>
                       <a:effectLst/>
-                      <a:latin typeface="Arial" panose="020B0604020202020204" pitchFamily="34" charset="0"/>
+                      <a:latin typeface="Arial" panose="020B0704020202020204" pitchFamily="34" charset="0"/>
                       <a:ea typeface="Times New Roman" panose="02020603050405020304" pitchFamily="18" charset="0"/>
-                      <a:cs typeface="Arial" panose="020B0604020202020204" pitchFamily="34" charset="0"/>
+                      <a:cs typeface="Arial" panose="020B0704020202020204" pitchFamily="34" charset="0"/>
                     </a:rPr>
                     <a:t>dc</a:t>
                   </a:r>
@@ -5088,7 +5089,7 @@
                           <a:srgbClr val="000000"/>
                         </a:solidFill>
                         <a:latin typeface="Cambria Math" panose="02040503050406030204" pitchFamily="18" charset="0"/>
-                        <a:cs typeface="Arial" panose="020B0604020202020204" pitchFamily="34" charset="0"/>
+                        <a:cs typeface="Arial" panose="020B0704020202020204" pitchFamily="34" charset="0"/>
                         <a:sym typeface="Symbol" panose="05050102010706020507" pitchFamily="18" charset="2"/>
                       </a:rPr>
                       <m:t></m:t>
@@ -5099,7 +5100,7 @@
                           <a:srgbClr val="000000"/>
                         </a:solidFill>
                         <a:latin typeface="Cambria Math" panose="02040503050406030204" pitchFamily="18" charset="0"/>
-                        <a:cs typeface="Arial" panose="020B0604020202020204" pitchFamily="34" charset="0"/>
+                        <a:cs typeface="Arial" panose="020B0704020202020204" pitchFamily="34" charset="0"/>
                       </a:rPr>
                       <m:t>𝐴</m:t>
                     </m:r>
@@ -5109,7 +5110,7 @@
                           <a:srgbClr val="000000"/>
                         </a:solidFill>
                         <a:latin typeface="Cambria Math" panose="02040503050406030204" pitchFamily="18" charset="0"/>
-                        <a:cs typeface="Arial" panose="020B0604020202020204" pitchFamily="34" charset="0"/>
+                        <a:cs typeface="Arial" panose="020B0704020202020204" pitchFamily="34" charset="0"/>
                       </a:rPr>
                       <m:t>𝑑𝑐</m:t>
                     </m:r>
@@ -5121,9 +5122,9 @@
                       <a:srgbClr val="000000"/>
                     </a:solidFill>
                     <a:effectLst/>
-                    <a:latin typeface="Arial" panose="020B0604020202020204" pitchFamily="34" charset="0"/>
+                    <a:latin typeface="Arial" panose="020B0704020202020204" pitchFamily="34" charset="0"/>
                     <a:ea typeface="Times New Roman" panose="02020603050405020304" pitchFamily="18" charset="0"/>
-                    <a:cs typeface="Arial" panose="020B0604020202020204" pitchFamily="34" charset="0"/>
+                    <a:cs typeface="Arial" panose="020B0704020202020204" pitchFamily="34" charset="0"/>
                   </a:rPr>
                   <a:t>: sai số dụng cụ</a:t>
                 </a:r>
@@ -5152,7 +5153,7 @@
               <a:blipFill rotWithShape="1">
                 <a:blip r:embed="rId5"/>
                 <a:stretch>
-                  <a:fillRect t="-120" r="16" b="-20609"/>
+                  <a:fillRect t="-120" r="16" b="-20476"/>
                 </a:stretch>
               </a:blipFill>
             </p:spPr>
@@ -5212,9 +5213,9 @@
                   <a:srgbClr val="000000"/>
                 </a:solidFill>
                 <a:effectLst/>
-                <a:latin typeface="Arial" panose="020B0604020202020204" pitchFamily="34" charset="0"/>
+                <a:latin typeface="Arial" panose="020B0704020202020204" pitchFamily="34" charset="0"/>
                 <a:ea typeface="Times New Roman" panose="02020603050405020304" pitchFamily="18" charset="0"/>
-                <a:cs typeface="Arial" panose="020B0604020202020204" pitchFamily="34" charset="0"/>
+                <a:cs typeface="Arial" panose="020B0704020202020204" pitchFamily="34" charset="0"/>
               </a:rPr>
               <a:t>Sai số tuyệt đối  = </a:t>
             </a:r>
@@ -5224,9 +5225,9 @@
                   <a:srgbClr val="000000"/>
                 </a:solidFill>
                 <a:effectLst/>
-                <a:latin typeface="Arial" panose="020B0604020202020204" pitchFamily="34" charset="0"/>
+                <a:latin typeface="Arial" panose="020B0704020202020204" pitchFamily="34" charset="0"/>
                 <a:ea typeface="Times New Roman" panose="02020603050405020304" pitchFamily="18" charset="0"/>
-                <a:cs typeface="Arial" panose="020B0604020202020204" pitchFamily="34" charset="0"/>
+                <a:cs typeface="Arial" panose="020B0704020202020204" pitchFamily="34" charset="0"/>
               </a:rPr>
               <a:t> </a:t>
             </a:r>
@@ -5236,9 +5237,9 @@
                   <a:srgbClr val="000000"/>
                 </a:solidFill>
                 <a:effectLst/>
-                <a:latin typeface="Arial" panose="020B0604020202020204" pitchFamily="34" charset="0"/>
+                <a:latin typeface="Arial" panose="020B0704020202020204" pitchFamily="34" charset="0"/>
                 <a:ea typeface="Times New Roman" panose="02020603050405020304" pitchFamily="18" charset="0"/>
-                <a:cs typeface="Arial" panose="020B0604020202020204" pitchFamily="34" charset="0"/>
+                <a:cs typeface="Arial" panose="020B0704020202020204" pitchFamily="34" charset="0"/>
               </a:rPr>
               <a:t>sai số dụng cụ </a:t>
             </a:r>
@@ -5248,9 +5249,9 @@
                   <a:srgbClr val="000000"/>
                 </a:solidFill>
                 <a:effectLst/>
-                <a:latin typeface="Arial" panose="020B0604020202020204" pitchFamily="34" charset="0"/>
+                <a:latin typeface="Arial" panose="020B0704020202020204" pitchFamily="34" charset="0"/>
                 <a:ea typeface="Times New Roman" panose="02020603050405020304" pitchFamily="18" charset="0"/>
-                <a:cs typeface="Arial" panose="020B0604020202020204" pitchFamily="34" charset="0"/>
+                <a:cs typeface="Arial" panose="020B0704020202020204" pitchFamily="34" charset="0"/>
               </a:rPr>
               <a:t>+  </a:t>
             </a:r>
@@ -5260,9 +5261,9 @@
                   <a:srgbClr val="000000"/>
                 </a:solidFill>
                 <a:effectLst/>
-                <a:latin typeface="Arial" panose="020B0604020202020204" pitchFamily="34" charset="0"/>
+                <a:latin typeface="Arial" panose="020B0704020202020204" pitchFamily="34" charset="0"/>
                 <a:ea typeface="Times New Roman" panose="02020603050405020304" pitchFamily="18" charset="0"/>
-                <a:cs typeface="Arial" panose="020B0604020202020204" pitchFamily="34" charset="0"/>
+                <a:cs typeface="Arial" panose="020B0704020202020204" pitchFamily="34" charset="0"/>
               </a:rPr>
               <a:t>sai số ngẫu nhiên</a:t>
             </a:r>
@@ -5272,17 +5273,17 @@
                   <a:srgbClr val="000000"/>
                 </a:solidFill>
                 <a:effectLst/>
-                <a:latin typeface="Arial" panose="020B0604020202020204" pitchFamily="34" charset="0"/>
+                <a:latin typeface="Arial" panose="020B0704020202020204" pitchFamily="34" charset="0"/>
                 <a:ea typeface="Times New Roman" panose="02020603050405020304" pitchFamily="18" charset="0"/>
-                <a:cs typeface="Arial" panose="020B0604020202020204" pitchFamily="34" charset="0"/>
+                <a:cs typeface="Arial" panose="020B0704020202020204" pitchFamily="34" charset="0"/>
               </a:rPr>
               <a:t>:</a:t>
             </a:r>
             <a:endParaRPr lang="en-US" sz="2500">
               <a:effectLst/>
-              <a:latin typeface="Arial" panose="020B0604020202020204" pitchFamily="34" charset="0"/>
+              <a:latin typeface="Arial" panose="020B0704020202020204" pitchFamily="34" charset="0"/>
               <a:ea typeface="游明朝" panose="02020400000000000000" pitchFamily="18" charset="-128"/>
-              <a:cs typeface="Arial" panose="020B0604020202020204" pitchFamily="34" charset="0"/>
+              <a:cs typeface="Arial" panose="020B0704020202020204" pitchFamily="34" charset="0"/>
             </a:endParaRPr>
           </a:p>
         </p:txBody>
@@ -5326,9 +5327,9 @@
                   <a:srgbClr val="000000"/>
                 </a:solidFill>
                 <a:effectLst/>
-                <a:latin typeface="Arial" panose="020B0604020202020204" pitchFamily="34" charset="0"/>
+                <a:latin typeface="Arial" panose="020B0704020202020204" pitchFamily="34" charset="0"/>
                 <a:ea typeface="Times New Roman" panose="02020603050405020304" pitchFamily="18" charset="0"/>
-                <a:cs typeface="Arial" panose="020B0604020202020204" pitchFamily="34" charset="0"/>
+                <a:cs typeface="Arial" panose="020B0704020202020204" pitchFamily="34" charset="0"/>
               </a:rPr>
               <a:t>- </a:t>
             </a:r>
@@ -5338,9 +5339,9 @@
                   <a:srgbClr val="000000"/>
                 </a:solidFill>
                 <a:effectLst/>
-                <a:latin typeface="Arial" panose="020B0604020202020204" pitchFamily="34" charset="0"/>
+                <a:latin typeface="Arial" panose="020B0704020202020204" pitchFamily="34" charset="0"/>
                 <a:ea typeface="Times New Roman" panose="02020603050405020304" pitchFamily="18" charset="0"/>
-                <a:cs typeface="Arial" panose="020B0604020202020204" pitchFamily="34" charset="0"/>
+                <a:cs typeface="Arial" panose="020B0704020202020204" pitchFamily="34" charset="0"/>
               </a:rPr>
               <a:t>Sai số tỉ đối </a:t>
             </a:r>
@@ -5350,9 +5351,9 @@
                   <a:srgbClr val="000000"/>
                 </a:solidFill>
                 <a:effectLst/>
-                <a:latin typeface="Arial" panose="020B0604020202020204" pitchFamily="34" charset="0"/>
+                <a:latin typeface="Arial" panose="020B0704020202020204" pitchFamily="34" charset="0"/>
                 <a:ea typeface="Times New Roman" panose="02020603050405020304" pitchFamily="18" charset="0"/>
-                <a:cs typeface="Arial" panose="020B0604020202020204" pitchFamily="34" charset="0"/>
+                <a:cs typeface="Arial" panose="020B0704020202020204" pitchFamily="34" charset="0"/>
               </a:rPr>
               <a:t>của phép đo là </a:t>
             </a:r>
@@ -5362,9 +5363,9 @@
                   <a:srgbClr val="000000"/>
                 </a:solidFill>
                 <a:effectLst/>
-                <a:latin typeface="Arial" panose="020B0604020202020204" pitchFamily="34" charset="0"/>
+                <a:latin typeface="Arial" panose="020B0704020202020204" pitchFamily="34" charset="0"/>
                 <a:ea typeface="Times New Roman" panose="02020603050405020304" pitchFamily="18" charset="0"/>
-                <a:cs typeface="Arial" panose="020B0604020202020204" pitchFamily="34" charset="0"/>
+                <a:cs typeface="Arial" panose="020B0704020202020204" pitchFamily="34" charset="0"/>
               </a:rPr>
               <a:t>tỉ lệ phần trăm </a:t>
             </a:r>
@@ -5374,9 +5375,9 @@
                   <a:srgbClr val="000000"/>
                 </a:solidFill>
                 <a:effectLst/>
-                <a:latin typeface="Arial" panose="020B0604020202020204" pitchFamily="34" charset="0"/>
+                <a:latin typeface="Arial" panose="020B0704020202020204" pitchFamily="34" charset="0"/>
                 <a:ea typeface="Times New Roman" panose="02020603050405020304" pitchFamily="18" charset="0"/>
-                <a:cs typeface="Arial" panose="020B0604020202020204" pitchFamily="34" charset="0"/>
+                <a:cs typeface="Arial" panose="020B0704020202020204" pitchFamily="34" charset="0"/>
               </a:rPr>
               <a:t>giữa </a:t>
             </a:r>
@@ -5386,9 +5387,9 @@
                   <a:srgbClr val="000000"/>
                 </a:solidFill>
                 <a:effectLst/>
-                <a:latin typeface="Arial" panose="020B0604020202020204" pitchFamily="34" charset="0"/>
+                <a:latin typeface="Arial" panose="020B0704020202020204" pitchFamily="34" charset="0"/>
                 <a:ea typeface="Times New Roman" panose="02020603050405020304" pitchFamily="18" charset="0"/>
-                <a:cs typeface="Arial" panose="020B0604020202020204" pitchFamily="34" charset="0"/>
+                <a:cs typeface="Arial" panose="020B0704020202020204" pitchFamily="34" charset="0"/>
               </a:rPr>
               <a:t>sai số tuyệt đối </a:t>
             </a:r>
@@ -5398,9 +5399,9 @@
                   <a:srgbClr val="000000"/>
                 </a:solidFill>
                 <a:effectLst/>
-                <a:latin typeface="Arial" panose="020B0604020202020204" pitchFamily="34" charset="0"/>
+                <a:latin typeface="Arial" panose="020B0704020202020204" pitchFamily="34" charset="0"/>
                 <a:ea typeface="Times New Roman" panose="02020603050405020304" pitchFamily="18" charset="0"/>
-                <a:cs typeface="Arial" panose="020B0604020202020204" pitchFamily="34" charset="0"/>
+                <a:cs typeface="Arial" panose="020B0704020202020204" pitchFamily="34" charset="0"/>
               </a:rPr>
               <a:t>và </a:t>
             </a:r>
@@ -5410,9 +5411,9 @@
                   <a:srgbClr val="000000"/>
                 </a:solidFill>
                 <a:effectLst/>
-                <a:latin typeface="Arial" panose="020B0604020202020204" pitchFamily="34" charset="0"/>
+                <a:latin typeface="Arial" panose="020B0704020202020204" pitchFamily="34" charset="0"/>
                 <a:ea typeface="Times New Roman" panose="02020603050405020304" pitchFamily="18" charset="0"/>
-                <a:cs typeface="Arial" panose="020B0604020202020204" pitchFamily="34" charset="0"/>
+                <a:cs typeface="Arial" panose="020B0704020202020204" pitchFamily="34" charset="0"/>
               </a:rPr>
               <a:t>giá trị trung bình</a:t>
             </a:r>
@@ -5422,17 +5423,17 @@
                   <a:srgbClr val="000000"/>
                 </a:solidFill>
                 <a:effectLst/>
-                <a:latin typeface="Arial" panose="020B0604020202020204" pitchFamily="34" charset="0"/>
+                <a:latin typeface="Arial" panose="020B0704020202020204" pitchFamily="34" charset="0"/>
                 <a:ea typeface="Times New Roman" panose="02020603050405020304" pitchFamily="18" charset="0"/>
-                <a:cs typeface="Arial" panose="020B0604020202020204" pitchFamily="34" charset="0"/>
+                <a:cs typeface="Arial" panose="020B0704020202020204" pitchFamily="34" charset="0"/>
               </a:rPr>
               <a:t> của đại lượng đo, cho biết mức độ chính xác của phép đo.</a:t>
             </a:r>
             <a:endParaRPr lang="en-US" sz="2500">
               <a:effectLst/>
-              <a:latin typeface="Arial" panose="020B0604020202020204" pitchFamily="34" charset="0"/>
+              <a:latin typeface="Arial" panose="020B0704020202020204" pitchFamily="34" charset="0"/>
               <a:ea typeface="游明朝" panose="02020400000000000000" pitchFamily="18" charset="-128"/>
-              <a:cs typeface="Arial" panose="020B0604020202020204" pitchFamily="34" charset="0"/>
+              <a:cs typeface="Arial" panose="020B0704020202020204" pitchFamily="34" charset="0"/>
             </a:endParaRPr>
           </a:p>
         </p:txBody>
@@ -5466,7 +5467,7 @@
                   <a:srgbClr val="000000"/>
                 </a:solidFill>
                 <a:effectLst/>
-                <a:latin typeface="Arial" panose="020B0604020202020204" pitchFamily="34" charset="0"/>
+                <a:latin typeface="Arial" panose="020B0704020202020204" pitchFamily="34" charset="0"/>
                 <a:ea typeface="Times New Roman" panose="02020603050405020304" pitchFamily="18" charset="0"/>
                 <a:cs typeface="Times New Roman" panose="02020603050405020304" pitchFamily="18" charset="0"/>
               </a:rPr>
@@ -5578,7 +5579,7 @@
                           </a:solidFill>
                           <a:effectLst/>
                           <a:latin typeface="Cambria Math" panose="02040503050406030204" pitchFamily="18" charset="0"/>
-                          <a:cs typeface="Arial" panose="020B0604020202020204" pitchFamily="34" charset="0"/>
+                          <a:cs typeface="Arial" panose="020B0704020202020204" pitchFamily="34" charset="0"/>
                           <a:sym typeface="Symbol" panose="05050102010706020507" pitchFamily="18" charset="2"/>
                         </a:rPr>
                         <m:t></m:t>
@@ -5590,7 +5591,7 @@
                           </a:solidFill>
                           <a:effectLst/>
                           <a:latin typeface="Cambria Math" panose="02040503050406030204" pitchFamily="18" charset="0"/>
-                          <a:cs typeface="Arial" panose="020B0604020202020204" pitchFamily="34" charset="0"/>
+                          <a:cs typeface="Arial" panose="020B0704020202020204" pitchFamily="34" charset="0"/>
                         </a:rPr>
                         <m:t>𝐴</m:t>
                       </m:r>
@@ -5602,9 +5603,9 @@
                         <a:srgbClr val="000000"/>
                       </a:solidFill>
                       <a:effectLst/>
-                      <a:latin typeface="Arial" panose="020B0604020202020204" pitchFamily="34" charset="0"/>
+                      <a:latin typeface="Arial" panose="020B0704020202020204" pitchFamily="34" charset="0"/>
                       <a:ea typeface="Times New Roman" panose="02020603050405020304" pitchFamily="18" charset="0"/>
-                      <a:cs typeface="Arial" panose="020B0604020202020204" pitchFamily="34" charset="0"/>
+                      <a:cs typeface="Arial" panose="020B0704020202020204" pitchFamily="34" charset="0"/>
                     </a:rPr>
                     <a:t>= </a:t>
                   </a:r>
@@ -5619,7 +5620,7 @@
                               </a:solidFill>
                               <a:effectLst/>
                               <a:latin typeface="Cambria Math" panose="02040503050406030204"/>
-                              <a:cs typeface="Arial" panose="020B0604020202020204" pitchFamily="34" charset="0"/>
+                              <a:cs typeface="Arial" panose="020B0704020202020204" pitchFamily="34" charset="0"/>
                             </a:rPr>
                           </m:ctrlPr>
                         </m:fPr>
@@ -5630,7 +5631,7 @@
                                 <a:srgbClr val="000000"/>
                               </a:solidFill>
                               <a:latin typeface="Cambria Math" panose="02040503050406030204" pitchFamily="18" charset="0"/>
-                              <a:cs typeface="Arial" panose="020B0604020202020204" pitchFamily="34" charset="0"/>
+                              <a:cs typeface="Arial" panose="020B0704020202020204" pitchFamily="34" charset="0"/>
                               <a:sym typeface="Symbol" panose="05050102010706020507" pitchFamily="18" charset="2"/>
                             </a:rPr>
                             <m:t></m:t>
@@ -5642,7 +5643,7 @@
                               </a:solidFill>
                               <a:effectLst/>
                               <a:latin typeface="Cambria Math" panose="02040503050406030204" pitchFamily="18" charset="0"/>
-                              <a:cs typeface="Arial" panose="020B0604020202020204" pitchFamily="34" charset="0"/>
+                              <a:cs typeface="Arial" panose="020B0704020202020204" pitchFamily="34" charset="0"/>
                             </a:rPr>
                             <m:t>𝐴</m:t>
                           </m:r>
@@ -5657,7 +5658,7 @@
                                     <a:srgbClr val="000000"/>
                                   </a:solidFill>
                                   <a:latin typeface="Cambria Math" panose="02040503050406030204"/>
-                                  <a:cs typeface="Arial" panose="020B0604020202020204" pitchFamily="34" charset="0"/>
+                                  <a:cs typeface="Arial" panose="020B0704020202020204" pitchFamily="34" charset="0"/>
                                 </a:rPr>
                               </m:ctrlPr>
                             </m:accPr>
@@ -5668,7 +5669,7 @@
                                     <a:srgbClr val="000000"/>
                                   </a:solidFill>
                                   <a:latin typeface="Cambria Math" panose="02040503050406030204" pitchFamily="18" charset="0"/>
-                                  <a:cs typeface="Arial" panose="020B0604020202020204" pitchFamily="34" charset="0"/>
+                                  <a:cs typeface="Arial" panose="020B0704020202020204" pitchFamily="34" charset="0"/>
                                 </a:rPr>
                                 <m:t>𝐴</m:t>
                               </m:r>
@@ -5684,9 +5685,9 @@
                         <a:srgbClr val="000000"/>
                       </a:solidFill>
                       <a:effectLst/>
-                      <a:latin typeface="Arial" panose="020B0604020202020204" pitchFamily="34" charset="0"/>
+                      <a:latin typeface="Arial" panose="020B0704020202020204" pitchFamily="34" charset="0"/>
                       <a:ea typeface="Times New Roman" panose="02020603050405020304" pitchFamily="18" charset="0"/>
-                      <a:cs typeface="Arial" panose="020B0604020202020204" pitchFamily="34" charset="0"/>
+                      <a:cs typeface="Arial" panose="020B0704020202020204" pitchFamily="34" charset="0"/>
                       <a:sym typeface="Symbol" panose="05050102010706020507" pitchFamily="18" charset="2"/>
                     </a:rPr>
                     <a:t>  </a:t>
@@ -5697,9 +5698,9 @@
                         <a:srgbClr val="000000"/>
                       </a:solidFill>
                       <a:effectLst/>
-                      <a:latin typeface="Arial" panose="020B0604020202020204" pitchFamily="34" charset="0"/>
+                      <a:latin typeface="Arial" panose="020B0704020202020204" pitchFamily="34" charset="0"/>
                       <a:ea typeface="Times New Roman" panose="02020603050405020304" pitchFamily="18" charset="0"/>
-                      <a:cs typeface="Arial" panose="020B0604020202020204" pitchFamily="34" charset="0"/>
+                      <a:cs typeface="Arial" panose="020B0704020202020204" pitchFamily="34" charset="0"/>
                     </a:rPr>
                     <a:t>100% </a:t>
                   </a:r>
@@ -6226,8 +6227,8 @@
                       </a:srgbClr>
                     </a:outerShdw>
                   </a:effectLst>
-                  <a:latin typeface="Arial" panose="020B0604020202020204" pitchFamily="34" charset="0"/>
-                  <a:cs typeface="Arial" panose="020B0604020202020204" pitchFamily="34" charset="0"/>
+                  <a:latin typeface="Arial" panose="020B0704020202020204" pitchFamily="34" charset="0"/>
+                  <a:cs typeface="Arial" panose="020B0704020202020204" pitchFamily="34" charset="0"/>
                 </a:rPr>
                 <a:t>II</a:t>
               </a:r>
@@ -6254,8 +6255,8 @@
                     </a:srgbClr>
                   </a:outerShdw>
                 </a:effectLst>
-                <a:latin typeface="Arial" panose="020B0604020202020204" pitchFamily="34" charset="0"/>
-                <a:cs typeface="Arial" panose="020B0604020202020204" pitchFamily="34" charset="0"/>
+                <a:latin typeface="Arial" panose="020B0704020202020204" pitchFamily="34" charset="0"/>
+                <a:cs typeface="Arial" panose="020B0704020202020204" pitchFamily="34" charset="0"/>
               </a:endParaRPr>
             </a:p>
           </p:txBody>
@@ -6292,7 +6293,7 @@
                   <a:solidFill>
                     <a:schemeClr val="tx1"/>
                   </a:solidFill>
-                  <a:latin typeface="Arial" panose="020B0604020202020204" pitchFamily="34" charset="0"/>
+                  <a:latin typeface="Arial" panose="020B0704020202020204" pitchFamily="34" charset="0"/>
                 </a:defRPr>
               </a:lvl1pPr>
               <a:lvl2pPr marL="742950" indent="-285750" defTabSz="1095375">
@@ -6300,7 +6301,7 @@
                   <a:solidFill>
                     <a:schemeClr val="tx1"/>
                   </a:solidFill>
-                  <a:latin typeface="Arial" panose="020B0604020202020204" pitchFamily="34" charset="0"/>
+                  <a:latin typeface="Arial" panose="020B0704020202020204" pitchFamily="34" charset="0"/>
                 </a:defRPr>
               </a:lvl2pPr>
               <a:lvl3pPr marL="1143000" indent="-228600" defTabSz="1095375">
@@ -6308,7 +6309,7 @@
                   <a:solidFill>
                     <a:schemeClr val="tx1"/>
                   </a:solidFill>
-                  <a:latin typeface="Arial" panose="020B0604020202020204" pitchFamily="34" charset="0"/>
+                  <a:latin typeface="Arial" panose="020B0704020202020204" pitchFamily="34" charset="0"/>
                 </a:defRPr>
               </a:lvl3pPr>
               <a:lvl4pPr marL="1600200" indent="-228600" defTabSz="1095375">
@@ -6316,7 +6317,7 @@
                   <a:solidFill>
                     <a:schemeClr val="tx1"/>
                   </a:solidFill>
-                  <a:latin typeface="Arial" panose="020B0604020202020204" pitchFamily="34" charset="0"/>
+                  <a:latin typeface="Arial" panose="020B0704020202020204" pitchFamily="34" charset="0"/>
                 </a:defRPr>
               </a:lvl4pPr>
               <a:lvl5pPr marL="2057400" indent="-228600" defTabSz="1095375">
@@ -6324,7 +6325,7 @@
                   <a:solidFill>
                     <a:schemeClr val="tx1"/>
                   </a:solidFill>
-                  <a:latin typeface="Arial" panose="020B0604020202020204" pitchFamily="34" charset="0"/>
+                  <a:latin typeface="Arial" panose="020B0704020202020204" pitchFamily="34" charset="0"/>
                 </a:defRPr>
               </a:lvl5pPr>
               <a:lvl6pPr marL="2514600" indent="-228600" defTabSz="1095375" fontAlgn="base">
@@ -6338,7 +6339,7 @@
                   <a:solidFill>
                     <a:schemeClr val="tx1"/>
                   </a:solidFill>
-                  <a:latin typeface="Arial" panose="020B0604020202020204" pitchFamily="34" charset="0"/>
+                  <a:latin typeface="Arial" panose="020B0704020202020204" pitchFamily="34" charset="0"/>
                 </a:defRPr>
               </a:lvl6pPr>
               <a:lvl7pPr marL="2971800" indent="-228600" defTabSz="1095375" fontAlgn="base">
@@ -6352,7 +6353,7 @@
                   <a:solidFill>
                     <a:schemeClr val="tx1"/>
                   </a:solidFill>
-                  <a:latin typeface="Arial" panose="020B0604020202020204" pitchFamily="34" charset="0"/>
+                  <a:latin typeface="Arial" panose="020B0704020202020204" pitchFamily="34" charset="0"/>
                 </a:defRPr>
               </a:lvl7pPr>
               <a:lvl8pPr marL="3429000" indent="-228600" defTabSz="1095375" fontAlgn="base">
@@ -6366,7 +6367,7 @@
                   <a:solidFill>
                     <a:schemeClr val="tx1"/>
                   </a:solidFill>
-                  <a:latin typeface="Arial" panose="020B0604020202020204" pitchFamily="34" charset="0"/>
+                  <a:latin typeface="Arial" panose="020B0704020202020204" pitchFamily="34" charset="0"/>
                 </a:defRPr>
               </a:lvl8pPr>
               <a:lvl9pPr marL="3886200" indent="-228600" defTabSz="1095375" fontAlgn="base">
@@ -6380,7 +6381,7 @@
                   <a:solidFill>
                     <a:schemeClr val="tx1"/>
                   </a:solidFill>
-                  <a:latin typeface="Arial" panose="020B0604020202020204" pitchFamily="34" charset="0"/>
+                  <a:latin typeface="Arial" panose="020B0704020202020204" pitchFamily="34" charset="0"/>
                 </a:defRPr>
               </a:lvl9pPr>
             </a:lstStyle>
@@ -6394,12 +6395,12 @@
               </a:pPr>
               <a:r>
                 <a:rPr lang="en-US" sz="2800" i="1">
-                  <a:cs typeface="Arial" panose="020B0604020202020204" pitchFamily="34" charset="0"/>
+                  <a:cs typeface="Arial" panose="020B0704020202020204" pitchFamily="34" charset="0"/>
                 </a:rPr>
                 <a:t>Sai số phép đo</a:t>
               </a:r>
               <a:endParaRPr lang="en-US" sz="2800" dirty="0">
-                <a:cs typeface="Arial" panose="020B0604020202020204" pitchFamily="34" charset="0"/>
+                <a:cs typeface="Arial" panose="020B0704020202020204" pitchFamily="34" charset="0"/>
               </a:endParaRPr>
             </a:p>
           </p:txBody>
@@ -6459,7 +6460,7 @@
                 <a:solidFill>
                   <a:schemeClr val="tx1"/>
                 </a:solidFill>
-                <a:latin typeface="Arial" panose="020B0604020202020204" pitchFamily="34" charset="0"/>
+                <a:latin typeface="Arial" panose="020B0704020202020204" pitchFamily="34" charset="0"/>
               </a:defRPr>
             </a:lvl1pPr>
             <a:lvl2pPr marL="742950" indent="-285750">
@@ -6471,7 +6472,7 @@
                 <a:solidFill>
                   <a:schemeClr val="tx1"/>
                 </a:solidFill>
-                <a:latin typeface="Arial" panose="020B0604020202020204" pitchFamily="34" charset="0"/>
+                <a:latin typeface="Arial" panose="020B0704020202020204" pitchFamily="34" charset="0"/>
               </a:defRPr>
             </a:lvl2pPr>
             <a:lvl3pPr marL="1143000" indent="-228600">
@@ -6483,7 +6484,7 @@
                 <a:solidFill>
                   <a:schemeClr val="tx1"/>
                 </a:solidFill>
-                <a:latin typeface="Arial" panose="020B0604020202020204" pitchFamily="34" charset="0"/>
+                <a:latin typeface="Arial" panose="020B0704020202020204" pitchFamily="34" charset="0"/>
               </a:defRPr>
             </a:lvl3pPr>
             <a:lvl4pPr marL="1600200" indent="-228600">
@@ -6495,7 +6496,7 @@
                 <a:solidFill>
                   <a:schemeClr val="tx1"/>
                 </a:solidFill>
-                <a:latin typeface="Arial" panose="020B0604020202020204" pitchFamily="34" charset="0"/>
+                <a:latin typeface="Arial" panose="020B0704020202020204" pitchFamily="34" charset="0"/>
               </a:defRPr>
             </a:lvl4pPr>
             <a:lvl5pPr marL="2057400" indent="-228600">
@@ -6507,7 +6508,7 @@
                 <a:solidFill>
                   <a:schemeClr val="tx1"/>
                 </a:solidFill>
-                <a:latin typeface="Arial" panose="020B0604020202020204" pitchFamily="34" charset="0"/>
+                <a:latin typeface="Arial" panose="020B0704020202020204" pitchFamily="34" charset="0"/>
               </a:defRPr>
             </a:lvl5pPr>
             <a:lvl6pPr marL="2514600" indent="-228600" eaLnBrk="0" fontAlgn="base" hangingPunct="0">
@@ -6522,7 +6523,7 @@
                 <a:solidFill>
                   <a:schemeClr val="tx1"/>
                 </a:solidFill>
-                <a:latin typeface="Arial" panose="020B0604020202020204" pitchFamily="34" charset="0"/>
+                <a:latin typeface="Arial" panose="020B0704020202020204" pitchFamily="34" charset="0"/>
               </a:defRPr>
             </a:lvl6pPr>
             <a:lvl7pPr marL="2971800" indent="-228600" eaLnBrk="0" fontAlgn="base" hangingPunct="0">
@@ -6537,7 +6538,7 @@
                 <a:solidFill>
                   <a:schemeClr val="tx1"/>
                 </a:solidFill>
-                <a:latin typeface="Arial" panose="020B0604020202020204" pitchFamily="34" charset="0"/>
+                <a:latin typeface="Arial" panose="020B0704020202020204" pitchFamily="34" charset="0"/>
               </a:defRPr>
             </a:lvl7pPr>
             <a:lvl8pPr marL="3429000" indent="-228600" eaLnBrk="0" fontAlgn="base" hangingPunct="0">
@@ -6552,7 +6553,7 @@
                 <a:solidFill>
                   <a:schemeClr val="tx1"/>
                 </a:solidFill>
-                <a:latin typeface="Arial" panose="020B0604020202020204" pitchFamily="34" charset="0"/>
+                <a:latin typeface="Arial" panose="020B0704020202020204" pitchFamily="34" charset="0"/>
               </a:defRPr>
             </a:lvl8pPr>
             <a:lvl9pPr marL="3886200" indent="-228600" eaLnBrk="0" fontAlgn="base" hangingPunct="0">
@@ -6567,7 +6568,7 @@
                 <a:solidFill>
                   <a:schemeClr val="tx1"/>
                 </a:solidFill>
-                <a:latin typeface="Arial" panose="020B0604020202020204" pitchFamily="34" charset="0"/>
+                <a:latin typeface="Arial" panose="020B0704020202020204" pitchFamily="34" charset="0"/>
               </a:defRPr>
             </a:lvl9pPr>
           </a:lstStyle>
@@ -6585,7 +6586,7 @@
                 <a:solidFill>
                   <a:srgbClr val="0070C0"/>
                 </a:solidFill>
-                <a:cs typeface="Arial" panose="020B0604020202020204" pitchFamily="34" charset="0"/>
+                <a:cs typeface="Arial" panose="020B0704020202020204" pitchFamily="34" charset="0"/>
               </a:rPr>
               <a:t>3. Cách xác định sai số phép đo gián tiếp</a:t>
             </a:r>
@@ -6593,7 +6594,7 @@
               <a:solidFill>
                 <a:srgbClr val="0070C0"/>
               </a:solidFill>
-              <a:cs typeface="Arial" panose="020B0604020202020204" pitchFamily="34" charset="0"/>
+              <a:cs typeface="Arial" panose="020B0704020202020204" pitchFamily="34" charset="0"/>
             </a:endParaRPr>
           </a:p>
         </p:txBody>
@@ -6637,7 +6638,7 @@
                   <a:srgbClr val="000000"/>
                 </a:solidFill>
                 <a:effectLst/>
-                <a:latin typeface="Arial" panose="020B0604020202020204" pitchFamily="34" charset="0"/>
+                <a:latin typeface="Arial" panose="020B0704020202020204" pitchFamily="34" charset="0"/>
                 <a:ea typeface="Times New Roman" panose="02020603050405020304" pitchFamily="18" charset="0"/>
                 <a:cs typeface="Times New Roman" panose="02020603050405020304" pitchFamily="18" charset="0"/>
               </a:rPr>
@@ -6648,7 +6649,7 @@
                 <a:srgbClr val="000000"/>
               </a:solidFill>
               <a:effectLst/>
-              <a:latin typeface="Arial" panose="020B0604020202020204" pitchFamily="34" charset="0"/>
+              <a:latin typeface="Arial" panose="020B0704020202020204" pitchFamily="34" charset="0"/>
               <a:ea typeface="Times New Roman" panose="02020603050405020304" pitchFamily="18" charset="0"/>
               <a:cs typeface="Times New Roman" panose="02020603050405020304" pitchFamily="18" charset="0"/>
             </a:endParaRPr>
@@ -6683,7 +6684,7 @@
                   <a:srgbClr val="000000"/>
                 </a:solidFill>
                 <a:effectLst/>
-                <a:latin typeface="Arial" panose="020B0604020202020204" pitchFamily="34" charset="0"/>
+                <a:latin typeface="Arial" panose="020B0704020202020204" pitchFamily="34" charset="0"/>
                 <a:ea typeface="Times New Roman" panose="02020603050405020304" pitchFamily="18" charset="0"/>
               </a:rPr>
               <a:t>- Từ sai số tỉ đối, tính được sai số tuyệt đối</a:t>
@@ -6731,7 +6732,7 @@
                   <a:srgbClr val="000000"/>
                 </a:solidFill>
                 <a:effectLst/>
-                <a:latin typeface="Arial" panose="020B0604020202020204" pitchFamily="34" charset="0"/>
+                <a:latin typeface="Arial" panose="020B0704020202020204" pitchFamily="34" charset="0"/>
                 <a:ea typeface="Times New Roman" panose="02020603050405020304" pitchFamily="18" charset="0"/>
                 <a:cs typeface="Times New Roman" panose="02020603050405020304" pitchFamily="18" charset="0"/>
               </a:rPr>
@@ -6843,9 +6844,9 @@
                     <a:srgbClr val="000000"/>
                   </a:solidFill>
                   <a:effectLst/>
-                  <a:latin typeface="Arial" panose="020B0604020202020204" pitchFamily="34" charset="0"/>
+                  <a:latin typeface="Arial" panose="020B0704020202020204" pitchFamily="34" charset="0"/>
                   <a:ea typeface="Times New Roman" panose="02020603050405020304" pitchFamily="18" charset="0"/>
-                  <a:cs typeface="Arial" panose="020B0604020202020204" pitchFamily="34" charset="0"/>
+                  <a:cs typeface="Arial" panose="020B0704020202020204" pitchFamily="34" charset="0"/>
                 </a:rPr>
                 <a:t>A = B + C</a:t>
               </a:r>
@@ -6951,9 +6952,9 @@
                     <a:srgbClr val="000000"/>
                   </a:solidFill>
                   <a:effectLst/>
-                  <a:latin typeface="Arial" panose="020B0604020202020204" pitchFamily="34" charset="0"/>
+                  <a:latin typeface="Arial" panose="020B0704020202020204" pitchFamily="34" charset="0"/>
                   <a:ea typeface="Times New Roman" panose="02020603050405020304" pitchFamily="18" charset="0"/>
-                  <a:cs typeface="Arial" panose="020B0604020202020204" pitchFamily="34" charset="0"/>
+                  <a:cs typeface="Arial" panose="020B0704020202020204" pitchFamily="34" charset="0"/>
                 </a:rPr>
                 <a:t>A = B.C</a:t>
               </a:r>
@@ -6961,9 +6962,9 @@
                 <a:solidFill>
                   <a:srgbClr val="000000"/>
                 </a:solidFill>
-                <a:latin typeface="Arial" panose="020B0604020202020204" pitchFamily="34" charset="0"/>
+                <a:latin typeface="Arial" panose="020B0704020202020204" pitchFamily="34" charset="0"/>
                 <a:ea typeface="Times New Roman" panose="02020603050405020304" pitchFamily="18" charset="0"/>
-                <a:cs typeface="Arial" panose="020B0604020202020204" pitchFamily="34" charset="0"/>
+                <a:cs typeface="Arial" panose="020B0704020202020204" pitchFamily="34" charset="0"/>
               </a:endParaRPr>
             </a:p>
           </p:txBody>
@@ -7065,9 +7066,9 @@
                     <a:srgbClr val="000000"/>
                   </a:solidFill>
                   <a:effectLst/>
-                  <a:latin typeface="Arial" panose="020B0604020202020204" pitchFamily="34" charset="0"/>
+                  <a:latin typeface="Arial" panose="020B0704020202020204" pitchFamily="34" charset="0"/>
                   <a:ea typeface="Times New Roman" panose="02020603050405020304" pitchFamily="18" charset="0"/>
-                  <a:cs typeface="Arial" panose="020B0604020202020204" pitchFamily="34" charset="0"/>
+                  <a:cs typeface="Arial" panose="020B0704020202020204" pitchFamily="34" charset="0"/>
                   <a:sym typeface="Symbol" panose="05050102010706020507" pitchFamily="18" charset="2"/>
                 </a:rPr>
                 <a:t>A</a:t>
@@ -7078,9 +7079,9 @@
                     <a:srgbClr val="000000"/>
                   </a:solidFill>
                   <a:effectLst/>
-                  <a:latin typeface="Arial" panose="020B0604020202020204" pitchFamily="34" charset="0"/>
+                  <a:latin typeface="Arial" panose="020B0704020202020204" pitchFamily="34" charset="0"/>
                   <a:ea typeface="Times New Roman" panose="02020603050405020304" pitchFamily="18" charset="0"/>
-                  <a:cs typeface="Arial" panose="020B0604020202020204" pitchFamily="34" charset="0"/>
+                  <a:cs typeface="Arial" panose="020B0704020202020204" pitchFamily="34" charset="0"/>
                 </a:rPr>
                 <a:t> = </a:t>
               </a:r>
@@ -7090,9 +7091,9 @@
                     <a:srgbClr val="000000"/>
                   </a:solidFill>
                   <a:effectLst/>
-                  <a:latin typeface="Arial" panose="020B0604020202020204" pitchFamily="34" charset="0"/>
+                  <a:latin typeface="Arial" panose="020B0704020202020204" pitchFamily="34" charset="0"/>
                   <a:ea typeface="Times New Roman" panose="02020603050405020304" pitchFamily="18" charset="0"/>
-                  <a:cs typeface="Arial" panose="020B0604020202020204" pitchFamily="34" charset="0"/>
+                  <a:cs typeface="Arial" panose="020B0704020202020204" pitchFamily="34" charset="0"/>
                   <a:sym typeface="Symbol" panose="05050102010706020507" pitchFamily="18" charset="2"/>
                 </a:rPr>
                 <a:t>B</a:t>
@@ -7103,9 +7104,9 @@
                     <a:srgbClr val="000000"/>
                   </a:solidFill>
                   <a:effectLst/>
-                  <a:latin typeface="Arial" panose="020B0604020202020204" pitchFamily="34" charset="0"/>
+                  <a:latin typeface="Arial" panose="020B0704020202020204" pitchFamily="34" charset="0"/>
                   <a:ea typeface="Times New Roman" panose="02020603050405020304" pitchFamily="18" charset="0"/>
-                  <a:cs typeface="Arial" panose="020B0604020202020204" pitchFamily="34" charset="0"/>
+                  <a:cs typeface="Arial" panose="020B0704020202020204" pitchFamily="34" charset="0"/>
                 </a:rPr>
                 <a:t> +</a:t>
               </a:r>
@@ -7115,9 +7116,9 @@
                     <a:srgbClr val="000000"/>
                   </a:solidFill>
                   <a:effectLst/>
-                  <a:latin typeface="Arial" panose="020B0604020202020204" pitchFamily="34" charset="0"/>
+                  <a:latin typeface="Arial" panose="020B0704020202020204" pitchFamily="34" charset="0"/>
                   <a:ea typeface="Times New Roman" panose="02020603050405020304" pitchFamily="18" charset="0"/>
-                  <a:cs typeface="Arial" panose="020B0604020202020204" pitchFamily="34" charset="0"/>
+                  <a:cs typeface="Arial" panose="020B0704020202020204" pitchFamily="34" charset="0"/>
                   <a:sym typeface="Symbol" panose="05050102010706020507" pitchFamily="18" charset="2"/>
                 </a:rPr>
                 <a:t> C</a:t>
@@ -7224,9 +7225,9 @@
                     <a:srgbClr val="000000"/>
                   </a:solidFill>
                   <a:effectLst/>
-                  <a:latin typeface="Arial" panose="020B0604020202020204" pitchFamily="34" charset="0"/>
+                  <a:latin typeface="Arial" panose="020B0704020202020204" pitchFamily="34" charset="0"/>
                   <a:ea typeface="Times New Roman" panose="02020603050405020304" pitchFamily="18" charset="0"/>
-                  <a:cs typeface="Arial" panose="020B0604020202020204" pitchFamily="34" charset="0"/>
+                  <a:cs typeface="Arial" panose="020B0704020202020204" pitchFamily="34" charset="0"/>
                   <a:sym typeface="Symbol" panose="05050102010706020507" pitchFamily="18" charset="2"/>
                 </a:rPr>
                 <a:t>A</a:t>
@@ -7237,9 +7238,9 @@
                     <a:srgbClr val="000000"/>
                   </a:solidFill>
                   <a:effectLst/>
-                  <a:latin typeface="Arial" panose="020B0604020202020204" pitchFamily="34" charset="0"/>
+                  <a:latin typeface="Arial" panose="020B0704020202020204" pitchFamily="34" charset="0"/>
                   <a:ea typeface="Times New Roman" panose="02020603050405020304" pitchFamily="18" charset="0"/>
-                  <a:cs typeface="Arial" panose="020B0604020202020204" pitchFamily="34" charset="0"/>
+                  <a:cs typeface="Arial" panose="020B0704020202020204" pitchFamily="34" charset="0"/>
                 </a:rPr>
                 <a:t> = </a:t>
               </a:r>
@@ -7248,9 +7249,9 @@
                   <a:solidFill>
                     <a:srgbClr val="000000"/>
                   </a:solidFill>
-                  <a:latin typeface="Arial" panose="020B0604020202020204" pitchFamily="34" charset="0"/>
+                  <a:latin typeface="Arial" panose="020B0704020202020204" pitchFamily="34" charset="0"/>
                   <a:ea typeface="Times New Roman" panose="02020603050405020304" pitchFamily="18" charset="0"/>
-                  <a:cs typeface="Arial" panose="020B0604020202020204" pitchFamily="34" charset="0"/>
+                  <a:cs typeface="Arial" panose="020B0704020202020204" pitchFamily="34" charset="0"/>
                   <a:sym typeface="Symbol" panose="05050102010706020507" pitchFamily="18" charset="2"/>
                 </a:rPr>
                 <a:t>B</a:t>
@@ -7260,9 +7261,9 @@
                   <a:solidFill>
                     <a:srgbClr val="000000"/>
                   </a:solidFill>
-                  <a:latin typeface="Arial" panose="020B0604020202020204" pitchFamily="34" charset="0"/>
+                  <a:latin typeface="Arial" panose="020B0704020202020204" pitchFamily="34" charset="0"/>
                   <a:ea typeface="Times New Roman" panose="02020603050405020304" pitchFamily="18" charset="0"/>
-                  <a:cs typeface="Arial" panose="020B0604020202020204" pitchFamily="34" charset="0"/>
+                  <a:cs typeface="Arial" panose="020B0704020202020204" pitchFamily="34" charset="0"/>
                 </a:rPr>
                 <a:t> + </a:t>
               </a:r>
@@ -7271,9 +7272,9 @@
                   <a:solidFill>
                     <a:srgbClr val="000000"/>
                   </a:solidFill>
-                  <a:latin typeface="Arial" panose="020B0604020202020204" pitchFamily="34" charset="0"/>
+                  <a:latin typeface="Arial" panose="020B0704020202020204" pitchFamily="34" charset="0"/>
                   <a:ea typeface="Times New Roman" panose="02020603050405020304" pitchFamily="18" charset="0"/>
-                  <a:cs typeface="Arial" panose="020B0604020202020204" pitchFamily="34" charset="0"/>
+                  <a:cs typeface="Arial" panose="020B0704020202020204" pitchFamily="34" charset="0"/>
                   <a:sym typeface="Symbol" panose="05050102010706020507" pitchFamily="18" charset="2"/>
                 </a:rPr>
                 <a:t>C</a:t>
@@ -7283,9 +7284,9 @@
                   <a:solidFill>
                     <a:srgbClr val="000000"/>
                   </a:solidFill>
-                  <a:latin typeface="Arial" panose="020B0604020202020204" pitchFamily="34" charset="0"/>
+                  <a:latin typeface="Arial" panose="020B0704020202020204" pitchFamily="34" charset="0"/>
                   <a:ea typeface="Times New Roman" panose="02020603050405020304" pitchFamily="18" charset="0"/>
-                  <a:cs typeface="Arial" panose="020B0604020202020204" pitchFamily="34" charset="0"/>
+                  <a:cs typeface="Arial" panose="020B0704020202020204" pitchFamily="34" charset="0"/>
                 </a:rPr>
                 <a:t> </a:t>
               </a:r>
@@ -7293,9 +7294,9 @@
                 <a:solidFill>
                   <a:srgbClr val="000000"/>
                 </a:solidFill>
-                <a:latin typeface="Arial" panose="020B0604020202020204" pitchFamily="34" charset="0"/>
+                <a:latin typeface="Arial" panose="020B0704020202020204" pitchFamily="34" charset="0"/>
                 <a:ea typeface="Times New Roman" panose="02020603050405020304" pitchFamily="18" charset="0"/>
-                <a:cs typeface="Arial" panose="020B0604020202020204" pitchFamily="34" charset="0"/>
+                <a:cs typeface="Arial" panose="020B0704020202020204" pitchFamily="34" charset="0"/>
               </a:endParaRPr>
             </a:p>
           </p:txBody>
@@ -7340,7 +7341,7 @@
                   <a:srgbClr val="000000"/>
                 </a:solidFill>
                 <a:effectLst/>
-                <a:latin typeface="Arial" panose="020B0604020202020204" pitchFamily="34" charset="0"/>
+                <a:latin typeface="Arial" panose="020B0704020202020204" pitchFamily="34" charset="0"/>
                 <a:ea typeface="Times New Roman" panose="02020603050405020304" pitchFamily="18" charset="0"/>
                 <a:cs typeface="Times New Roman" panose="02020603050405020304" pitchFamily="18" charset="0"/>
               </a:rPr>
@@ -7880,8 +7881,8 @@
                       </a:srgbClr>
                     </a:outerShdw>
                   </a:effectLst>
-                  <a:latin typeface="Arial" panose="020B0604020202020204" pitchFamily="34" charset="0"/>
-                  <a:cs typeface="Arial" panose="020B0604020202020204" pitchFamily="34" charset="0"/>
+                  <a:latin typeface="Arial" panose="020B0704020202020204" pitchFamily="34" charset="0"/>
+                  <a:cs typeface="Arial" panose="020B0704020202020204" pitchFamily="34" charset="0"/>
                 </a:rPr>
                 <a:t>II</a:t>
               </a:r>
@@ -7908,8 +7909,8 @@
                     </a:srgbClr>
                   </a:outerShdw>
                 </a:effectLst>
-                <a:latin typeface="Arial" panose="020B0604020202020204" pitchFamily="34" charset="0"/>
-                <a:cs typeface="Arial" panose="020B0604020202020204" pitchFamily="34" charset="0"/>
+                <a:latin typeface="Arial" panose="020B0704020202020204" pitchFamily="34" charset="0"/>
+                <a:cs typeface="Arial" panose="020B0704020202020204" pitchFamily="34" charset="0"/>
               </a:endParaRPr>
             </a:p>
           </p:txBody>
@@ -7946,7 +7947,7 @@
                   <a:solidFill>
                     <a:schemeClr val="tx1"/>
                   </a:solidFill>
-                  <a:latin typeface="Arial" panose="020B0604020202020204" pitchFamily="34" charset="0"/>
+                  <a:latin typeface="Arial" panose="020B0704020202020204" pitchFamily="34" charset="0"/>
                 </a:defRPr>
               </a:lvl1pPr>
               <a:lvl2pPr marL="742950" indent="-285750" defTabSz="1095375">
@@ -7954,7 +7955,7 @@
                   <a:solidFill>
                     <a:schemeClr val="tx1"/>
                   </a:solidFill>
-                  <a:latin typeface="Arial" panose="020B0604020202020204" pitchFamily="34" charset="0"/>
+                  <a:latin typeface="Arial" panose="020B0704020202020204" pitchFamily="34" charset="0"/>
                 </a:defRPr>
               </a:lvl2pPr>
               <a:lvl3pPr marL="1143000" indent="-228600" defTabSz="1095375">
@@ -7962,7 +7963,7 @@
                   <a:solidFill>
                     <a:schemeClr val="tx1"/>
                   </a:solidFill>
-                  <a:latin typeface="Arial" panose="020B0604020202020204" pitchFamily="34" charset="0"/>
+                  <a:latin typeface="Arial" panose="020B0704020202020204" pitchFamily="34" charset="0"/>
                 </a:defRPr>
               </a:lvl3pPr>
               <a:lvl4pPr marL="1600200" indent="-228600" defTabSz="1095375">
@@ -7970,7 +7971,7 @@
                   <a:solidFill>
                     <a:schemeClr val="tx1"/>
                   </a:solidFill>
-                  <a:latin typeface="Arial" panose="020B0604020202020204" pitchFamily="34" charset="0"/>
+                  <a:latin typeface="Arial" panose="020B0704020202020204" pitchFamily="34" charset="0"/>
                 </a:defRPr>
               </a:lvl4pPr>
               <a:lvl5pPr marL="2057400" indent="-228600" defTabSz="1095375">
@@ -7978,7 +7979,7 @@
                   <a:solidFill>
                     <a:schemeClr val="tx1"/>
                   </a:solidFill>
-                  <a:latin typeface="Arial" panose="020B0604020202020204" pitchFamily="34" charset="0"/>
+                  <a:latin typeface="Arial" panose="020B0704020202020204" pitchFamily="34" charset="0"/>
                 </a:defRPr>
               </a:lvl5pPr>
               <a:lvl6pPr marL="2514600" indent="-228600" defTabSz="1095375" fontAlgn="base">
@@ -7992,7 +7993,7 @@
                   <a:solidFill>
                     <a:schemeClr val="tx1"/>
                   </a:solidFill>
-                  <a:latin typeface="Arial" panose="020B0604020202020204" pitchFamily="34" charset="0"/>
+                  <a:latin typeface="Arial" panose="020B0704020202020204" pitchFamily="34" charset="0"/>
                 </a:defRPr>
               </a:lvl6pPr>
               <a:lvl7pPr marL="2971800" indent="-228600" defTabSz="1095375" fontAlgn="base">
@@ -8006,7 +8007,7 @@
                   <a:solidFill>
                     <a:schemeClr val="tx1"/>
                   </a:solidFill>
-                  <a:latin typeface="Arial" panose="020B0604020202020204" pitchFamily="34" charset="0"/>
+                  <a:latin typeface="Arial" panose="020B0704020202020204" pitchFamily="34" charset="0"/>
                 </a:defRPr>
               </a:lvl7pPr>
               <a:lvl8pPr marL="3429000" indent="-228600" defTabSz="1095375" fontAlgn="base">
@@ -8020,7 +8021,7 @@
                   <a:solidFill>
                     <a:schemeClr val="tx1"/>
                   </a:solidFill>
-                  <a:latin typeface="Arial" panose="020B0604020202020204" pitchFamily="34" charset="0"/>
+                  <a:latin typeface="Arial" panose="020B0704020202020204" pitchFamily="34" charset="0"/>
                 </a:defRPr>
               </a:lvl8pPr>
               <a:lvl9pPr marL="3886200" indent="-228600" defTabSz="1095375" fontAlgn="base">
@@ -8034,7 +8035,7 @@
                   <a:solidFill>
                     <a:schemeClr val="tx1"/>
                   </a:solidFill>
-                  <a:latin typeface="Arial" panose="020B0604020202020204" pitchFamily="34" charset="0"/>
+                  <a:latin typeface="Arial" panose="020B0704020202020204" pitchFamily="34" charset="0"/>
                 </a:defRPr>
               </a:lvl9pPr>
             </a:lstStyle>
@@ -8048,12 +8049,12 @@
               </a:pPr>
               <a:r>
                 <a:rPr lang="en-US" sz="2800" i="1">
-                  <a:cs typeface="Arial" panose="020B0604020202020204" pitchFamily="34" charset="0"/>
+                  <a:cs typeface="Arial" panose="020B0704020202020204" pitchFamily="34" charset="0"/>
                 </a:rPr>
                 <a:t>Sai số phép đo</a:t>
               </a:r>
               <a:endParaRPr lang="en-US" sz="2800" dirty="0">
-                <a:cs typeface="Arial" panose="020B0604020202020204" pitchFamily="34" charset="0"/>
+                <a:cs typeface="Arial" panose="020B0704020202020204" pitchFamily="34" charset="0"/>
               </a:endParaRPr>
             </a:p>
           </p:txBody>
@@ -8113,7 +8114,7 @@
                 <a:solidFill>
                   <a:schemeClr val="tx1"/>
                 </a:solidFill>
-                <a:latin typeface="Arial" panose="020B0604020202020204" pitchFamily="34" charset="0"/>
+                <a:latin typeface="Arial" panose="020B0704020202020204" pitchFamily="34" charset="0"/>
               </a:defRPr>
             </a:lvl1pPr>
             <a:lvl2pPr marL="742950" indent="-285750">
@@ -8125,7 +8126,7 @@
                 <a:solidFill>
                   <a:schemeClr val="tx1"/>
                 </a:solidFill>
-                <a:latin typeface="Arial" panose="020B0604020202020204" pitchFamily="34" charset="0"/>
+                <a:latin typeface="Arial" panose="020B0704020202020204" pitchFamily="34" charset="0"/>
               </a:defRPr>
             </a:lvl2pPr>
             <a:lvl3pPr marL="1143000" indent="-228600">
@@ -8137,7 +8138,7 @@
                 <a:solidFill>
                   <a:schemeClr val="tx1"/>
                 </a:solidFill>
-                <a:latin typeface="Arial" panose="020B0604020202020204" pitchFamily="34" charset="0"/>
+                <a:latin typeface="Arial" panose="020B0704020202020204" pitchFamily="34" charset="0"/>
               </a:defRPr>
             </a:lvl3pPr>
             <a:lvl4pPr marL="1600200" indent="-228600">
@@ -8149,7 +8150,7 @@
                 <a:solidFill>
                   <a:schemeClr val="tx1"/>
                 </a:solidFill>
-                <a:latin typeface="Arial" panose="020B0604020202020204" pitchFamily="34" charset="0"/>
+                <a:latin typeface="Arial" panose="020B0704020202020204" pitchFamily="34" charset="0"/>
               </a:defRPr>
             </a:lvl4pPr>
             <a:lvl5pPr marL="2057400" indent="-228600">
@@ -8161,7 +8162,7 @@
                 <a:solidFill>
                   <a:schemeClr val="tx1"/>
                 </a:solidFill>
-                <a:latin typeface="Arial" panose="020B0604020202020204" pitchFamily="34" charset="0"/>
+                <a:latin typeface="Arial" panose="020B0704020202020204" pitchFamily="34" charset="0"/>
               </a:defRPr>
             </a:lvl5pPr>
             <a:lvl6pPr marL="2514600" indent="-228600" eaLnBrk="0" fontAlgn="base" hangingPunct="0">
@@ -8176,7 +8177,7 @@
                 <a:solidFill>
                   <a:schemeClr val="tx1"/>
                 </a:solidFill>
-                <a:latin typeface="Arial" panose="020B0604020202020204" pitchFamily="34" charset="0"/>
+                <a:latin typeface="Arial" panose="020B0704020202020204" pitchFamily="34" charset="0"/>
               </a:defRPr>
             </a:lvl6pPr>
             <a:lvl7pPr marL="2971800" indent="-228600" eaLnBrk="0" fontAlgn="base" hangingPunct="0">
@@ -8191,7 +8192,7 @@
                 <a:solidFill>
                   <a:schemeClr val="tx1"/>
                 </a:solidFill>
-                <a:latin typeface="Arial" panose="020B0604020202020204" pitchFamily="34" charset="0"/>
+                <a:latin typeface="Arial" panose="020B0704020202020204" pitchFamily="34" charset="0"/>
               </a:defRPr>
             </a:lvl7pPr>
             <a:lvl8pPr marL="3429000" indent="-228600" eaLnBrk="0" fontAlgn="base" hangingPunct="0">
@@ -8206,7 +8207,7 @@
                 <a:solidFill>
                   <a:schemeClr val="tx1"/>
                 </a:solidFill>
-                <a:latin typeface="Arial" panose="020B0604020202020204" pitchFamily="34" charset="0"/>
+                <a:latin typeface="Arial" panose="020B0704020202020204" pitchFamily="34" charset="0"/>
               </a:defRPr>
             </a:lvl8pPr>
             <a:lvl9pPr marL="3886200" indent="-228600" eaLnBrk="0" fontAlgn="base" hangingPunct="0">
@@ -8221,7 +8222,7 @@
                 <a:solidFill>
                   <a:schemeClr val="tx1"/>
                 </a:solidFill>
-                <a:latin typeface="Arial" panose="020B0604020202020204" pitchFamily="34" charset="0"/>
+                <a:latin typeface="Arial" panose="020B0704020202020204" pitchFamily="34" charset="0"/>
               </a:defRPr>
             </a:lvl9pPr>
           </a:lstStyle>
@@ -8239,7 +8240,7 @@
                 <a:solidFill>
                   <a:srgbClr val="0070C0"/>
                 </a:solidFill>
-                <a:cs typeface="Arial" panose="020B0604020202020204" pitchFamily="34" charset="0"/>
+                <a:cs typeface="Arial" panose="020B0704020202020204" pitchFamily="34" charset="0"/>
               </a:rPr>
               <a:t>3. Cách xác định sai số phép đo gián tiếp</a:t>
             </a:r>
@@ -8247,7 +8248,7 @@
               <a:solidFill>
                 <a:srgbClr val="0070C0"/>
               </a:solidFill>
-              <a:cs typeface="Arial" panose="020B0604020202020204" pitchFamily="34" charset="0"/>
+              <a:cs typeface="Arial" panose="020B0704020202020204" pitchFamily="34" charset="0"/>
             </a:endParaRPr>
           </a:p>
         </p:txBody>
@@ -8291,7 +8292,7 @@
                   <a:srgbClr val="000000"/>
                 </a:solidFill>
                 <a:effectLst/>
-                <a:latin typeface="Arial" panose="020B0604020202020204" pitchFamily="34" charset="0"/>
+                <a:latin typeface="Arial" panose="020B0704020202020204" pitchFamily="34" charset="0"/>
                 <a:ea typeface="Times New Roman" panose="02020603050405020304" pitchFamily="18" charset="0"/>
                 <a:cs typeface="Times New Roman" panose="02020603050405020304" pitchFamily="18" charset="0"/>
               </a:rPr>
@@ -8303,7 +8304,7 @@
                   <a:srgbClr val="000000"/>
                 </a:solidFill>
                 <a:effectLst/>
-                <a:latin typeface="Arial" panose="020B0604020202020204" pitchFamily="34" charset="0"/>
+                <a:latin typeface="Arial" panose="020B0704020202020204" pitchFamily="34" charset="0"/>
                 <a:ea typeface="Times New Roman" panose="02020603050405020304" pitchFamily="18" charset="0"/>
                 <a:cs typeface="Times New Roman" panose="02020603050405020304" pitchFamily="18" charset="0"/>
               </a:rPr>
@@ -8315,7 +8316,7 @@
                   <a:srgbClr val="000000"/>
                 </a:solidFill>
                 <a:effectLst/>
-                <a:latin typeface="Arial" panose="020B0604020202020204" pitchFamily="34" charset="0"/>
+                <a:latin typeface="Arial" panose="020B0704020202020204" pitchFamily="34" charset="0"/>
                 <a:ea typeface="Times New Roman" panose="02020603050405020304" pitchFamily="18" charset="0"/>
                 <a:cs typeface="Times New Roman" panose="02020603050405020304" pitchFamily="18" charset="0"/>
               </a:rPr>
@@ -8327,7 +8328,7 @@
                   <a:srgbClr val="000000"/>
                 </a:solidFill>
                 <a:effectLst/>
-                <a:latin typeface="Arial" panose="020B0604020202020204" pitchFamily="34" charset="0"/>
+                <a:latin typeface="Arial" panose="020B0704020202020204" pitchFamily="34" charset="0"/>
                 <a:ea typeface="Times New Roman" panose="02020603050405020304" pitchFamily="18" charset="0"/>
                 <a:cs typeface="Times New Roman" panose="02020603050405020304" pitchFamily="18" charset="0"/>
               </a:rPr>
@@ -8339,7 +8340,7 @@
                   <a:srgbClr val="000000"/>
                 </a:solidFill>
                 <a:effectLst/>
-                <a:latin typeface="Arial" panose="020B0604020202020204" pitchFamily="34" charset="0"/>
+                <a:latin typeface="Arial" panose="020B0704020202020204" pitchFamily="34" charset="0"/>
                 <a:ea typeface="Times New Roman" panose="02020603050405020304" pitchFamily="18" charset="0"/>
                 <a:cs typeface="Times New Roman" panose="02020603050405020304" pitchFamily="18" charset="0"/>
               </a:rPr>
@@ -8350,7 +8351,7 @@
                 <a:srgbClr val="000000"/>
               </a:solidFill>
               <a:effectLst/>
-              <a:latin typeface="Arial" panose="020B0604020202020204" pitchFamily="34" charset="0"/>
+              <a:latin typeface="Arial" panose="020B0704020202020204" pitchFamily="34" charset="0"/>
               <a:ea typeface="Times New Roman" panose="02020603050405020304" pitchFamily="18" charset="0"/>
               <a:cs typeface="Times New Roman" panose="02020603050405020304" pitchFamily="18" charset="0"/>
             </a:endParaRPr>
@@ -8458,7 +8459,7 @@
                             <a:srgbClr val="000000"/>
                           </a:solidFill>
                           <a:latin typeface="Cambria Math" panose="02040503050406030204" pitchFamily="18" charset="0"/>
-                          <a:cs typeface="Arial" panose="020B0604020202020204" pitchFamily="34" charset="0"/>
+                          <a:cs typeface="Arial" panose="020B0704020202020204" pitchFamily="34" charset="0"/>
                           <a:sym typeface="Symbol" panose="05050102010706020507" pitchFamily="18" charset="2"/>
                         </a:rPr>
                         <m:t></m:t>
@@ -8470,7 +8471,7 @@
                           </a:solidFill>
                           <a:effectLst/>
                           <a:latin typeface="Cambria Math" panose="02040503050406030204" pitchFamily="18" charset="0"/>
-                          <a:cs typeface="Arial" panose="020B0604020202020204" pitchFamily="34" charset="0"/>
+                          <a:cs typeface="Arial" panose="020B0704020202020204" pitchFamily="34" charset="0"/>
                           <a:sym typeface="Symbol" panose="05050102010706020507" pitchFamily="18" charset="2"/>
                         </a:rPr>
                         <m:t>𝑣</m:t>
@@ -8483,9 +8484,9 @@
                         <a:srgbClr val="000000"/>
                       </a:solidFill>
                       <a:effectLst/>
-                      <a:latin typeface="Arial" panose="020B0604020202020204" pitchFamily="34" charset="0"/>
+                      <a:latin typeface="Arial" panose="020B0704020202020204" pitchFamily="34" charset="0"/>
                       <a:ea typeface="Times New Roman" panose="02020603050405020304" pitchFamily="18" charset="0"/>
-                      <a:cs typeface="Arial" panose="020B0604020202020204" pitchFamily="34" charset="0"/>
+                      <a:cs typeface="Arial" panose="020B0704020202020204" pitchFamily="34" charset="0"/>
                     </a:rPr>
                     <a:t> = </a:t>
                   </a:r>
@@ -8497,7 +8498,7 @@
                             <a:srgbClr val="000000"/>
                           </a:solidFill>
                           <a:latin typeface="Cambria Math" panose="02040503050406030204" pitchFamily="18" charset="0"/>
-                          <a:cs typeface="Arial" panose="020B0604020202020204" pitchFamily="34" charset="0"/>
+                          <a:cs typeface="Arial" panose="020B0704020202020204" pitchFamily="34" charset="0"/>
                           <a:sym typeface="Symbol" panose="05050102010706020507" pitchFamily="18" charset="2"/>
                         </a:rPr>
                         <m:t></m:t>
@@ -8508,7 +8509,7 @@
                             <a:srgbClr val="000000"/>
                           </a:solidFill>
                           <a:latin typeface="Cambria Math" panose="02040503050406030204" pitchFamily="18" charset="0"/>
-                          <a:cs typeface="Arial" panose="020B0604020202020204" pitchFamily="34" charset="0"/>
+                          <a:cs typeface="Arial" panose="020B0704020202020204" pitchFamily="34" charset="0"/>
                           <a:sym typeface="Symbol" panose="05050102010706020507" pitchFamily="18" charset="2"/>
                         </a:rPr>
                         <m:t>𝑣</m:t>
@@ -8521,9 +8522,9 @@
                         <a:srgbClr val="000000"/>
                       </a:solidFill>
                       <a:effectLst/>
-                      <a:latin typeface="Arial" panose="020B0604020202020204" pitchFamily="34" charset="0"/>
+                      <a:latin typeface="Arial" panose="020B0704020202020204" pitchFamily="34" charset="0"/>
                       <a:ea typeface="Times New Roman" panose="02020603050405020304" pitchFamily="18" charset="0"/>
-                      <a:cs typeface="Arial" panose="020B0604020202020204" pitchFamily="34" charset="0"/>
+                      <a:cs typeface="Arial" panose="020B0704020202020204" pitchFamily="34" charset="0"/>
                     </a:rPr>
                     <a:t>. </a:t>
                   </a:r>
@@ -8539,7 +8540,7 @@
                               </a:solidFill>
                               <a:effectLst/>
                               <a:latin typeface="Cambria Math" panose="02040503050406030204"/>
-                              <a:cs typeface="Arial" panose="020B0604020202020204" pitchFamily="34" charset="0"/>
+                              <a:cs typeface="Arial" panose="020B0704020202020204" pitchFamily="34" charset="0"/>
                             </a:rPr>
                           </m:ctrlPr>
                         </m:accPr>
@@ -8551,7 +8552,7 @@
                               </a:solidFill>
                               <a:effectLst/>
                               <a:latin typeface="Cambria Math" panose="02040503050406030204" pitchFamily="18" charset="0"/>
-                              <a:cs typeface="Arial" panose="020B0604020202020204" pitchFamily="34" charset="0"/>
+                              <a:cs typeface="Arial" panose="020B0704020202020204" pitchFamily="34" charset="0"/>
                             </a:rPr>
                             <m:t>𝑣</m:t>
                           </m:r>
@@ -8703,7 +8704,7 @@
                           </a:solidFill>
                           <a:effectLst/>
                           <a:latin typeface="Cambria Math" panose="02040503050406030204" pitchFamily="18" charset="0"/>
-                          <a:cs typeface="Arial" panose="020B0604020202020204" pitchFamily="34" charset="0"/>
+                          <a:cs typeface="Arial" panose="020B0704020202020204" pitchFamily="34" charset="0"/>
                           <a:sym typeface="Symbol" panose="05050102010706020507" pitchFamily="18" charset="2"/>
                         </a:rPr>
                         <m:t></m:t>
@@ -8715,7 +8716,7 @@
                           </a:solidFill>
                           <a:effectLst/>
                           <a:latin typeface="Cambria Math" panose="02040503050406030204" pitchFamily="18" charset="0"/>
-                          <a:cs typeface="Arial" panose="020B0604020202020204" pitchFamily="34" charset="0"/>
+                          <a:cs typeface="Arial" panose="020B0704020202020204" pitchFamily="34" charset="0"/>
                           <a:sym typeface="Symbol" panose="05050102010706020507" pitchFamily="18" charset="2"/>
                         </a:rPr>
                         <m:t>𝑣</m:t>
@@ -8728,9 +8729,9 @@
                         <a:srgbClr val="000000"/>
                       </a:solidFill>
                       <a:effectLst/>
-                      <a:latin typeface="Arial" panose="020B0604020202020204" pitchFamily="34" charset="0"/>
+                      <a:latin typeface="Arial" panose="020B0704020202020204" pitchFamily="34" charset="0"/>
                       <a:ea typeface="Times New Roman" panose="02020603050405020304" pitchFamily="18" charset="0"/>
-                      <a:cs typeface="Arial" panose="020B0604020202020204" pitchFamily="34" charset="0"/>
+                      <a:cs typeface="Arial" panose="020B0704020202020204" pitchFamily="34" charset="0"/>
                     </a:rPr>
                     <a:t> = </a:t>
                   </a:r>
@@ -8745,7 +8746,7 @@
                               </a:solidFill>
                               <a:effectLst/>
                               <a:latin typeface="Cambria Math" panose="02040503050406030204"/>
-                              <a:cs typeface="Arial" panose="020B0604020202020204" pitchFamily="34" charset="0"/>
+                              <a:cs typeface="Arial" panose="020B0704020202020204" pitchFamily="34" charset="0"/>
                             </a:rPr>
                           </m:ctrlPr>
                         </m:fPr>
@@ -8756,7 +8757,7 @@
                                 <a:srgbClr val="000000"/>
                               </a:solidFill>
                               <a:latin typeface="Cambria Math" panose="02040503050406030204" pitchFamily="18" charset="0"/>
-                              <a:cs typeface="Arial" panose="020B0604020202020204" pitchFamily="34" charset="0"/>
+                              <a:cs typeface="Arial" panose="020B0704020202020204" pitchFamily="34" charset="0"/>
                               <a:sym typeface="Symbol" panose="05050102010706020507" pitchFamily="18" charset="2"/>
                             </a:rPr>
                             <m:t></m:t>
@@ -8767,7 +8768,7 @@
                                 <a:srgbClr val="000000"/>
                               </a:solidFill>
                               <a:latin typeface="Cambria Math" panose="02040503050406030204" pitchFamily="18" charset="0"/>
-                              <a:cs typeface="Arial" panose="020B0604020202020204" pitchFamily="34" charset="0"/>
+                              <a:cs typeface="Arial" panose="020B0704020202020204" pitchFamily="34" charset="0"/>
                               <a:sym typeface="Symbol" panose="05050102010706020507" pitchFamily="18" charset="2"/>
                             </a:rPr>
                             <m:t>𝑠</m:t>
@@ -8781,7 +8782,7 @@
                               </a:solidFill>
                               <a:effectLst/>
                               <a:latin typeface="Cambria Math" panose="02040503050406030204" pitchFamily="18" charset="0"/>
-                              <a:cs typeface="Arial" panose="020B0604020202020204" pitchFamily="34" charset="0"/>
+                              <a:cs typeface="Arial" panose="020B0704020202020204" pitchFamily="34" charset="0"/>
                             </a:rPr>
                             <m:t>𝑠</m:t>
                           </m:r>
@@ -8795,9 +8796,9 @@
                         <a:srgbClr val="000000"/>
                       </a:solidFill>
                       <a:effectLst/>
-                      <a:latin typeface="Arial" panose="020B0604020202020204" pitchFamily="34" charset="0"/>
+                      <a:latin typeface="Arial" panose="020B0704020202020204" pitchFamily="34" charset="0"/>
                       <a:ea typeface="Times New Roman" panose="02020603050405020304" pitchFamily="18" charset="0"/>
-                      <a:cs typeface="Arial" panose="020B0604020202020204" pitchFamily="34" charset="0"/>
+                      <a:cs typeface="Arial" panose="020B0704020202020204" pitchFamily="34" charset="0"/>
                       <a:sym typeface="Symbol" panose="05050102010706020507" pitchFamily="18" charset="2"/>
                     </a:rPr>
                     <a:t> . </a:t>
@@ -8808,9 +8809,9 @@
                         <a:srgbClr val="000000"/>
                       </a:solidFill>
                       <a:effectLst/>
-                      <a:latin typeface="Arial" panose="020B0604020202020204" pitchFamily="34" charset="0"/>
+                      <a:latin typeface="Arial" panose="020B0704020202020204" pitchFamily="34" charset="0"/>
                       <a:ea typeface="Times New Roman" panose="02020603050405020304" pitchFamily="18" charset="0"/>
-                      <a:cs typeface="Arial" panose="020B0604020202020204" pitchFamily="34" charset="0"/>
+                      <a:cs typeface="Arial" panose="020B0704020202020204" pitchFamily="34" charset="0"/>
                     </a:rPr>
                     <a:t>100% + </a:t>
                   </a:r>
@@ -8824,7 +8825,7 @@
                                 <a:srgbClr val="000000"/>
                               </a:solidFill>
                               <a:latin typeface="Cambria Math" panose="02040503050406030204"/>
-                              <a:cs typeface="Arial" panose="020B0604020202020204" pitchFamily="34" charset="0"/>
+                              <a:cs typeface="Arial" panose="020B0704020202020204" pitchFamily="34" charset="0"/>
                             </a:rPr>
                           </m:ctrlPr>
                         </m:fPr>
@@ -8835,7 +8836,7 @@
                                 <a:srgbClr val="000000"/>
                               </a:solidFill>
                               <a:latin typeface="Cambria Math" panose="02040503050406030204" pitchFamily="18" charset="0"/>
-                              <a:cs typeface="Arial" panose="020B0604020202020204" pitchFamily="34" charset="0"/>
+                              <a:cs typeface="Arial" panose="020B0704020202020204" pitchFamily="34" charset="0"/>
                               <a:sym typeface="Symbol" panose="05050102010706020507" pitchFamily="18" charset="2"/>
                             </a:rPr>
                             <m:t></m:t>
@@ -8846,7 +8847,7 @@
                                 <a:srgbClr val="000000"/>
                               </a:solidFill>
                               <a:latin typeface="Cambria Math" panose="02040503050406030204" pitchFamily="18" charset="0"/>
-                              <a:cs typeface="Arial" panose="020B0604020202020204" pitchFamily="34" charset="0"/>
+                              <a:cs typeface="Arial" panose="020B0704020202020204" pitchFamily="34" charset="0"/>
                               <a:sym typeface="Symbol" panose="05050102010706020507" pitchFamily="18" charset="2"/>
                             </a:rPr>
                             <m:t>𝑡</m:t>
@@ -8859,7 +8860,7 @@
                                 <a:srgbClr val="000000"/>
                               </a:solidFill>
                               <a:latin typeface="Cambria Math" panose="02040503050406030204" pitchFamily="18" charset="0"/>
-                              <a:cs typeface="Arial" panose="020B0604020202020204" pitchFamily="34" charset="0"/>
+                              <a:cs typeface="Arial" panose="020B0704020202020204" pitchFamily="34" charset="0"/>
                             </a:rPr>
                             <m:t>𝑡</m:t>
                           </m:r>
@@ -8872,9 +8873,9 @@
                       <a:solidFill>
                         <a:srgbClr val="000000"/>
                       </a:solidFill>
-                      <a:latin typeface="Arial" panose="020B0604020202020204" pitchFamily="34" charset="0"/>
+                      <a:latin typeface="Arial" panose="020B0704020202020204" pitchFamily="34" charset="0"/>
                       <a:ea typeface="Times New Roman" panose="02020603050405020304" pitchFamily="18" charset="0"/>
-                      <a:cs typeface="Arial" panose="020B0604020202020204" pitchFamily="34" charset="0"/>
+                      <a:cs typeface="Arial" panose="020B0704020202020204" pitchFamily="34" charset="0"/>
                       <a:sym typeface="Symbol" panose="05050102010706020507" pitchFamily="18" charset="2"/>
                     </a:rPr>
                     <a:t> . </a:t>
@@ -8884,9 +8885,9 @@
                       <a:solidFill>
                         <a:srgbClr val="000000"/>
                       </a:solidFill>
-                      <a:latin typeface="Arial" panose="020B0604020202020204" pitchFamily="34" charset="0"/>
+                      <a:latin typeface="Arial" panose="020B0704020202020204" pitchFamily="34" charset="0"/>
                       <a:ea typeface="Times New Roman" panose="02020603050405020304" pitchFamily="18" charset="0"/>
-                      <a:cs typeface="Arial" panose="020B0604020202020204" pitchFamily="34" charset="0"/>
+                      <a:cs typeface="Arial" panose="020B0704020202020204" pitchFamily="34" charset="0"/>
                     </a:rPr>
                     <a:t>100% </a:t>
                   </a:r>
@@ -9032,9 +9033,9 @@
                   <a:solidFill>
                     <a:srgbClr val="000000"/>
                   </a:solidFill>
-                  <a:latin typeface="Arial" panose="020B0604020202020204" pitchFamily="34" charset="0"/>
+                  <a:latin typeface="Arial" panose="020B0704020202020204" pitchFamily="34" charset="0"/>
                   <a:ea typeface="Times New Roman" panose="02020603050405020304" pitchFamily="18" charset="0"/>
-                  <a:cs typeface="Arial" panose="020B0604020202020204" pitchFamily="34" charset="0"/>
+                  <a:cs typeface="Arial" panose="020B0704020202020204" pitchFamily="34" charset="0"/>
                   <a:sym typeface="Symbol" panose="05050102010706020507" pitchFamily="18" charset="2"/>
                 </a:rPr>
                 <a:t></a:t>
@@ -9044,7 +9045,7 @@
                   <a:solidFill>
                     <a:srgbClr val="000000"/>
                   </a:solidFill>
-                  <a:latin typeface="Arial" panose="020B0604020202020204" pitchFamily="34" charset="0"/>
+                  <a:latin typeface="Arial" panose="020B0704020202020204" pitchFamily="34" charset="0"/>
                   <a:ea typeface="Times New Roman" panose="02020603050405020304" pitchFamily="18" charset="0"/>
                   <a:cs typeface="Times New Roman" panose="02020603050405020304" pitchFamily="18" charset="0"/>
                 </a:rPr>
@@ -9055,9 +9056,9 @@
                   <a:solidFill>
                     <a:srgbClr val="000000"/>
                   </a:solidFill>
-                  <a:latin typeface="Arial" panose="020B0604020202020204" pitchFamily="34" charset="0"/>
+                  <a:latin typeface="Arial" panose="020B0704020202020204" pitchFamily="34" charset="0"/>
                   <a:ea typeface="Times New Roman" panose="02020603050405020304" pitchFamily="18" charset="0"/>
-                  <a:cs typeface="Arial" panose="020B0604020202020204" pitchFamily="34" charset="0"/>
+                  <a:cs typeface="Arial" panose="020B0704020202020204" pitchFamily="34" charset="0"/>
                   <a:sym typeface="Symbol" panose="05050102010706020507" pitchFamily="18" charset="2"/>
                 </a:rPr>
                 <a:t> s</a:t>
@@ -9067,9 +9068,9 @@
                   <a:solidFill>
                     <a:srgbClr val="000000"/>
                   </a:solidFill>
-                  <a:latin typeface="Arial" panose="020B0604020202020204" pitchFamily="34" charset="0"/>
+                  <a:latin typeface="Arial" panose="020B0704020202020204" pitchFamily="34" charset="0"/>
                   <a:ea typeface="Times New Roman" panose="02020603050405020304" pitchFamily="18" charset="0"/>
-                  <a:cs typeface="Arial" panose="020B0604020202020204" pitchFamily="34" charset="0"/>
+                  <a:cs typeface="Arial" panose="020B0704020202020204" pitchFamily="34" charset="0"/>
                   <a:sym typeface="Symbol" panose="05050102010706020507" pitchFamily="18" charset="2"/>
                 </a:rPr>
                 <a:t>1</a:t>
@@ -9079,7 +9080,7 @@
                   <a:solidFill>
                     <a:srgbClr val="000000"/>
                   </a:solidFill>
-                  <a:latin typeface="Arial" panose="020B0604020202020204" pitchFamily="34" charset="0"/>
+                  <a:latin typeface="Arial" panose="020B0704020202020204" pitchFamily="34" charset="0"/>
                   <a:ea typeface="Times New Roman" panose="02020603050405020304" pitchFamily="18" charset="0"/>
                   <a:cs typeface="Times New Roman" panose="02020603050405020304" pitchFamily="18" charset="0"/>
                 </a:rPr>
@@ -9090,9 +9091,9 @@
                   <a:solidFill>
                     <a:srgbClr val="000000"/>
                   </a:solidFill>
-                  <a:latin typeface="Arial" panose="020B0604020202020204" pitchFamily="34" charset="0"/>
+                  <a:latin typeface="Arial" panose="020B0704020202020204" pitchFamily="34" charset="0"/>
                   <a:ea typeface="Times New Roman" panose="02020603050405020304" pitchFamily="18" charset="0"/>
-                  <a:cs typeface="Arial" panose="020B0604020202020204" pitchFamily="34" charset="0"/>
+                  <a:cs typeface="Arial" panose="020B0704020202020204" pitchFamily="34" charset="0"/>
                   <a:sym typeface="Symbol" panose="05050102010706020507" pitchFamily="18" charset="2"/>
                 </a:rPr>
                 <a:t></a:t>
@@ -9102,7 +9103,7 @@
                   <a:solidFill>
                     <a:srgbClr val="000000"/>
                   </a:solidFill>
-                  <a:latin typeface="Arial" panose="020B0604020202020204" pitchFamily="34" charset="0"/>
+                  <a:latin typeface="Arial" panose="020B0704020202020204" pitchFamily="34" charset="0"/>
                   <a:ea typeface="Times New Roman" panose="02020603050405020304" pitchFamily="18" charset="0"/>
                   <a:cs typeface="Times New Roman" panose="02020603050405020304" pitchFamily="18" charset="0"/>
                   <a:sym typeface="Symbol" panose="05050102010706020507" pitchFamily="18" charset="2"/>
@@ -9114,7 +9115,7 @@
                   <a:solidFill>
                     <a:srgbClr val="000000"/>
                   </a:solidFill>
-                  <a:latin typeface="Arial" panose="020B0604020202020204" pitchFamily="34" charset="0"/>
+                  <a:latin typeface="Arial" panose="020B0704020202020204" pitchFamily="34" charset="0"/>
                   <a:ea typeface="Times New Roman" panose="02020603050405020304" pitchFamily="18" charset="0"/>
                   <a:cs typeface="Times New Roman" panose="02020603050405020304" pitchFamily="18" charset="0"/>
                 </a:rPr>
@@ -9159,7 +9160,7 @@
                       <a:srgbClr val="000000"/>
                     </a:solidFill>
                     <a:effectLst/>
-                    <a:latin typeface="Arial" panose="020B0604020202020204" pitchFamily="34" charset="0"/>
+                    <a:latin typeface="Arial" panose="020B0704020202020204" pitchFamily="34" charset="0"/>
                     <a:ea typeface="Times New Roman" panose="02020603050405020304" pitchFamily="18" charset="0"/>
                     <a:cs typeface="Times New Roman" panose="02020603050405020304" pitchFamily="18" charset="0"/>
                   </a:rPr>
@@ -9239,7 +9240,7 @@
                       <a:srgbClr val="000000"/>
                     </a:solidFill>
                     <a:effectLst/>
-                    <a:latin typeface="Arial" panose="020B0604020202020204" pitchFamily="34" charset="0"/>
+                    <a:latin typeface="Arial" panose="020B0704020202020204" pitchFamily="34" charset="0"/>
                     <a:ea typeface="Times New Roman" panose="02020603050405020304" pitchFamily="18" charset="0"/>
                     <a:cs typeface="Times New Roman" panose="02020603050405020304" pitchFamily="18" charset="0"/>
                   </a:rPr>
@@ -9328,7 +9329,7 @@
                   <a:srgbClr val="000000"/>
                 </a:solidFill>
                 <a:effectLst/>
-                <a:latin typeface="Arial" panose="020B0604020202020204" pitchFamily="34" charset="0"/>
+                <a:latin typeface="Arial" panose="020B0704020202020204" pitchFamily="34" charset="0"/>
                 <a:ea typeface="Times New Roman" panose="02020603050405020304" pitchFamily="18" charset="0"/>
                 <a:cs typeface="Times New Roman" panose="02020603050405020304" pitchFamily="18" charset="0"/>
               </a:rPr>
@@ -9795,8 +9796,8 @@
                       </a:srgbClr>
                     </a:outerShdw>
                   </a:effectLst>
-                  <a:latin typeface="Arial" panose="020B0604020202020204" pitchFamily="34" charset="0"/>
-                  <a:cs typeface="Arial" panose="020B0604020202020204" pitchFamily="34" charset="0"/>
+                  <a:latin typeface="Arial" panose="020B0704020202020204" pitchFamily="34" charset="0"/>
+                  <a:cs typeface="Arial" panose="020B0704020202020204" pitchFamily="34" charset="0"/>
                 </a:rPr>
                 <a:t>II</a:t>
               </a:r>
@@ -9823,8 +9824,8 @@
                     </a:srgbClr>
                   </a:outerShdw>
                 </a:effectLst>
-                <a:latin typeface="Arial" panose="020B0604020202020204" pitchFamily="34" charset="0"/>
-                <a:cs typeface="Arial" panose="020B0604020202020204" pitchFamily="34" charset="0"/>
+                <a:latin typeface="Arial" panose="020B0704020202020204" pitchFamily="34" charset="0"/>
+                <a:cs typeface="Arial" panose="020B0704020202020204" pitchFamily="34" charset="0"/>
               </a:endParaRPr>
             </a:p>
           </p:txBody>
@@ -9861,7 +9862,7 @@
                   <a:solidFill>
                     <a:schemeClr val="tx1"/>
                   </a:solidFill>
-                  <a:latin typeface="Arial" panose="020B0604020202020204" pitchFamily="34" charset="0"/>
+                  <a:latin typeface="Arial" panose="020B0704020202020204" pitchFamily="34" charset="0"/>
                 </a:defRPr>
               </a:lvl1pPr>
               <a:lvl2pPr marL="742950" indent="-285750" defTabSz="1095375">
@@ -9869,7 +9870,7 @@
                   <a:solidFill>
                     <a:schemeClr val="tx1"/>
                   </a:solidFill>
-                  <a:latin typeface="Arial" panose="020B0604020202020204" pitchFamily="34" charset="0"/>
+                  <a:latin typeface="Arial" panose="020B0704020202020204" pitchFamily="34" charset="0"/>
                 </a:defRPr>
               </a:lvl2pPr>
               <a:lvl3pPr marL="1143000" indent="-228600" defTabSz="1095375">
@@ -9877,7 +9878,7 @@
                   <a:solidFill>
                     <a:schemeClr val="tx1"/>
                   </a:solidFill>
-                  <a:latin typeface="Arial" panose="020B0604020202020204" pitchFamily="34" charset="0"/>
+                  <a:latin typeface="Arial" panose="020B0704020202020204" pitchFamily="34" charset="0"/>
                 </a:defRPr>
               </a:lvl3pPr>
               <a:lvl4pPr marL="1600200" indent="-228600" defTabSz="1095375">
@@ -9885,7 +9886,7 @@
                   <a:solidFill>
                     <a:schemeClr val="tx1"/>
                   </a:solidFill>
-                  <a:latin typeface="Arial" panose="020B0604020202020204" pitchFamily="34" charset="0"/>
+                  <a:latin typeface="Arial" panose="020B0704020202020204" pitchFamily="34" charset="0"/>
                 </a:defRPr>
               </a:lvl4pPr>
               <a:lvl5pPr marL="2057400" indent="-228600" defTabSz="1095375">
@@ -9893,7 +9894,7 @@
                   <a:solidFill>
                     <a:schemeClr val="tx1"/>
                   </a:solidFill>
-                  <a:latin typeface="Arial" panose="020B0604020202020204" pitchFamily="34" charset="0"/>
+                  <a:latin typeface="Arial" panose="020B0704020202020204" pitchFamily="34" charset="0"/>
                 </a:defRPr>
               </a:lvl5pPr>
               <a:lvl6pPr marL="2514600" indent="-228600" defTabSz="1095375" fontAlgn="base">
@@ -9907,7 +9908,7 @@
                   <a:solidFill>
                     <a:schemeClr val="tx1"/>
                   </a:solidFill>
-                  <a:latin typeface="Arial" panose="020B0604020202020204" pitchFamily="34" charset="0"/>
+                  <a:latin typeface="Arial" panose="020B0704020202020204" pitchFamily="34" charset="0"/>
                 </a:defRPr>
               </a:lvl6pPr>
               <a:lvl7pPr marL="2971800" indent="-228600" defTabSz="1095375" fontAlgn="base">
@@ -9921,7 +9922,7 @@
                   <a:solidFill>
                     <a:schemeClr val="tx1"/>
                   </a:solidFill>
-                  <a:latin typeface="Arial" panose="020B0604020202020204" pitchFamily="34" charset="0"/>
+                  <a:latin typeface="Arial" panose="020B0704020202020204" pitchFamily="34" charset="0"/>
                 </a:defRPr>
               </a:lvl7pPr>
               <a:lvl8pPr marL="3429000" indent="-228600" defTabSz="1095375" fontAlgn="base">
@@ -9935,7 +9936,7 @@
                   <a:solidFill>
                     <a:schemeClr val="tx1"/>
                   </a:solidFill>
-                  <a:latin typeface="Arial" panose="020B0604020202020204" pitchFamily="34" charset="0"/>
+                  <a:latin typeface="Arial" panose="020B0704020202020204" pitchFamily="34" charset="0"/>
                 </a:defRPr>
               </a:lvl8pPr>
               <a:lvl9pPr marL="3886200" indent="-228600" defTabSz="1095375" fontAlgn="base">
@@ -9949,7 +9950,7 @@
                   <a:solidFill>
                     <a:schemeClr val="tx1"/>
                   </a:solidFill>
-                  <a:latin typeface="Arial" panose="020B0604020202020204" pitchFamily="34" charset="0"/>
+                  <a:latin typeface="Arial" panose="020B0704020202020204" pitchFamily="34" charset="0"/>
                 </a:defRPr>
               </a:lvl9pPr>
             </a:lstStyle>
@@ -9963,12 +9964,12 @@
               </a:pPr>
               <a:r>
                 <a:rPr lang="en-US" sz="2800" i="1">
-                  <a:cs typeface="Arial" panose="020B0604020202020204" pitchFamily="34" charset="0"/>
+                  <a:cs typeface="Arial" panose="020B0704020202020204" pitchFamily="34" charset="0"/>
                 </a:rPr>
                 <a:t>Sai số phép đo</a:t>
               </a:r>
               <a:endParaRPr lang="en-US" sz="2800" dirty="0">
-                <a:cs typeface="Arial" panose="020B0604020202020204" pitchFamily="34" charset="0"/>
+                <a:cs typeface="Arial" panose="020B0704020202020204" pitchFamily="34" charset="0"/>
               </a:endParaRPr>
             </a:p>
           </p:txBody>
@@ -10028,7 +10029,7 @@
                 <a:solidFill>
                   <a:schemeClr val="tx1"/>
                 </a:solidFill>
-                <a:latin typeface="Arial" panose="020B0604020202020204" pitchFamily="34" charset="0"/>
+                <a:latin typeface="Arial" panose="020B0704020202020204" pitchFamily="34" charset="0"/>
               </a:defRPr>
             </a:lvl1pPr>
             <a:lvl2pPr marL="742950" indent="-285750">
@@ -10040,7 +10041,7 @@
                 <a:solidFill>
                   <a:schemeClr val="tx1"/>
                 </a:solidFill>
-                <a:latin typeface="Arial" panose="020B0604020202020204" pitchFamily="34" charset="0"/>
+                <a:latin typeface="Arial" panose="020B0704020202020204" pitchFamily="34" charset="0"/>
               </a:defRPr>
             </a:lvl2pPr>
             <a:lvl3pPr marL="1143000" indent="-228600">
@@ -10052,7 +10053,7 @@
                 <a:solidFill>
                   <a:schemeClr val="tx1"/>
                 </a:solidFill>
-                <a:latin typeface="Arial" panose="020B0604020202020204" pitchFamily="34" charset="0"/>
+                <a:latin typeface="Arial" panose="020B0704020202020204" pitchFamily="34" charset="0"/>
               </a:defRPr>
             </a:lvl3pPr>
             <a:lvl4pPr marL="1600200" indent="-228600">
@@ -10064,7 +10065,7 @@
                 <a:solidFill>
                   <a:schemeClr val="tx1"/>
                 </a:solidFill>
-                <a:latin typeface="Arial" panose="020B0604020202020204" pitchFamily="34" charset="0"/>
+                <a:latin typeface="Arial" panose="020B0704020202020204" pitchFamily="34" charset="0"/>
               </a:defRPr>
             </a:lvl4pPr>
             <a:lvl5pPr marL="2057400" indent="-228600">
@@ -10076,7 +10077,7 @@
                 <a:solidFill>
                   <a:schemeClr val="tx1"/>
                 </a:solidFill>
-                <a:latin typeface="Arial" panose="020B0604020202020204" pitchFamily="34" charset="0"/>
+                <a:latin typeface="Arial" panose="020B0704020202020204" pitchFamily="34" charset="0"/>
               </a:defRPr>
             </a:lvl5pPr>
             <a:lvl6pPr marL="2514600" indent="-228600" eaLnBrk="0" fontAlgn="base" hangingPunct="0">
@@ -10091,7 +10092,7 @@
                 <a:solidFill>
                   <a:schemeClr val="tx1"/>
                 </a:solidFill>
-                <a:latin typeface="Arial" panose="020B0604020202020204" pitchFamily="34" charset="0"/>
+                <a:latin typeface="Arial" panose="020B0704020202020204" pitchFamily="34" charset="0"/>
               </a:defRPr>
             </a:lvl6pPr>
             <a:lvl7pPr marL="2971800" indent="-228600" eaLnBrk="0" fontAlgn="base" hangingPunct="0">
@@ -10106,7 +10107,7 @@
                 <a:solidFill>
                   <a:schemeClr val="tx1"/>
                 </a:solidFill>
-                <a:latin typeface="Arial" panose="020B0604020202020204" pitchFamily="34" charset="0"/>
+                <a:latin typeface="Arial" panose="020B0704020202020204" pitchFamily="34" charset="0"/>
               </a:defRPr>
             </a:lvl7pPr>
             <a:lvl8pPr marL="3429000" indent="-228600" eaLnBrk="0" fontAlgn="base" hangingPunct="0">
@@ -10121,7 +10122,7 @@
                 <a:solidFill>
                   <a:schemeClr val="tx1"/>
                 </a:solidFill>
-                <a:latin typeface="Arial" panose="020B0604020202020204" pitchFamily="34" charset="0"/>
+                <a:latin typeface="Arial" panose="020B0704020202020204" pitchFamily="34" charset="0"/>
               </a:defRPr>
             </a:lvl8pPr>
             <a:lvl9pPr marL="3886200" indent="-228600" eaLnBrk="0" fontAlgn="base" hangingPunct="0">
@@ -10136,7 +10137,7 @@
                 <a:solidFill>
                   <a:schemeClr val="tx1"/>
                 </a:solidFill>
-                <a:latin typeface="Arial" panose="020B0604020202020204" pitchFamily="34" charset="0"/>
+                <a:latin typeface="Arial" panose="020B0704020202020204" pitchFamily="34" charset="0"/>
               </a:defRPr>
             </a:lvl9pPr>
           </a:lstStyle>
@@ -10154,7 +10155,7 @@
                 <a:solidFill>
                   <a:srgbClr val="0070C0"/>
                 </a:solidFill>
-                <a:cs typeface="Arial" panose="020B0604020202020204" pitchFamily="34" charset="0"/>
+                <a:cs typeface="Arial" panose="020B0704020202020204" pitchFamily="34" charset="0"/>
               </a:rPr>
               <a:t>4. Cách ghi kết quả đo</a:t>
             </a:r>
@@ -10162,7 +10163,7 @@
               <a:solidFill>
                 <a:srgbClr val="0070C0"/>
               </a:solidFill>
-              <a:cs typeface="Arial" panose="020B0604020202020204" pitchFamily="34" charset="0"/>
+              <a:cs typeface="Arial" panose="020B0704020202020204" pitchFamily="34" charset="0"/>
             </a:endParaRPr>
           </a:p>
         </p:txBody>
@@ -10201,7 +10202,7 @@
                   <a:spcAft>
                     <a:spcPts val="0"/>
                   </a:spcAft>
-                  <a:buFont typeface="Arial" panose="020B0604020202020204" pitchFamily="34" charset="0"/>
+                  <a:buFont typeface="Arial" panose="020B0704020202020204" pitchFamily="34" charset="0"/>
                   <a:buChar char="•"/>
                 </a:pPr>
                 <a14:m>
@@ -10212,7 +10213,7 @@
                           <a:srgbClr val="000000"/>
                         </a:solidFill>
                         <a:latin typeface="Cambria Math" panose="02040503050406030204" pitchFamily="18" charset="0"/>
-                        <a:cs typeface="Arial" panose="020B0604020202020204" pitchFamily="34" charset="0"/>
+                        <a:cs typeface="Arial" panose="020B0704020202020204" pitchFamily="34" charset="0"/>
                         <a:sym typeface="Symbol" panose="05050102010706020507" pitchFamily="18" charset="2"/>
                       </a:rPr>
                       <m:t></m:t>
@@ -10223,7 +10224,7 @@
                           <a:srgbClr val="000000"/>
                         </a:solidFill>
                         <a:latin typeface="Cambria Math" panose="02040503050406030204" pitchFamily="18" charset="0"/>
-                        <a:cs typeface="Arial" panose="020B0604020202020204" pitchFamily="34" charset="0"/>
+                        <a:cs typeface="Arial" panose="020B0704020202020204" pitchFamily="34" charset="0"/>
                       </a:rPr>
                       <m:t>𝐴</m:t>
                     </m:r>
@@ -10235,7 +10236,7 @@
                       <a:srgbClr val="000000"/>
                     </a:solidFill>
                     <a:effectLst/>
-                    <a:latin typeface="Arial" panose="020B0604020202020204" pitchFamily="34" charset="0"/>
+                    <a:latin typeface="Arial" panose="020B0704020202020204" pitchFamily="34" charset="0"/>
                     <a:ea typeface="Times New Roman" panose="02020603050405020304" pitchFamily="18" charset="0"/>
                     <a:cs typeface="Times New Roman" panose="02020603050405020304" pitchFamily="18" charset="0"/>
                   </a:rPr>
@@ -10246,7 +10247,7 @@
                     <a:srgbClr val="000000"/>
                   </a:solidFill>
                   <a:effectLst/>
-                  <a:latin typeface="Arial" panose="020B0604020202020204" pitchFamily="34" charset="0"/>
+                  <a:latin typeface="Arial" panose="020B0704020202020204" pitchFamily="34" charset="0"/>
                   <a:ea typeface="Times New Roman" panose="02020603050405020304" pitchFamily="18" charset="0"/>
                   <a:cs typeface="Times New Roman" panose="02020603050405020304" pitchFamily="18" charset="0"/>
                 </a:endParaRPr>
@@ -10332,7 +10333,7 @@
                   <a:srgbClr val="000000"/>
                 </a:solidFill>
                 <a:effectLst/>
-                <a:latin typeface="Arial" panose="020B0604020202020204" pitchFamily="34" charset="0"/>
+                <a:latin typeface="Arial" panose="020B0704020202020204" pitchFamily="34" charset="0"/>
                 <a:ea typeface="Times New Roman" panose="02020603050405020304" pitchFamily="18" charset="0"/>
                 <a:cs typeface="Times New Roman" panose="02020603050405020304" pitchFamily="18" charset="0"/>
               </a:rPr>
@@ -10344,7 +10345,7 @@
                   <a:srgbClr val="000000"/>
                 </a:solidFill>
                 <a:effectLst/>
-                <a:latin typeface="Arial" panose="020B0604020202020204" pitchFamily="34" charset="0"/>
+                <a:latin typeface="Arial" panose="020B0704020202020204" pitchFamily="34" charset="0"/>
                 <a:ea typeface="Times New Roman" panose="02020603050405020304" pitchFamily="18" charset="0"/>
                 <a:cs typeface="Times New Roman" panose="02020603050405020304" pitchFamily="18" charset="0"/>
               </a:rPr>
@@ -10356,7 +10357,7 @@
                   <a:srgbClr val="000000"/>
                 </a:solidFill>
                 <a:effectLst/>
-                <a:latin typeface="Arial" panose="020B0604020202020204" pitchFamily="34" charset="0"/>
+                <a:latin typeface="Arial" panose="020B0704020202020204" pitchFamily="34" charset="0"/>
                 <a:ea typeface="Times New Roman" panose="02020603050405020304" pitchFamily="18" charset="0"/>
                 <a:cs typeface="Times New Roman" panose="02020603050405020304" pitchFamily="18" charset="0"/>
               </a:rPr>
@@ -10368,7 +10369,7 @@
                   <a:srgbClr val="000000"/>
                 </a:solidFill>
                 <a:effectLst/>
-                <a:latin typeface="Arial" panose="020B0604020202020204" pitchFamily="34" charset="0"/>
+                <a:latin typeface="Arial" panose="020B0704020202020204" pitchFamily="34" charset="0"/>
                 <a:ea typeface="Times New Roman" panose="02020603050405020304" pitchFamily="18" charset="0"/>
                 <a:cs typeface="Times New Roman" panose="02020603050405020304" pitchFamily="18" charset="0"/>
               </a:rPr>
@@ -10380,7 +10381,7 @@
                   <a:srgbClr val="000000"/>
                 </a:solidFill>
                 <a:effectLst/>
-                <a:latin typeface="Arial" panose="020B0604020202020204" pitchFamily="34" charset="0"/>
+                <a:latin typeface="Arial" panose="020B0704020202020204" pitchFamily="34" charset="0"/>
                 <a:ea typeface="Times New Roman" panose="02020603050405020304" pitchFamily="18" charset="0"/>
                 <a:cs typeface="Times New Roman" panose="02020603050405020304" pitchFamily="18" charset="0"/>
               </a:rPr>
@@ -10392,7 +10393,7 @@
                   <a:srgbClr val="000000"/>
                 </a:solidFill>
                 <a:effectLst/>
-                <a:latin typeface="Arial" panose="020B0604020202020204" pitchFamily="34" charset="0"/>
+                <a:latin typeface="Arial" panose="020B0704020202020204" pitchFamily="34" charset="0"/>
                 <a:ea typeface="Times New Roman" panose="02020603050405020304" pitchFamily="18" charset="0"/>
                 <a:cs typeface="Times New Roman" panose="02020603050405020304" pitchFamily="18" charset="0"/>
               </a:rPr>
@@ -10404,7 +10405,7 @@
                   <a:srgbClr val="000000"/>
                 </a:solidFill>
                 <a:effectLst/>
-                <a:latin typeface="Arial" panose="020B0604020202020204" pitchFamily="34" charset="0"/>
+                <a:latin typeface="Arial" panose="020B0704020202020204" pitchFamily="34" charset="0"/>
                 <a:ea typeface="Times New Roman" panose="02020603050405020304" pitchFamily="18" charset="0"/>
                 <a:cs typeface="Times New Roman" panose="02020603050405020304" pitchFamily="18" charset="0"/>
               </a:rPr>
@@ -10416,7 +10417,7 @@
                   <a:srgbClr val="000000"/>
                 </a:solidFill>
                 <a:effectLst/>
-                <a:latin typeface="Arial" panose="020B0604020202020204" pitchFamily="34" charset="0"/>
+                <a:latin typeface="Arial" panose="020B0704020202020204" pitchFamily="34" charset="0"/>
                 <a:ea typeface="Times New Roman" panose="02020603050405020304" pitchFamily="18" charset="0"/>
                 <a:cs typeface="Times New Roman" panose="02020603050405020304" pitchFamily="18" charset="0"/>
               </a:rPr>
@@ -10428,7 +10429,7 @@
                   <a:srgbClr val="000000"/>
                 </a:solidFill>
                 <a:effectLst/>
-                <a:latin typeface="Arial" panose="020B0604020202020204" pitchFamily="34" charset="0"/>
+                <a:latin typeface="Arial" panose="020B0704020202020204" pitchFamily="34" charset="0"/>
                 <a:ea typeface="Times New Roman" panose="02020603050405020304" pitchFamily="18" charset="0"/>
                 <a:cs typeface="Times New Roman" panose="02020603050405020304" pitchFamily="18" charset="0"/>
               </a:rPr>
@@ -10440,7 +10441,7 @@
                   <a:srgbClr val="000000"/>
                 </a:solidFill>
                 <a:effectLst/>
-                <a:latin typeface="Arial" panose="020B0604020202020204" pitchFamily="34" charset="0"/>
+                <a:latin typeface="Arial" panose="020B0704020202020204" pitchFamily="34" charset="0"/>
                 <a:ea typeface="Times New Roman" panose="02020603050405020304" pitchFamily="18" charset="0"/>
                 <a:cs typeface="Times New Roman" panose="02020603050405020304" pitchFamily="18" charset="0"/>
               </a:rPr>
@@ -10452,7 +10453,7 @@
                   <a:srgbClr val="000000"/>
                 </a:solidFill>
                 <a:effectLst/>
-                <a:latin typeface="Arial" panose="020B0604020202020204" pitchFamily="34" charset="0"/>
+                <a:latin typeface="Arial" panose="020B0704020202020204" pitchFamily="34" charset="0"/>
                 <a:ea typeface="Times New Roman" panose="02020603050405020304" pitchFamily="18" charset="0"/>
                 <a:cs typeface="Times New Roman" panose="02020603050405020304" pitchFamily="18" charset="0"/>
               </a:rPr>
@@ -10476,7 +10477,7 @@
               <a:spcAft>
                 <a:spcPts val="0"/>
               </a:spcAft>
-              <a:buFont typeface="Arial" panose="020B0604020202020204" pitchFamily="34" charset="0"/>
+              <a:buFont typeface="Arial" panose="020B0704020202020204" pitchFamily="34" charset="0"/>
               <a:buChar char="•"/>
             </a:pPr>
             <a:r>
@@ -10485,7 +10486,7 @@
                   <a:srgbClr val="000000"/>
                 </a:solidFill>
                 <a:effectLst/>
-                <a:latin typeface="Arial" panose="020B0604020202020204" pitchFamily="34" charset="0"/>
+                <a:latin typeface="Arial" panose="020B0704020202020204" pitchFamily="34" charset="0"/>
                 <a:ea typeface="Times New Roman" panose="02020603050405020304" pitchFamily="18" charset="0"/>
                 <a:cs typeface="Times New Roman" panose="02020603050405020304" pitchFamily="18" charset="0"/>
               </a:rPr>
@@ -10497,7 +10498,7 @@
                   <a:srgbClr val="000000"/>
                 </a:solidFill>
                 <a:effectLst/>
-                <a:latin typeface="Arial" panose="020B0604020202020204" pitchFamily="34" charset="0"/>
+                <a:latin typeface="Arial" panose="020B0704020202020204" pitchFamily="34" charset="0"/>
                 <a:ea typeface="Times New Roman" panose="02020603050405020304" pitchFamily="18" charset="0"/>
                 <a:cs typeface="Times New Roman" panose="02020603050405020304" pitchFamily="18" charset="0"/>
               </a:rPr>
@@ -10509,7 +10510,7 @@
                   <a:srgbClr val="000000"/>
                 </a:solidFill>
                 <a:effectLst/>
-                <a:latin typeface="Arial" panose="020B0604020202020204" pitchFamily="34" charset="0"/>
+                <a:latin typeface="Arial" panose="020B0704020202020204" pitchFamily="34" charset="0"/>
                 <a:ea typeface="Times New Roman" panose="02020603050405020304" pitchFamily="18" charset="0"/>
                 <a:cs typeface="Times New Roman" panose="02020603050405020304" pitchFamily="18" charset="0"/>
               </a:rPr>
@@ -10521,7 +10522,7 @@
                   <a:srgbClr val="000000"/>
                 </a:solidFill>
                 <a:effectLst/>
-                <a:latin typeface="Arial" panose="020B0604020202020204" pitchFamily="34" charset="0"/>
+                <a:latin typeface="Arial" panose="020B0704020202020204" pitchFamily="34" charset="0"/>
                 <a:ea typeface="Times New Roman" panose="02020603050405020304" pitchFamily="18" charset="0"/>
                 <a:cs typeface="Times New Roman" panose="02020603050405020304" pitchFamily="18" charset="0"/>
               </a:rPr>
@@ -10533,7 +10534,7 @@
                   <a:srgbClr val="000000"/>
                 </a:solidFill>
                 <a:effectLst/>
-                <a:latin typeface="Arial" panose="020B0604020202020204" pitchFamily="34" charset="0"/>
+                <a:latin typeface="Arial" panose="020B0704020202020204" pitchFamily="34" charset="0"/>
                 <a:ea typeface="Times New Roman" panose="02020603050405020304" pitchFamily="18" charset="0"/>
                 <a:cs typeface="Times New Roman" panose="02020603050405020304" pitchFamily="18" charset="0"/>
               </a:rPr>
@@ -10545,7 +10546,7 @@
                   <a:srgbClr val="000000"/>
                 </a:solidFill>
                 <a:effectLst/>
-                <a:latin typeface="Arial" panose="020B0604020202020204" pitchFamily="34" charset="0"/>
+                <a:latin typeface="Arial" panose="020B0704020202020204" pitchFamily="34" charset="0"/>
                 <a:ea typeface="Times New Roman" panose="02020603050405020304" pitchFamily="18" charset="0"/>
                 <a:cs typeface="Times New Roman" panose="02020603050405020304" pitchFamily="18" charset="0"/>
               </a:rPr>
@@ -10557,7 +10558,7 @@
                   <a:srgbClr val="000000"/>
                 </a:solidFill>
                 <a:effectLst/>
-                <a:latin typeface="Arial" panose="020B0604020202020204" pitchFamily="34" charset="0"/>
+                <a:latin typeface="Arial" panose="020B0704020202020204" pitchFamily="34" charset="0"/>
                 <a:ea typeface="Times New Roman" panose="02020603050405020304" pitchFamily="18" charset="0"/>
                 <a:cs typeface="Times New Roman" panose="02020603050405020304" pitchFamily="18" charset="0"/>
               </a:rPr>
@@ -10569,7 +10570,7 @@
                   <a:srgbClr val="000000"/>
                 </a:solidFill>
                 <a:effectLst/>
-                <a:latin typeface="Arial" panose="020B0604020202020204" pitchFamily="34" charset="0"/>
+                <a:latin typeface="Arial" panose="020B0704020202020204" pitchFamily="34" charset="0"/>
                 <a:ea typeface="Times New Roman" panose="02020603050405020304" pitchFamily="18" charset="0"/>
                 <a:cs typeface="Times New Roman" panose="02020603050405020304" pitchFamily="18" charset="0"/>
               </a:rPr>
@@ -10581,7 +10582,7 @@
                   <a:srgbClr val="000000"/>
                 </a:solidFill>
                 <a:effectLst/>
-                <a:latin typeface="Arial" panose="020B0604020202020204" pitchFamily="34" charset="0"/>
+                <a:latin typeface="Arial" panose="020B0704020202020204" pitchFamily="34" charset="0"/>
                 <a:ea typeface="Times New Roman" panose="02020603050405020304" pitchFamily="18" charset="0"/>
                 <a:cs typeface="Times New Roman" panose="02020603050405020304" pitchFamily="18" charset="0"/>
               </a:rPr>
@@ -10593,7 +10594,7 @@
                   <a:srgbClr val="000000"/>
                 </a:solidFill>
                 <a:effectLst/>
-                <a:latin typeface="Arial" panose="020B0604020202020204" pitchFamily="34" charset="0"/>
+                <a:latin typeface="Arial" panose="020B0704020202020204" pitchFamily="34" charset="0"/>
                 <a:ea typeface="Times New Roman" panose="02020603050405020304" pitchFamily="18" charset="0"/>
                 <a:cs typeface="Times New Roman" panose="02020603050405020304" pitchFamily="18" charset="0"/>
               </a:rPr>
@@ -10605,7 +10606,7 @@
                   <a:srgbClr val="000000"/>
                 </a:solidFill>
                 <a:effectLst/>
-                <a:latin typeface="Arial" panose="020B0604020202020204" pitchFamily="34" charset="0"/>
+                <a:latin typeface="Arial" panose="020B0704020202020204" pitchFamily="34" charset="0"/>
                 <a:ea typeface="Times New Roman" panose="02020603050405020304" pitchFamily="18" charset="0"/>
                 <a:cs typeface="Times New Roman" panose="02020603050405020304" pitchFamily="18" charset="0"/>
               </a:rPr>
@@ -10617,7 +10618,7 @@
                   <a:srgbClr val="000000"/>
                 </a:solidFill>
                 <a:effectLst/>
-                <a:latin typeface="Arial" panose="020B0604020202020204" pitchFamily="34" charset="0"/>
+                <a:latin typeface="Arial" panose="020B0704020202020204" pitchFamily="34" charset="0"/>
                 <a:ea typeface="Times New Roman" panose="02020603050405020304" pitchFamily="18" charset="0"/>
                 <a:cs typeface="Times New Roman" panose="02020603050405020304" pitchFamily="18" charset="0"/>
               </a:rPr>
@@ -10629,7 +10630,7 @@
                   <a:srgbClr val="000000"/>
                 </a:solidFill>
                 <a:effectLst/>
-                <a:latin typeface="Arial" panose="020B0604020202020204" pitchFamily="34" charset="0"/>
+                <a:latin typeface="Arial" panose="020B0704020202020204" pitchFamily="34" charset="0"/>
                 <a:ea typeface="Times New Roman" panose="02020603050405020304" pitchFamily="18" charset="0"/>
                 <a:cs typeface="Times New Roman" panose="02020603050405020304" pitchFamily="18" charset="0"/>
               </a:rPr>
@@ -10641,7 +10642,7 @@
                   <a:srgbClr val="000000"/>
                 </a:solidFill>
                 <a:effectLst/>
-                <a:latin typeface="Arial" panose="020B0604020202020204" pitchFamily="34" charset="0"/>
+                <a:latin typeface="Arial" panose="020B0704020202020204" pitchFamily="34" charset="0"/>
                 <a:ea typeface="Times New Roman" panose="02020603050405020304" pitchFamily="18" charset="0"/>
                 <a:cs typeface="Times New Roman" panose="02020603050405020304" pitchFamily="18" charset="0"/>
               </a:rPr>
@@ -10653,7 +10654,7 @@
                   <a:srgbClr val="000000"/>
                 </a:solidFill>
                 <a:effectLst/>
-                <a:latin typeface="Arial" panose="020B0604020202020204" pitchFamily="34" charset="0"/>
+                <a:latin typeface="Arial" panose="020B0704020202020204" pitchFamily="34" charset="0"/>
                 <a:ea typeface="Times New Roman" panose="02020603050405020304" pitchFamily="18" charset="0"/>
                 <a:cs typeface="Times New Roman" panose="02020603050405020304" pitchFamily="18" charset="0"/>
               </a:rPr>
@@ -10665,7 +10666,7 @@
                   <a:srgbClr val="000000"/>
                 </a:solidFill>
                 <a:effectLst/>
-                <a:latin typeface="Arial" panose="020B0604020202020204" pitchFamily="34" charset="0"/>
+                <a:latin typeface="Arial" panose="020B0704020202020204" pitchFamily="34" charset="0"/>
                 <a:ea typeface="Times New Roman" panose="02020603050405020304" pitchFamily="18" charset="0"/>
                 <a:cs typeface="Times New Roman" panose="02020603050405020304" pitchFamily="18" charset="0"/>
               </a:rPr>
@@ -10677,7 +10678,7 @@
                   <a:srgbClr val="000000"/>
                 </a:solidFill>
                 <a:effectLst/>
-                <a:latin typeface="Arial" panose="020B0604020202020204" pitchFamily="34" charset="0"/>
+                <a:latin typeface="Arial" panose="020B0704020202020204" pitchFamily="34" charset="0"/>
                 <a:ea typeface="Times New Roman" panose="02020603050405020304" pitchFamily="18" charset="0"/>
                 <a:cs typeface="Times New Roman" panose="02020603050405020304" pitchFamily="18" charset="0"/>
               </a:rPr>
@@ -10689,7 +10690,7 @@
                   <a:srgbClr val="000000"/>
                 </a:solidFill>
                 <a:effectLst/>
-                <a:latin typeface="Arial" panose="020B0604020202020204" pitchFamily="34" charset="0"/>
+                <a:latin typeface="Arial" panose="020B0704020202020204" pitchFamily="34" charset="0"/>
                 <a:ea typeface="Times New Roman" panose="02020603050405020304" pitchFamily="18" charset="0"/>
                 <a:cs typeface="Times New Roman" panose="02020603050405020304" pitchFamily="18" charset="0"/>
               </a:rPr>
@@ -10701,7 +10702,7 @@
                   <a:srgbClr val="000000"/>
                 </a:solidFill>
                 <a:effectLst/>
-                <a:latin typeface="Arial" panose="020B0604020202020204" pitchFamily="34" charset="0"/>
+                <a:latin typeface="Arial" panose="020B0704020202020204" pitchFamily="34" charset="0"/>
                 <a:ea typeface="Times New Roman" panose="02020603050405020304" pitchFamily="18" charset="0"/>
                 <a:cs typeface="Times New Roman" panose="02020603050405020304" pitchFamily="18" charset="0"/>
               </a:rPr>
@@ -10713,7 +10714,7 @@
                   <a:srgbClr val="000000"/>
                 </a:solidFill>
                 <a:effectLst/>
-                <a:latin typeface="Arial" panose="020B0604020202020204" pitchFamily="34" charset="0"/>
+                <a:latin typeface="Arial" panose="020B0704020202020204" pitchFamily="34" charset="0"/>
                 <a:ea typeface="Times New Roman" panose="02020603050405020304" pitchFamily="18" charset="0"/>
                 <a:cs typeface="Times New Roman" panose="02020603050405020304" pitchFamily="18" charset="0"/>
               </a:rPr>
@@ -10725,7 +10726,7 @@
                   <a:srgbClr val="000000"/>
                 </a:solidFill>
                 <a:effectLst/>
-                <a:latin typeface="Arial" panose="020B0604020202020204" pitchFamily="34" charset="0"/>
+                <a:latin typeface="Arial" panose="020B0704020202020204" pitchFamily="34" charset="0"/>
                 <a:ea typeface="Times New Roman" panose="02020603050405020304" pitchFamily="18" charset="0"/>
                 <a:cs typeface="Times New Roman" panose="02020603050405020304" pitchFamily="18" charset="0"/>
               </a:rPr>
@@ -10737,7 +10738,7 @@
                   <a:srgbClr val="000000"/>
                 </a:solidFill>
                 <a:effectLst/>
-                <a:latin typeface="Arial" panose="020B0604020202020204" pitchFamily="34" charset="0"/>
+                <a:latin typeface="Arial" panose="020B0704020202020204" pitchFamily="34" charset="0"/>
                 <a:ea typeface="Times New Roman" panose="02020603050405020304" pitchFamily="18" charset="0"/>
                 <a:cs typeface="Times New Roman" panose="02020603050405020304" pitchFamily="18" charset="0"/>
               </a:rPr>
@@ -10749,7 +10750,7 @@
                   <a:srgbClr val="000000"/>
                 </a:solidFill>
                 <a:effectLst/>
-                <a:latin typeface="Arial" panose="020B0604020202020204" pitchFamily="34" charset="0"/>
+                <a:latin typeface="Arial" panose="020B0704020202020204" pitchFamily="34" charset="0"/>
                 <a:ea typeface="Times New Roman" panose="02020603050405020304" pitchFamily="18" charset="0"/>
                 <a:cs typeface="Times New Roman" panose="02020603050405020304" pitchFamily="18" charset="0"/>
               </a:rPr>
@@ -10761,7 +10762,7 @@
                   <a:srgbClr val="000000"/>
                 </a:solidFill>
                 <a:effectLst/>
-                <a:latin typeface="Arial" panose="020B0604020202020204" pitchFamily="34" charset="0"/>
+                <a:latin typeface="Arial" panose="020B0704020202020204" pitchFamily="34" charset="0"/>
                 <a:ea typeface="Times New Roman" panose="02020603050405020304" pitchFamily="18" charset="0"/>
                 <a:cs typeface="Times New Roman" panose="02020603050405020304" pitchFamily="18" charset="0"/>
               </a:rPr>
@@ -10773,7 +10774,7 @@
                   <a:srgbClr val="000000"/>
                 </a:solidFill>
                 <a:effectLst/>
-                <a:latin typeface="Arial" panose="020B0604020202020204" pitchFamily="34" charset="0"/>
+                <a:latin typeface="Arial" panose="020B0704020202020204" pitchFamily="34" charset="0"/>
                 <a:ea typeface="Times New Roman" panose="02020603050405020304" pitchFamily="18" charset="0"/>
                 <a:cs typeface="Times New Roman" panose="02020603050405020304" pitchFamily="18" charset="0"/>
               </a:rPr>
@@ -10785,7 +10786,7 @@
                   <a:srgbClr val="000000"/>
                 </a:solidFill>
                 <a:effectLst/>
-                <a:latin typeface="Arial" panose="020B0604020202020204" pitchFamily="34" charset="0"/>
+                <a:latin typeface="Arial" panose="020B0704020202020204" pitchFamily="34" charset="0"/>
                 <a:ea typeface="Times New Roman" panose="02020603050405020304" pitchFamily="18" charset="0"/>
                 <a:cs typeface="Times New Roman" panose="02020603050405020304" pitchFamily="18" charset="0"/>
               </a:rPr>
@@ -10797,7 +10798,7 @@
                   <a:srgbClr val="000000"/>
                 </a:solidFill>
                 <a:effectLst/>
-                <a:latin typeface="Arial" panose="020B0604020202020204" pitchFamily="34" charset="0"/>
+                <a:latin typeface="Arial" panose="020B0704020202020204" pitchFamily="34" charset="0"/>
                 <a:ea typeface="Times New Roman" panose="02020603050405020304" pitchFamily="18" charset="0"/>
                 <a:cs typeface="Times New Roman" panose="02020603050405020304" pitchFamily="18" charset="0"/>
               </a:rPr>
@@ -10809,7 +10810,7 @@
                   <a:srgbClr val="000000"/>
                 </a:solidFill>
                 <a:effectLst/>
-                <a:latin typeface="Arial" panose="020B0604020202020204" pitchFamily="34" charset="0"/>
+                <a:latin typeface="Arial" panose="020B0704020202020204" pitchFamily="34" charset="0"/>
                 <a:ea typeface="Times New Roman" panose="02020603050405020304" pitchFamily="18" charset="0"/>
                 <a:cs typeface="Times New Roman" panose="02020603050405020304" pitchFamily="18" charset="0"/>
               </a:rPr>
@@ -10821,7 +10822,7 @@
                   <a:srgbClr val="000000"/>
                 </a:solidFill>
                 <a:effectLst/>
-                <a:latin typeface="Arial" panose="020B0604020202020204" pitchFamily="34" charset="0"/>
+                <a:latin typeface="Arial" panose="020B0704020202020204" pitchFamily="34" charset="0"/>
                 <a:ea typeface="Times New Roman" panose="02020603050405020304" pitchFamily="18" charset="0"/>
                 <a:cs typeface="Times New Roman" panose="02020603050405020304" pitchFamily="18" charset="0"/>
               </a:rPr>
@@ -10833,7 +10834,7 @@
                   <a:srgbClr val="000000"/>
                 </a:solidFill>
                 <a:effectLst/>
-                <a:latin typeface="Arial" panose="020B0604020202020204" pitchFamily="34" charset="0"/>
+                <a:latin typeface="Arial" panose="020B0704020202020204" pitchFamily="34" charset="0"/>
                 <a:ea typeface="Times New Roman" panose="02020603050405020304" pitchFamily="18" charset="0"/>
                 <a:cs typeface="Times New Roman" panose="02020603050405020304" pitchFamily="18" charset="0"/>
               </a:rPr>
@@ -10844,7 +10845,7 @@
                 <a:srgbClr val="000000"/>
               </a:solidFill>
               <a:effectLst/>
-              <a:latin typeface="Arial" panose="020B0604020202020204" pitchFamily="34" charset="0"/>
+              <a:latin typeface="Arial" panose="020B0704020202020204" pitchFamily="34" charset="0"/>
               <a:ea typeface="Times New Roman" panose="02020603050405020304" pitchFamily="18" charset="0"/>
               <a:cs typeface="Times New Roman" panose="02020603050405020304" pitchFamily="18" charset="0"/>
             </a:endParaRPr>
@@ -10860,7 +10861,7 @@
               <a:spcAft>
                 <a:spcPts val="0"/>
               </a:spcAft>
-              <a:buFont typeface="Arial" panose="020B0604020202020204" pitchFamily="34" charset="0"/>
+              <a:buFont typeface="Arial" panose="020B0704020202020204" pitchFamily="34" charset="0"/>
               <a:buChar char="•"/>
             </a:pPr>
             <a:r>
@@ -10869,7 +10870,7 @@
                   <a:srgbClr val="000000"/>
                 </a:solidFill>
                 <a:effectLst/>
-                <a:latin typeface="Arial" panose="020B0604020202020204" pitchFamily="34" charset="0"/>
+                <a:latin typeface="Arial" panose="020B0704020202020204" pitchFamily="34" charset="0"/>
                 <a:ea typeface="Times New Roman" panose="02020603050405020304" pitchFamily="18" charset="0"/>
                 <a:cs typeface="Times New Roman" panose="02020603050405020304" pitchFamily="18" charset="0"/>
               </a:rPr>
@@ -10881,7 +10882,7 @@
                   <a:srgbClr val="000000"/>
                 </a:solidFill>
                 <a:effectLst/>
-                <a:latin typeface="Arial" panose="020B0604020202020204" pitchFamily="34" charset="0"/>
+                <a:latin typeface="Arial" panose="020B0704020202020204" pitchFamily="34" charset="0"/>
                 <a:ea typeface="Times New Roman" panose="02020603050405020304" pitchFamily="18" charset="0"/>
                 <a:cs typeface="Times New Roman" panose="02020603050405020304" pitchFamily="18" charset="0"/>
               </a:rPr>
@@ -10893,7 +10894,7 @@
                   <a:srgbClr val="000000"/>
                 </a:solidFill>
                 <a:effectLst/>
-                <a:latin typeface="Arial" panose="020B0604020202020204" pitchFamily="34" charset="0"/>
+                <a:latin typeface="Arial" panose="020B0704020202020204" pitchFamily="34" charset="0"/>
                 <a:ea typeface="Times New Roman" panose="02020603050405020304" pitchFamily="18" charset="0"/>
                 <a:cs typeface="Times New Roman" panose="02020603050405020304" pitchFamily="18" charset="0"/>
               </a:rPr>
@@ -10905,7 +10906,7 @@
                   <a:srgbClr val="000000"/>
                 </a:solidFill>
                 <a:effectLst/>
-                <a:latin typeface="Arial" panose="020B0604020202020204" pitchFamily="34" charset="0"/>
+                <a:latin typeface="Arial" panose="020B0704020202020204" pitchFamily="34" charset="0"/>
                 <a:ea typeface="Times New Roman" panose="02020603050405020304" pitchFamily="18" charset="0"/>
                 <a:cs typeface="Times New Roman" panose="02020603050405020304" pitchFamily="18" charset="0"/>
               </a:rPr>
@@ -10917,7 +10918,7 @@
                   <a:srgbClr val="000000"/>
                 </a:solidFill>
                 <a:effectLst/>
-                <a:latin typeface="Arial" panose="020B0604020202020204" pitchFamily="34" charset="0"/>
+                <a:latin typeface="Arial" panose="020B0704020202020204" pitchFamily="34" charset="0"/>
                 <a:ea typeface="Times New Roman" panose="02020603050405020304" pitchFamily="18" charset="0"/>
                 <a:cs typeface="Times New Roman" panose="02020603050405020304" pitchFamily="18" charset="0"/>
               </a:rPr>
@@ -10929,7 +10930,7 @@
                   <a:srgbClr val="000000"/>
                 </a:solidFill>
                 <a:effectLst/>
-                <a:latin typeface="Arial" panose="020B0604020202020204" pitchFamily="34" charset="0"/>
+                <a:latin typeface="Arial" panose="020B0704020202020204" pitchFamily="34" charset="0"/>
                 <a:ea typeface="Times New Roman" panose="02020603050405020304" pitchFamily="18" charset="0"/>
                 <a:cs typeface="Times New Roman" panose="02020603050405020304" pitchFamily="18" charset="0"/>
               </a:rPr>
@@ -10941,7 +10942,7 @@
                   <a:srgbClr val="000000"/>
                 </a:solidFill>
                 <a:effectLst/>
-                <a:latin typeface="Arial" panose="020B0604020202020204" pitchFamily="34" charset="0"/>
+                <a:latin typeface="Arial" panose="020B0704020202020204" pitchFamily="34" charset="0"/>
                 <a:ea typeface="Times New Roman" panose="02020603050405020304" pitchFamily="18" charset="0"/>
                 <a:cs typeface="Times New Roman" panose="02020603050405020304" pitchFamily="18" charset="0"/>
               </a:rPr>
@@ -10953,7 +10954,7 @@
                   <a:srgbClr val="000000"/>
                 </a:solidFill>
                 <a:effectLst/>
-                <a:latin typeface="Arial" panose="020B0604020202020204" pitchFamily="34" charset="0"/>
+                <a:latin typeface="Arial" panose="020B0704020202020204" pitchFamily="34" charset="0"/>
                 <a:ea typeface="Times New Roman" panose="02020603050405020304" pitchFamily="18" charset="0"/>
                 <a:cs typeface="Times New Roman" panose="02020603050405020304" pitchFamily="18" charset="0"/>
               </a:rPr>
@@ -10965,7 +10966,7 @@
                   <a:srgbClr val="000000"/>
                 </a:solidFill>
                 <a:effectLst/>
-                <a:latin typeface="Arial" panose="020B0604020202020204" pitchFamily="34" charset="0"/>
+                <a:latin typeface="Arial" panose="020B0704020202020204" pitchFamily="34" charset="0"/>
                 <a:ea typeface="Times New Roman" panose="02020603050405020304" pitchFamily="18" charset="0"/>
                 <a:cs typeface="Times New Roman" panose="02020603050405020304" pitchFamily="18" charset="0"/>
               </a:rPr>
@@ -10977,7 +10978,7 @@
                   <a:srgbClr val="000000"/>
                 </a:solidFill>
                 <a:effectLst/>
-                <a:latin typeface="Arial" panose="020B0604020202020204" pitchFamily="34" charset="0"/>
+                <a:latin typeface="Arial" panose="020B0704020202020204" pitchFamily="34" charset="0"/>
                 <a:ea typeface="Times New Roman" panose="02020603050405020304" pitchFamily="18" charset="0"/>
                 <a:cs typeface="Times New Roman" panose="02020603050405020304" pitchFamily="18" charset="0"/>
               </a:rPr>
@@ -10989,7 +10990,7 @@
                   <a:srgbClr val="000000"/>
                 </a:solidFill>
                 <a:effectLst/>
-                <a:latin typeface="Arial" panose="020B0604020202020204" pitchFamily="34" charset="0"/>
+                <a:latin typeface="Arial" panose="020B0704020202020204" pitchFamily="34" charset="0"/>
                 <a:ea typeface="Times New Roman" panose="02020603050405020304" pitchFamily="18" charset="0"/>
                 <a:cs typeface="Times New Roman" panose="02020603050405020304" pitchFamily="18" charset="0"/>
               </a:rPr>
@@ -11001,7 +11002,7 @@
                   <a:srgbClr val="000000"/>
                 </a:solidFill>
                 <a:effectLst/>
-                <a:latin typeface="Arial" panose="020B0604020202020204" pitchFamily="34" charset="0"/>
+                <a:latin typeface="Arial" panose="020B0704020202020204" pitchFamily="34" charset="0"/>
                 <a:ea typeface="Times New Roman" panose="02020603050405020304" pitchFamily="18" charset="0"/>
                 <a:cs typeface="Times New Roman" panose="02020603050405020304" pitchFamily="18" charset="0"/>
               </a:rPr>
@@ -11013,7 +11014,7 @@
                   <a:srgbClr val="000000"/>
                 </a:solidFill>
                 <a:effectLst/>
-                <a:latin typeface="Arial" panose="020B0604020202020204" pitchFamily="34" charset="0"/>
+                <a:latin typeface="Arial" panose="020B0704020202020204" pitchFamily="34" charset="0"/>
                 <a:ea typeface="Times New Roman" panose="02020603050405020304" pitchFamily="18" charset="0"/>
                 <a:cs typeface="Times New Roman" panose="02020603050405020304" pitchFamily="18" charset="0"/>
               </a:rPr>
@@ -11025,7 +11026,7 @@
                   <a:srgbClr val="000000"/>
                 </a:solidFill>
                 <a:effectLst/>
-                <a:latin typeface="Arial" panose="020B0604020202020204" pitchFamily="34" charset="0"/>
+                <a:latin typeface="Arial" panose="020B0704020202020204" pitchFamily="34" charset="0"/>
                 <a:ea typeface="Times New Roman" panose="02020603050405020304" pitchFamily="18" charset="0"/>
                 <a:cs typeface="Times New Roman" panose="02020603050405020304" pitchFamily="18" charset="0"/>
               </a:rPr>
@@ -11037,7 +11038,7 @@
                   <a:srgbClr val="000000"/>
                 </a:solidFill>
                 <a:effectLst/>
-                <a:latin typeface="Arial" panose="020B0604020202020204" pitchFamily="34" charset="0"/>
+                <a:latin typeface="Arial" panose="020B0704020202020204" pitchFamily="34" charset="0"/>
                 <a:ea typeface="Times New Roman" panose="02020603050405020304" pitchFamily="18" charset="0"/>
                 <a:cs typeface="Times New Roman" panose="02020603050405020304" pitchFamily="18" charset="0"/>
               </a:rPr>
@@ -11049,7 +11050,7 @@
                   <a:srgbClr val="000000"/>
                 </a:solidFill>
                 <a:effectLst/>
-                <a:latin typeface="Arial" panose="020B0604020202020204" pitchFamily="34" charset="0"/>
+                <a:latin typeface="Arial" panose="020B0704020202020204" pitchFamily="34" charset="0"/>
                 <a:ea typeface="Times New Roman" panose="02020603050405020304" pitchFamily="18" charset="0"/>
                 <a:cs typeface="Times New Roman" panose="02020603050405020304" pitchFamily="18" charset="0"/>
               </a:rPr>
@@ -11061,7 +11062,7 @@
                   <a:srgbClr val="000000"/>
                 </a:solidFill>
                 <a:effectLst/>
-                <a:latin typeface="Arial" panose="020B0604020202020204" pitchFamily="34" charset="0"/>
+                <a:latin typeface="Arial" panose="020B0704020202020204" pitchFamily="34" charset="0"/>
                 <a:ea typeface="Times New Roman" panose="02020603050405020304" pitchFamily="18" charset="0"/>
                 <a:cs typeface="Times New Roman" panose="02020603050405020304" pitchFamily="18" charset="0"/>
               </a:rPr>
@@ -11073,7 +11074,7 @@
                   <a:srgbClr val="000000"/>
                 </a:solidFill>
                 <a:effectLst/>
-                <a:latin typeface="Arial" panose="020B0604020202020204" pitchFamily="34" charset="0"/>
+                <a:latin typeface="Arial" panose="020B0704020202020204" pitchFamily="34" charset="0"/>
                 <a:ea typeface="Times New Roman" panose="02020603050405020304" pitchFamily="18" charset="0"/>
                 <a:cs typeface="Times New Roman" panose="02020603050405020304" pitchFamily="18" charset="0"/>
               </a:rPr>
@@ -11085,7 +11086,7 @@
                   <a:srgbClr val="000000"/>
                 </a:solidFill>
                 <a:effectLst/>
-                <a:latin typeface="Arial" panose="020B0604020202020204" pitchFamily="34" charset="0"/>
+                <a:latin typeface="Arial" panose="020B0704020202020204" pitchFamily="34" charset="0"/>
                 <a:ea typeface="Times New Roman" panose="02020603050405020304" pitchFamily="18" charset="0"/>
                 <a:cs typeface="Times New Roman" panose="02020603050405020304" pitchFamily="18" charset="0"/>
               </a:rPr>
@@ -11097,7 +11098,7 @@
                   <a:srgbClr val="000000"/>
                 </a:solidFill>
                 <a:effectLst/>
-                <a:latin typeface="Arial" panose="020B0604020202020204" pitchFamily="34" charset="0"/>
+                <a:latin typeface="Arial" panose="020B0704020202020204" pitchFamily="34" charset="0"/>
                 <a:ea typeface="Times New Roman" panose="02020603050405020304" pitchFamily="18" charset="0"/>
                 <a:cs typeface="Times New Roman" panose="02020603050405020304" pitchFamily="18" charset="0"/>
               </a:rPr>
@@ -11109,7 +11110,7 @@
                   <a:srgbClr val="000000"/>
                 </a:solidFill>
                 <a:effectLst/>
-                <a:latin typeface="Arial" panose="020B0604020202020204" pitchFamily="34" charset="0"/>
+                <a:latin typeface="Arial" panose="020B0704020202020204" pitchFamily="34" charset="0"/>
                 <a:ea typeface="Times New Roman" panose="02020603050405020304" pitchFamily="18" charset="0"/>
                 <a:cs typeface="Times New Roman" panose="02020603050405020304" pitchFamily="18" charset="0"/>
               </a:rPr>
@@ -11121,7 +11122,7 @@
                   <a:srgbClr val="000000"/>
                 </a:solidFill>
                 <a:effectLst/>
-                <a:latin typeface="Arial" panose="020B0604020202020204" pitchFamily="34" charset="0"/>
+                <a:latin typeface="Arial" panose="020B0704020202020204" pitchFamily="34" charset="0"/>
                 <a:ea typeface="Times New Roman" panose="02020603050405020304" pitchFamily="18" charset="0"/>
                 <a:cs typeface="Times New Roman" panose="02020603050405020304" pitchFamily="18" charset="0"/>
               </a:rPr>
@@ -11133,7 +11134,7 @@
                   <a:srgbClr val="000000"/>
                 </a:solidFill>
                 <a:effectLst/>
-                <a:latin typeface="Arial" panose="020B0604020202020204" pitchFamily="34" charset="0"/>
+                <a:latin typeface="Arial" panose="020B0704020202020204" pitchFamily="34" charset="0"/>
                 <a:ea typeface="Times New Roman" panose="02020603050405020304" pitchFamily="18" charset="0"/>
                 <a:cs typeface="Times New Roman" panose="02020603050405020304" pitchFamily="18" charset="0"/>
               </a:rPr>
@@ -11145,7 +11146,7 @@
                   <a:srgbClr val="000000"/>
                 </a:solidFill>
                 <a:effectLst/>
-                <a:latin typeface="Arial" panose="020B0604020202020204" pitchFamily="34" charset="0"/>
+                <a:latin typeface="Arial" panose="020B0704020202020204" pitchFamily="34" charset="0"/>
                 <a:ea typeface="Times New Roman" panose="02020603050405020304" pitchFamily="18" charset="0"/>
                 <a:cs typeface="Times New Roman" panose="02020603050405020304" pitchFamily="18" charset="0"/>
               </a:rPr>
@@ -11157,7 +11158,7 @@
                   <a:srgbClr val="000000"/>
                 </a:solidFill>
                 <a:effectLst/>
-                <a:latin typeface="Arial" panose="020B0604020202020204" pitchFamily="34" charset="0"/>
+                <a:latin typeface="Arial" panose="020B0704020202020204" pitchFamily="34" charset="0"/>
                 <a:ea typeface="Times New Roman" panose="02020603050405020304" pitchFamily="18" charset="0"/>
                 <a:cs typeface="Times New Roman" panose="02020603050405020304" pitchFamily="18" charset="0"/>
               </a:rPr>
@@ -11169,7 +11170,7 @@
                   <a:srgbClr val="000000"/>
                 </a:solidFill>
                 <a:effectLst/>
-                <a:latin typeface="Arial" panose="020B0604020202020204" pitchFamily="34" charset="0"/>
+                <a:latin typeface="Arial" panose="020B0704020202020204" pitchFamily="34" charset="0"/>
                 <a:ea typeface="Times New Roman" panose="02020603050405020304" pitchFamily="18" charset="0"/>
                 <a:cs typeface="Times New Roman" panose="02020603050405020304" pitchFamily="18" charset="0"/>
               </a:rPr>
@@ -11181,7 +11182,7 @@
                   <a:srgbClr val="000000"/>
                 </a:solidFill>
                 <a:effectLst/>
-                <a:latin typeface="Arial" panose="020B0604020202020204" pitchFamily="34" charset="0"/>
+                <a:latin typeface="Arial" panose="020B0704020202020204" pitchFamily="34" charset="0"/>
                 <a:ea typeface="Times New Roman" panose="02020603050405020304" pitchFamily="18" charset="0"/>
                 <a:cs typeface="Times New Roman" panose="02020603050405020304" pitchFamily="18" charset="0"/>
               </a:rPr>
@@ -11193,7 +11194,7 @@
                   <a:srgbClr val="000000"/>
                 </a:solidFill>
                 <a:effectLst/>
-                <a:latin typeface="Arial" panose="020B0604020202020204" pitchFamily="34" charset="0"/>
+                <a:latin typeface="Arial" panose="020B0704020202020204" pitchFamily="34" charset="0"/>
                 <a:ea typeface="Times New Roman" panose="02020603050405020304" pitchFamily="18" charset="0"/>
                 <a:cs typeface="Times New Roman" panose="02020603050405020304" pitchFamily="18" charset="0"/>
               </a:rPr>
@@ -11205,7 +11206,7 @@
                   <a:srgbClr val="000000"/>
                 </a:solidFill>
                 <a:effectLst/>
-                <a:latin typeface="Arial" panose="020B0604020202020204" pitchFamily="34" charset="0"/>
+                <a:latin typeface="Arial" panose="020B0704020202020204" pitchFamily="34" charset="0"/>
                 <a:ea typeface="Times New Roman" panose="02020603050405020304" pitchFamily="18" charset="0"/>
                 <a:cs typeface="Times New Roman" panose="02020603050405020304" pitchFamily="18" charset="0"/>
               </a:rPr>
@@ -11217,7 +11218,7 @@
                   <a:srgbClr val="000000"/>
                 </a:solidFill>
                 <a:effectLst/>
-                <a:latin typeface="Arial" panose="020B0604020202020204" pitchFamily="34" charset="0"/>
+                <a:latin typeface="Arial" panose="020B0704020202020204" pitchFamily="34" charset="0"/>
                 <a:ea typeface="Times New Roman" panose="02020603050405020304" pitchFamily="18" charset="0"/>
                 <a:cs typeface="Times New Roman" panose="02020603050405020304" pitchFamily="18" charset="0"/>
               </a:rPr>
@@ -11229,7 +11230,7 @@
                   <a:srgbClr val="000000"/>
                 </a:solidFill>
                 <a:effectLst/>
-                <a:latin typeface="Arial" panose="020B0604020202020204" pitchFamily="34" charset="0"/>
+                <a:latin typeface="Arial" panose="020B0704020202020204" pitchFamily="34" charset="0"/>
                 <a:ea typeface="Times New Roman" panose="02020603050405020304" pitchFamily="18" charset="0"/>
                 <a:cs typeface="Times New Roman" panose="02020603050405020304" pitchFamily="18" charset="0"/>
               </a:rPr>
@@ -11241,7 +11242,7 @@
                   <a:srgbClr val="000000"/>
                 </a:solidFill>
                 <a:effectLst/>
-                <a:latin typeface="Arial" panose="020B0604020202020204" pitchFamily="34" charset="0"/>
+                <a:latin typeface="Arial" panose="020B0704020202020204" pitchFamily="34" charset="0"/>
                 <a:ea typeface="Times New Roman" panose="02020603050405020304" pitchFamily="18" charset="0"/>
                 <a:cs typeface="Times New Roman" panose="02020603050405020304" pitchFamily="18" charset="0"/>
               </a:rPr>
@@ -11253,7 +11254,7 @@
                   <a:srgbClr val="000000"/>
                 </a:solidFill>
                 <a:effectLst/>
-                <a:latin typeface="Arial" panose="020B0604020202020204" pitchFamily="34" charset="0"/>
+                <a:latin typeface="Arial" panose="020B0704020202020204" pitchFamily="34" charset="0"/>
                 <a:ea typeface="Times New Roman" panose="02020603050405020304" pitchFamily="18" charset="0"/>
                 <a:cs typeface="Times New Roman" panose="02020603050405020304" pitchFamily="18" charset="0"/>
               </a:rPr>
@@ -11265,7 +11266,7 @@
                   <a:srgbClr val="000000"/>
                 </a:solidFill>
                 <a:effectLst/>
-                <a:latin typeface="Arial" panose="020B0604020202020204" pitchFamily="34" charset="0"/>
+                <a:latin typeface="Arial" panose="020B0704020202020204" pitchFamily="34" charset="0"/>
                 <a:ea typeface="Times New Roman" panose="02020603050405020304" pitchFamily="18" charset="0"/>
                 <a:cs typeface="Times New Roman" panose="02020603050405020304" pitchFamily="18" charset="0"/>
               </a:rPr>
@@ -11277,7 +11278,7 @@
                   <a:srgbClr val="000000"/>
                 </a:solidFill>
                 <a:effectLst/>
-                <a:latin typeface="Arial" panose="020B0604020202020204" pitchFamily="34" charset="0"/>
+                <a:latin typeface="Arial" panose="020B0704020202020204" pitchFamily="34" charset="0"/>
                 <a:ea typeface="Times New Roman" panose="02020603050405020304" pitchFamily="18" charset="0"/>
                 <a:cs typeface="Times New Roman" panose="02020603050405020304" pitchFamily="18" charset="0"/>
               </a:rPr>
@@ -11289,7 +11290,7 @@
                   <a:srgbClr val="000000"/>
                 </a:solidFill>
                 <a:effectLst/>
-                <a:latin typeface="Arial" panose="020B0604020202020204" pitchFamily="34" charset="0"/>
+                <a:latin typeface="Arial" panose="020B0704020202020204" pitchFamily="34" charset="0"/>
                 <a:ea typeface="Times New Roman" panose="02020603050405020304" pitchFamily="18" charset="0"/>
                 <a:cs typeface="Times New Roman" panose="02020603050405020304" pitchFamily="18" charset="0"/>
               </a:rPr>
@@ -11301,7 +11302,7 @@
                   <a:srgbClr val="000000"/>
                 </a:solidFill>
                 <a:effectLst/>
-                <a:latin typeface="Arial" panose="020B0604020202020204" pitchFamily="34" charset="0"/>
+                <a:latin typeface="Arial" panose="020B0704020202020204" pitchFamily="34" charset="0"/>
                 <a:ea typeface="Times New Roman" panose="02020603050405020304" pitchFamily="18" charset="0"/>
                 <a:cs typeface="Times New Roman" panose="02020603050405020304" pitchFamily="18" charset="0"/>
               </a:rPr>
@@ -11313,7 +11314,7 @@
                   <a:srgbClr val="000000"/>
                 </a:solidFill>
                 <a:effectLst/>
-                <a:latin typeface="Arial" panose="020B0604020202020204" pitchFamily="34" charset="0"/>
+                <a:latin typeface="Arial" panose="020B0704020202020204" pitchFamily="34" charset="0"/>
                 <a:ea typeface="Times New Roman" panose="02020603050405020304" pitchFamily="18" charset="0"/>
                 <a:cs typeface="Times New Roman" panose="02020603050405020304" pitchFamily="18" charset="0"/>
               </a:rPr>
@@ -11325,7 +11326,7 @@
                   <a:srgbClr val="000000"/>
                 </a:solidFill>
                 <a:effectLst/>
-                <a:latin typeface="Arial" panose="020B0604020202020204" pitchFamily="34" charset="0"/>
+                <a:latin typeface="Arial" panose="020B0704020202020204" pitchFamily="34" charset="0"/>
                 <a:ea typeface="Times New Roman" panose="02020603050405020304" pitchFamily="18" charset="0"/>
                 <a:cs typeface="Times New Roman" panose="02020603050405020304" pitchFamily="18" charset="0"/>
               </a:rPr>
@@ -11337,7 +11338,7 @@
                   <a:srgbClr val="000000"/>
                 </a:solidFill>
                 <a:effectLst/>
-                <a:latin typeface="Arial" panose="020B0604020202020204" pitchFamily="34" charset="0"/>
+                <a:latin typeface="Arial" panose="020B0704020202020204" pitchFamily="34" charset="0"/>
                 <a:ea typeface="Times New Roman" panose="02020603050405020304" pitchFamily="18" charset="0"/>
                 <a:cs typeface="Times New Roman" panose="02020603050405020304" pitchFamily="18" charset="0"/>
               </a:rPr>
@@ -11455,7 +11456,7 @@
                                 <a:srgbClr val="000000"/>
                               </a:solidFill>
                               <a:latin typeface="Cambria Math" panose="02040503050406030204"/>
-                              <a:cs typeface="Arial" panose="020B0604020202020204" pitchFamily="34" charset="0"/>
+                              <a:cs typeface="Arial" panose="020B0704020202020204" pitchFamily="34" charset="0"/>
                             </a:rPr>
                           </m:ctrlPr>
                         </m:dPr>
@@ -11469,7 +11470,7 @@
                                     <a:srgbClr val="000000"/>
                                   </a:solidFill>
                                   <a:latin typeface="Cambria Math" panose="02040503050406030204"/>
-                                  <a:cs typeface="Arial" panose="020B0604020202020204" pitchFamily="34" charset="0"/>
+                                  <a:cs typeface="Arial" panose="020B0704020202020204" pitchFamily="34" charset="0"/>
                                 </a:rPr>
                               </m:ctrlPr>
                             </m:accPr>
@@ -11480,7 +11481,7 @@
                                     <a:srgbClr val="000000"/>
                                   </a:solidFill>
                                   <a:latin typeface="Cambria Math" panose="02040503050406030204" pitchFamily="18" charset="0"/>
-                                  <a:cs typeface="Arial" panose="020B0604020202020204" pitchFamily="34" charset="0"/>
+                                  <a:cs typeface="Arial" panose="020B0704020202020204" pitchFamily="34" charset="0"/>
                                 </a:rPr>
                                 <m:t>𝐴</m:t>
                               </m:r>
@@ -11494,9 +11495,9 @@
                               <a:solidFill>
                                 <a:srgbClr val="000000"/>
                               </a:solidFill>
-                              <a:latin typeface="Arial" panose="020B0604020202020204" pitchFamily="34" charset="0"/>
+                              <a:latin typeface="Arial" panose="020B0704020202020204" pitchFamily="34" charset="0"/>
                               <a:ea typeface="Times New Roman" panose="02020603050405020304" pitchFamily="18" charset="0"/>
-                              <a:cs typeface="Arial" panose="020B0604020202020204" pitchFamily="34" charset="0"/>
+                              <a:cs typeface="Arial" panose="020B0704020202020204" pitchFamily="34" charset="0"/>
                             </a:rPr>
                             <m:t> </m:t>
                           </m:r>
@@ -11508,9 +11509,9 @@
                               <a:solidFill>
                                 <a:srgbClr val="000000"/>
                               </a:solidFill>
-                              <a:latin typeface="Arial" panose="020B0604020202020204" pitchFamily="34" charset="0"/>
+                              <a:latin typeface="Arial" panose="020B0704020202020204" pitchFamily="34" charset="0"/>
                               <a:ea typeface="Times New Roman" panose="02020603050405020304" pitchFamily="18" charset="0"/>
-                              <a:cs typeface="Arial" panose="020B0604020202020204" pitchFamily="34" charset="0"/>
+                              <a:cs typeface="Arial" panose="020B0704020202020204" pitchFamily="34" charset="0"/>
                             </a:rPr>
                             <m:t>−</m:t>
                           </m:r>
@@ -11523,7 +11524,7 @@
                                 <a:srgbClr val="000000"/>
                               </a:solidFill>
                               <a:latin typeface="Cambria Math" panose="02040503050406030204" pitchFamily="18" charset="0"/>
-                              <a:cs typeface="Arial" panose="020B0604020202020204" pitchFamily="34" charset="0"/>
+                              <a:cs typeface="Arial" panose="020B0704020202020204" pitchFamily="34" charset="0"/>
                               <a:sym typeface="Symbol" panose="05050102010706020507" pitchFamily="18" charset="2"/>
                             </a:rPr>
                             <m:t> </m:t>
@@ -11534,7 +11535,7 @@
                                 <a:srgbClr val="000000"/>
                               </a:solidFill>
                               <a:latin typeface="Cambria Math" panose="02040503050406030204" pitchFamily="18" charset="0"/>
-                              <a:cs typeface="Arial" panose="020B0604020202020204" pitchFamily="34" charset="0"/>
+                              <a:cs typeface="Arial" panose="020B0704020202020204" pitchFamily="34" charset="0"/>
                               <a:sym typeface="Symbol" panose="05050102010706020507" pitchFamily="18" charset="2"/>
                             </a:rPr>
                             <m:t></m:t>
@@ -11545,7 +11546,7 @@
                                 <a:srgbClr val="000000"/>
                               </a:solidFill>
                               <a:latin typeface="Cambria Math" panose="02040503050406030204" pitchFamily="18" charset="0"/>
-                              <a:cs typeface="Arial" panose="020B0604020202020204" pitchFamily="34" charset="0"/>
+                              <a:cs typeface="Arial" panose="020B0704020202020204" pitchFamily="34" charset="0"/>
                             </a:rPr>
                             <m:t>𝐴</m:t>
                           </m:r>
@@ -11557,7 +11558,7 @@
                             <a:srgbClr val="000000"/>
                           </a:solidFill>
                           <a:latin typeface="Cambria Math" panose="02040503050406030204" pitchFamily="18" charset="0"/>
-                          <a:cs typeface="Arial" panose="020B0604020202020204" pitchFamily="34" charset="0"/>
+                          <a:cs typeface="Arial" panose="020B0704020202020204" pitchFamily="34" charset="0"/>
                         </a:rPr>
                         <m:t> </m:t>
                       </m:r>
@@ -11567,7 +11568,7 @@
                             <a:srgbClr val="000000"/>
                           </a:solidFill>
                           <a:latin typeface="Cambria Math" panose="02040503050406030204" pitchFamily="18" charset="0"/>
-                          <a:cs typeface="Arial" panose="020B0604020202020204" pitchFamily="34" charset="0"/>
+                          <a:cs typeface="Arial" panose="020B0704020202020204" pitchFamily="34" charset="0"/>
                           <a:sym typeface="Symbol" panose="05050102010706020507" pitchFamily="18" charset="2"/>
                         </a:rPr>
                         <m:t></m:t>
@@ -11578,7 +11579,7 @@
                             <a:srgbClr val="000000"/>
                           </a:solidFill>
                           <a:latin typeface="Cambria Math" panose="02040503050406030204" pitchFamily="18" charset="0"/>
-                          <a:cs typeface="Arial" panose="020B0604020202020204" pitchFamily="34" charset="0"/>
+                          <a:cs typeface="Arial" panose="020B0704020202020204" pitchFamily="34" charset="0"/>
                           <a:sym typeface="Symbol" panose="05050102010706020507" pitchFamily="18" charset="2"/>
                         </a:rPr>
                         <m:t> </m:t>
@@ -11589,7 +11590,7 @@
                             <a:srgbClr val="000000"/>
                           </a:solidFill>
                           <a:latin typeface="Cambria Math" panose="02040503050406030204" pitchFamily="18" charset="0"/>
-                          <a:cs typeface="Arial" panose="020B0604020202020204" pitchFamily="34" charset="0"/>
+                          <a:cs typeface="Arial" panose="020B0704020202020204" pitchFamily="34" charset="0"/>
                         </a:rPr>
                         <m:t>𝐴</m:t>
                       </m:r>
@@ -11599,7 +11600,7 @@
                             <a:srgbClr val="000000"/>
                           </a:solidFill>
                           <a:latin typeface="Cambria Math" panose="02040503050406030204" pitchFamily="18" charset="0"/>
-                          <a:cs typeface="Arial" panose="020B0604020202020204" pitchFamily="34" charset="0"/>
+                          <a:cs typeface="Arial" panose="020B0704020202020204" pitchFamily="34" charset="0"/>
                           <a:sym typeface="Symbol" panose="05050102010706020507" pitchFamily="18" charset="2"/>
                         </a:rPr>
                         <m:t></m:t>
@@ -11611,7 +11612,7 @@
                       <a:solidFill>
                         <a:srgbClr val="000000"/>
                       </a:solidFill>
-                      <a:cs typeface="Arial" panose="020B0604020202020204" pitchFamily="34" charset="0"/>
+                      <a:cs typeface="Arial" panose="020B0704020202020204" pitchFamily="34" charset="0"/>
                     </a:rPr>
                     <a:t>(</a:t>
                   </a:r>
@@ -11626,7 +11627,7 @@
                                 <a:srgbClr val="000000"/>
                               </a:solidFill>
                               <a:latin typeface="Cambria Math" panose="02040503050406030204"/>
-                              <a:cs typeface="Arial" panose="020B0604020202020204" pitchFamily="34" charset="0"/>
+                              <a:cs typeface="Arial" panose="020B0704020202020204" pitchFamily="34" charset="0"/>
                             </a:rPr>
                           </m:ctrlPr>
                         </m:accPr>
@@ -11637,7 +11638,7 @@
                                 <a:srgbClr val="000000"/>
                               </a:solidFill>
                               <a:latin typeface="Cambria Math" panose="02040503050406030204" pitchFamily="18" charset="0"/>
-                              <a:cs typeface="Arial" panose="020B0604020202020204" pitchFamily="34" charset="0"/>
+                              <a:cs typeface="Arial" panose="020B0704020202020204" pitchFamily="34" charset="0"/>
                             </a:rPr>
                             <m:t>𝐴</m:t>
                           </m:r>
@@ -11651,9 +11652,9 @@
                         <a:srgbClr val="000000"/>
                       </a:solidFill>
                       <a:effectLst/>
-                      <a:latin typeface="Arial" panose="020B0604020202020204" pitchFamily="34" charset="0"/>
+                      <a:latin typeface="Arial" panose="020B0704020202020204" pitchFamily="34" charset="0"/>
                       <a:ea typeface="Times New Roman" panose="02020603050405020304" pitchFamily="18" charset="0"/>
-                      <a:cs typeface="Arial" panose="020B0604020202020204" pitchFamily="34" charset="0"/>
+                      <a:cs typeface="Arial" panose="020B0704020202020204" pitchFamily="34" charset="0"/>
                     </a:rPr>
                     <a:t> +</a:t>
                   </a:r>
@@ -11662,7 +11663,7 @@
                       <a:solidFill>
                         <a:srgbClr val="000000"/>
                       </a:solidFill>
-                      <a:cs typeface="Arial" panose="020B0604020202020204" pitchFamily="34" charset="0"/>
+                      <a:cs typeface="Arial" panose="020B0704020202020204" pitchFamily="34" charset="0"/>
                       <a:sym typeface="Symbol" panose="05050102010706020507" pitchFamily="18" charset="2"/>
                     </a:rPr>
                     <a:t> </a:t>
@@ -11675,7 +11676,7 @@
                             <a:srgbClr val="000000"/>
                           </a:solidFill>
                           <a:latin typeface="Cambria Math" panose="02040503050406030204" pitchFamily="18" charset="0"/>
-                          <a:cs typeface="Arial" panose="020B0604020202020204" pitchFamily="34" charset="0"/>
+                          <a:cs typeface="Arial" panose="020B0704020202020204" pitchFamily="34" charset="0"/>
                           <a:sym typeface="Symbol" panose="05050102010706020507" pitchFamily="18" charset="2"/>
                         </a:rPr>
                         <m:t></m:t>
@@ -11686,7 +11687,7 @@
                             <a:srgbClr val="000000"/>
                           </a:solidFill>
                           <a:latin typeface="Cambria Math" panose="02040503050406030204" pitchFamily="18" charset="0"/>
-                          <a:cs typeface="Arial" panose="020B0604020202020204" pitchFamily="34" charset="0"/>
+                          <a:cs typeface="Arial" panose="020B0704020202020204" pitchFamily="34" charset="0"/>
                         </a:rPr>
                         <m:t>𝐴</m:t>
                       </m:r>
@@ -11696,7 +11697,7 @@
                             <a:srgbClr val="000000"/>
                           </a:solidFill>
                           <a:latin typeface="Cambria Math" panose="02040503050406030204" pitchFamily="18" charset="0"/>
-                          <a:cs typeface="Arial" panose="020B0604020202020204" pitchFamily="34" charset="0"/>
+                          <a:cs typeface="Arial" panose="020B0704020202020204" pitchFamily="34" charset="0"/>
                         </a:rPr>
                         <m:t>)</m:t>
                       </m:r>
@@ -11772,16 +11773,16 @@
                   <a:srgbClr val="000000"/>
                 </a:solidFill>
                 <a:effectLst/>
-                <a:latin typeface="Arial" panose="020B0604020202020204" pitchFamily="34" charset="0"/>
+                <a:latin typeface="Arial" panose="020B0704020202020204" pitchFamily="34" charset="0"/>
                 <a:ea typeface="Times New Roman" panose="02020603050405020304" pitchFamily="18" charset="0"/>
-                <a:cs typeface="Arial" panose="020B0604020202020204" pitchFamily="34" charset="0"/>
+                <a:cs typeface="Arial" panose="020B0704020202020204" pitchFamily="34" charset="0"/>
               </a:rPr>
               <a:t>hoặc</a:t>
             </a:r>
             <a:endParaRPr lang="vi-VN" sz="2500">
-              <a:latin typeface="Arial" panose="020B0604020202020204" pitchFamily="34" charset="0"/>
+              <a:latin typeface="Arial" panose="020B0704020202020204" pitchFamily="34" charset="0"/>
               <a:ea typeface="Calibri" panose="020F0502020204030204" pitchFamily="34" charset="0"/>
-              <a:cs typeface="Arial" panose="020B0604020202020204" pitchFamily="34" charset="0"/>
+              <a:cs typeface="Arial" panose="020B0704020202020204" pitchFamily="34" charset="0"/>
             </a:endParaRPr>
           </a:p>
         </p:txBody>
@@ -11887,7 +11888,7 @@
                             <a:srgbClr val="000000"/>
                           </a:solidFill>
                           <a:latin typeface="Cambria Math" panose="02040503050406030204" pitchFamily="18" charset="0"/>
-                          <a:cs typeface="Arial" panose="020B0604020202020204" pitchFamily="34" charset="0"/>
+                          <a:cs typeface="Arial" panose="020B0704020202020204" pitchFamily="34" charset="0"/>
                         </a:rPr>
                         <m:t>𝐴</m:t>
                       </m:r>
@@ -11897,7 +11898,7 @@
                             <a:srgbClr val="000000"/>
                           </a:solidFill>
                           <a:latin typeface="Cambria Math" panose="02040503050406030204" pitchFamily="18" charset="0"/>
-                          <a:cs typeface="Arial" panose="020B0604020202020204" pitchFamily="34" charset="0"/>
+                          <a:cs typeface="Arial" panose="020B0704020202020204" pitchFamily="34" charset="0"/>
                         </a:rPr>
                         <m:t> </m:t>
                       </m:r>
@@ -11909,9 +11910,9 @@
                         <a:srgbClr val="000000"/>
                       </a:solidFill>
                       <a:effectLst/>
-                      <a:latin typeface="Arial" panose="020B0604020202020204" pitchFamily="34" charset="0"/>
+                      <a:latin typeface="Arial" panose="020B0704020202020204" pitchFamily="34" charset="0"/>
                       <a:ea typeface="Times New Roman" panose="02020603050405020304" pitchFamily="18" charset="0"/>
-                      <a:cs typeface="Arial" panose="020B0604020202020204" pitchFamily="34" charset="0"/>
+                      <a:cs typeface="Arial" panose="020B0704020202020204" pitchFamily="34" charset="0"/>
                     </a:rPr>
                     <a:t>=</a:t>
                   </a:r>
@@ -11920,7 +11921,7 @@
                       <a:solidFill>
                         <a:srgbClr val="000000"/>
                       </a:solidFill>
-                      <a:cs typeface="Arial" panose="020B0604020202020204" pitchFamily="34" charset="0"/>
+                      <a:cs typeface="Arial" panose="020B0704020202020204" pitchFamily="34" charset="0"/>
                     </a:rPr>
                     <a:t> </a:t>
                   </a:r>
@@ -11935,7 +11936,7 @@
                                 <a:srgbClr val="000000"/>
                               </a:solidFill>
                               <a:latin typeface="Cambria Math" panose="02040503050406030204"/>
-                              <a:cs typeface="Arial" panose="020B0604020202020204" pitchFamily="34" charset="0"/>
+                              <a:cs typeface="Arial" panose="020B0704020202020204" pitchFamily="34" charset="0"/>
                             </a:rPr>
                           </m:ctrlPr>
                         </m:accPr>
@@ -11946,7 +11947,7 @@
                                 <a:srgbClr val="000000"/>
                               </a:solidFill>
                               <a:latin typeface="Cambria Math" panose="02040503050406030204" pitchFamily="18" charset="0"/>
-                              <a:cs typeface="Arial" panose="020B0604020202020204" pitchFamily="34" charset="0"/>
+                              <a:cs typeface="Arial" panose="020B0704020202020204" pitchFamily="34" charset="0"/>
                             </a:rPr>
                             <m:t>𝐴</m:t>
                           </m:r>
@@ -11960,9 +11961,9 @@
                         <a:srgbClr val="000000"/>
                       </a:solidFill>
                       <a:effectLst/>
-                      <a:latin typeface="Arial" panose="020B0604020202020204" pitchFamily="34" charset="0"/>
+                      <a:latin typeface="Arial" panose="020B0704020202020204" pitchFamily="34" charset="0"/>
                       <a:ea typeface="Times New Roman" panose="02020603050405020304" pitchFamily="18" charset="0"/>
-                      <a:cs typeface="Arial" panose="020B0604020202020204" pitchFamily="34" charset="0"/>
+                      <a:cs typeface="Arial" panose="020B0704020202020204" pitchFamily="34" charset="0"/>
                     </a:rPr>
                     <a:t> </a:t>
                   </a:r>
@@ -11972,9 +11973,9 @@
                         <a:srgbClr val="000000"/>
                       </a:solidFill>
                       <a:effectLst/>
-                      <a:latin typeface="Arial" panose="020B0604020202020204" pitchFamily="34" charset="0"/>
+                      <a:latin typeface="Arial" panose="020B0704020202020204" pitchFamily="34" charset="0"/>
                       <a:ea typeface="Times New Roman" panose="02020603050405020304" pitchFamily="18" charset="0"/>
-                      <a:cs typeface="Arial" panose="020B0604020202020204" pitchFamily="34" charset="0"/>
+                      <a:cs typeface="Arial" panose="020B0704020202020204" pitchFamily="34" charset="0"/>
                       <a:sym typeface="Symbol" panose="05050102010706020507" pitchFamily="18" charset="2"/>
                     </a:rPr>
                     <a:t></a:t>
@@ -11984,7 +11985,7 @@
                       <a:solidFill>
                         <a:srgbClr val="000000"/>
                       </a:solidFill>
-                      <a:cs typeface="Arial" panose="020B0604020202020204" pitchFamily="34" charset="0"/>
+                      <a:cs typeface="Arial" panose="020B0704020202020204" pitchFamily="34" charset="0"/>
                       <a:sym typeface="Symbol" panose="05050102010706020507" pitchFamily="18" charset="2"/>
                     </a:rPr>
                     <a:t> </a:t>
@@ -11997,7 +11998,7 @@
                             <a:srgbClr val="000000"/>
                           </a:solidFill>
                           <a:latin typeface="Cambria Math" panose="02040503050406030204" pitchFamily="18" charset="0"/>
-                          <a:cs typeface="Arial" panose="020B0604020202020204" pitchFamily="34" charset="0"/>
+                          <a:cs typeface="Arial" panose="020B0704020202020204" pitchFamily="34" charset="0"/>
                           <a:sym typeface="Symbol" panose="05050102010706020507" pitchFamily="18" charset="2"/>
                         </a:rPr>
                         <m:t></m:t>
@@ -12008,7 +12009,7 @@
                             <a:srgbClr val="000000"/>
                           </a:solidFill>
                           <a:latin typeface="Cambria Math" panose="02040503050406030204" pitchFamily="18" charset="0"/>
-                          <a:cs typeface="Arial" panose="020B0604020202020204" pitchFamily="34" charset="0"/>
+                          <a:cs typeface="Arial" panose="020B0704020202020204" pitchFamily="34" charset="0"/>
                         </a:rPr>
                         <m:t>𝐴</m:t>
                       </m:r>
@@ -12095,7 +12096,7 @@
                   <a:srgbClr val="000000"/>
                 </a:solidFill>
                 <a:effectLst/>
-                <a:latin typeface="Arial" panose="020B0604020202020204" pitchFamily="34" charset="0"/>
+                <a:latin typeface="Arial" panose="020B0704020202020204" pitchFamily="34" charset="0"/>
                 <a:ea typeface="Times New Roman" panose="02020603050405020304" pitchFamily="18" charset="0"/>
                 <a:cs typeface="Times New Roman" panose="02020603050405020304" pitchFamily="18" charset="0"/>
               </a:rPr>
@@ -12144,7 +12145,7 @@
                   <a:spcAft>
                     <a:spcPts val="0"/>
                   </a:spcAft>
-                  <a:buFont typeface="Arial" panose="020B0604020202020204" pitchFamily="34" charset="0"/>
+                  <a:buFont typeface="Arial" panose="020B0704020202020204" pitchFamily="34" charset="0"/>
                   <a:buChar char="•"/>
                 </a:pPr>
                 <a14:m>
@@ -12159,7 +12160,7 @@
                             </a:solidFill>
                             <a:effectLst/>
                             <a:latin typeface="Cambria Math" panose="02040503050406030204"/>
-                            <a:cs typeface="Arial" panose="020B0604020202020204" pitchFamily="34" charset="0"/>
+                            <a:cs typeface="Arial" panose="020B0704020202020204" pitchFamily="34" charset="0"/>
                           </a:rPr>
                         </m:ctrlPr>
                       </m:accPr>
@@ -12171,7 +12172,7 @@
                             </a:solidFill>
                             <a:effectLst/>
                             <a:latin typeface="Cambria Math" panose="02040503050406030204" pitchFamily="18" charset="0"/>
-                            <a:cs typeface="Arial" panose="020B0604020202020204" pitchFamily="34" charset="0"/>
+                            <a:cs typeface="Arial" panose="020B0704020202020204" pitchFamily="34" charset="0"/>
                           </a:rPr>
                           <m:t>𝐴</m:t>
                         </m:r>
@@ -12185,7 +12186,7 @@
                       <a:srgbClr val="000000"/>
                     </a:solidFill>
                     <a:effectLst/>
-                    <a:latin typeface="Arial" panose="020B0604020202020204" pitchFamily="34" charset="0"/>
+                    <a:latin typeface="Arial" panose="020B0704020202020204" pitchFamily="34" charset="0"/>
                     <a:ea typeface="Times New Roman" panose="02020603050405020304" pitchFamily="18" charset="0"/>
                     <a:cs typeface="Times New Roman" panose="02020603050405020304" pitchFamily="18" charset="0"/>
                   </a:rPr>
@@ -12199,7 +12200,7 @@
                           <a:srgbClr val="000000"/>
                         </a:solidFill>
                         <a:latin typeface="Cambria Math" panose="02040503050406030204" pitchFamily="18" charset="0"/>
-                        <a:cs typeface="Arial" panose="020B0604020202020204" pitchFamily="34" charset="0"/>
+                        <a:cs typeface="Arial" panose="020B0704020202020204" pitchFamily="34" charset="0"/>
                         <a:sym typeface="Symbol" panose="05050102010706020507" pitchFamily="18" charset="2"/>
                       </a:rPr>
                       <m:t></m:t>
@@ -12210,7 +12211,7 @@
                           <a:srgbClr val="000000"/>
                         </a:solidFill>
                         <a:latin typeface="Cambria Math" panose="02040503050406030204" pitchFamily="18" charset="0"/>
-                        <a:cs typeface="Arial" panose="020B0604020202020204" pitchFamily="34" charset="0"/>
+                        <a:cs typeface="Arial" panose="020B0704020202020204" pitchFamily="34" charset="0"/>
                       </a:rPr>
                       <m:t>𝐴</m:t>
                     </m:r>
@@ -12221,7 +12222,7 @@
                     <a:solidFill>
                       <a:srgbClr val="000000"/>
                     </a:solidFill>
-                    <a:latin typeface="Arial" panose="020B0604020202020204" pitchFamily="34" charset="0"/>
+                    <a:latin typeface="Arial" panose="020B0704020202020204" pitchFamily="34" charset="0"/>
                     <a:ea typeface="Times New Roman" panose="02020603050405020304" pitchFamily="18" charset="0"/>
                     <a:cs typeface="Times New Roman" panose="02020603050405020304" pitchFamily="18" charset="0"/>
                   </a:rPr>
@@ -12233,7 +12234,7 @@
                       <a:srgbClr val="000000"/>
                     </a:solidFill>
                     <a:effectLst/>
-                    <a:latin typeface="Arial" panose="020B0604020202020204" pitchFamily="34" charset="0"/>
+                    <a:latin typeface="Arial" panose="020B0704020202020204" pitchFamily="34" charset="0"/>
                     <a:ea typeface="Times New Roman" panose="02020603050405020304" pitchFamily="18" charset="0"/>
                     <a:cs typeface="Times New Roman" panose="02020603050405020304" pitchFamily="18" charset="0"/>
                   </a:rPr>
@@ -12244,7 +12245,7 @@
                     <a:srgbClr val="000000"/>
                   </a:solidFill>
                   <a:effectLst/>
-                  <a:latin typeface="Arial" panose="020B0604020202020204" pitchFamily="34" charset="0"/>
+                  <a:latin typeface="Arial" panose="020B0704020202020204" pitchFamily="34" charset="0"/>
                   <a:ea typeface="Times New Roman" panose="02020603050405020304" pitchFamily="18" charset="0"/>
                   <a:cs typeface="Times New Roman" panose="02020603050405020304" pitchFamily="18" charset="0"/>
                 </a:endParaRPr>
@@ -12272,7 +12273,7 @@
               <a:blipFill rotWithShape="1">
                 <a:blip r:embed="rId7"/>
                 <a:stretch>
-                  <a:fillRect l="-3" t="-4" r="3" b="-1135"/>
+                  <a:fillRect l="-3" t="-4" r="3" b="-11910"/>
                 </a:stretch>
               </a:blipFill>
             </p:spPr>
@@ -12754,14 +12755,14 @@
               </a:pPr>
               <a:r>
                 <a:rPr lang="en-US" sz="2600" b="1">
-                  <a:latin typeface="Arial" panose="020B0604020202020204" pitchFamily="34" charset="0"/>
-                  <a:cs typeface="Arial" panose="020B0604020202020204" pitchFamily="34" charset="0"/>
+                  <a:latin typeface="Arial" panose="020B0704020202020204" pitchFamily="34" charset="0"/>
+                  <a:cs typeface="Arial" panose="020B0704020202020204" pitchFamily="34" charset="0"/>
                 </a:rPr>
                 <a:t>Hoạt động</a:t>
               </a:r>
               <a:endParaRPr lang="en-US" sz="2600" b="1">
-                <a:latin typeface="Arial" panose="020B0604020202020204" pitchFamily="34" charset="0"/>
-                <a:cs typeface="Arial" panose="020B0604020202020204" pitchFamily="34" charset="0"/>
+                <a:latin typeface="Arial" panose="020B0704020202020204" pitchFamily="34" charset="0"/>
+                <a:cs typeface="Arial" panose="020B0704020202020204" pitchFamily="34" charset="0"/>
               </a:endParaRPr>
             </a:p>
           </p:txBody>
@@ -12866,9 +12867,9 @@
                   <a:srgbClr val="000000"/>
                 </a:solidFill>
                 <a:effectLst/>
-                <a:latin typeface="Arial" panose="020B0604020202020204" pitchFamily="34" charset="0"/>
+                <a:latin typeface="Arial" panose="020B0704020202020204" pitchFamily="34" charset="0"/>
                 <a:ea typeface="Times New Roman" panose="02020603050405020304" pitchFamily="18" charset="0"/>
-                <a:cs typeface="Arial" panose="020B0604020202020204" pitchFamily="34" charset="0"/>
+                <a:cs typeface="Arial" panose="020B0704020202020204" pitchFamily="34" charset="0"/>
               </a:rPr>
               <a:t>- Dùng các dụng cụ:</a:t>
             </a:r>
@@ -12877,14 +12878,14 @@
                 <a:srgbClr val="000000"/>
               </a:solidFill>
               <a:effectLst/>
-              <a:latin typeface="Arial" panose="020B0604020202020204" pitchFamily="34" charset="0"/>
+              <a:latin typeface="Arial" panose="020B0704020202020204" pitchFamily="34" charset="0"/>
               <a:ea typeface="Times New Roman" panose="02020603050405020304" pitchFamily="18" charset="0"/>
-              <a:cs typeface="Arial" panose="020B0604020202020204" pitchFamily="34" charset="0"/>
+              <a:cs typeface="Arial" panose="020B0704020202020204" pitchFamily="34" charset="0"/>
             </a:endParaRPr>
           </a:p>
           <a:p>
             <a:pPr marL="800100" lvl="1" indent="-342900">
-              <a:buFont typeface="Arial" panose="020B0604020202020204" pitchFamily="34" charset="0"/>
+              <a:buFont typeface="Arial" panose="020B0704020202020204" pitchFamily="34" charset="0"/>
               <a:buChar char="•"/>
             </a:pPr>
             <a:r>
@@ -12893,9 +12894,9 @@
                   <a:srgbClr val="000000"/>
                 </a:solidFill>
                 <a:effectLst/>
-                <a:latin typeface="Arial" panose="020B0604020202020204" pitchFamily="34" charset="0"/>
+                <a:latin typeface="Arial" panose="020B0704020202020204" pitchFamily="34" charset="0"/>
                 <a:ea typeface="Times New Roman" panose="02020603050405020304" pitchFamily="18" charset="0"/>
-                <a:cs typeface="Arial" panose="020B0604020202020204" pitchFamily="34" charset="0"/>
+                <a:cs typeface="Arial" panose="020B0704020202020204" pitchFamily="34" charset="0"/>
               </a:rPr>
               <a:t>Một thước có ĐCNN là 1 mm</a:t>
             </a:r>
@@ -12904,14 +12905,14 @@
                 <a:srgbClr val="000000"/>
               </a:solidFill>
               <a:effectLst/>
-              <a:latin typeface="Arial" panose="020B0604020202020204" pitchFamily="34" charset="0"/>
+              <a:latin typeface="Arial" panose="020B0704020202020204" pitchFamily="34" charset="0"/>
               <a:ea typeface="Times New Roman" panose="02020603050405020304" pitchFamily="18" charset="0"/>
-              <a:cs typeface="Arial" panose="020B0604020202020204" pitchFamily="34" charset="0"/>
+              <a:cs typeface="Arial" panose="020B0704020202020204" pitchFamily="34" charset="0"/>
             </a:endParaRPr>
           </a:p>
           <a:p>
             <a:pPr marL="800100" lvl="1" indent="-342900">
-              <a:buFont typeface="Arial" panose="020B0604020202020204" pitchFamily="34" charset="0"/>
+              <a:buFont typeface="Arial" panose="020B0704020202020204" pitchFamily="34" charset="0"/>
               <a:buChar char="•"/>
             </a:pPr>
             <a:r>
@@ -12919,9 +12920,9 @@
                 <a:solidFill>
                   <a:srgbClr val="000000"/>
                 </a:solidFill>
-                <a:latin typeface="Arial" panose="020B0604020202020204" pitchFamily="34" charset="0"/>
+                <a:latin typeface="Arial" panose="020B0704020202020204" pitchFamily="34" charset="0"/>
                 <a:ea typeface="Times New Roman" panose="02020603050405020304" pitchFamily="18" charset="0"/>
-                <a:cs typeface="Arial" panose="020B0604020202020204" pitchFamily="34" charset="0"/>
+                <a:cs typeface="Arial" panose="020B0704020202020204" pitchFamily="34" charset="0"/>
               </a:rPr>
               <a:t>Đ</a:t>
             </a:r>
@@ -12931,9 +12932,9 @@
                   <a:srgbClr val="000000"/>
                 </a:solidFill>
                 <a:effectLst/>
-                <a:latin typeface="Arial" panose="020B0604020202020204" pitchFamily="34" charset="0"/>
+                <a:latin typeface="Arial" panose="020B0704020202020204" pitchFamily="34" charset="0"/>
                 <a:ea typeface="Times New Roman" panose="02020603050405020304" pitchFamily="18" charset="0"/>
-                <a:cs typeface="Arial" panose="020B0604020202020204" pitchFamily="34" charset="0"/>
+                <a:cs typeface="Arial" panose="020B0704020202020204" pitchFamily="34" charset="0"/>
               </a:rPr>
               <a:t>ồng hồ đo thời gian có ĐCNN 0,01 s </a:t>
             </a:r>
@@ -12942,9 +12943,9 @@
                 <a:srgbClr val="000000"/>
               </a:solidFill>
               <a:effectLst/>
-              <a:latin typeface="Arial" panose="020B0604020202020204" pitchFamily="34" charset="0"/>
+              <a:latin typeface="Arial" panose="020B0704020202020204" pitchFamily="34" charset="0"/>
               <a:ea typeface="Times New Roman" panose="02020603050405020304" pitchFamily="18" charset="0"/>
-              <a:cs typeface="Arial" panose="020B0604020202020204" pitchFamily="34" charset="0"/>
+              <a:cs typeface="Arial" panose="020B0704020202020204" pitchFamily="34" charset="0"/>
             </a:endParaRPr>
           </a:p>
           <a:p>
@@ -12963,9 +12964,9 @@
                 <a:solidFill>
                   <a:srgbClr val="000000"/>
                 </a:solidFill>
-                <a:latin typeface="Arial" panose="020B0604020202020204" pitchFamily="34" charset="0"/>
+                <a:latin typeface="Arial" panose="020B0704020202020204" pitchFamily="34" charset="0"/>
                 <a:ea typeface="Times New Roman" panose="02020603050405020304" pitchFamily="18" charset="0"/>
-                <a:cs typeface="Arial" panose="020B0604020202020204" pitchFamily="34" charset="0"/>
+                <a:cs typeface="Arial" panose="020B0704020202020204" pitchFamily="34" charset="0"/>
               </a:rPr>
               <a:t>Đ</a:t>
             </a:r>
@@ -12975,9 +12976,9 @@
                   <a:srgbClr val="000000"/>
                 </a:solidFill>
                 <a:effectLst/>
-                <a:latin typeface="Arial" panose="020B0604020202020204" pitchFamily="34" charset="0"/>
+                <a:latin typeface="Arial" panose="020B0704020202020204" pitchFamily="34" charset="0"/>
                 <a:ea typeface="Times New Roman" panose="02020603050405020304" pitchFamily="18" charset="0"/>
-                <a:cs typeface="Arial" panose="020B0604020202020204" pitchFamily="34" charset="0"/>
+                <a:cs typeface="Arial" panose="020B0704020202020204" pitchFamily="34" charset="0"/>
               </a:rPr>
               <a:t>o 5 lần thời gian chuyển động của chiếc xe đồ chơi chạy bằng pin từ điểm A (v</a:t>
             </a:r>
@@ -12987,9 +12988,9 @@
                   <a:srgbClr val="000000"/>
                 </a:solidFill>
                 <a:effectLst/>
-                <a:latin typeface="Arial" panose="020B0604020202020204" pitchFamily="34" charset="0"/>
+                <a:latin typeface="Arial" panose="020B0704020202020204" pitchFamily="34" charset="0"/>
                 <a:ea typeface="Times New Roman" panose="02020603050405020304" pitchFamily="18" charset="0"/>
-                <a:cs typeface="Arial" panose="020B0604020202020204" pitchFamily="34" charset="0"/>
+                <a:cs typeface="Arial" panose="020B0704020202020204" pitchFamily="34" charset="0"/>
               </a:rPr>
               <a:t>A</a:t>
             </a:r>
@@ -12999,9 +13000,9 @@
                   <a:srgbClr val="000000"/>
                 </a:solidFill>
                 <a:effectLst/>
-                <a:latin typeface="Arial" panose="020B0604020202020204" pitchFamily="34" charset="0"/>
+                <a:latin typeface="Arial" panose="020B0704020202020204" pitchFamily="34" charset="0"/>
                 <a:ea typeface="Times New Roman" panose="02020603050405020304" pitchFamily="18" charset="0"/>
-                <a:cs typeface="Arial" panose="020B0604020202020204" pitchFamily="34" charset="0"/>
+                <a:cs typeface="Arial" panose="020B0704020202020204" pitchFamily="34" charset="0"/>
               </a:rPr>
               <a:t> = 0) đến điểm B. </a:t>
             </a:r>
@@ -13010,9 +13011,9 @@
                 <a:srgbClr val="000000"/>
               </a:solidFill>
               <a:effectLst/>
-              <a:latin typeface="Arial" panose="020B0604020202020204" pitchFamily="34" charset="0"/>
+              <a:latin typeface="Arial" panose="020B0704020202020204" pitchFamily="34" charset="0"/>
               <a:ea typeface="Times New Roman" panose="02020603050405020304" pitchFamily="18" charset="0"/>
-              <a:cs typeface="Arial" panose="020B0604020202020204" pitchFamily="34" charset="0"/>
+              <a:cs typeface="Arial" panose="020B0704020202020204" pitchFamily="34" charset="0"/>
             </a:endParaRPr>
           </a:p>
           <a:p>
@@ -13032,17 +13033,17 @@
                   <a:srgbClr val="000000"/>
                 </a:solidFill>
                 <a:effectLst/>
-                <a:latin typeface="Arial" panose="020B0604020202020204" pitchFamily="34" charset="0"/>
+                <a:latin typeface="Arial" panose="020B0704020202020204" pitchFamily="34" charset="0"/>
                 <a:ea typeface="Times New Roman" panose="02020603050405020304" pitchFamily="18" charset="0"/>
-                <a:cs typeface="Arial" panose="020B0604020202020204" pitchFamily="34" charset="0"/>
+                <a:cs typeface="Arial" panose="020B0704020202020204" pitchFamily="34" charset="0"/>
               </a:rPr>
               <a:t>Ghi các giá trị vào Bảng và trả lời các câu hỏi. </a:t>
             </a:r>
             <a:endParaRPr lang="en-US" sz="2500">
               <a:effectLst/>
-              <a:latin typeface="Arial" panose="020B0604020202020204" pitchFamily="34" charset="0"/>
+              <a:latin typeface="Arial" panose="020B0704020202020204" pitchFamily="34" charset="0"/>
               <a:ea typeface="Times New Roman" panose="02020603050405020304" pitchFamily="18" charset="0"/>
-              <a:cs typeface="Arial" panose="020B0604020202020204" pitchFamily="34" charset="0"/>
+              <a:cs typeface="Arial" panose="020B0704020202020204" pitchFamily="34" charset="0"/>
             </a:endParaRPr>
           </a:p>
         </p:txBody>
@@ -13192,14 +13193,14 @@
                           </a:pPr>
                           <a:r>
                             <a:rPr lang="en-US" sz="1800">
-                              <a:latin typeface="Arial" panose="020B0604020202020204" pitchFamily="34" charset="0"/>
-                              <a:cs typeface="Arial" panose="020B0604020202020204" pitchFamily="34" charset="0"/>
+                              <a:latin typeface="Arial" panose="020B0704020202020204" pitchFamily="34" charset="0"/>
+                              <a:cs typeface="Arial" panose="020B0704020202020204" pitchFamily="34" charset="0"/>
                             </a:rPr>
                             <a:t>n</a:t>
                           </a:r>
                           <a:endParaRPr lang="en-US" sz="1800">
-                            <a:latin typeface="Arial" panose="020B0604020202020204" pitchFamily="34" charset="0"/>
-                            <a:cs typeface="Arial" panose="020B0604020202020204" pitchFamily="34" charset="0"/>
+                            <a:latin typeface="Arial" panose="020B0704020202020204" pitchFamily="34" charset="0"/>
+                            <a:cs typeface="Arial" panose="020B0704020202020204" pitchFamily="34" charset="0"/>
                           </a:endParaRPr>
                         </a:p>
                       </a:txBody>
@@ -13213,14 +13214,14 @@
                           <a:pPr algn="ctr"/>
                           <a:r>
                             <a:rPr lang="en-US" sz="1800">
-                              <a:latin typeface="Arial" panose="020B0604020202020204" pitchFamily="34" charset="0"/>
-                              <a:cs typeface="Arial" panose="020B0604020202020204" pitchFamily="34" charset="0"/>
+                              <a:latin typeface="Arial" panose="020B0704020202020204" pitchFamily="34" charset="0"/>
+                              <a:cs typeface="Arial" panose="020B0704020202020204" pitchFamily="34" charset="0"/>
                             </a:rPr>
                             <a:t>s (m)</a:t>
                           </a:r>
                           <a:endParaRPr lang="en-US" sz="1800">
-                            <a:latin typeface="Arial" panose="020B0604020202020204" pitchFamily="34" charset="0"/>
-                            <a:cs typeface="Arial" panose="020B0604020202020204" pitchFamily="34" charset="0"/>
+                            <a:latin typeface="Arial" panose="020B0704020202020204" pitchFamily="34" charset="0"/>
+                            <a:cs typeface="Arial" panose="020B0704020202020204" pitchFamily="34" charset="0"/>
                           </a:endParaRPr>
                         </a:p>
                       </a:txBody>
@@ -13234,22 +13235,22 @@
                           <a:pPr algn="ctr"/>
                           <a:r>
                             <a:rPr lang="en-US" sz="1800">
-                              <a:latin typeface="Arial" panose="020B0604020202020204" pitchFamily="34" charset="0"/>
-                              <a:cs typeface="Arial" panose="020B0604020202020204" pitchFamily="34" charset="0"/>
+                              <a:latin typeface="Arial" panose="020B0704020202020204" pitchFamily="34" charset="0"/>
+                              <a:cs typeface="Arial" panose="020B0704020202020204" pitchFamily="34" charset="0"/>
                               <a:sym typeface="Symbol" panose="05050102010706020507" pitchFamily="18" charset="2"/>
                             </a:rPr>
                             <a:t>s </a:t>
                           </a:r>
                           <a:r>
                             <a:rPr lang="en-US" sz="1800">
-                              <a:latin typeface="Arial" panose="020B0604020202020204" pitchFamily="34" charset="0"/>
-                              <a:cs typeface="Arial" panose="020B0604020202020204" pitchFamily="34" charset="0"/>
+                              <a:latin typeface="Arial" panose="020B0704020202020204" pitchFamily="34" charset="0"/>
+                              <a:cs typeface="Arial" panose="020B0704020202020204" pitchFamily="34" charset="0"/>
                             </a:rPr>
                             <a:t>(m)</a:t>
                           </a:r>
                           <a:endParaRPr lang="en-US" sz="1800">
-                            <a:latin typeface="Arial" panose="020B0604020202020204" pitchFamily="34" charset="0"/>
-                            <a:cs typeface="Arial" panose="020B0604020202020204" pitchFamily="34" charset="0"/>
+                            <a:latin typeface="Arial" panose="020B0704020202020204" pitchFamily="34" charset="0"/>
+                            <a:cs typeface="Arial" panose="020B0704020202020204" pitchFamily="34" charset="0"/>
                           </a:endParaRPr>
                         </a:p>
                       </a:txBody>
@@ -13263,14 +13264,14 @@
                           <a:pPr algn="ctr"/>
                           <a:r>
                             <a:rPr lang="en-US" sz="1800">
-                              <a:latin typeface="Arial" panose="020B0604020202020204" pitchFamily="34" charset="0"/>
-                              <a:cs typeface="Arial" panose="020B0604020202020204" pitchFamily="34" charset="0"/>
+                              <a:latin typeface="Arial" panose="020B0704020202020204" pitchFamily="34" charset="0"/>
+                              <a:cs typeface="Arial" panose="020B0704020202020204" pitchFamily="34" charset="0"/>
                             </a:rPr>
                             <a:t>t (s)</a:t>
                           </a:r>
                           <a:endParaRPr lang="en-US" sz="1800">
-                            <a:latin typeface="Arial" panose="020B0604020202020204" pitchFamily="34" charset="0"/>
-                            <a:cs typeface="Arial" panose="020B0604020202020204" pitchFamily="34" charset="0"/>
+                            <a:latin typeface="Arial" panose="020B0704020202020204" pitchFamily="34" charset="0"/>
+                            <a:cs typeface="Arial" panose="020B0704020202020204" pitchFamily="34" charset="0"/>
                           </a:endParaRPr>
                         </a:p>
                       </a:txBody>
@@ -13284,22 +13285,22 @@
                           <a:pPr algn="ctr"/>
                           <a:r>
                             <a:rPr lang="en-US" sz="1800">
-                              <a:latin typeface="Arial" panose="020B0604020202020204" pitchFamily="34" charset="0"/>
-                              <a:cs typeface="Arial" panose="020B0604020202020204" pitchFamily="34" charset="0"/>
+                              <a:latin typeface="Arial" panose="020B0704020202020204" pitchFamily="34" charset="0"/>
+                              <a:cs typeface="Arial" panose="020B0704020202020204" pitchFamily="34" charset="0"/>
                               <a:sym typeface="Symbol" panose="05050102010706020507" pitchFamily="18" charset="2"/>
                             </a:rPr>
                             <a:t>t </a:t>
                           </a:r>
                           <a:r>
                             <a:rPr lang="en-US" sz="1800">
-                              <a:latin typeface="Arial" panose="020B0604020202020204" pitchFamily="34" charset="0"/>
-                              <a:cs typeface="Arial" panose="020B0604020202020204" pitchFamily="34" charset="0"/>
+                              <a:latin typeface="Arial" panose="020B0704020202020204" pitchFamily="34" charset="0"/>
+                              <a:cs typeface="Arial" panose="020B0704020202020204" pitchFamily="34" charset="0"/>
                             </a:rPr>
                             <a:t>(s)</a:t>
                           </a:r>
                           <a:endParaRPr lang="en-US" sz="1800">
-                            <a:latin typeface="Arial" panose="020B0604020202020204" pitchFamily="34" charset="0"/>
-                            <a:cs typeface="Arial" panose="020B0604020202020204" pitchFamily="34" charset="0"/>
+                            <a:latin typeface="Arial" panose="020B0704020202020204" pitchFamily="34" charset="0"/>
+                            <a:cs typeface="Arial" panose="020B0704020202020204" pitchFamily="34" charset="0"/>
                           </a:endParaRPr>
                         </a:p>
                       </a:txBody>
@@ -13315,14 +13316,14 @@
                           <a:pPr algn="ctr"/>
                           <a:r>
                             <a:rPr lang="en-US" sz="1800">
-                              <a:latin typeface="Arial" panose="020B0604020202020204" pitchFamily="34" charset="0"/>
-                              <a:cs typeface="Arial" panose="020B0604020202020204" pitchFamily="34" charset="0"/>
+                              <a:latin typeface="Arial" panose="020B0704020202020204" pitchFamily="34" charset="0"/>
+                              <a:cs typeface="Arial" panose="020B0704020202020204" pitchFamily="34" charset="0"/>
                             </a:rPr>
                             <a:t>1</a:t>
                           </a:r>
                           <a:endParaRPr lang="en-US" sz="1800">
-                            <a:latin typeface="Arial" panose="020B0604020202020204" pitchFamily="34" charset="0"/>
-                            <a:cs typeface="Arial" panose="020B0604020202020204" pitchFamily="34" charset="0"/>
+                            <a:latin typeface="Arial" panose="020B0704020202020204" pitchFamily="34" charset="0"/>
+                            <a:cs typeface="Arial" panose="020B0704020202020204" pitchFamily="34" charset="0"/>
                           </a:endParaRPr>
                         </a:p>
                       </a:txBody>
@@ -13335,8 +13336,8 @@
                         <a:p>
                           <a:pPr algn="ctr"/>
                           <a:endParaRPr lang="en-US" sz="1800">
-                            <a:latin typeface="Arial" panose="020B0604020202020204" pitchFamily="34" charset="0"/>
-                            <a:cs typeface="Arial" panose="020B0604020202020204" pitchFamily="34" charset="0"/>
+                            <a:latin typeface="Arial" panose="020B0704020202020204" pitchFamily="34" charset="0"/>
+                            <a:cs typeface="Arial" panose="020B0704020202020204" pitchFamily="34" charset="0"/>
                           </a:endParaRPr>
                         </a:p>
                       </a:txBody>
@@ -13350,14 +13351,14 @@
                           <a:pPr algn="ctr"/>
                           <a:r>
                             <a:rPr lang="en-US" sz="1800">
-                              <a:latin typeface="Arial" panose="020B0604020202020204" pitchFamily="34" charset="0"/>
-                              <a:cs typeface="Arial" panose="020B0604020202020204" pitchFamily="34" charset="0"/>
+                              <a:latin typeface="Arial" panose="020B0704020202020204" pitchFamily="34" charset="0"/>
+                              <a:cs typeface="Arial" panose="020B0704020202020204" pitchFamily="34" charset="0"/>
                             </a:rPr>
                             <a:t>-</a:t>
                           </a:r>
                           <a:endParaRPr lang="en-US" sz="1800">
-                            <a:latin typeface="Arial" panose="020B0604020202020204" pitchFamily="34" charset="0"/>
-                            <a:cs typeface="Arial" panose="020B0604020202020204" pitchFamily="34" charset="0"/>
+                            <a:latin typeface="Arial" panose="020B0704020202020204" pitchFamily="34" charset="0"/>
+                            <a:cs typeface="Arial" panose="020B0704020202020204" pitchFamily="34" charset="0"/>
                           </a:endParaRPr>
                         </a:p>
                       </a:txBody>
@@ -13370,8 +13371,8 @@
                         <a:p>
                           <a:pPr algn="ctr"/>
                           <a:endParaRPr lang="en-US" sz="1800">
-                            <a:latin typeface="Arial" panose="020B0604020202020204" pitchFamily="34" charset="0"/>
-                            <a:cs typeface="Arial" panose="020B0604020202020204" pitchFamily="34" charset="0"/>
+                            <a:latin typeface="Arial" panose="020B0704020202020204" pitchFamily="34" charset="0"/>
+                            <a:cs typeface="Arial" panose="020B0704020202020204" pitchFamily="34" charset="0"/>
                           </a:endParaRPr>
                         </a:p>
                       </a:txBody>
@@ -13384,8 +13385,8 @@
                         <a:p>
                           <a:pPr algn="ctr"/>
                           <a:endParaRPr lang="en-US" sz="1800">
-                            <a:latin typeface="Arial" panose="020B0604020202020204" pitchFamily="34" charset="0"/>
-                            <a:cs typeface="Arial" panose="020B0604020202020204" pitchFamily="34" charset="0"/>
+                            <a:latin typeface="Arial" panose="020B0704020202020204" pitchFamily="34" charset="0"/>
+                            <a:cs typeface="Arial" panose="020B0704020202020204" pitchFamily="34" charset="0"/>
                           </a:endParaRPr>
                         </a:p>
                       </a:txBody>
@@ -13401,14 +13402,14 @@
                           <a:pPr algn="ctr"/>
                           <a:r>
                             <a:rPr lang="en-US" sz="1800">
-                              <a:latin typeface="Arial" panose="020B0604020202020204" pitchFamily="34" charset="0"/>
-                              <a:cs typeface="Arial" panose="020B0604020202020204" pitchFamily="34" charset="0"/>
+                              <a:latin typeface="Arial" panose="020B0704020202020204" pitchFamily="34" charset="0"/>
+                              <a:cs typeface="Arial" panose="020B0704020202020204" pitchFamily="34" charset="0"/>
                             </a:rPr>
                             <a:t>2</a:t>
                           </a:r>
                           <a:endParaRPr lang="en-US" sz="1800">
-                            <a:latin typeface="Arial" panose="020B0604020202020204" pitchFamily="34" charset="0"/>
-                            <a:cs typeface="Arial" panose="020B0604020202020204" pitchFamily="34" charset="0"/>
+                            <a:latin typeface="Arial" panose="020B0704020202020204" pitchFamily="34" charset="0"/>
+                            <a:cs typeface="Arial" panose="020B0704020202020204" pitchFamily="34" charset="0"/>
                           </a:endParaRPr>
                         </a:p>
                       </a:txBody>
@@ -13421,8 +13422,8 @@
                         <a:p>
                           <a:pPr algn="ctr"/>
                           <a:endParaRPr lang="en-US" sz="1800">
-                            <a:latin typeface="Arial" panose="020B0604020202020204" pitchFamily="34" charset="0"/>
-                            <a:cs typeface="Arial" panose="020B0604020202020204" pitchFamily="34" charset="0"/>
+                            <a:latin typeface="Arial" panose="020B0704020202020204" pitchFamily="34" charset="0"/>
+                            <a:cs typeface="Arial" panose="020B0704020202020204" pitchFamily="34" charset="0"/>
                           </a:endParaRPr>
                         </a:p>
                       </a:txBody>
@@ -13436,14 +13437,14 @@
                           <a:pPr algn="ctr"/>
                           <a:r>
                             <a:rPr lang="en-US" sz="1800">
-                              <a:latin typeface="Arial" panose="020B0604020202020204" pitchFamily="34" charset="0"/>
-                              <a:cs typeface="Arial" panose="020B0604020202020204" pitchFamily="34" charset="0"/>
+                              <a:latin typeface="Arial" panose="020B0704020202020204" pitchFamily="34" charset="0"/>
+                              <a:cs typeface="Arial" panose="020B0704020202020204" pitchFamily="34" charset="0"/>
                             </a:rPr>
                             <a:t>-</a:t>
                           </a:r>
                           <a:endParaRPr lang="en-US" sz="1800">
-                            <a:latin typeface="Arial" panose="020B0604020202020204" pitchFamily="34" charset="0"/>
-                            <a:cs typeface="Arial" panose="020B0604020202020204" pitchFamily="34" charset="0"/>
+                            <a:latin typeface="Arial" panose="020B0704020202020204" pitchFamily="34" charset="0"/>
+                            <a:cs typeface="Arial" panose="020B0704020202020204" pitchFamily="34" charset="0"/>
                           </a:endParaRPr>
                         </a:p>
                       </a:txBody>
@@ -13456,8 +13457,8 @@
                         <a:p>
                           <a:pPr algn="ctr"/>
                           <a:endParaRPr lang="en-US" sz="1800">
-                            <a:latin typeface="Arial" panose="020B0604020202020204" pitchFamily="34" charset="0"/>
-                            <a:cs typeface="Arial" panose="020B0604020202020204" pitchFamily="34" charset="0"/>
+                            <a:latin typeface="Arial" panose="020B0704020202020204" pitchFamily="34" charset="0"/>
+                            <a:cs typeface="Arial" panose="020B0704020202020204" pitchFamily="34" charset="0"/>
                           </a:endParaRPr>
                         </a:p>
                       </a:txBody>
@@ -13470,8 +13471,8 @@
                         <a:p>
                           <a:pPr algn="ctr"/>
                           <a:endParaRPr lang="en-US" sz="1800">
-                            <a:latin typeface="Arial" panose="020B0604020202020204" pitchFamily="34" charset="0"/>
-                            <a:cs typeface="Arial" panose="020B0604020202020204" pitchFamily="34" charset="0"/>
+                            <a:latin typeface="Arial" panose="020B0704020202020204" pitchFamily="34" charset="0"/>
+                            <a:cs typeface="Arial" panose="020B0704020202020204" pitchFamily="34" charset="0"/>
                           </a:endParaRPr>
                         </a:p>
                       </a:txBody>
@@ -13487,14 +13488,14 @@
                           <a:pPr algn="ctr"/>
                           <a:r>
                             <a:rPr lang="en-US" sz="1800">
-                              <a:latin typeface="Arial" panose="020B0604020202020204" pitchFamily="34" charset="0"/>
-                              <a:cs typeface="Arial" panose="020B0604020202020204" pitchFamily="34" charset="0"/>
+                              <a:latin typeface="Arial" panose="020B0704020202020204" pitchFamily="34" charset="0"/>
+                              <a:cs typeface="Arial" panose="020B0704020202020204" pitchFamily="34" charset="0"/>
                             </a:rPr>
                             <a:t>3</a:t>
                           </a:r>
                           <a:endParaRPr lang="en-US" sz="1800">
-                            <a:latin typeface="Arial" panose="020B0604020202020204" pitchFamily="34" charset="0"/>
-                            <a:cs typeface="Arial" panose="020B0604020202020204" pitchFamily="34" charset="0"/>
+                            <a:latin typeface="Arial" panose="020B0704020202020204" pitchFamily="34" charset="0"/>
+                            <a:cs typeface="Arial" panose="020B0704020202020204" pitchFamily="34" charset="0"/>
                           </a:endParaRPr>
                         </a:p>
                       </a:txBody>
@@ -13507,8 +13508,8 @@
                         <a:p>
                           <a:pPr algn="ctr"/>
                           <a:endParaRPr lang="en-US" sz="1800">
-                            <a:latin typeface="Arial" panose="020B0604020202020204" pitchFamily="34" charset="0"/>
-                            <a:cs typeface="Arial" panose="020B0604020202020204" pitchFamily="34" charset="0"/>
+                            <a:latin typeface="Arial" panose="020B0704020202020204" pitchFamily="34" charset="0"/>
+                            <a:cs typeface="Arial" panose="020B0704020202020204" pitchFamily="34" charset="0"/>
                           </a:endParaRPr>
                         </a:p>
                       </a:txBody>
@@ -13522,14 +13523,14 @@
                           <a:pPr algn="ctr"/>
                           <a:r>
                             <a:rPr lang="en-US" sz="1800">
-                              <a:latin typeface="Arial" panose="020B0604020202020204" pitchFamily="34" charset="0"/>
-                              <a:cs typeface="Arial" panose="020B0604020202020204" pitchFamily="34" charset="0"/>
+                              <a:latin typeface="Arial" panose="020B0704020202020204" pitchFamily="34" charset="0"/>
+                              <a:cs typeface="Arial" panose="020B0704020202020204" pitchFamily="34" charset="0"/>
                             </a:rPr>
                             <a:t>-</a:t>
                           </a:r>
                           <a:endParaRPr lang="en-US" sz="1800">
-                            <a:latin typeface="Arial" panose="020B0604020202020204" pitchFamily="34" charset="0"/>
-                            <a:cs typeface="Arial" panose="020B0604020202020204" pitchFamily="34" charset="0"/>
+                            <a:latin typeface="Arial" panose="020B0704020202020204" pitchFamily="34" charset="0"/>
+                            <a:cs typeface="Arial" panose="020B0704020202020204" pitchFamily="34" charset="0"/>
                           </a:endParaRPr>
                         </a:p>
                       </a:txBody>
@@ -13542,8 +13543,8 @@
                         <a:p>
                           <a:pPr algn="ctr"/>
                           <a:endParaRPr lang="en-US" sz="1800">
-                            <a:latin typeface="Arial" panose="020B0604020202020204" pitchFamily="34" charset="0"/>
-                            <a:cs typeface="Arial" panose="020B0604020202020204" pitchFamily="34" charset="0"/>
+                            <a:latin typeface="Arial" panose="020B0704020202020204" pitchFamily="34" charset="0"/>
+                            <a:cs typeface="Arial" panose="020B0704020202020204" pitchFamily="34" charset="0"/>
                           </a:endParaRPr>
                         </a:p>
                       </a:txBody>
@@ -13556,8 +13557,8 @@
                         <a:p>
                           <a:pPr algn="ctr"/>
                           <a:endParaRPr lang="en-US" sz="1800">
-                            <a:latin typeface="Arial" panose="020B0604020202020204" pitchFamily="34" charset="0"/>
-                            <a:cs typeface="Arial" panose="020B0604020202020204" pitchFamily="34" charset="0"/>
+                            <a:latin typeface="Arial" panose="020B0704020202020204" pitchFamily="34" charset="0"/>
+                            <a:cs typeface="Arial" panose="020B0704020202020204" pitchFamily="34" charset="0"/>
                           </a:endParaRPr>
                         </a:p>
                       </a:txBody>
@@ -13573,14 +13574,14 @@
                           <a:pPr algn="ctr"/>
                           <a:r>
                             <a:rPr lang="en-US" sz="1800">
-                              <a:latin typeface="Arial" panose="020B0604020202020204" pitchFamily="34" charset="0"/>
-                              <a:cs typeface="Arial" panose="020B0604020202020204" pitchFamily="34" charset="0"/>
+                              <a:latin typeface="Arial" panose="020B0704020202020204" pitchFamily="34" charset="0"/>
+                              <a:cs typeface="Arial" panose="020B0704020202020204" pitchFamily="34" charset="0"/>
                             </a:rPr>
                             <a:t>4</a:t>
                           </a:r>
                           <a:endParaRPr lang="en-US" sz="1800">
-                            <a:latin typeface="Arial" panose="020B0604020202020204" pitchFamily="34" charset="0"/>
-                            <a:cs typeface="Arial" panose="020B0604020202020204" pitchFamily="34" charset="0"/>
+                            <a:latin typeface="Arial" panose="020B0704020202020204" pitchFamily="34" charset="0"/>
+                            <a:cs typeface="Arial" panose="020B0704020202020204" pitchFamily="34" charset="0"/>
                           </a:endParaRPr>
                         </a:p>
                       </a:txBody>
@@ -13593,8 +13594,8 @@
                         <a:p>
                           <a:pPr algn="ctr"/>
                           <a:endParaRPr lang="en-US" sz="1800">
-                            <a:latin typeface="Arial" panose="020B0604020202020204" pitchFamily="34" charset="0"/>
-                            <a:cs typeface="Arial" panose="020B0604020202020204" pitchFamily="34" charset="0"/>
+                            <a:latin typeface="Arial" panose="020B0704020202020204" pitchFamily="34" charset="0"/>
+                            <a:cs typeface="Arial" panose="020B0704020202020204" pitchFamily="34" charset="0"/>
                           </a:endParaRPr>
                         </a:p>
                       </a:txBody>
@@ -13608,14 +13609,14 @@
                           <a:pPr algn="ctr"/>
                           <a:r>
                             <a:rPr lang="en-US" sz="1800">
-                              <a:latin typeface="Arial" panose="020B0604020202020204" pitchFamily="34" charset="0"/>
-                              <a:cs typeface="Arial" panose="020B0604020202020204" pitchFamily="34" charset="0"/>
+                              <a:latin typeface="Arial" panose="020B0704020202020204" pitchFamily="34" charset="0"/>
+                              <a:cs typeface="Arial" panose="020B0704020202020204" pitchFamily="34" charset="0"/>
                             </a:rPr>
                             <a:t>-</a:t>
                           </a:r>
                           <a:endParaRPr lang="en-US" sz="1800">
-                            <a:latin typeface="Arial" panose="020B0604020202020204" pitchFamily="34" charset="0"/>
-                            <a:cs typeface="Arial" panose="020B0604020202020204" pitchFamily="34" charset="0"/>
+                            <a:latin typeface="Arial" panose="020B0704020202020204" pitchFamily="34" charset="0"/>
+                            <a:cs typeface="Arial" panose="020B0704020202020204" pitchFamily="34" charset="0"/>
                           </a:endParaRPr>
                         </a:p>
                       </a:txBody>
@@ -13628,8 +13629,8 @@
                         <a:p>
                           <a:pPr algn="ctr"/>
                           <a:endParaRPr lang="en-US" sz="1800">
-                            <a:latin typeface="Arial" panose="020B0604020202020204" pitchFamily="34" charset="0"/>
-                            <a:cs typeface="Arial" panose="020B0604020202020204" pitchFamily="34" charset="0"/>
+                            <a:latin typeface="Arial" panose="020B0704020202020204" pitchFamily="34" charset="0"/>
+                            <a:cs typeface="Arial" panose="020B0704020202020204" pitchFamily="34" charset="0"/>
                           </a:endParaRPr>
                         </a:p>
                       </a:txBody>
@@ -13642,8 +13643,8 @@
                         <a:p>
                           <a:pPr algn="ctr"/>
                           <a:endParaRPr lang="en-US" sz="1800">
-                            <a:latin typeface="Arial" panose="020B0604020202020204" pitchFamily="34" charset="0"/>
-                            <a:cs typeface="Arial" panose="020B0604020202020204" pitchFamily="34" charset="0"/>
+                            <a:latin typeface="Arial" panose="020B0704020202020204" pitchFamily="34" charset="0"/>
+                            <a:cs typeface="Arial" panose="020B0704020202020204" pitchFamily="34" charset="0"/>
                           </a:endParaRPr>
                         </a:p>
                       </a:txBody>
@@ -13659,14 +13660,14 @@
                           <a:pPr algn="ctr"/>
                           <a:r>
                             <a:rPr lang="en-US" sz="1800">
-                              <a:latin typeface="Arial" panose="020B0604020202020204" pitchFamily="34" charset="0"/>
-                              <a:cs typeface="Arial" panose="020B0604020202020204" pitchFamily="34" charset="0"/>
+                              <a:latin typeface="Arial" panose="020B0704020202020204" pitchFamily="34" charset="0"/>
+                              <a:cs typeface="Arial" panose="020B0704020202020204" pitchFamily="34" charset="0"/>
                             </a:rPr>
                             <a:t>5</a:t>
                           </a:r>
                           <a:endParaRPr lang="en-US" sz="1800">
-                            <a:latin typeface="Arial" panose="020B0604020202020204" pitchFamily="34" charset="0"/>
-                            <a:cs typeface="Arial" panose="020B0604020202020204" pitchFamily="34" charset="0"/>
+                            <a:latin typeface="Arial" panose="020B0704020202020204" pitchFamily="34" charset="0"/>
+                            <a:cs typeface="Arial" panose="020B0704020202020204" pitchFamily="34" charset="0"/>
                           </a:endParaRPr>
                         </a:p>
                       </a:txBody>
@@ -13679,8 +13680,8 @@
                         <a:p>
                           <a:pPr algn="ctr"/>
                           <a:endParaRPr lang="en-US" sz="1800">
-                            <a:latin typeface="Arial" panose="020B0604020202020204" pitchFamily="34" charset="0"/>
-                            <a:cs typeface="Arial" panose="020B0604020202020204" pitchFamily="34" charset="0"/>
+                            <a:latin typeface="Arial" panose="020B0704020202020204" pitchFamily="34" charset="0"/>
+                            <a:cs typeface="Arial" panose="020B0704020202020204" pitchFamily="34" charset="0"/>
                           </a:endParaRPr>
                         </a:p>
                       </a:txBody>
@@ -13693,8 +13694,8 @@
                         <a:p>
                           <a:pPr algn="ctr"/>
                           <a:endParaRPr lang="en-US" sz="1800">
-                            <a:latin typeface="Arial" panose="020B0604020202020204" pitchFamily="34" charset="0"/>
-                            <a:cs typeface="Arial" panose="020B0604020202020204" pitchFamily="34" charset="0"/>
+                            <a:latin typeface="Arial" panose="020B0704020202020204" pitchFamily="34" charset="0"/>
+                            <a:cs typeface="Arial" panose="020B0704020202020204" pitchFamily="34" charset="0"/>
                           </a:endParaRPr>
                         </a:p>
                       </a:txBody>
@@ -13707,8 +13708,8 @@
                         <a:p>
                           <a:pPr algn="ctr"/>
                           <a:endParaRPr lang="en-US" sz="1800">
-                            <a:latin typeface="Arial" panose="020B0604020202020204" pitchFamily="34" charset="0"/>
-                            <a:cs typeface="Arial" panose="020B0604020202020204" pitchFamily="34" charset="0"/>
+                            <a:latin typeface="Arial" panose="020B0704020202020204" pitchFamily="34" charset="0"/>
+                            <a:cs typeface="Arial" panose="020B0704020202020204" pitchFamily="34" charset="0"/>
                           </a:endParaRPr>
                         </a:p>
                       </a:txBody>
@@ -13721,8 +13722,8 @@
                         <a:p>
                           <a:pPr algn="ctr"/>
                           <a:endParaRPr lang="en-US" sz="1800">
-                            <a:latin typeface="Arial" panose="020B0604020202020204" pitchFamily="34" charset="0"/>
-                            <a:cs typeface="Arial" panose="020B0604020202020204" pitchFamily="34" charset="0"/>
+                            <a:latin typeface="Arial" panose="020B0704020202020204" pitchFamily="34" charset="0"/>
+                            <a:cs typeface="Arial" panose="020B0704020202020204" pitchFamily="34" charset="0"/>
                           </a:endParaRPr>
                         </a:p>
                       </a:txBody>
@@ -13738,14 +13739,14 @@
                           <a:pPr algn="ctr"/>
                           <a:r>
                             <a:rPr lang="en-US" sz="1800">
-                              <a:latin typeface="Arial" panose="020B0604020202020204" pitchFamily="34" charset="0"/>
-                              <a:cs typeface="Arial" panose="020B0604020202020204" pitchFamily="34" charset="0"/>
+                              <a:latin typeface="Arial" panose="020B0704020202020204" pitchFamily="34" charset="0"/>
+                              <a:cs typeface="Arial" panose="020B0704020202020204" pitchFamily="34" charset="0"/>
                             </a:rPr>
                             <a:t>Trung bình</a:t>
                           </a:r>
                           <a:endParaRPr lang="en-US" sz="1800">
-                            <a:latin typeface="Arial" panose="020B0604020202020204" pitchFamily="34" charset="0"/>
-                            <a:cs typeface="Arial" panose="020B0604020202020204" pitchFamily="34" charset="0"/>
+                            <a:latin typeface="Arial" panose="020B0704020202020204" pitchFamily="34" charset="0"/>
+                            <a:cs typeface="Arial" panose="020B0704020202020204" pitchFamily="34" charset="0"/>
                           </a:endParaRPr>
                         </a:p>
                       </a:txBody>
@@ -13768,7 +13769,7 @@
                                         <a:srgbClr val="000000"/>
                                       </a:solidFill>
                                       <a:latin typeface="Cambria Math" panose="02040503050406030204"/>
-                                      <a:cs typeface="Arial" panose="020B0604020202020204" pitchFamily="34" charset="0"/>
+                                      <a:cs typeface="Arial" panose="020B0704020202020204" pitchFamily="34" charset="0"/>
                                     </a:rPr>
                                   </m:ctrlPr>
                                 </m:accPr>
@@ -13779,7 +13780,7 @@
                                         <a:srgbClr val="000000"/>
                                       </a:solidFill>
                                       <a:latin typeface="Cambria Math" panose="02040503050406030204" pitchFamily="18" charset="0"/>
-                                      <a:cs typeface="Arial" panose="020B0604020202020204" pitchFamily="34" charset="0"/>
+                                      <a:cs typeface="Arial" panose="020B0704020202020204" pitchFamily="34" charset="0"/>
                                     </a:rPr>
                                     <m:t>𝑠</m:t>
                                   </m:r>
@@ -13791,7 +13792,7 @@
                                     <a:srgbClr val="000000"/>
                                   </a:solidFill>
                                   <a:latin typeface="Cambria Math" panose="02040503050406030204" pitchFamily="18" charset="0"/>
-                                  <a:cs typeface="Arial" panose="020B0604020202020204" pitchFamily="34" charset="0"/>
+                                  <a:cs typeface="Arial" panose="020B0704020202020204" pitchFamily="34" charset="0"/>
                                 </a:rPr>
                                 <m:t>= ?</m:t>
                               </m:r>
@@ -13803,15 +13804,15 @@
                                 <a:srgbClr val="000000"/>
                               </a:solidFill>
                               <a:effectLst/>
-                              <a:latin typeface="Arial" panose="020B0604020202020204" pitchFamily="34" charset="0"/>
+                              <a:latin typeface="Arial" panose="020B0704020202020204" pitchFamily="34" charset="0"/>
                               <a:ea typeface="Times New Roman" panose="02020603050405020304" pitchFamily="18" charset="0"/>
-                              <a:cs typeface="Arial" panose="020B0604020202020204" pitchFamily="34" charset="0"/>
+                              <a:cs typeface="Arial" panose="020B0704020202020204" pitchFamily="34" charset="0"/>
                             </a:rPr>
                             <a:t> </a:t>
                           </a:r>
                           <a:endParaRPr lang="en-US" sz="1800">
-                            <a:latin typeface="Arial" panose="020B0604020202020204" pitchFamily="34" charset="0"/>
-                            <a:cs typeface="Arial" panose="020B0604020202020204" pitchFamily="34" charset="0"/>
+                            <a:latin typeface="Arial" panose="020B0704020202020204" pitchFamily="34" charset="0"/>
+                            <a:cs typeface="Arial" panose="020B0704020202020204" pitchFamily="34" charset="0"/>
                           </a:endParaRPr>
                         </a:p>
                       </a:txBody>
@@ -13843,7 +13844,7 @@
                               <a:solidFill>
                                 <a:srgbClr val="000000"/>
                               </a:solidFill>
-                              <a:cs typeface="Arial" panose="020B0604020202020204" pitchFamily="34" charset="0"/>
+                              <a:cs typeface="Arial" panose="020B0704020202020204" pitchFamily="34" charset="0"/>
                               <a:sym typeface="Symbol" panose="05050102010706020507" pitchFamily="18" charset="2"/>
                             </a:rPr>
                             <a:t></a:t>
@@ -13859,7 +13860,7 @@
                                         <a:srgbClr val="000000"/>
                                       </a:solidFill>
                                       <a:latin typeface="Cambria Math" panose="02040503050406030204"/>
-                                      <a:cs typeface="Arial" panose="020B0604020202020204" pitchFamily="34" charset="0"/>
+                                      <a:cs typeface="Arial" panose="020B0704020202020204" pitchFamily="34" charset="0"/>
                                     </a:rPr>
                                   </m:ctrlPr>
                                 </m:accPr>
@@ -13870,7 +13871,7 @@
                                         <a:srgbClr val="000000"/>
                                       </a:solidFill>
                                       <a:latin typeface="Cambria Math" panose="02040503050406030204" pitchFamily="18" charset="0"/>
-                                      <a:cs typeface="Arial" panose="020B0604020202020204" pitchFamily="34" charset="0"/>
+                                      <a:cs typeface="Arial" panose="020B0704020202020204" pitchFamily="34" charset="0"/>
                                     </a:rPr>
                                     <m:t>𝑠</m:t>
                                   </m:r>
@@ -13882,7 +13883,7 @@
                                     <a:srgbClr val="000000"/>
                                   </a:solidFill>
                                   <a:latin typeface="Cambria Math" panose="02040503050406030204" pitchFamily="18" charset="0"/>
-                                  <a:cs typeface="Arial" panose="020B0604020202020204" pitchFamily="34" charset="0"/>
+                                  <a:cs typeface="Arial" panose="020B0704020202020204" pitchFamily="34" charset="0"/>
                                 </a:rPr>
                                 <m:t>= ?</m:t>
                               </m:r>
@@ -13894,15 +13895,15 @@
                                 <a:srgbClr val="000000"/>
                               </a:solidFill>
                               <a:effectLst/>
-                              <a:latin typeface="Arial" panose="020B0604020202020204" pitchFamily="34" charset="0"/>
+                              <a:latin typeface="Arial" panose="020B0704020202020204" pitchFamily="34" charset="0"/>
                               <a:ea typeface="Times New Roman" panose="02020603050405020304" pitchFamily="18" charset="0"/>
-                              <a:cs typeface="Arial" panose="020B0604020202020204" pitchFamily="34" charset="0"/>
+                              <a:cs typeface="Arial" panose="020B0704020202020204" pitchFamily="34" charset="0"/>
                             </a:rPr>
                             <a:t> </a:t>
                           </a:r>
                           <a:endParaRPr lang="en-US" sz="1800">
-                            <a:latin typeface="Arial" panose="020B0604020202020204" pitchFamily="34" charset="0"/>
-                            <a:cs typeface="Arial" panose="020B0604020202020204" pitchFamily="34" charset="0"/>
+                            <a:latin typeface="Arial" panose="020B0704020202020204" pitchFamily="34" charset="0"/>
+                            <a:cs typeface="Arial" panose="020B0704020202020204" pitchFamily="34" charset="0"/>
                           </a:endParaRPr>
                         </a:p>
                       </a:txBody>
@@ -13940,7 +13941,7 @@
                                         <a:srgbClr val="000000"/>
                                       </a:solidFill>
                                       <a:latin typeface="Cambria Math" panose="02040503050406030204"/>
-                                      <a:cs typeface="Arial" panose="020B0604020202020204" pitchFamily="34" charset="0"/>
+                                      <a:cs typeface="Arial" panose="020B0704020202020204" pitchFamily="34" charset="0"/>
                                     </a:rPr>
                                   </m:ctrlPr>
                                 </m:accPr>
@@ -13951,7 +13952,7 @@
                                         <a:srgbClr val="000000"/>
                                       </a:solidFill>
                                       <a:latin typeface="Cambria Math" panose="02040503050406030204" pitchFamily="18" charset="0"/>
-                                      <a:cs typeface="Arial" panose="020B0604020202020204" pitchFamily="34" charset="0"/>
+                                      <a:cs typeface="Arial" panose="020B0704020202020204" pitchFamily="34" charset="0"/>
                                     </a:rPr>
                                     <m:t>𝑡</m:t>
                                   </m:r>
@@ -13963,7 +13964,7 @@
                                     <a:srgbClr val="000000"/>
                                   </a:solidFill>
                                   <a:latin typeface="Cambria Math" panose="02040503050406030204" pitchFamily="18" charset="0"/>
-                                  <a:cs typeface="Arial" panose="020B0604020202020204" pitchFamily="34" charset="0"/>
+                                  <a:cs typeface="Arial" panose="020B0704020202020204" pitchFamily="34" charset="0"/>
                                 </a:rPr>
                                 <m:t>= ?</m:t>
                               </m:r>
@@ -13975,15 +13976,15 @@
                                 <a:srgbClr val="000000"/>
                               </a:solidFill>
                               <a:effectLst/>
-                              <a:latin typeface="Arial" panose="020B0604020202020204" pitchFamily="34" charset="0"/>
+                              <a:latin typeface="Arial" panose="020B0704020202020204" pitchFamily="34" charset="0"/>
                               <a:ea typeface="Times New Roman" panose="02020603050405020304" pitchFamily="18" charset="0"/>
-                              <a:cs typeface="Arial" panose="020B0604020202020204" pitchFamily="34" charset="0"/>
+                              <a:cs typeface="Arial" panose="020B0704020202020204" pitchFamily="34" charset="0"/>
                             </a:rPr>
                             <a:t> </a:t>
                           </a:r>
                           <a:endParaRPr lang="en-US" sz="1800">
-                            <a:latin typeface="Arial" panose="020B0604020202020204" pitchFamily="34" charset="0"/>
-                            <a:cs typeface="Arial" panose="020B0604020202020204" pitchFamily="34" charset="0"/>
+                            <a:latin typeface="Arial" panose="020B0704020202020204" pitchFamily="34" charset="0"/>
+                            <a:cs typeface="Arial" panose="020B0704020202020204" pitchFamily="34" charset="0"/>
                           </a:endParaRPr>
                         </a:p>
                       </a:txBody>
@@ -14015,7 +14016,7 @@
                               <a:solidFill>
                                 <a:srgbClr val="000000"/>
                               </a:solidFill>
-                              <a:cs typeface="Arial" panose="020B0604020202020204" pitchFamily="34" charset="0"/>
+                              <a:cs typeface="Arial" panose="020B0704020202020204" pitchFamily="34" charset="0"/>
                               <a:sym typeface="Symbol" panose="05050102010706020507" pitchFamily="18" charset="2"/>
                             </a:rPr>
                             <a:t></a:t>
@@ -14031,7 +14032,7 @@
                                         <a:srgbClr val="000000"/>
                                       </a:solidFill>
                                       <a:latin typeface="Cambria Math" panose="02040503050406030204"/>
-                                      <a:cs typeface="Arial" panose="020B0604020202020204" pitchFamily="34" charset="0"/>
+                                      <a:cs typeface="Arial" panose="020B0704020202020204" pitchFamily="34" charset="0"/>
                                     </a:rPr>
                                   </m:ctrlPr>
                                 </m:accPr>
@@ -14042,7 +14043,7 @@
                                         <a:srgbClr val="000000"/>
                                       </a:solidFill>
                                       <a:latin typeface="Cambria Math" panose="02040503050406030204" pitchFamily="18" charset="0"/>
-                                      <a:cs typeface="Arial" panose="020B0604020202020204" pitchFamily="34" charset="0"/>
+                                      <a:cs typeface="Arial" panose="020B0704020202020204" pitchFamily="34" charset="0"/>
                                     </a:rPr>
                                     <m:t>𝑡</m:t>
                                   </m:r>
@@ -14054,7 +14055,7 @@
                                     <a:srgbClr val="000000"/>
                                   </a:solidFill>
                                   <a:latin typeface="Cambria Math" panose="02040503050406030204" pitchFamily="18" charset="0"/>
-                                  <a:cs typeface="Arial" panose="020B0604020202020204" pitchFamily="34" charset="0"/>
+                                  <a:cs typeface="Arial" panose="020B0704020202020204" pitchFamily="34" charset="0"/>
                                 </a:rPr>
                                 <m:t>= ?</m:t>
                               </m:r>
@@ -14066,15 +14067,15 @@
                                 <a:srgbClr val="000000"/>
                               </a:solidFill>
                               <a:effectLst/>
-                              <a:latin typeface="Arial" panose="020B0604020202020204" pitchFamily="34" charset="0"/>
+                              <a:latin typeface="Arial" panose="020B0704020202020204" pitchFamily="34" charset="0"/>
                               <a:ea typeface="Times New Roman" panose="02020603050405020304" pitchFamily="18" charset="0"/>
-                              <a:cs typeface="Arial" panose="020B0604020202020204" pitchFamily="34" charset="0"/>
+                              <a:cs typeface="Arial" panose="020B0704020202020204" pitchFamily="34" charset="0"/>
                             </a:rPr>
                             <a:t> </a:t>
                           </a:r>
                           <a:endParaRPr lang="en-US" sz="1800">
-                            <a:latin typeface="Arial" panose="020B0604020202020204" pitchFamily="34" charset="0"/>
-                            <a:cs typeface="Arial" panose="020B0604020202020204" pitchFamily="34" charset="0"/>
+                            <a:latin typeface="Arial" panose="020B0704020202020204" pitchFamily="34" charset="0"/>
+                            <a:cs typeface="Arial" panose="020B0704020202020204" pitchFamily="34" charset="0"/>
                           </a:endParaRPr>
                         </a:p>
                       </a:txBody>
@@ -14136,14 +14137,14 @@
                           </a:pPr>
                           <a:r>
                             <a:rPr lang="en-US" sz="1800">
-                              <a:latin typeface="Arial" panose="020B0604020202020204" pitchFamily="34" charset="0"/>
-                              <a:cs typeface="Arial" panose="020B0604020202020204" pitchFamily="34" charset="0"/>
+                              <a:latin typeface="Arial" panose="020B0704020202020204" pitchFamily="34" charset="0"/>
+                              <a:cs typeface="Arial" panose="020B0704020202020204" pitchFamily="34" charset="0"/>
                             </a:rPr>
                             <a:t>n</a:t>
                           </a:r>
                           <a:endParaRPr lang="en-US" sz="1800">
-                            <a:latin typeface="Arial" panose="020B0604020202020204" pitchFamily="34" charset="0"/>
-                            <a:cs typeface="Arial" panose="020B0604020202020204" pitchFamily="34" charset="0"/>
+                            <a:latin typeface="Arial" panose="020B0704020202020204" pitchFamily="34" charset="0"/>
+                            <a:cs typeface="Arial" panose="020B0704020202020204" pitchFamily="34" charset="0"/>
                           </a:endParaRPr>
                         </a:p>
                       </a:txBody>
@@ -14157,14 +14158,14 @@
                           <a:pPr algn="ctr"/>
                           <a:r>
                             <a:rPr lang="en-US" sz="1800">
-                              <a:latin typeface="Arial" panose="020B0604020202020204" pitchFamily="34" charset="0"/>
-                              <a:cs typeface="Arial" panose="020B0604020202020204" pitchFamily="34" charset="0"/>
+                              <a:latin typeface="Arial" panose="020B0704020202020204" pitchFamily="34" charset="0"/>
+                              <a:cs typeface="Arial" panose="020B0704020202020204" pitchFamily="34" charset="0"/>
                             </a:rPr>
                             <a:t>s (m)</a:t>
                           </a:r>
                           <a:endParaRPr lang="en-US" sz="1800">
-                            <a:latin typeface="Arial" panose="020B0604020202020204" pitchFamily="34" charset="0"/>
-                            <a:cs typeface="Arial" panose="020B0604020202020204" pitchFamily="34" charset="0"/>
+                            <a:latin typeface="Arial" panose="020B0704020202020204" pitchFamily="34" charset="0"/>
+                            <a:cs typeface="Arial" panose="020B0704020202020204" pitchFamily="34" charset="0"/>
                           </a:endParaRPr>
                         </a:p>
                       </a:txBody>
@@ -14178,22 +14179,22 @@
                           <a:pPr algn="ctr"/>
                           <a:r>
                             <a:rPr lang="en-US" sz="1800">
-                              <a:latin typeface="Arial" panose="020B0604020202020204" pitchFamily="34" charset="0"/>
-                              <a:cs typeface="Arial" panose="020B0604020202020204" pitchFamily="34" charset="0"/>
+                              <a:latin typeface="Arial" panose="020B0704020202020204" pitchFamily="34" charset="0"/>
+                              <a:cs typeface="Arial" panose="020B0704020202020204" pitchFamily="34" charset="0"/>
                               <a:sym typeface="Symbol" panose="05050102010706020507" pitchFamily="18" charset="2"/>
                             </a:rPr>
                             <a:t>s </a:t>
                           </a:r>
                           <a:r>
                             <a:rPr lang="en-US" sz="1800">
-                              <a:latin typeface="Arial" panose="020B0604020202020204" pitchFamily="34" charset="0"/>
-                              <a:cs typeface="Arial" panose="020B0604020202020204" pitchFamily="34" charset="0"/>
+                              <a:latin typeface="Arial" panose="020B0704020202020204" pitchFamily="34" charset="0"/>
+                              <a:cs typeface="Arial" panose="020B0704020202020204" pitchFamily="34" charset="0"/>
                             </a:rPr>
                             <a:t>(m)</a:t>
                           </a:r>
                           <a:endParaRPr lang="en-US" sz="1800">
-                            <a:latin typeface="Arial" panose="020B0604020202020204" pitchFamily="34" charset="0"/>
-                            <a:cs typeface="Arial" panose="020B0604020202020204" pitchFamily="34" charset="0"/>
+                            <a:latin typeface="Arial" panose="020B0704020202020204" pitchFamily="34" charset="0"/>
+                            <a:cs typeface="Arial" panose="020B0704020202020204" pitchFamily="34" charset="0"/>
                           </a:endParaRPr>
                         </a:p>
                       </a:txBody>
@@ -14207,14 +14208,14 @@
                           <a:pPr algn="ctr"/>
                           <a:r>
                             <a:rPr lang="en-US" sz="1800">
-                              <a:latin typeface="Arial" panose="020B0604020202020204" pitchFamily="34" charset="0"/>
-                              <a:cs typeface="Arial" panose="020B0604020202020204" pitchFamily="34" charset="0"/>
+                              <a:latin typeface="Arial" panose="020B0704020202020204" pitchFamily="34" charset="0"/>
+                              <a:cs typeface="Arial" panose="020B0704020202020204" pitchFamily="34" charset="0"/>
                             </a:rPr>
                             <a:t>t (s)</a:t>
                           </a:r>
                           <a:endParaRPr lang="en-US" sz="1800">
-                            <a:latin typeface="Arial" panose="020B0604020202020204" pitchFamily="34" charset="0"/>
-                            <a:cs typeface="Arial" panose="020B0604020202020204" pitchFamily="34" charset="0"/>
+                            <a:latin typeface="Arial" panose="020B0704020202020204" pitchFamily="34" charset="0"/>
+                            <a:cs typeface="Arial" panose="020B0704020202020204" pitchFamily="34" charset="0"/>
                           </a:endParaRPr>
                         </a:p>
                       </a:txBody>
@@ -14228,22 +14229,22 @@
                           <a:pPr algn="ctr"/>
                           <a:r>
                             <a:rPr lang="en-US" sz="1800">
-                              <a:latin typeface="Arial" panose="020B0604020202020204" pitchFamily="34" charset="0"/>
-                              <a:cs typeface="Arial" panose="020B0604020202020204" pitchFamily="34" charset="0"/>
+                              <a:latin typeface="Arial" panose="020B0704020202020204" pitchFamily="34" charset="0"/>
+                              <a:cs typeface="Arial" panose="020B0704020202020204" pitchFamily="34" charset="0"/>
                               <a:sym typeface="Symbol" panose="05050102010706020507" pitchFamily="18" charset="2"/>
                             </a:rPr>
                             <a:t>t </a:t>
                           </a:r>
                           <a:r>
                             <a:rPr lang="en-US" sz="1800">
-                              <a:latin typeface="Arial" panose="020B0604020202020204" pitchFamily="34" charset="0"/>
-                              <a:cs typeface="Arial" panose="020B0604020202020204" pitchFamily="34" charset="0"/>
+                              <a:latin typeface="Arial" panose="020B0704020202020204" pitchFamily="34" charset="0"/>
+                              <a:cs typeface="Arial" panose="020B0704020202020204" pitchFamily="34" charset="0"/>
                             </a:rPr>
                             <a:t>(s)</a:t>
                           </a:r>
                           <a:endParaRPr lang="en-US" sz="1800">
-                            <a:latin typeface="Arial" panose="020B0604020202020204" pitchFamily="34" charset="0"/>
-                            <a:cs typeface="Arial" panose="020B0604020202020204" pitchFamily="34" charset="0"/>
+                            <a:latin typeface="Arial" panose="020B0704020202020204" pitchFamily="34" charset="0"/>
+                            <a:cs typeface="Arial" panose="020B0704020202020204" pitchFamily="34" charset="0"/>
                           </a:endParaRPr>
                         </a:p>
                       </a:txBody>
@@ -14259,14 +14260,14 @@
                           <a:pPr algn="ctr"/>
                           <a:r>
                             <a:rPr lang="en-US" sz="1800">
-                              <a:latin typeface="Arial" panose="020B0604020202020204" pitchFamily="34" charset="0"/>
-                              <a:cs typeface="Arial" panose="020B0604020202020204" pitchFamily="34" charset="0"/>
+                              <a:latin typeface="Arial" panose="020B0704020202020204" pitchFamily="34" charset="0"/>
+                              <a:cs typeface="Arial" panose="020B0704020202020204" pitchFamily="34" charset="0"/>
                             </a:rPr>
                             <a:t>1</a:t>
                           </a:r>
                           <a:endParaRPr lang="en-US" sz="1800">
-                            <a:latin typeface="Arial" panose="020B0604020202020204" pitchFamily="34" charset="0"/>
-                            <a:cs typeface="Arial" panose="020B0604020202020204" pitchFamily="34" charset="0"/>
+                            <a:latin typeface="Arial" panose="020B0704020202020204" pitchFamily="34" charset="0"/>
+                            <a:cs typeface="Arial" panose="020B0704020202020204" pitchFamily="34" charset="0"/>
                           </a:endParaRPr>
                         </a:p>
                       </a:txBody>
@@ -14279,8 +14280,8 @@
                         <a:p>
                           <a:pPr algn="ctr"/>
                           <a:endParaRPr lang="en-US" sz="1800">
-                            <a:latin typeface="Arial" panose="020B0604020202020204" pitchFamily="34" charset="0"/>
-                            <a:cs typeface="Arial" panose="020B0604020202020204" pitchFamily="34" charset="0"/>
+                            <a:latin typeface="Arial" panose="020B0704020202020204" pitchFamily="34" charset="0"/>
+                            <a:cs typeface="Arial" panose="020B0704020202020204" pitchFamily="34" charset="0"/>
                           </a:endParaRPr>
                         </a:p>
                       </a:txBody>
@@ -14294,14 +14295,14 @@
                           <a:pPr algn="ctr"/>
                           <a:r>
                             <a:rPr lang="en-US" sz="1800">
-                              <a:latin typeface="Arial" panose="020B0604020202020204" pitchFamily="34" charset="0"/>
-                              <a:cs typeface="Arial" panose="020B0604020202020204" pitchFamily="34" charset="0"/>
+                              <a:latin typeface="Arial" panose="020B0704020202020204" pitchFamily="34" charset="0"/>
+                              <a:cs typeface="Arial" panose="020B0704020202020204" pitchFamily="34" charset="0"/>
                             </a:rPr>
                             <a:t>-</a:t>
                           </a:r>
                           <a:endParaRPr lang="en-US" sz="1800">
-                            <a:latin typeface="Arial" panose="020B0604020202020204" pitchFamily="34" charset="0"/>
-                            <a:cs typeface="Arial" panose="020B0604020202020204" pitchFamily="34" charset="0"/>
+                            <a:latin typeface="Arial" panose="020B0704020202020204" pitchFamily="34" charset="0"/>
+                            <a:cs typeface="Arial" panose="020B0704020202020204" pitchFamily="34" charset="0"/>
                           </a:endParaRPr>
                         </a:p>
                       </a:txBody>
@@ -14314,8 +14315,8 @@
                         <a:p>
                           <a:pPr algn="ctr"/>
                           <a:endParaRPr lang="en-US" sz="1800">
-                            <a:latin typeface="Arial" panose="020B0604020202020204" pitchFamily="34" charset="0"/>
-                            <a:cs typeface="Arial" panose="020B0604020202020204" pitchFamily="34" charset="0"/>
+                            <a:latin typeface="Arial" panose="020B0704020202020204" pitchFamily="34" charset="0"/>
+                            <a:cs typeface="Arial" panose="020B0704020202020204" pitchFamily="34" charset="0"/>
                           </a:endParaRPr>
                         </a:p>
                       </a:txBody>
@@ -14328,8 +14329,8 @@
                         <a:p>
                           <a:pPr algn="ctr"/>
                           <a:endParaRPr lang="en-US" sz="1800">
-                            <a:latin typeface="Arial" panose="020B0604020202020204" pitchFamily="34" charset="0"/>
-                            <a:cs typeface="Arial" panose="020B0604020202020204" pitchFamily="34" charset="0"/>
+                            <a:latin typeface="Arial" panose="020B0704020202020204" pitchFamily="34" charset="0"/>
+                            <a:cs typeface="Arial" panose="020B0704020202020204" pitchFamily="34" charset="0"/>
                           </a:endParaRPr>
                         </a:p>
                       </a:txBody>
@@ -14345,14 +14346,14 @@
                           <a:pPr algn="ctr"/>
                           <a:r>
                             <a:rPr lang="en-US" sz="1800">
-                              <a:latin typeface="Arial" panose="020B0604020202020204" pitchFamily="34" charset="0"/>
-                              <a:cs typeface="Arial" panose="020B0604020202020204" pitchFamily="34" charset="0"/>
+                              <a:latin typeface="Arial" panose="020B0704020202020204" pitchFamily="34" charset="0"/>
+                              <a:cs typeface="Arial" panose="020B0704020202020204" pitchFamily="34" charset="0"/>
                             </a:rPr>
                             <a:t>2</a:t>
                           </a:r>
                           <a:endParaRPr lang="en-US" sz="1800">
-                            <a:latin typeface="Arial" panose="020B0604020202020204" pitchFamily="34" charset="0"/>
-                            <a:cs typeface="Arial" panose="020B0604020202020204" pitchFamily="34" charset="0"/>
+                            <a:latin typeface="Arial" panose="020B0704020202020204" pitchFamily="34" charset="0"/>
+                            <a:cs typeface="Arial" panose="020B0704020202020204" pitchFamily="34" charset="0"/>
                           </a:endParaRPr>
                         </a:p>
                       </a:txBody>
@@ -14365,8 +14366,8 @@
                         <a:p>
                           <a:pPr algn="ctr"/>
                           <a:endParaRPr lang="en-US" sz="1800">
-                            <a:latin typeface="Arial" panose="020B0604020202020204" pitchFamily="34" charset="0"/>
-                            <a:cs typeface="Arial" panose="020B0604020202020204" pitchFamily="34" charset="0"/>
+                            <a:latin typeface="Arial" panose="020B0704020202020204" pitchFamily="34" charset="0"/>
+                            <a:cs typeface="Arial" panose="020B0704020202020204" pitchFamily="34" charset="0"/>
                           </a:endParaRPr>
                         </a:p>
                       </a:txBody>
@@ -14380,14 +14381,14 @@
                           <a:pPr algn="ctr"/>
                           <a:r>
                             <a:rPr lang="en-US" sz="1800">
-                              <a:latin typeface="Arial" panose="020B0604020202020204" pitchFamily="34" charset="0"/>
-                              <a:cs typeface="Arial" panose="020B0604020202020204" pitchFamily="34" charset="0"/>
+                              <a:latin typeface="Arial" panose="020B0704020202020204" pitchFamily="34" charset="0"/>
+                              <a:cs typeface="Arial" panose="020B0704020202020204" pitchFamily="34" charset="0"/>
                             </a:rPr>
                             <a:t>-</a:t>
                           </a:r>
                           <a:endParaRPr lang="en-US" sz="1800">
-                            <a:latin typeface="Arial" panose="020B0604020202020204" pitchFamily="34" charset="0"/>
-                            <a:cs typeface="Arial" panose="020B0604020202020204" pitchFamily="34" charset="0"/>
+                            <a:latin typeface="Arial" panose="020B0704020202020204" pitchFamily="34" charset="0"/>
+                            <a:cs typeface="Arial" panose="020B0704020202020204" pitchFamily="34" charset="0"/>
                           </a:endParaRPr>
                         </a:p>
                       </a:txBody>
@@ -14400,8 +14401,8 @@
                         <a:p>
                           <a:pPr algn="ctr"/>
                           <a:endParaRPr lang="en-US" sz="1800">
-                            <a:latin typeface="Arial" panose="020B0604020202020204" pitchFamily="34" charset="0"/>
-                            <a:cs typeface="Arial" panose="020B0604020202020204" pitchFamily="34" charset="0"/>
+                            <a:latin typeface="Arial" panose="020B0704020202020204" pitchFamily="34" charset="0"/>
+                            <a:cs typeface="Arial" panose="020B0704020202020204" pitchFamily="34" charset="0"/>
                           </a:endParaRPr>
                         </a:p>
                       </a:txBody>
@@ -14414,8 +14415,8 @@
                         <a:p>
                           <a:pPr algn="ctr"/>
                           <a:endParaRPr lang="en-US" sz="1800">
-                            <a:latin typeface="Arial" panose="020B0604020202020204" pitchFamily="34" charset="0"/>
-                            <a:cs typeface="Arial" panose="020B0604020202020204" pitchFamily="34" charset="0"/>
+                            <a:latin typeface="Arial" panose="020B0704020202020204" pitchFamily="34" charset="0"/>
+                            <a:cs typeface="Arial" panose="020B0704020202020204" pitchFamily="34" charset="0"/>
                           </a:endParaRPr>
                         </a:p>
                       </a:txBody>
@@ -14431,14 +14432,14 @@
                           <a:pPr algn="ctr"/>
                           <a:r>
                             <a:rPr lang="en-US" sz="1800">
-                              <a:latin typeface="Arial" panose="020B0604020202020204" pitchFamily="34" charset="0"/>
-                              <a:cs typeface="Arial" panose="020B0604020202020204" pitchFamily="34" charset="0"/>
+                              <a:latin typeface="Arial" panose="020B0704020202020204" pitchFamily="34" charset="0"/>
+                              <a:cs typeface="Arial" panose="020B0704020202020204" pitchFamily="34" charset="0"/>
                             </a:rPr>
                             <a:t>3</a:t>
                           </a:r>
                           <a:endParaRPr lang="en-US" sz="1800">
-                            <a:latin typeface="Arial" panose="020B0604020202020204" pitchFamily="34" charset="0"/>
-                            <a:cs typeface="Arial" panose="020B0604020202020204" pitchFamily="34" charset="0"/>
+                            <a:latin typeface="Arial" panose="020B0704020202020204" pitchFamily="34" charset="0"/>
+                            <a:cs typeface="Arial" panose="020B0704020202020204" pitchFamily="34" charset="0"/>
                           </a:endParaRPr>
                         </a:p>
                       </a:txBody>
@@ -14451,8 +14452,8 @@
                         <a:p>
                           <a:pPr algn="ctr"/>
                           <a:endParaRPr lang="en-US" sz="1800">
-                            <a:latin typeface="Arial" panose="020B0604020202020204" pitchFamily="34" charset="0"/>
-                            <a:cs typeface="Arial" panose="020B0604020202020204" pitchFamily="34" charset="0"/>
+                            <a:latin typeface="Arial" panose="020B0704020202020204" pitchFamily="34" charset="0"/>
+                            <a:cs typeface="Arial" panose="020B0704020202020204" pitchFamily="34" charset="0"/>
                           </a:endParaRPr>
                         </a:p>
                       </a:txBody>
@@ -14466,14 +14467,14 @@
                           <a:pPr algn="ctr"/>
                           <a:r>
                             <a:rPr lang="en-US" sz="1800">
-                              <a:latin typeface="Arial" panose="020B0604020202020204" pitchFamily="34" charset="0"/>
-                              <a:cs typeface="Arial" panose="020B0604020202020204" pitchFamily="34" charset="0"/>
+                              <a:latin typeface="Arial" panose="020B0704020202020204" pitchFamily="34" charset="0"/>
+                              <a:cs typeface="Arial" panose="020B0704020202020204" pitchFamily="34" charset="0"/>
                             </a:rPr>
                             <a:t>-</a:t>
                           </a:r>
                           <a:endParaRPr lang="en-US" sz="1800">
-                            <a:latin typeface="Arial" panose="020B0604020202020204" pitchFamily="34" charset="0"/>
-                            <a:cs typeface="Arial" panose="020B0604020202020204" pitchFamily="34" charset="0"/>
+                            <a:latin typeface="Arial" panose="020B0704020202020204" pitchFamily="34" charset="0"/>
+                            <a:cs typeface="Arial" panose="020B0704020202020204" pitchFamily="34" charset="0"/>
                           </a:endParaRPr>
                         </a:p>
                       </a:txBody>
@@ -14486,8 +14487,8 @@
                         <a:p>
                           <a:pPr algn="ctr"/>
                           <a:endParaRPr lang="en-US" sz="1800">
-                            <a:latin typeface="Arial" panose="020B0604020202020204" pitchFamily="34" charset="0"/>
-                            <a:cs typeface="Arial" panose="020B0604020202020204" pitchFamily="34" charset="0"/>
+                            <a:latin typeface="Arial" panose="020B0704020202020204" pitchFamily="34" charset="0"/>
+                            <a:cs typeface="Arial" panose="020B0704020202020204" pitchFamily="34" charset="0"/>
                           </a:endParaRPr>
                         </a:p>
                       </a:txBody>
@@ -14500,8 +14501,8 @@
                         <a:p>
                           <a:pPr algn="ctr"/>
                           <a:endParaRPr lang="en-US" sz="1800">
-                            <a:latin typeface="Arial" panose="020B0604020202020204" pitchFamily="34" charset="0"/>
-                            <a:cs typeface="Arial" panose="020B0604020202020204" pitchFamily="34" charset="0"/>
+                            <a:latin typeface="Arial" panose="020B0704020202020204" pitchFamily="34" charset="0"/>
+                            <a:cs typeface="Arial" panose="020B0704020202020204" pitchFamily="34" charset="0"/>
                           </a:endParaRPr>
                         </a:p>
                       </a:txBody>
@@ -14517,14 +14518,14 @@
                           <a:pPr algn="ctr"/>
                           <a:r>
                             <a:rPr lang="en-US" sz="1800">
-                              <a:latin typeface="Arial" panose="020B0604020202020204" pitchFamily="34" charset="0"/>
-                              <a:cs typeface="Arial" panose="020B0604020202020204" pitchFamily="34" charset="0"/>
+                              <a:latin typeface="Arial" panose="020B0704020202020204" pitchFamily="34" charset="0"/>
+                              <a:cs typeface="Arial" panose="020B0704020202020204" pitchFamily="34" charset="0"/>
                             </a:rPr>
                             <a:t>4</a:t>
                           </a:r>
                           <a:endParaRPr lang="en-US" sz="1800">
-                            <a:latin typeface="Arial" panose="020B0604020202020204" pitchFamily="34" charset="0"/>
-                            <a:cs typeface="Arial" panose="020B0604020202020204" pitchFamily="34" charset="0"/>
+                            <a:latin typeface="Arial" panose="020B0704020202020204" pitchFamily="34" charset="0"/>
+                            <a:cs typeface="Arial" panose="020B0704020202020204" pitchFamily="34" charset="0"/>
                           </a:endParaRPr>
                         </a:p>
                       </a:txBody>
@@ -14537,8 +14538,8 @@
                         <a:p>
                           <a:pPr algn="ctr"/>
                           <a:endParaRPr lang="en-US" sz="1800">
-                            <a:latin typeface="Arial" panose="020B0604020202020204" pitchFamily="34" charset="0"/>
-                            <a:cs typeface="Arial" panose="020B0604020202020204" pitchFamily="34" charset="0"/>
+                            <a:latin typeface="Arial" panose="020B0704020202020204" pitchFamily="34" charset="0"/>
+                            <a:cs typeface="Arial" panose="020B0704020202020204" pitchFamily="34" charset="0"/>
                           </a:endParaRPr>
                         </a:p>
                       </a:txBody>
@@ -14552,14 +14553,14 @@
                           <a:pPr algn="ctr"/>
                           <a:r>
                             <a:rPr lang="en-US" sz="1800">
-                              <a:latin typeface="Arial" panose="020B0604020202020204" pitchFamily="34" charset="0"/>
-                              <a:cs typeface="Arial" panose="020B0604020202020204" pitchFamily="34" charset="0"/>
+                              <a:latin typeface="Arial" panose="020B0704020202020204" pitchFamily="34" charset="0"/>
+                              <a:cs typeface="Arial" panose="020B0704020202020204" pitchFamily="34" charset="0"/>
                             </a:rPr>
                             <a:t>-</a:t>
                           </a:r>
                           <a:endParaRPr lang="en-US" sz="1800">
-                            <a:latin typeface="Arial" panose="020B0604020202020204" pitchFamily="34" charset="0"/>
-                            <a:cs typeface="Arial" panose="020B0604020202020204" pitchFamily="34" charset="0"/>
+                            <a:latin typeface="Arial" panose="020B0704020202020204" pitchFamily="34" charset="0"/>
+                            <a:cs typeface="Arial" panose="020B0704020202020204" pitchFamily="34" charset="0"/>
                           </a:endParaRPr>
                         </a:p>
                       </a:txBody>
@@ -14572,8 +14573,8 @@
                         <a:p>
                           <a:pPr algn="ctr"/>
                           <a:endParaRPr lang="en-US" sz="1800">
-                            <a:latin typeface="Arial" panose="020B0604020202020204" pitchFamily="34" charset="0"/>
-                            <a:cs typeface="Arial" panose="020B0604020202020204" pitchFamily="34" charset="0"/>
+                            <a:latin typeface="Arial" panose="020B0704020202020204" pitchFamily="34" charset="0"/>
+                            <a:cs typeface="Arial" panose="020B0704020202020204" pitchFamily="34" charset="0"/>
                           </a:endParaRPr>
                         </a:p>
                       </a:txBody>
@@ -14586,8 +14587,8 @@
                         <a:p>
                           <a:pPr algn="ctr"/>
                           <a:endParaRPr lang="en-US" sz="1800">
-                            <a:latin typeface="Arial" panose="020B0604020202020204" pitchFamily="34" charset="0"/>
-                            <a:cs typeface="Arial" panose="020B0604020202020204" pitchFamily="34" charset="0"/>
+                            <a:latin typeface="Arial" panose="020B0704020202020204" pitchFamily="34" charset="0"/>
+                            <a:cs typeface="Arial" panose="020B0704020202020204" pitchFamily="34" charset="0"/>
                           </a:endParaRPr>
                         </a:p>
                       </a:txBody>
@@ -14603,14 +14604,14 @@
                           <a:pPr algn="ctr"/>
                           <a:r>
                             <a:rPr lang="en-US" sz="1800">
-                              <a:latin typeface="Arial" panose="020B0604020202020204" pitchFamily="34" charset="0"/>
-                              <a:cs typeface="Arial" panose="020B0604020202020204" pitchFamily="34" charset="0"/>
+                              <a:latin typeface="Arial" panose="020B0704020202020204" pitchFamily="34" charset="0"/>
+                              <a:cs typeface="Arial" panose="020B0704020202020204" pitchFamily="34" charset="0"/>
                             </a:rPr>
                             <a:t>5</a:t>
                           </a:r>
                           <a:endParaRPr lang="en-US" sz="1800">
-                            <a:latin typeface="Arial" panose="020B0604020202020204" pitchFamily="34" charset="0"/>
-                            <a:cs typeface="Arial" panose="020B0604020202020204" pitchFamily="34" charset="0"/>
+                            <a:latin typeface="Arial" panose="020B0704020202020204" pitchFamily="34" charset="0"/>
+                            <a:cs typeface="Arial" panose="020B0704020202020204" pitchFamily="34" charset="0"/>
                           </a:endParaRPr>
                         </a:p>
                       </a:txBody>
@@ -14623,8 +14624,8 @@
                         <a:p>
                           <a:pPr algn="ctr"/>
                           <a:endParaRPr lang="en-US" sz="1800">
-                            <a:latin typeface="Arial" panose="020B0604020202020204" pitchFamily="34" charset="0"/>
-                            <a:cs typeface="Arial" panose="020B0604020202020204" pitchFamily="34" charset="0"/>
+                            <a:latin typeface="Arial" panose="020B0704020202020204" pitchFamily="34" charset="0"/>
+                            <a:cs typeface="Arial" panose="020B0704020202020204" pitchFamily="34" charset="0"/>
                           </a:endParaRPr>
                         </a:p>
                       </a:txBody>
@@ -14637,8 +14638,8 @@
                         <a:p>
                           <a:pPr algn="ctr"/>
                           <a:endParaRPr lang="en-US" sz="1800">
-                            <a:latin typeface="Arial" panose="020B0604020202020204" pitchFamily="34" charset="0"/>
-                            <a:cs typeface="Arial" panose="020B0604020202020204" pitchFamily="34" charset="0"/>
+                            <a:latin typeface="Arial" panose="020B0704020202020204" pitchFamily="34" charset="0"/>
+                            <a:cs typeface="Arial" panose="020B0704020202020204" pitchFamily="34" charset="0"/>
                           </a:endParaRPr>
                         </a:p>
                       </a:txBody>
@@ -14651,8 +14652,8 @@
                         <a:p>
                           <a:pPr algn="ctr"/>
                           <a:endParaRPr lang="en-US" sz="1800">
-                            <a:latin typeface="Arial" panose="020B0604020202020204" pitchFamily="34" charset="0"/>
-                            <a:cs typeface="Arial" panose="020B0604020202020204" pitchFamily="34" charset="0"/>
+                            <a:latin typeface="Arial" panose="020B0704020202020204" pitchFamily="34" charset="0"/>
+                            <a:cs typeface="Arial" panose="020B0704020202020204" pitchFamily="34" charset="0"/>
                           </a:endParaRPr>
                         </a:p>
                       </a:txBody>
@@ -14665,8 +14666,8 @@
                         <a:p>
                           <a:pPr algn="ctr"/>
                           <a:endParaRPr lang="en-US" sz="1800">
-                            <a:latin typeface="Arial" panose="020B0604020202020204" pitchFamily="34" charset="0"/>
-                            <a:cs typeface="Arial" panose="020B0604020202020204" pitchFamily="34" charset="0"/>
+                            <a:latin typeface="Arial" panose="020B0704020202020204" pitchFamily="34" charset="0"/>
+                            <a:cs typeface="Arial" panose="020B0704020202020204" pitchFamily="34" charset="0"/>
                           </a:endParaRPr>
                         </a:p>
                       </a:txBody>
@@ -14682,14 +14683,14 @@
                           <a:pPr algn="ctr"/>
                           <a:r>
                             <a:rPr lang="en-US" sz="1800">
-                              <a:latin typeface="Arial" panose="020B0604020202020204" pitchFamily="34" charset="0"/>
-                              <a:cs typeface="Arial" panose="020B0604020202020204" pitchFamily="34" charset="0"/>
+                              <a:latin typeface="Arial" panose="020B0704020202020204" pitchFamily="34" charset="0"/>
+                              <a:cs typeface="Arial" panose="020B0704020202020204" pitchFamily="34" charset="0"/>
                             </a:rPr>
                             <a:t>Trung bình</a:t>
                           </a:r>
                           <a:endParaRPr lang="en-US" sz="1800">
-                            <a:latin typeface="Arial" panose="020B0604020202020204" pitchFamily="34" charset="0"/>
-                            <a:cs typeface="Arial" panose="020B0604020202020204" pitchFamily="34" charset="0"/>
+                            <a:latin typeface="Arial" panose="020B0704020202020204" pitchFamily="34" charset="0"/>
+                            <a:cs typeface="Arial" panose="020B0704020202020204" pitchFamily="34" charset="0"/>
                           </a:endParaRPr>
                         </a:p>
                       </a:txBody>
@@ -15051,14 +15052,14 @@
               </a:pPr>
               <a:r>
                 <a:rPr lang="en-US" sz="2600" b="1">
-                  <a:latin typeface="Arial" panose="020B0604020202020204" pitchFamily="34" charset="0"/>
-                  <a:cs typeface="Arial" panose="020B0604020202020204" pitchFamily="34" charset="0"/>
+                  <a:latin typeface="Arial" panose="020B0704020202020204" pitchFamily="34" charset="0"/>
+                  <a:cs typeface="Arial" panose="020B0704020202020204" pitchFamily="34" charset="0"/>
                 </a:rPr>
                 <a:t>Hoạt động</a:t>
               </a:r>
               <a:endParaRPr lang="en-US" sz="2600" b="1">
-                <a:latin typeface="Arial" panose="020B0604020202020204" pitchFamily="34" charset="0"/>
-                <a:cs typeface="Arial" panose="020B0604020202020204" pitchFamily="34" charset="0"/>
+                <a:latin typeface="Arial" panose="020B0704020202020204" pitchFamily="34" charset="0"/>
+                <a:cs typeface="Arial" panose="020B0704020202020204" pitchFamily="34" charset="0"/>
               </a:endParaRPr>
             </a:p>
           </p:txBody>
@@ -15163,9 +15164,9 @@
                   <a:srgbClr val="000000"/>
                 </a:solidFill>
                 <a:effectLst/>
-                <a:latin typeface="Arial" panose="020B0604020202020204" pitchFamily="34" charset="0"/>
+                <a:latin typeface="Arial" panose="020B0704020202020204" pitchFamily="34" charset="0"/>
                 <a:ea typeface="Times New Roman" panose="02020603050405020304" pitchFamily="18" charset="0"/>
-                <a:cs typeface="Arial" panose="020B0604020202020204" pitchFamily="34" charset="0"/>
+                <a:cs typeface="Arial" panose="020B0704020202020204" pitchFamily="34" charset="0"/>
               </a:rPr>
               <a:t>Dùng một thước có ĐCNN là 1 mm và một đồng hồ đo thời gian có ĐCNN 0,01 s để đo 5 lần thời gian chuyển động của chiếc xe đồ chơi chạy bằng pin từ điểm A (v</a:t>
             </a:r>
@@ -15175,9 +15176,9 @@
                   <a:srgbClr val="000000"/>
                 </a:solidFill>
                 <a:effectLst/>
-                <a:latin typeface="Arial" panose="020B0604020202020204" pitchFamily="34" charset="0"/>
+                <a:latin typeface="Arial" panose="020B0704020202020204" pitchFamily="34" charset="0"/>
                 <a:ea typeface="Times New Roman" panose="02020603050405020304" pitchFamily="18" charset="0"/>
-                <a:cs typeface="Arial" panose="020B0604020202020204" pitchFamily="34" charset="0"/>
+                <a:cs typeface="Arial" panose="020B0704020202020204" pitchFamily="34" charset="0"/>
               </a:rPr>
               <a:t>A</a:t>
             </a:r>
@@ -15187,17 +15188,17 @@
                   <a:srgbClr val="000000"/>
                 </a:solidFill>
                 <a:effectLst/>
-                <a:latin typeface="Arial" panose="020B0604020202020204" pitchFamily="34" charset="0"/>
+                <a:latin typeface="Arial" panose="020B0704020202020204" pitchFamily="34" charset="0"/>
                 <a:ea typeface="Times New Roman" panose="02020603050405020304" pitchFamily="18" charset="0"/>
-                <a:cs typeface="Arial" panose="020B0604020202020204" pitchFamily="34" charset="0"/>
+                <a:cs typeface="Arial" panose="020B0704020202020204" pitchFamily="34" charset="0"/>
               </a:rPr>
               <a:t> = 0) đến điểm B. Ghi các giá trị vào Bảng và trả lời các câu hỏi. </a:t>
             </a:r>
             <a:endParaRPr lang="en-US" sz="2500">
               <a:effectLst/>
-              <a:latin typeface="Arial" panose="020B0604020202020204" pitchFamily="34" charset="0"/>
+              <a:latin typeface="Arial" panose="020B0704020202020204" pitchFamily="34" charset="0"/>
               <a:ea typeface="Times New Roman" panose="02020603050405020304" pitchFamily="18" charset="0"/>
-              <a:cs typeface="Arial" panose="020B0604020202020204" pitchFamily="34" charset="0"/>
+              <a:cs typeface="Arial" panose="020B0704020202020204" pitchFamily="34" charset="0"/>
             </a:endParaRPr>
           </a:p>
         </p:txBody>
@@ -15387,9 +15388,9 @@
                   <a:srgbClr val="000000"/>
                 </a:solidFill>
                 <a:effectLst/>
-                <a:latin typeface="Arial" panose="020B0604020202020204" pitchFamily="34" charset="0"/>
+                <a:latin typeface="Arial" panose="020B0704020202020204" pitchFamily="34" charset="0"/>
                 <a:ea typeface="Times New Roman" panose="02020603050405020304" pitchFamily="18" charset="0"/>
-                <a:cs typeface="Arial" panose="020B0604020202020204" pitchFamily="34" charset="0"/>
+                <a:cs typeface="Arial" panose="020B0704020202020204" pitchFamily="34" charset="0"/>
               </a:rPr>
               <a:t>Nguyên</a:t>
             </a:r>
@@ -15399,9 +15400,9 @@
                   <a:srgbClr val="000000"/>
                 </a:solidFill>
                 <a:effectLst/>
-                <a:latin typeface="Arial" panose="020B0604020202020204" pitchFamily="34" charset="0"/>
+                <a:latin typeface="Arial" panose="020B0704020202020204" pitchFamily="34" charset="0"/>
                 <a:ea typeface="Times New Roman" panose="02020603050405020304" pitchFamily="18" charset="0"/>
-                <a:cs typeface="Arial" panose="020B0604020202020204" pitchFamily="34" charset="0"/>
+                <a:cs typeface="Arial" panose="020B0704020202020204" pitchFamily="34" charset="0"/>
               </a:rPr>
               <a:t> </a:t>
             </a:r>
@@ -15411,9 +15412,9 @@
                   <a:srgbClr val="000000"/>
                 </a:solidFill>
                 <a:effectLst/>
-                <a:latin typeface="Arial" panose="020B0604020202020204" pitchFamily="34" charset="0"/>
+                <a:latin typeface="Arial" panose="020B0704020202020204" pitchFamily="34" charset="0"/>
                 <a:ea typeface="Times New Roman" panose="02020603050405020304" pitchFamily="18" charset="0"/>
-                <a:cs typeface="Arial" panose="020B0604020202020204" pitchFamily="34" charset="0"/>
+                <a:cs typeface="Arial" panose="020B0704020202020204" pitchFamily="34" charset="0"/>
               </a:rPr>
               <a:t>nhân</a:t>
             </a:r>
@@ -15423,9 +15424,9 @@
                   <a:srgbClr val="000000"/>
                 </a:solidFill>
                 <a:effectLst/>
-                <a:latin typeface="Arial" panose="020B0604020202020204" pitchFamily="34" charset="0"/>
+                <a:latin typeface="Arial" panose="020B0704020202020204" pitchFamily="34" charset="0"/>
                 <a:ea typeface="Times New Roman" panose="02020603050405020304" pitchFamily="18" charset="0"/>
-                <a:cs typeface="Arial" panose="020B0604020202020204" pitchFamily="34" charset="0"/>
+                <a:cs typeface="Arial" panose="020B0704020202020204" pitchFamily="34" charset="0"/>
               </a:rPr>
               <a:t> </a:t>
             </a:r>
@@ -15435,9 +15436,9 @@
                   <a:srgbClr val="000000"/>
                 </a:solidFill>
                 <a:effectLst/>
-                <a:latin typeface="Arial" panose="020B0604020202020204" pitchFamily="34" charset="0"/>
+                <a:latin typeface="Arial" panose="020B0704020202020204" pitchFamily="34" charset="0"/>
                 <a:ea typeface="Times New Roman" panose="02020603050405020304" pitchFamily="18" charset="0"/>
-                <a:cs typeface="Arial" panose="020B0604020202020204" pitchFamily="34" charset="0"/>
+                <a:cs typeface="Arial" panose="020B0704020202020204" pitchFamily="34" charset="0"/>
               </a:rPr>
               <a:t>nào</a:t>
             </a:r>
@@ -15447,9 +15448,9 @@
                   <a:srgbClr val="000000"/>
                 </a:solidFill>
                 <a:effectLst/>
-                <a:latin typeface="Arial" panose="020B0604020202020204" pitchFamily="34" charset="0"/>
+                <a:latin typeface="Arial" panose="020B0704020202020204" pitchFamily="34" charset="0"/>
                 <a:ea typeface="Times New Roman" panose="02020603050405020304" pitchFamily="18" charset="0"/>
-                <a:cs typeface="Arial" panose="020B0604020202020204" pitchFamily="34" charset="0"/>
+                <a:cs typeface="Arial" panose="020B0704020202020204" pitchFamily="34" charset="0"/>
               </a:rPr>
               <a:t> </a:t>
             </a:r>
@@ -15459,9 +15460,9 @@
                   <a:srgbClr val="000000"/>
                 </a:solidFill>
                 <a:effectLst/>
-                <a:latin typeface="Arial" panose="020B0604020202020204" pitchFamily="34" charset="0"/>
+                <a:latin typeface="Arial" panose="020B0704020202020204" pitchFamily="34" charset="0"/>
                 <a:ea typeface="Times New Roman" panose="02020603050405020304" pitchFamily="18" charset="0"/>
-                <a:cs typeface="Arial" panose="020B0604020202020204" pitchFamily="34" charset="0"/>
+                <a:cs typeface="Arial" panose="020B0704020202020204" pitchFamily="34" charset="0"/>
               </a:rPr>
               <a:t>gây</a:t>
             </a:r>
@@ -15471,9 +15472,9 @@
                   <a:srgbClr val="000000"/>
                 </a:solidFill>
                 <a:effectLst/>
-                <a:latin typeface="Arial" panose="020B0604020202020204" pitchFamily="34" charset="0"/>
+                <a:latin typeface="Arial" panose="020B0704020202020204" pitchFamily="34" charset="0"/>
                 <a:ea typeface="Times New Roman" panose="02020603050405020304" pitchFamily="18" charset="0"/>
-                <a:cs typeface="Arial" panose="020B0604020202020204" pitchFamily="34" charset="0"/>
+                <a:cs typeface="Arial" panose="020B0704020202020204" pitchFamily="34" charset="0"/>
               </a:rPr>
               <a:t> </a:t>
             </a:r>
@@ -15483,9 +15484,9 @@
                   <a:srgbClr val="000000"/>
                 </a:solidFill>
                 <a:effectLst/>
-                <a:latin typeface="Arial" panose="020B0604020202020204" pitchFamily="34" charset="0"/>
+                <a:latin typeface="Arial" panose="020B0704020202020204" pitchFamily="34" charset="0"/>
                 <a:ea typeface="Times New Roman" panose="02020603050405020304" pitchFamily="18" charset="0"/>
-                <a:cs typeface="Arial" panose="020B0604020202020204" pitchFamily="34" charset="0"/>
+                <a:cs typeface="Arial" panose="020B0704020202020204" pitchFamily="34" charset="0"/>
               </a:rPr>
               <a:t>ra</a:t>
             </a:r>
@@ -15495,9 +15496,9 @@
                   <a:srgbClr val="000000"/>
                 </a:solidFill>
                 <a:effectLst/>
-                <a:latin typeface="Arial" panose="020B0604020202020204" pitchFamily="34" charset="0"/>
+                <a:latin typeface="Arial" panose="020B0704020202020204" pitchFamily="34" charset="0"/>
                 <a:ea typeface="Times New Roman" panose="02020603050405020304" pitchFamily="18" charset="0"/>
-                <a:cs typeface="Arial" panose="020B0604020202020204" pitchFamily="34" charset="0"/>
+                <a:cs typeface="Arial" panose="020B0704020202020204" pitchFamily="34" charset="0"/>
               </a:rPr>
               <a:t> </a:t>
             </a:r>
@@ -15507,9 +15508,9 @@
                   <a:srgbClr val="000000"/>
                 </a:solidFill>
                 <a:effectLst/>
-                <a:latin typeface="Arial" panose="020B0604020202020204" pitchFamily="34" charset="0"/>
+                <a:latin typeface="Arial" panose="020B0704020202020204" pitchFamily="34" charset="0"/>
                 <a:ea typeface="Times New Roman" panose="02020603050405020304" pitchFamily="18" charset="0"/>
-                <a:cs typeface="Arial" panose="020B0604020202020204" pitchFamily="34" charset="0"/>
+                <a:cs typeface="Arial" panose="020B0704020202020204" pitchFamily="34" charset="0"/>
               </a:rPr>
               <a:t>sự</a:t>
             </a:r>
@@ -15519,9 +15520,9 @@
                   <a:srgbClr val="000000"/>
                 </a:solidFill>
                 <a:effectLst/>
-                <a:latin typeface="Arial" panose="020B0604020202020204" pitchFamily="34" charset="0"/>
+                <a:latin typeface="Arial" panose="020B0704020202020204" pitchFamily="34" charset="0"/>
                 <a:ea typeface="Times New Roman" panose="02020603050405020304" pitchFamily="18" charset="0"/>
-                <a:cs typeface="Arial" panose="020B0604020202020204" pitchFamily="34" charset="0"/>
+                <a:cs typeface="Arial" panose="020B0704020202020204" pitchFamily="34" charset="0"/>
               </a:rPr>
               <a:t> </a:t>
             </a:r>
@@ -15531,9 +15532,9 @@
                   <a:srgbClr val="000000"/>
                 </a:solidFill>
                 <a:effectLst/>
-                <a:latin typeface="Arial" panose="020B0604020202020204" pitchFamily="34" charset="0"/>
+                <a:latin typeface="Arial" panose="020B0704020202020204" pitchFamily="34" charset="0"/>
                 <a:ea typeface="Times New Roman" panose="02020603050405020304" pitchFamily="18" charset="0"/>
-                <a:cs typeface="Arial" panose="020B0604020202020204" pitchFamily="34" charset="0"/>
+                <a:cs typeface="Arial" panose="020B0704020202020204" pitchFamily="34" charset="0"/>
               </a:rPr>
               <a:t>sai</a:t>
             </a:r>
@@ -15543,9 +15544,9 @@
                   <a:srgbClr val="000000"/>
                 </a:solidFill>
                 <a:effectLst/>
-                <a:latin typeface="Arial" panose="020B0604020202020204" pitchFamily="34" charset="0"/>
+                <a:latin typeface="Arial" panose="020B0704020202020204" pitchFamily="34" charset="0"/>
                 <a:ea typeface="Times New Roman" panose="02020603050405020304" pitchFamily="18" charset="0"/>
-                <a:cs typeface="Arial" panose="020B0604020202020204" pitchFamily="34" charset="0"/>
+                <a:cs typeface="Arial" panose="020B0704020202020204" pitchFamily="34" charset="0"/>
               </a:rPr>
               <a:t> </a:t>
             </a:r>
@@ -15555,9 +15556,9 @@
                   <a:srgbClr val="000000"/>
                 </a:solidFill>
                 <a:effectLst/>
-                <a:latin typeface="Arial" panose="020B0604020202020204" pitchFamily="34" charset="0"/>
+                <a:latin typeface="Arial" panose="020B0704020202020204" pitchFamily="34" charset="0"/>
                 <a:ea typeface="Times New Roman" panose="02020603050405020304" pitchFamily="18" charset="0"/>
-                <a:cs typeface="Arial" panose="020B0604020202020204" pitchFamily="34" charset="0"/>
+                <a:cs typeface="Arial" panose="020B0704020202020204" pitchFamily="34" charset="0"/>
               </a:rPr>
               <a:t>khác</a:t>
             </a:r>
@@ -15567,9 +15568,9 @@
                   <a:srgbClr val="000000"/>
                 </a:solidFill>
                 <a:effectLst/>
-                <a:latin typeface="Arial" panose="020B0604020202020204" pitchFamily="34" charset="0"/>
+                <a:latin typeface="Arial" panose="020B0704020202020204" pitchFamily="34" charset="0"/>
                 <a:ea typeface="Times New Roman" panose="02020603050405020304" pitchFamily="18" charset="0"/>
-                <a:cs typeface="Arial" panose="020B0604020202020204" pitchFamily="34" charset="0"/>
+                <a:cs typeface="Arial" panose="020B0704020202020204" pitchFamily="34" charset="0"/>
               </a:rPr>
               <a:t> </a:t>
             </a:r>
@@ -15579,9 +15580,9 @@
                   <a:srgbClr val="000000"/>
                 </a:solidFill>
                 <a:effectLst/>
-                <a:latin typeface="Arial" panose="020B0604020202020204" pitchFamily="34" charset="0"/>
+                <a:latin typeface="Arial" panose="020B0704020202020204" pitchFamily="34" charset="0"/>
                 <a:ea typeface="Times New Roman" panose="02020603050405020304" pitchFamily="18" charset="0"/>
-                <a:cs typeface="Arial" panose="020B0604020202020204" pitchFamily="34" charset="0"/>
+                <a:cs typeface="Arial" panose="020B0704020202020204" pitchFamily="34" charset="0"/>
               </a:rPr>
               <a:t>giữa</a:t>
             </a:r>
@@ -15591,9 +15592,9 @@
                   <a:srgbClr val="000000"/>
                 </a:solidFill>
                 <a:effectLst/>
-                <a:latin typeface="Arial" panose="020B0604020202020204" pitchFamily="34" charset="0"/>
+                <a:latin typeface="Arial" panose="020B0704020202020204" pitchFamily="34" charset="0"/>
                 <a:ea typeface="Times New Roman" panose="02020603050405020304" pitchFamily="18" charset="0"/>
-                <a:cs typeface="Arial" panose="020B0604020202020204" pitchFamily="34" charset="0"/>
+                <a:cs typeface="Arial" panose="020B0704020202020204" pitchFamily="34" charset="0"/>
               </a:rPr>
               <a:t> </a:t>
             </a:r>
@@ -15603,9 +15604,9 @@
                   <a:srgbClr val="000000"/>
                 </a:solidFill>
                 <a:effectLst/>
-                <a:latin typeface="Arial" panose="020B0604020202020204" pitchFamily="34" charset="0"/>
+                <a:latin typeface="Arial" panose="020B0704020202020204" pitchFamily="34" charset="0"/>
                 <a:ea typeface="Times New Roman" panose="02020603050405020304" pitchFamily="18" charset="0"/>
-                <a:cs typeface="Arial" panose="020B0604020202020204" pitchFamily="34" charset="0"/>
+                <a:cs typeface="Arial" panose="020B0704020202020204" pitchFamily="34" charset="0"/>
               </a:rPr>
               <a:t>các</a:t>
             </a:r>
@@ -15615,9 +15616,9 @@
                   <a:srgbClr val="000000"/>
                 </a:solidFill>
                 <a:effectLst/>
-                <a:latin typeface="Arial" panose="020B0604020202020204" pitchFamily="34" charset="0"/>
+                <a:latin typeface="Arial" panose="020B0704020202020204" pitchFamily="34" charset="0"/>
                 <a:ea typeface="Times New Roman" panose="02020603050405020304" pitchFamily="18" charset="0"/>
-                <a:cs typeface="Arial" panose="020B0604020202020204" pitchFamily="34" charset="0"/>
+                <a:cs typeface="Arial" panose="020B0704020202020204" pitchFamily="34" charset="0"/>
               </a:rPr>
               <a:t> </a:t>
             </a:r>
@@ -15627,9 +15628,9 @@
                   <a:srgbClr val="000000"/>
                 </a:solidFill>
                 <a:effectLst/>
-                <a:latin typeface="Arial" panose="020B0604020202020204" pitchFamily="34" charset="0"/>
+                <a:latin typeface="Arial" panose="020B0704020202020204" pitchFamily="34" charset="0"/>
                 <a:ea typeface="Times New Roman" panose="02020603050405020304" pitchFamily="18" charset="0"/>
-                <a:cs typeface="Arial" panose="020B0604020202020204" pitchFamily="34" charset="0"/>
+                <a:cs typeface="Arial" panose="020B0704020202020204" pitchFamily="34" charset="0"/>
               </a:rPr>
               <a:t>lần</a:t>
             </a:r>
@@ -15639,9 +15640,9 @@
                   <a:srgbClr val="000000"/>
                 </a:solidFill>
                 <a:effectLst/>
-                <a:latin typeface="Arial" panose="020B0604020202020204" pitchFamily="34" charset="0"/>
+                <a:latin typeface="Arial" panose="020B0704020202020204" pitchFamily="34" charset="0"/>
                 <a:ea typeface="Times New Roman" panose="02020603050405020304" pitchFamily="18" charset="0"/>
-                <a:cs typeface="Arial" panose="020B0604020202020204" pitchFamily="34" charset="0"/>
+                <a:cs typeface="Arial" panose="020B0704020202020204" pitchFamily="34" charset="0"/>
               </a:rPr>
               <a:t> </a:t>
             </a:r>
@@ -15651,9 +15652,9 @@
                   <a:srgbClr val="000000"/>
                 </a:solidFill>
                 <a:effectLst/>
-                <a:latin typeface="Arial" panose="020B0604020202020204" pitchFamily="34" charset="0"/>
+                <a:latin typeface="Arial" panose="020B0704020202020204" pitchFamily="34" charset="0"/>
                 <a:ea typeface="Times New Roman" panose="02020603050405020304" pitchFamily="18" charset="0"/>
-                <a:cs typeface="Arial" panose="020B0604020202020204" pitchFamily="34" charset="0"/>
+                <a:cs typeface="Arial" panose="020B0704020202020204" pitchFamily="34" charset="0"/>
               </a:rPr>
               <a:t>đo</a:t>
             </a:r>
@@ -15663,9 +15664,9 @@
                   <a:srgbClr val="000000"/>
                 </a:solidFill>
                 <a:effectLst/>
-                <a:latin typeface="Arial" panose="020B0604020202020204" pitchFamily="34" charset="0"/>
+                <a:latin typeface="Arial" panose="020B0704020202020204" pitchFamily="34" charset="0"/>
                 <a:ea typeface="Times New Roman" panose="02020603050405020304" pitchFamily="18" charset="0"/>
-                <a:cs typeface="Arial" panose="020B0604020202020204" pitchFamily="34" charset="0"/>
+                <a:cs typeface="Arial" panose="020B0704020202020204" pitchFamily="34" charset="0"/>
               </a:rPr>
               <a:t>?</a:t>
             </a:r>
@@ -15674,9 +15675,9 @@
                 <a:srgbClr val="000000"/>
               </a:solidFill>
               <a:effectLst/>
-              <a:latin typeface="Arial" panose="020B0604020202020204" pitchFamily="34" charset="0"/>
+              <a:latin typeface="Arial" panose="020B0704020202020204" pitchFamily="34" charset="0"/>
               <a:ea typeface="Times New Roman" panose="02020603050405020304" pitchFamily="18" charset="0"/>
-              <a:cs typeface="Arial" panose="020B0604020202020204" pitchFamily="34" charset="0"/>
+              <a:cs typeface="Arial" panose="020B0704020202020204" pitchFamily="34" charset="0"/>
             </a:endParaRPr>
           </a:p>
           <a:p>
@@ -15695,9 +15696,9 @@
                   <a:srgbClr val="000000"/>
                 </a:solidFill>
                 <a:effectLst/>
-                <a:latin typeface="Arial" panose="020B0604020202020204" pitchFamily="34" charset="0"/>
+                <a:latin typeface="Arial" panose="020B0704020202020204" pitchFamily="34" charset="0"/>
                 <a:ea typeface="Times New Roman" panose="02020603050405020304" pitchFamily="18" charset="0"/>
-                <a:cs typeface="Arial" panose="020B0604020202020204" pitchFamily="34" charset="0"/>
+                <a:cs typeface="Arial" panose="020B0704020202020204" pitchFamily="34" charset="0"/>
               </a:rPr>
               <a:t>Tính</a:t>
             </a:r>
@@ -15707,9 +15708,9 @@
                   <a:srgbClr val="000000"/>
                 </a:solidFill>
                 <a:effectLst/>
-                <a:latin typeface="Arial" panose="020B0604020202020204" pitchFamily="34" charset="0"/>
+                <a:latin typeface="Arial" panose="020B0704020202020204" pitchFamily="34" charset="0"/>
                 <a:ea typeface="Times New Roman" panose="02020603050405020304" pitchFamily="18" charset="0"/>
-                <a:cs typeface="Arial" panose="020B0604020202020204" pitchFamily="34" charset="0"/>
+                <a:cs typeface="Arial" panose="020B0704020202020204" pitchFamily="34" charset="0"/>
               </a:rPr>
               <a:t> </a:t>
             </a:r>
@@ -15719,9 +15720,9 @@
                   <a:srgbClr val="000000"/>
                 </a:solidFill>
                 <a:effectLst/>
-                <a:latin typeface="Arial" panose="020B0604020202020204" pitchFamily="34" charset="0"/>
+                <a:latin typeface="Arial" panose="020B0704020202020204" pitchFamily="34" charset="0"/>
                 <a:ea typeface="Times New Roman" panose="02020603050405020304" pitchFamily="18" charset="0"/>
-                <a:cs typeface="Arial" panose="020B0604020202020204" pitchFamily="34" charset="0"/>
+                <a:cs typeface="Arial" panose="020B0704020202020204" pitchFamily="34" charset="0"/>
               </a:rPr>
               <a:t>sai</a:t>
             </a:r>
@@ -15731,9 +15732,9 @@
                   <a:srgbClr val="000000"/>
                 </a:solidFill>
                 <a:effectLst/>
-                <a:latin typeface="Arial" panose="020B0604020202020204" pitchFamily="34" charset="0"/>
+                <a:latin typeface="Arial" panose="020B0704020202020204" pitchFamily="34" charset="0"/>
                 <a:ea typeface="Times New Roman" panose="02020603050405020304" pitchFamily="18" charset="0"/>
-                <a:cs typeface="Arial" panose="020B0604020202020204" pitchFamily="34" charset="0"/>
+                <a:cs typeface="Arial" panose="020B0704020202020204" pitchFamily="34" charset="0"/>
               </a:rPr>
               <a:t> </a:t>
             </a:r>
@@ -15743,9 +15744,9 @@
                   <a:srgbClr val="000000"/>
                 </a:solidFill>
                 <a:effectLst/>
-                <a:latin typeface="Arial" panose="020B0604020202020204" pitchFamily="34" charset="0"/>
+                <a:latin typeface="Arial" panose="020B0704020202020204" pitchFamily="34" charset="0"/>
                 <a:ea typeface="Times New Roman" panose="02020603050405020304" pitchFamily="18" charset="0"/>
-                <a:cs typeface="Arial" panose="020B0604020202020204" pitchFamily="34" charset="0"/>
+                <a:cs typeface="Arial" panose="020B0704020202020204" pitchFamily="34" charset="0"/>
               </a:rPr>
               <a:t>số</a:t>
             </a:r>
@@ -15755,9 +15756,9 @@
                   <a:srgbClr val="000000"/>
                 </a:solidFill>
                 <a:effectLst/>
-                <a:latin typeface="Arial" panose="020B0604020202020204" pitchFamily="34" charset="0"/>
+                <a:latin typeface="Arial" panose="020B0704020202020204" pitchFamily="34" charset="0"/>
                 <a:ea typeface="Times New Roman" panose="02020603050405020304" pitchFamily="18" charset="0"/>
-                <a:cs typeface="Arial" panose="020B0604020202020204" pitchFamily="34" charset="0"/>
+                <a:cs typeface="Arial" panose="020B0704020202020204" pitchFamily="34" charset="0"/>
               </a:rPr>
               <a:t> </a:t>
             </a:r>
@@ -15767,9 +15768,9 @@
                   <a:srgbClr val="000000"/>
                 </a:solidFill>
                 <a:effectLst/>
-                <a:latin typeface="Arial" panose="020B0604020202020204" pitchFamily="34" charset="0"/>
+                <a:latin typeface="Arial" panose="020B0704020202020204" pitchFamily="34" charset="0"/>
                 <a:ea typeface="Times New Roman" panose="02020603050405020304" pitchFamily="18" charset="0"/>
-                <a:cs typeface="Arial" panose="020B0604020202020204" pitchFamily="34" charset="0"/>
+                <a:cs typeface="Arial" panose="020B0704020202020204" pitchFamily="34" charset="0"/>
               </a:rPr>
               <a:t>tuyệt</a:t>
             </a:r>
@@ -15779,9 +15780,9 @@
                   <a:srgbClr val="000000"/>
                 </a:solidFill>
                 <a:effectLst/>
-                <a:latin typeface="Arial" panose="020B0604020202020204" pitchFamily="34" charset="0"/>
+                <a:latin typeface="Arial" panose="020B0704020202020204" pitchFamily="34" charset="0"/>
                 <a:ea typeface="Times New Roman" panose="02020603050405020304" pitchFamily="18" charset="0"/>
-                <a:cs typeface="Arial" panose="020B0604020202020204" pitchFamily="34" charset="0"/>
+                <a:cs typeface="Arial" panose="020B0704020202020204" pitchFamily="34" charset="0"/>
               </a:rPr>
               <a:t> </a:t>
             </a:r>
@@ -15791,9 +15792,9 @@
                   <a:srgbClr val="000000"/>
                 </a:solidFill>
                 <a:effectLst/>
-                <a:latin typeface="Arial" panose="020B0604020202020204" pitchFamily="34" charset="0"/>
+                <a:latin typeface="Arial" panose="020B0704020202020204" pitchFamily="34" charset="0"/>
                 <a:ea typeface="Times New Roman" panose="02020603050405020304" pitchFamily="18" charset="0"/>
-                <a:cs typeface="Arial" panose="020B0604020202020204" pitchFamily="34" charset="0"/>
+                <a:cs typeface="Arial" panose="020B0704020202020204" pitchFamily="34" charset="0"/>
               </a:rPr>
               <a:t>đối</a:t>
             </a:r>
@@ -15803,9 +15804,9 @@
                   <a:srgbClr val="000000"/>
                 </a:solidFill>
                 <a:effectLst/>
-                <a:latin typeface="Arial" panose="020B0604020202020204" pitchFamily="34" charset="0"/>
+                <a:latin typeface="Arial" panose="020B0704020202020204" pitchFamily="34" charset="0"/>
                 <a:ea typeface="Times New Roman" panose="02020603050405020304" pitchFamily="18" charset="0"/>
-                <a:cs typeface="Arial" panose="020B0604020202020204" pitchFamily="34" charset="0"/>
+                <a:cs typeface="Arial" panose="020B0704020202020204" pitchFamily="34" charset="0"/>
               </a:rPr>
               <a:t> </a:t>
             </a:r>
@@ -15815,9 +15816,9 @@
                   <a:srgbClr val="000000"/>
                 </a:solidFill>
                 <a:effectLst/>
-                <a:latin typeface="Arial" panose="020B0604020202020204" pitchFamily="34" charset="0"/>
+                <a:latin typeface="Arial" panose="020B0704020202020204" pitchFamily="34" charset="0"/>
                 <a:ea typeface="Times New Roman" panose="02020603050405020304" pitchFamily="18" charset="0"/>
-                <a:cs typeface="Arial" panose="020B0604020202020204" pitchFamily="34" charset="0"/>
+                <a:cs typeface="Arial" panose="020B0704020202020204" pitchFamily="34" charset="0"/>
               </a:rPr>
               <a:t>của</a:t>
             </a:r>
@@ -15827,9 +15828,9 @@
                   <a:srgbClr val="000000"/>
                 </a:solidFill>
                 <a:effectLst/>
-                <a:latin typeface="Arial" panose="020B0604020202020204" pitchFamily="34" charset="0"/>
+                <a:latin typeface="Arial" panose="020B0704020202020204" pitchFamily="34" charset="0"/>
                 <a:ea typeface="Times New Roman" panose="02020603050405020304" pitchFamily="18" charset="0"/>
-                <a:cs typeface="Arial" panose="020B0604020202020204" pitchFamily="34" charset="0"/>
+                <a:cs typeface="Arial" panose="020B0704020202020204" pitchFamily="34" charset="0"/>
               </a:rPr>
               <a:t> </a:t>
             </a:r>
@@ -15839,9 +15840,9 @@
                   <a:srgbClr val="000000"/>
                 </a:solidFill>
                 <a:effectLst/>
-                <a:latin typeface="Arial" panose="020B0604020202020204" pitchFamily="34" charset="0"/>
+                <a:latin typeface="Arial" panose="020B0704020202020204" pitchFamily="34" charset="0"/>
                 <a:ea typeface="Times New Roman" panose="02020603050405020304" pitchFamily="18" charset="0"/>
-                <a:cs typeface="Arial" panose="020B0604020202020204" pitchFamily="34" charset="0"/>
+                <a:cs typeface="Arial" panose="020B0704020202020204" pitchFamily="34" charset="0"/>
               </a:rPr>
               <a:t>phép</a:t>
             </a:r>
@@ -15851,9 +15852,9 @@
                   <a:srgbClr val="000000"/>
                 </a:solidFill>
                 <a:effectLst/>
-                <a:latin typeface="Arial" panose="020B0604020202020204" pitchFamily="34" charset="0"/>
+                <a:latin typeface="Arial" panose="020B0704020202020204" pitchFamily="34" charset="0"/>
                 <a:ea typeface="Times New Roman" panose="02020603050405020304" pitchFamily="18" charset="0"/>
-                <a:cs typeface="Arial" panose="020B0604020202020204" pitchFamily="34" charset="0"/>
+                <a:cs typeface="Arial" panose="020B0704020202020204" pitchFamily="34" charset="0"/>
               </a:rPr>
               <a:t> </a:t>
             </a:r>
@@ -15863,9 +15864,9 @@
                   <a:srgbClr val="000000"/>
                 </a:solidFill>
                 <a:effectLst/>
-                <a:latin typeface="Arial" panose="020B0604020202020204" pitchFamily="34" charset="0"/>
+                <a:latin typeface="Arial" panose="020B0704020202020204" pitchFamily="34" charset="0"/>
                 <a:ea typeface="Times New Roman" panose="02020603050405020304" pitchFamily="18" charset="0"/>
-                <a:cs typeface="Arial" panose="020B0604020202020204" pitchFamily="34" charset="0"/>
+                <a:cs typeface="Arial" panose="020B0704020202020204" pitchFamily="34" charset="0"/>
               </a:rPr>
               <a:t>đo</a:t>
             </a:r>
@@ -15875,9 +15876,9 @@
                   <a:srgbClr val="000000"/>
                 </a:solidFill>
                 <a:effectLst/>
-                <a:latin typeface="Arial" panose="020B0604020202020204" pitchFamily="34" charset="0"/>
+                <a:latin typeface="Arial" panose="020B0704020202020204" pitchFamily="34" charset="0"/>
                 <a:ea typeface="Times New Roman" panose="02020603050405020304" pitchFamily="18" charset="0"/>
-                <a:cs typeface="Arial" panose="020B0604020202020204" pitchFamily="34" charset="0"/>
+                <a:cs typeface="Arial" panose="020B0704020202020204" pitchFamily="34" charset="0"/>
               </a:rPr>
               <a:t> s, </a:t>
             </a:r>
@@ -15887,9 +15888,9 @@
                   <a:srgbClr val="000000"/>
                 </a:solidFill>
                 <a:effectLst/>
-                <a:latin typeface="Arial" panose="020B0604020202020204" pitchFamily="34" charset="0"/>
+                <a:latin typeface="Arial" panose="020B0704020202020204" pitchFamily="34" charset="0"/>
                 <a:ea typeface="Times New Roman" panose="02020603050405020304" pitchFamily="18" charset="0"/>
-                <a:cs typeface="Arial" panose="020B0604020202020204" pitchFamily="34" charset="0"/>
+                <a:cs typeface="Arial" panose="020B0704020202020204" pitchFamily="34" charset="0"/>
               </a:rPr>
               <a:t>tvà</a:t>
             </a:r>
@@ -15899,9 +15900,9 @@
                   <a:srgbClr val="000000"/>
                 </a:solidFill>
                 <a:effectLst/>
-                <a:latin typeface="Arial" panose="020B0604020202020204" pitchFamily="34" charset="0"/>
+                <a:latin typeface="Arial" panose="020B0704020202020204" pitchFamily="34" charset="0"/>
                 <a:ea typeface="Times New Roman" panose="02020603050405020304" pitchFamily="18" charset="0"/>
-                <a:cs typeface="Arial" panose="020B0604020202020204" pitchFamily="34" charset="0"/>
+                <a:cs typeface="Arial" panose="020B0704020202020204" pitchFamily="34" charset="0"/>
               </a:rPr>
               <a:t> </a:t>
             </a:r>
@@ -15911,9 +15912,9 @@
                   <a:srgbClr val="000000"/>
                 </a:solidFill>
                 <a:effectLst/>
-                <a:latin typeface="Arial" panose="020B0604020202020204" pitchFamily="34" charset="0"/>
+                <a:latin typeface="Arial" panose="020B0704020202020204" pitchFamily="34" charset="0"/>
                 <a:ea typeface="Times New Roman" panose="02020603050405020304" pitchFamily="18" charset="0"/>
-                <a:cs typeface="Arial" panose="020B0604020202020204" pitchFamily="34" charset="0"/>
+                <a:cs typeface="Arial" panose="020B0704020202020204" pitchFamily="34" charset="0"/>
               </a:rPr>
               <a:t>điền</a:t>
             </a:r>
@@ -15923,9 +15924,9 @@
                   <a:srgbClr val="000000"/>
                 </a:solidFill>
                 <a:effectLst/>
-                <a:latin typeface="Arial" panose="020B0604020202020204" pitchFamily="34" charset="0"/>
+                <a:latin typeface="Arial" panose="020B0704020202020204" pitchFamily="34" charset="0"/>
                 <a:ea typeface="Times New Roman" panose="02020603050405020304" pitchFamily="18" charset="0"/>
-                <a:cs typeface="Arial" panose="020B0604020202020204" pitchFamily="34" charset="0"/>
+                <a:cs typeface="Arial" panose="020B0704020202020204" pitchFamily="34" charset="0"/>
               </a:rPr>
               <a:t> </a:t>
             </a:r>
@@ -15935,9 +15936,9 @@
                   <a:srgbClr val="000000"/>
                 </a:solidFill>
                 <a:effectLst/>
-                <a:latin typeface="Arial" panose="020B0604020202020204" pitchFamily="34" charset="0"/>
+                <a:latin typeface="Arial" panose="020B0704020202020204" pitchFamily="34" charset="0"/>
                 <a:ea typeface="Times New Roman" panose="02020603050405020304" pitchFamily="18" charset="0"/>
-                <a:cs typeface="Arial" panose="020B0604020202020204" pitchFamily="34" charset="0"/>
+                <a:cs typeface="Arial" panose="020B0704020202020204" pitchFamily="34" charset="0"/>
               </a:rPr>
               <a:t>vào</a:t>
             </a:r>
@@ -15947,9 +15948,9 @@
                   <a:srgbClr val="000000"/>
                 </a:solidFill>
                 <a:effectLst/>
-                <a:latin typeface="Arial" panose="020B0604020202020204" pitchFamily="34" charset="0"/>
+                <a:latin typeface="Arial" panose="020B0704020202020204" pitchFamily="34" charset="0"/>
                 <a:ea typeface="Times New Roman" panose="02020603050405020304" pitchFamily="18" charset="0"/>
-                <a:cs typeface="Arial" panose="020B0604020202020204" pitchFamily="34" charset="0"/>
+                <a:cs typeface="Arial" panose="020B0704020202020204" pitchFamily="34" charset="0"/>
               </a:rPr>
               <a:t> </a:t>
             </a:r>
@@ -15959,9 +15960,9 @@
                   <a:srgbClr val="000000"/>
                 </a:solidFill>
                 <a:effectLst/>
-                <a:latin typeface="Arial" panose="020B0604020202020204" pitchFamily="34" charset="0"/>
+                <a:latin typeface="Arial" panose="020B0704020202020204" pitchFamily="34" charset="0"/>
                 <a:ea typeface="Times New Roman" panose="02020603050405020304" pitchFamily="18" charset="0"/>
-                <a:cs typeface="Arial" panose="020B0604020202020204" pitchFamily="34" charset="0"/>
+                <a:cs typeface="Arial" panose="020B0704020202020204" pitchFamily="34" charset="0"/>
               </a:rPr>
               <a:t>Bảng</a:t>
             </a:r>
@@ -15971,9 +15972,9 @@
                   <a:srgbClr val="000000"/>
                 </a:solidFill>
                 <a:effectLst/>
-                <a:latin typeface="Arial" panose="020B0604020202020204" pitchFamily="34" charset="0"/>
+                <a:latin typeface="Arial" panose="020B0704020202020204" pitchFamily="34" charset="0"/>
                 <a:ea typeface="Times New Roman" panose="02020603050405020304" pitchFamily="18" charset="0"/>
-                <a:cs typeface="Arial" panose="020B0604020202020204" pitchFamily="34" charset="0"/>
+                <a:cs typeface="Arial" panose="020B0704020202020204" pitchFamily="34" charset="0"/>
               </a:rPr>
               <a:t> 3.1. </a:t>
             </a:r>
@@ -15982,9 +15983,9 @@
                 <a:srgbClr val="000000"/>
               </a:solidFill>
               <a:effectLst/>
-              <a:latin typeface="Arial" panose="020B0604020202020204" pitchFamily="34" charset="0"/>
+              <a:latin typeface="Arial" panose="020B0704020202020204" pitchFamily="34" charset="0"/>
               <a:ea typeface="Times New Roman" panose="02020603050405020304" pitchFamily="18" charset="0"/>
-              <a:cs typeface="Arial" panose="020B0604020202020204" pitchFamily="34" charset="0"/>
+              <a:cs typeface="Arial" panose="020B0704020202020204" pitchFamily="34" charset="0"/>
             </a:endParaRPr>
           </a:p>
           <a:p>
@@ -16003,9 +16004,9 @@
                   <a:srgbClr val="000000"/>
                 </a:solidFill>
                 <a:effectLst/>
-                <a:latin typeface="Arial" panose="020B0604020202020204" pitchFamily="34" charset="0"/>
+                <a:latin typeface="Arial" panose="020B0704020202020204" pitchFamily="34" charset="0"/>
                 <a:ea typeface="Times New Roman" panose="02020603050405020304" pitchFamily="18" charset="0"/>
-                <a:cs typeface="Arial" panose="020B0604020202020204" pitchFamily="34" charset="0"/>
+                <a:cs typeface="Arial" panose="020B0704020202020204" pitchFamily="34" charset="0"/>
               </a:rPr>
               <a:t>Viết</a:t>
             </a:r>
@@ -16015,9 +16016,9 @@
                   <a:srgbClr val="000000"/>
                 </a:solidFill>
                 <a:effectLst/>
-                <a:latin typeface="Arial" panose="020B0604020202020204" pitchFamily="34" charset="0"/>
+                <a:latin typeface="Arial" panose="020B0704020202020204" pitchFamily="34" charset="0"/>
                 <a:ea typeface="Times New Roman" panose="02020603050405020304" pitchFamily="18" charset="0"/>
-                <a:cs typeface="Arial" panose="020B0604020202020204" pitchFamily="34" charset="0"/>
+                <a:cs typeface="Arial" panose="020B0704020202020204" pitchFamily="34" charset="0"/>
               </a:rPr>
               <a:t> </a:t>
             </a:r>
@@ -16027,9 +16028,9 @@
                   <a:srgbClr val="000000"/>
                 </a:solidFill>
                 <a:effectLst/>
-                <a:latin typeface="Arial" panose="020B0604020202020204" pitchFamily="34" charset="0"/>
+                <a:latin typeface="Arial" panose="020B0704020202020204" pitchFamily="34" charset="0"/>
                 <a:ea typeface="Times New Roman" panose="02020603050405020304" pitchFamily="18" charset="0"/>
-                <a:cs typeface="Arial" panose="020B0604020202020204" pitchFamily="34" charset="0"/>
+                <a:cs typeface="Arial" panose="020B0704020202020204" pitchFamily="34" charset="0"/>
               </a:rPr>
               <a:t>kết</a:t>
             </a:r>
@@ -16039,9 +16040,9 @@
                   <a:srgbClr val="000000"/>
                 </a:solidFill>
                 <a:effectLst/>
-                <a:latin typeface="Arial" panose="020B0604020202020204" pitchFamily="34" charset="0"/>
+                <a:latin typeface="Arial" panose="020B0704020202020204" pitchFamily="34" charset="0"/>
                 <a:ea typeface="Times New Roman" panose="02020603050405020304" pitchFamily="18" charset="0"/>
-                <a:cs typeface="Arial" panose="020B0604020202020204" pitchFamily="34" charset="0"/>
+                <a:cs typeface="Arial" panose="020B0704020202020204" pitchFamily="34" charset="0"/>
               </a:rPr>
               <a:t> </a:t>
             </a:r>
@@ -16051,9 +16052,9 @@
                   <a:srgbClr val="000000"/>
                 </a:solidFill>
                 <a:effectLst/>
-                <a:latin typeface="Arial" panose="020B0604020202020204" pitchFamily="34" charset="0"/>
+                <a:latin typeface="Arial" panose="020B0704020202020204" pitchFamily="34" charset="0"/>
                 <a:ea typeface="Times New Roman" panose="02020603050405020304" pitchFamily="18" charset="0"/>
-                <a:cs typeface="Arial" panose="020B0604020202020204" pitchFamily="34" charset="0"/>
+                <a:cs typeface="Arial" panose="020B0704020202020204" pitchFamily="34" charset="0"/>
               </a:rPr>
               <a:t>quả</a:t>
             </a:r>
@@ -16063,9 +16064,9 @@
                   <a:srgbClr val="000000"/>
                 </a:solidFill>
                 <a:effectLst/>
-                <a:latin typeface="Arial" panose="020B0604020202020204" pitchFamily="34" charset="0"/>
+                <a:latin typeface="Arial" panose="020B0704020202020204" pitchFamily="34" charset="0"/>
                 <a:ea typeface="Times New Roman" panose="02020603050405020304" pitchFamily="18" charset="0"/>
-                <a:cs typeface="Arial" panose="020B0604020202020204" pitchFamily="34" charset="0"/>
+                <a:cs typeface="Arial" panose="020B0704020202020204" pitchFamily="34" charset="0"/>
               </a:rPr>
               <a:t> </a:t>
             </a:r>
@@ -16075,9 +16076,9 @@
                   <a:srgbClr val="000000"/>
                 </a:solidFill>
                 <a:effectLst/>
-                <a:latin typeface="Arial" panose="020B0604020202020204" pitchFamily="34" charset="0"/>
+                <a:latin typeface="Arial" panose="020B0704020202020204" pitchFamily="34" charset="0"/>
                 <a:ea typeface="Times New Roman" panose="02020603050405020304" pitchFamily="18" charset="0"/>
-                <a:cs typeface="Arial" panose="020B0604020202020204" pitchFamily="34" charset="0"/>
+                <a:cs typeface="Arial" panose="020B0704020202020204" pitchFamily="34" charset="0"/>
               </a:rPr>
               <a:t>đo</a:t>
             </a:r>
@@ -16087,9 +16088,9 @@
                   <a:srgbClr val="000000"/>
                 </a:solidFill>
                 <a:effectLst/>
-                <a:latin typeface="Arial" panose="020B0604020202020204" pitchFamily="34" charset="0"/>
+                <a:latin typeface="Arial" panose="020B0704020202020204" pitchFamily="34" charset="0"/>
                 <a:ea typeface="Times New Roman" panose="02020603050405020304" pitchFamily="18" charset="0"/>
-                <a:cs typeface="Arial" panose="020B0604020202020204" pitchFamily="34" charset="0"/>
+                <a:cs typeface="Arial" panose="020B0704020202020204" pitchFamily="34" charset="0"/>
               </a:rPr>
               <a:t>:  </a:t>
             </a:r>
@@ -16099,9 +16100,9 @@
                   <a:srgbClr val="000000"/>
                 </a:solidFill>
                 <a:effectLst/>
-                <a:latin typeface="Arial" panose="020B0604020202020204" pitchFamily="34" charset="0"/>
+                <a:latin typeface="Arial" panose="020B0704020202020204" pitchFamily="34" charset="0"/>
                 <a:ea typeface="Times New Roman" panose="02020603050405020304" pitchFamily="18" charset="0"/>
-                <a:cs typeface="Arial" panose="020B0604020202020204" pitchFamily="34" charset="0"/>
+                <a:cs typeface="Arial" panose="020B0704020202020204" pitchFamily="34" charset="0"/>
               </a:rPr>
               <a:t>s = ..........; t =… . </a:t>
             </a:r>
@@ -16110,9 +16111,9 @@
                 <a:srgbClr val="000000"/>
               </a:solidFill>
               <a:effectLst/>
-              <a:latin typeface="Arial" panose="020B0604020202020204" pitchFamily="34" charset="0"/>
+              <a:latin typeface="Arial" panose="020B0704020202020204" pitchFamily="34" charset="0"/>
               <a:ea typeface="Times New Roman" panose="02020603050405020304" pitchFamily="18" charset="0"/>
-              <a:cs typeface="Arial" panose="020B0604020202020204" pitchFamily="34" charset="0"/>
+              <a:cs typeface="Arial" panose="020B0704020202020204" pitchFamily="34" charset="0"/>
             </a:endParaRPr>
           </a:p>
           <a:p>
@@ -16131,9 +16132,9 @@
                   <a:srgbClr val="000000"/>
                 </a:solidFill>
                 <a:effectLst/>
-                <a:latin typeface="Arial" panose="020B0604020202020204" pitchFamily="34" charset="0"/>
+                <a:latin typeface="Arial" panose="020B0704020202020204" pitchFamily="34" charset="0"/>
                 <a:ea typeface="Times New Roman" panose="02020603050405020304" pitchFamily="18" charset="0"/>
-                <a:cs typeface="Arial" panose="020B0604020202020204" pitchFamily="34" charset="0"/>
+                <a:cs typeface="Arial" panose="020B0704020202020204" pitchFamily="34" charset="0"/>
               </a:rPr>
               <a:t>Tính</a:t>
             </a:r>
@@ -16143,9 +16144,9 @@
                   <a:srgbClr val="000000"/>
                 </a:solidFill>
                 <a:effectLst/>
-                <a:latin typeface="Arial" panose="020B0604020202020204" pitchFamily="34" charset="0"/>
+                <a:latin typeface="Arial" panose="020B0704020202020204" pitchFamily="34" charset="0"/>
                 <a:ea typeface="Times New Roman" panose="02020603050405020304" pitchFamily="18" charset="0"/>
-                <a:cs typeface="Arial" panose="020B0604020202020204" pitchFamily="34" charset="0"/>
+                <a:cs typeface="Arial" panose="020B0704020202020204" pitchFamily="34" charset="0"/>
               </a:rPr>
               <a:t> </a:t>
             </a:r>
@@ -16155,9 +16156,9 @@
                   <a:srgbClr val="000000"/>
                 </a:solidFill>
                 <a:effectLst/>
-                <a:latin typeface="Arial" panose="020B0604020202020204" pitchFamily="34" charset="0"/>
+                <a:latin typeface="Arial" panose="020B0704020202020204" pitchFamily="34" charset="0"/>
                 <a:ea typeface="Times New Roman" panose="02020603050405020304" pitchFamily="18" charset="0"/>
-                <a:cs typeface="Arial" panose="020B0604020202020204" pitchFamily="34" charset="0"/>
+                <a:cs typeface="Arial" panose="020B0704020202020204" pitchFamily="34" charset="0"/>
               </a:rPr>
               <a:t>sai</a:t>
             </a:r>
@@ -16167,9 +16168,9 @@
                   <a:srgbClr val="000000"/>
                 </a:solidFill>
                 <a:effectLst/>
-                <a:latin typeface="Arial" panose="020B0604020202020204" pitchFamily="34" charset="0"/>
+                <a:latin typeface="Arial" panose="020B0704020202020204" pitchFamily="34" charset="0"/>
                 <a:ea typeface="Times New Roman" panose="02020603050405020304" pitchFamily="18" charset="0"/>
-                <a:cs typeface="Arial" panose="020B0604020202020204" pitchFamily="34" charset="0"/>
+                <a:cs typeface="Arial" panose="020B0704020202020204" pitchFamily="34" charset="0"/>
               </a:rPr>
               <a:t> </a:t>
             </a:r>
@@ -16179,9 +16180,9 @@
                   <a:srgbClr val="000000"/>
                 </a:solidFill>
                 <a:effectLst/>
-                <a:latin typeface="Arial" panose="020B0604020202020204" pitchFamily="34" charset="0"/>
+                <a:latin typeface="Arial" panose="020B0704020202020204" pitchFamily="34" charset="0"/>
                 <a:ea typeface="Times New Roman" panose="02020603050405020304" pitchFamily="18" charset="0"/>
-                <a:cs typeface="Arial" panose="020B0604020202020204" pitchFamily="34" charset="0"/>
+                <a:cs typeface="Arial" panose="020B0704020202020204" pitchFamily="34" charset="0"/>
               </a:rPr>
               <a:t>số</a:t>
             </a:r>
@@ -16191,9 +16192,9 @@
                   <a:srgbClr val="000000"/>
                 </a:solidFill>
                 <a:effectLst/>
-                <a:latin typeface="Arial" panose="020B0604020202020204" pitchFamily="34" charset="0"/>
+                <a:latin typeface="Arial" panose="020B0704020202020204" pitchFamily="34" charset="0"/>
                 <a:ea typeface="Times New Roman" panose="02020603050405020304" pitchFamily="18" charset="0"/>
-                <a:cs typeface="Arial" panose="020B0604020202020204" pitchFamily="34" charset="0"/>
+                <a:cs typeface="Arial" panose="020B0704020202020204" pitchFamily="34" charset="0"/>
               </a:rPr>
               <a:t> </a:t>
             </a:r>
@@ -16203,9 +16204,9 @@
                   <a:srgbClr val="000000"/>
                 </a:solidFill>
                 <a:effectLst/>
-                <a:latin typeface="Arial" panose="020B0604020202020204" pitchFamily="34" charset="0"/>
+                <a:latin typeface="Arial" panose="020B0704020202020204" pitchFamily="34" charset="0"/>
                 <a:ea typeface="Times New Roman" panose="02020603050405020304" pitchFamily="18" charset="0"/>
-                <a:cs typeface="Arial" panose="020B0604020202020204" pitchFamily="34" charset="0"/>
+                <a:cs typeface="Arial" panose="020B0704020202020204" pitchFamily="34" charset="0"/>
               </a:rPr>
               <a:t>tỉ</a:t>
             </a:r>
@@ -16215,9 +16216,9 @@
                   <a:srgbClr val="000000"/>
                 </a:solidFill>
                 <a:effectLst/>
-                <a:latin typeface="Arial" panose="020B0604020202020204" pitchFamily="34" charset="0"/>
+                <a:latin typeface="Arial" panose="020B0704020202020204" pitchFamily="34" charset="0"/>
                 <a:ea typeface="Times New Roman" panose="02020603050405020304" pitchFamily="18" charset="0"/>
-                <a:cs typeface="Arial" panose="020B0604020202020204" pitchFamily="34" charset="0"/>
+                <a:cs typeface="Arial" panose="020B0704020202020204" pitchFamily="34" charset="0"/>
               </a:rPr>
               <a:t> </a:t>
             </a:r>
@@ -16227,9 +16228,9 @@
                   <a:srgbClr val="000000"/>
                 </a:solidFill>
                 <a:effectLst/>
-                <a:latin typeface="Arial" panose="020B0604020202020204" pitchFamily="34" charset="0"/>
+                <a:latin typeface="Arial" panose="020B0704020202020204" pitchFamily="34" charset="0"/>
                 <a:ea typeface="Times New Roman" panose="02020603050405020304" pitchFamily="18" charset="0"/>
-                <a:cs typeface="Arial" panose="020B0604020202020204" pitchFamily="34" charset="0"/>
+                <a:cs typeface="Arial" panose="020B0704020202020204" pitchFamily="34" charset="0"/>
               </a:rPr>
               <a:t>đối</a:t>
             </a:r>
@@ -16239,17 +16240,17 @@
                   <a:srgbClr val="000000"/>
                 </a:solidFill>
                 <a:effectLst/>
-                <a:latin typeface="Arial" panose="020B0604020202020204" pitchFamily="34" charset="0"/>
+                <a:latin typeface="Arial" panose="020B0704020202020204" pitchFamily="34" charset="0"/>
                 <a:ea typeface="Times New Roman" panose="02020603050405020304" pitchFamily="18" charset="0"/>
-                <a:cs typeface="Arial" panose="020B0604020202020204" pitchFamily="34" charset="0"/>
+                <a:cs typeface="Arial" panose="020B0704020202020204" pitchFamily="34" charset="0"/>
               </a:rPr>
               <a:t>:</a:t>
             </a:r>
             <a:endParaRPr lang="en-US" sz="2500" dirty="0">
               <a:effectLst/>
-              <a:latin typeface="Arial" panose="020B0604020202020204" pitchFamily="34" charset="0"/>
+              <a:latin typeface="Arial" panose="020B0704020202020204" pitchFamily="34" charset="0"/>
               <a:ea typeface="Times New Roman" panose="02020603050405020304" pitchFamily="18" charset="0"/>
-              <a:cs typeface="Arial" panose="020B0604020202020204" pitchFamily="34" charset="0"/>
+              <a:cs typeface="Arial" panose="020B0704020202020204" pitchFamily="34" charset="0"/>
             </a:endParaRPr>
           </a:p>
         </p:txBody>
@@ -16355,7 +16356,7 @@
                             <a:srgbClr val="000000"/>
                           </a:solidFill>
                           <a:latin typeface="Cambria Math" panose="02040503050406030204" pitchFamily="18" charset="0"/>
-                          <a:cs typeface="Arial" panose="020B0604020202020204" pitchFamily="34" charset="0"/>
+                          <a:cs typeface="Arial" panose="020B0704020202020204" pitchFamily="34" charset="0"/>
                           <a:sym typeface="Symbol" panose="05050102010706020507" pitchFamily="18" charset="2"/>
                         </a:rPr>
                         <m:t></m:t>
@@ -16366,7 +16367,7 @@
                             <a:srgbClr val="000000"/>
                           </a:solidFill>
                           <a:latin typeface="Cambria Math" panose="02040503050406030204" pitchFamily="18" charset="0"/>
-                          <a:cs typeface="Arial" panose="020B0604020202020204" pitchFamily="34" charset="0"/>
+                          <a:cs typeface="Arial" panose="020B0704020202020204" pitchFamily="34" charset="0"/>
                           <a:sym typeface="Symbol" panose="05050102010706020507" pitchFamily="18" charset="2"/>
                         </a:rPr>
                         <m:t>𝑣</m:t>
@@ -16379,9 +16380,9 @@
                         <a:srgbClr val="000000"/>
                       </a:solidFill>
                       <a:effectLst/>
-                      <a:latin typeface="Arial" panose="020B0604020202020204" pitchFamily="34" charset="0"/>
+                      <a:latin typeface="Arial" panose="020B0704020202020204" pitchFamily="34" charset="0"/>
                       <a:ea typeface="Times New Roman" panose="02020603050405020304" pitchFamily="18" charset="0"/>
-                      <a:cs typeface="Arial" panose="020B0604020202020204" pitchFamily="34" charset="0"/>
+                      <a:cs typeface="Arial" panose="020B0704020202020204" pitchFamily="34" charset="0"/>
                     </a:rPr>
                     <a:t> = …</a:t>
                   </a:r>
@@ -16529,7 +16530,7 @@
                           </a:solidFill>
                           <a:effectLst/>
                           <a:latin typeface="Cambria Math" panose="02040503050406030204" pitchFamily="18" charset="0"/>
-                          <a:cs typeface="Arial" panose="020B0604020202020204" pitchFamily="34" charset="0"/>
+                          <a:cs typeface="Arial" panose="020B0704020202020204" pitchFamily="34" charset="0"/>
                           <a:sym typeface="Symbol" panose="05050102010706020507" pitchFamily="18" charset="2"/>
                         </a:rPr>
                         <m:t></m:t>
@@ -16541,7 +16542,7 @@
                           </a:solidFill>
                           <a:effectLst/>
                           <a:latin typeface="Cambria Math" panose="02040503050406030204" pitchFamily="18" charset="0"/>
-                          <a:cs typeface="Arial" panose="020B0604020202020204" pitchFamily="34" charset="0"/>
+                          <a:cs typeface="Arial" panose="020B0704020202020204" pitchFamily="34" charset="0"/>
                           <a:sym typeface="Symbol" panose="05050102010706020507" pitchFamily="18" charset="2"/>
                         </a:rPr>
                         <m:t>𝑡</m:t>
@@ -16554,9 +16555,9 @@
                         <a:srgbClr val="000000"/>
                       </a:solidFill>
                       <a:effectLst/>
-                      <a:latin typeface="Arial" panose="020B0604020202020204" pitchFamily="34" charset="0"/>
+                      <a:latin typeface="Arial" panose="020B0704020202020204" pitchFamily="34" charset="0"/>
                       <a:ea typeface="Times New Roman" panose="02020603050405020304" pitchFamily="18" charset="0"/>
-                      <a:cs typeface="Arial" panose="020B0604020202020204" pitchFamily="34" charset="0"/>
+                      <a:cs typeface="Arial" panose="020B0704020202020204" pitchFamily="34" charset="0"/>
                     </a:rPr>
                     <a:t> = </a:t>
                   </a:r>
@@ -16571,7 +16572,7 @@
                               </a:solidFill>
                               <a:effectLst/>
                               <a:latin typeface="Cambria Math" panose="02040503050406030204"/>
-                              <a:cs typeface="Arial" panose="020B0604020202020204" pitchFamily="34" charset="0"/>
+                              <a:cs typeface="Arial" panose="020B0704020202020204" pitchFamily="34" charset="0"/>
                             </a:rPr>
                           </m:ctrlPr>
                         </m:fPr>
@@ -16582,7 +16583,7 @@
                                 <a:srgbClr val="000000"/>
                               </a:solidFill>
                               <a:latin typeface="Cambria Math" panose="02040503050406030204" pitchFamily="18" charset="0"/>
-                              <a:cs typeface="Arial" panose="020B0604020202020204" pitchFamily="34" charset="0"/>
+                              <a:cs typeface="Arial" panose="020B0704020202020204" pitchFamily="34" charset="0"/>
                               <a:sym typeface="Symbol" panose="05050102010706020507" pitchFamily="18" charset="2"/>
                             </a:rPr>
                             <m:t></m:t>
@@ -16593,7 +16594,7 @@
                                 <a:srgbClr val="000000"/>
                               </a:solidFill>
                               <a:latin typeface="Cambria Math" panose="02040503050406030204" pitchFamily="18" charset="0"/>
-                              <a:cs typeface="Arial" panose="020B0604020202020204" pitchFamily="34" charset="0"/>
+                              <a:cs typeface="Arial" panose="020B0704020202020204" pitchFamily="34" charset="0"/>
                               <a:sym typeface="Symbol" panose="05050102010706020507" pitchFamily="18" charset="2"/>
                             </a:rPr>
                             <m:t>𝑡</m:t>
@@ -16607,7 +16608,7 @@
                               </a:solidFill>
                               <a:effectLst/>
                               <a:latin typeface="Cambria Math" panose="02040503050406030204" pitchFamily="18" charset="0"/>
-                              <a:cs typeface="Arial" panose="020B0604020202020204" pitchFamily="34" charset="0"/>
+                              <a:cs typeface="Arial" panose="020B0704020202020204" pitchFamily="34" charset="0"/>
                             </a:rPr>
                             <m:t>𝑡</m:t>
                           </m:r>
@@ -16621,9 +16622,9 @@
                         <a:srgbClr val="000000"/>
                       </a:solidFill>
                       <a:effectLst/>
-                      <a:latin typeface="Arial" panose="020B0604020202020204" pitchFamily="34" charset="0"/>
+                      <a:latin typeface="Arial" panose="020B0704020202020204" pitchFamily="34" charset="0"/>
                       <a:ea typeface="Times New Roman" panose="02020603050405020304" pitchFamily="18" charset="0"/>
-                      <a:cs typeface="Arial" panose="020B0604020202020204" pitchFamily="34" charset="0"/>
+                      <a:cs typeface="Arial" panose="020B0704020202020204" pitchFamily="34" charset="0"/>
                       <a:sym typeface="Symbol" panose="05050102010706020507" pitchFamily="18" charset="2"/>
                     </a:rPr>
                     <a:t> . </a:t>
@@ -16634,9 +16635,9 @@
                         <a:srgbClr val="000000"/>
                       </a:solidFill>
                       <a:effectLst/>
-                      <a:latin typeface="Arial" panose="020B0604020202020204" pitchFamily="34" charset="0"/>
+                      <a:latin typeface="Arial" panose="020B0704020202020204" pitchFamily="34" charset="0"/>
                       <a:ea typeface="Times New Roman" panose="02020603050405020304" pitchFamily="18" charset="0"/>
-                      <a:cs typeface="Arial" panose="020B0604020202020204" pitchFamily="34" charset="0"/>
+                      <a:cs typeface="Arial" panose="020B0704020202020204" pitchFamily="34" charset="0"/>
                     </a:rPr>
                     <a:t>100% = …</a:t>
                   </a:r>
@@ -16783,7 +16784,7 @@
                             <a:srgbClr val="000000"/>
                           </a:solidFill>
                           <a:latin typeface="Cambria Math" panose="02040503050406030204" pitchFamily="18" charset="0"/>
-                          <a:cs typeface="Arial" panose="020B0604020202020204" pitchFamily="34" charset="0"/>
+                          <a:cs typeface="Arial" panose="020B0704020202020204" pitchFamily="34" charset="0"/>
                           <a:sym typeface="Symbol" panose="05050102010706020507" pitchFamily="18" charset="2"/>
                         </a:rPr>
                         <m:t></m:t>
@@ -16794,7 +16795,7 @@
                             <a:srgbClr val="000000"/>
                           </a:solidFill>
                           <a:latin typeface="Cambria Math" panose="02040503050406030204" pitchFamily="18" charset="0"/>
-                          <a:cs typeface="Arial" panose="020B0604020202020204" pitchFamily="34" charset="0"/>
+                          <a:cs typeface="Arial" panose="020B0704020202020204" pitchFamily="34" charset="0"/>
                           <a:sym typeface="Symbol" panose="05050102010706020507" pitchFamily="18" charset="2"/>
                         </a:rPr>
                         <m:t>𝑣</m:t>
@@ -16807,9 +16808,9 @@
                         <a:srgbClr val="000000"/>
                       </a:solidFill>
                       <a:effectLst/>
-                      <a:latin typeface="Arial" panose="020B0604020202020204" pitchFamily="34" charset="0"/>
+                      <a:latin typeface="Arial" panose="020B0704020202020204" pitchFamily="34" charset="0"/>
                       <a:ea typeface="Times New Roman" panose="02020603050405020304" pitchFamily="18" charset="0"/>
-                      <a:cs typeface="Arial" panose="020B0604020202020204" pitchFamily="34" charset="0"/>
+                      <a:cs typeface="Arial" panose="020B0704020202020204" pitchFamily="34" charset="0"/>
                     </a:rPr>
                     <a:t> = …</a:t>
                   </a:r>
@@ -16957,7 +16958,7 @@
                           </a:solidFill>
                           <a:effectLst/>
                           <a:latin typeface="Cambria Math" panose="02040503050406030204" pitchFamily="18" charset="0"/>
-                          <a:cs typeface="Arial" panose="020B0604020202020204" pitchFamily="34" charset="0"/>
+                          <a:cs typeface="Arial" panose="020B0704020202020204" pitchFamily="34" charset="0"/>
                           <a:sym typeface="Symbol" panose="05050102010706020507" pitchFamily="18" charset="2"/>
                         </a:rPr>
                         <m:t></m:t>
@@ -16969,7 +16970,7 @@
                           </a:solidFill>
                           <a:effectLst/>
                           <a:latin typeface="Cambria Math" panose="02040503050406030204" pitchFamily="18" charset="0"/>
-                          <a:cs typeface="Arial" panose="020B0604020202020204" pitchFamily="34" charset="0"/>
+                          <a:cs typeface="Arial" panose="020B0704020202020204" pitchFamily="34" charset="0"/>
                           <a:sym typeface="Symbol" panose="05050102010706020507" pitchFamily="18" charset="2"/>
                         </a:rPr>
                         <m:t>𝑠</m:t>
@@ -16982,9 +16983,9 @@
                         <a:srgbClr val="000000"/>
                       </a:solidFill>
                       <a:effectLst/>
-                      <a:latin typeface="Arial" panose="020B0604020202020204" pitchFamily="34" charset="0"/>
+                      <a:latin typeface="Arial" panose="020B0704020202020204" pitchFamily="34" charset="0"/>
                       <a:ea typeface="Times New Roman" panose="02020603050405020304" pitchFamily="18" charset="0"/>
-                      <a:cs typeface="Arial" panose="020B0604020202020204" pitchFamily="34" charset="0"/>
+                      <a:cs typeface="Arial" panose="020B0704020202020204" pitchFamily="34" charset="0"/>
                     </a:rPr>
                     <a:t> = </a:t>
                   </a:r>
@@ -16999,7 +17000,7 @@
                               </a:solidFill>
                               <a:effectLst/>
                               <a:latin typeface="Cambria Math" panose="02040503050406030204"/>
-                              <a:cs typeface="Arial" panose="020B0604020202020204" pitchFamily="34" charset="0"/>
+                              <a:cs typeface="Arial" panose="020B0704020202020204" pitchFamily="34" charset="0"/>
                             </a:rPr>
                           </m:ctrlPr>
                         </m:fPr>
@@ -17010,7 +17011,7 @@
                                 <a:srgbClr val="000000"/>
                               </a:solidFill>
                               <a:latin typeface="Cambria Math" panose="02040503050406030204" pitchFamily="18" charset="0"/>
-                              <a:cs typeface="Arial" panose="020B0604020202020204" pitchFamily="34" charset="0"/>
+                              <a:cs typeface="Arial" panose="020B0704020202020204" pitchFamily="34" charset="0"/>
                               <a:sym typeface="Symbol" panose="05050102010706020507" pitchFamily="18" charset="2"/>
                             </a:rPr>
                             <m:t></m:t>
@@ -17021,7 +17022,7 @@
                                 <a:srgbClr val="000000"/>
                               </a:solidFill>
                               <a:latin typeface="Cambria Math" panose="02040503050406030204" pitchFamily="18" charset="0"/>
-                              <a:cs typeface="Arial" panose="020B0604020202020204" pitchFamily="34" charset="0"/>
+                              <a:cs typeface="Arial" panose="020B0704020202020204" pitchFamily="34" charset="0"/>
                               <a:sym typeface="Symbol" panose="05050102010706020507" pitchFamily="18" charset="2"/>
                             </a:rPr>
                             <m:t>𝑠</m:t>
@@ -17035,7 +17036,7 @@
                               </a:solidFill>
                               <a:effectLst/>
                               <a:latin typeface="Cambria Math" panose="02040503050406030204" pitchFamily="18" charset="0"/>
-                              <a:cs typeface="Arial" panose="020B0604020202020204" pitchFamily="34" charset="0"/>
+                              <a:cs typeface="Arial" panose="020B0704020202020204" pitchFamily="34" charset="0"/>
                             </a:rPr>
                             <m:t>𝑠</m:t>
                           </m:r>
@@ -17049,9 +17050,9 @@
                         <a:srgbClr val="000000"/>
                       </a:solidFill>
                       <a:effectLst/>
-                      <a:latin typeface="Arial" panose="020B0604020202020204" pitchFamily="34" charset="0"/>
+                      <a:latin typeface="Arial" panose="020B0704020202020204" pitchFamily="34" charset="0"/>
                       <a:ea typeface="Times New Roman" panose="02020603050405020304" pitchFamily="18" charset="0"/>
-                      <a:cs typeface="Arial" panose="020B0604020202020204" pitchFamily="34" charset="0"/>
+                      <a:cs typeface="Arial" panose="020B0704020202020204" pitchFamily="34" charset="0"/>
                       <a:sym typeface="Symbol" panose="05050102010706020507" pitchFamily="18" charset="2"/>
                     </a:rPr>
                     <a:t> . </a:t>
@@ -17062,9 +17063,9 @@
                         <a:srgbClr val="000000"/>
                       </a:solidFill>
                       <a:effectLst/>
-                      <a:latin typeface="Arial" panose="020B0604020202020204" pitchFamily="34" charset="0"/>
+                      <a:latin typeface="Arial" panose="020B0704020202020204" pitchFamily="34" charset="0"/>
                       <a:ea typeface="Times New Roman" panose="02020603050405020304" pitchFamily="18" charset="0"/>
-                      <a:cs typeface="Arial" panose="020B0604020202020204" pitchFamily="34" charset="0"/>
+                      <a:cs typeface="Arial" panose="020B0704020202020204" pitchFamily="34" charset="0"/>
                     </a:rPr>
                     <a:t>100% = …</a:t>
                   </a:r>
@@ -17403,6 +17404,24 @@
 </p:sld>
 </file>
 
+<file path=ppt/slides/slide16.xml><?xml version="1.0" encoding="utf-8"?>
+<p:sld xmlns:a="http://schemas.openxmlformats.org/drawingml/2006/main" xmlns:r="http://schemas.openxmlformats.org/officeDocument/2006/relationships" xmlns:p="http://schemas.openxmlformats.org/presentationml/2006/main">
+  <p:cSld>
+    <p:spTree>
+      <p:nvGrpSpPr>
+        <p:cNvPr id="1" name=""/>
+        <p:cNvGrpSpPr/>
+        <p:nvPr/>
+      </p:nvGrpSpPr>
+      <p:grpSpPr/>
+    </p:spTree>
+  </p:cSld>
+  <p:clrMapOvr>
+    <a:masterClrMapping/>
+  </p:clrMapOvr>
+</p:sld>
+</file>
+
 <file path=ppt/slides/slide2.xml><?xml version="1.0" encoding="utf-8"?>
 <p:sld xmlns:a="http://schemas.openxmlformats.org/drawingml/2006/main" xmlns:r="http://schemas.openxmlformats.org/officeDocument/2006/relationships" xmlns:p="http://schemas.openxmlformats.org/presentationml/2006/main">
   <p:cSld>
@@ -17542,14 +17561,14 @@
               </a:pPr>
               <a:r>
                 <a:rPr lang="en-US" sz="2600" b="1">
-                  <a:latin typeface="Arial" panose="020B0604020202020204" pitchFamily="34" charset="0"/>
-                  <a:cs typeface="Arial" panose="020B0604020202020204" pitchFamily="34" charset="0"/>
+                  <a:latin typeface="Arial" panose="020B0704020202020204" pitchFamily="34" charset="0"/>
+                  <a:cs typeface="Arial" panose="020B0704020202020204" pitchFamily="34" charset="0"/>
                 </a:rPr>
                 <a:t>Khởi động</a:t>
               </a:r>
               <a:endParaRPr lang="en-US" sz="2600" b="1">
-                <a:latin typeface="Arial" panose="020B0604020202020204" pitchFamily="34" charset="0"/>
-                <a:cs typeface="Arial" panose="020B0604020202020204" pitchFamily="34" charset="0"/>
+                <a:latin typeface="Arial" panose="020B0704020202020204" pitchFamily="34" charset="0"/>
+                <a:cs typeface="Arial" panose="020B0704020202020204" pitchFamily="34" charset="0"/>
               </a:endParaRPr>
             </a:p>
           </p:txBody>
@@ -17654,7 +17673,7 @@
                   <a:srgbClr val="000000"/>
                 </a:solidFill>
                 <a:effectLst/>
-                <a:latin typeface="Arial" panose="020B0604020202020204" pitchFamily="34" charset="0"/>
+                <a:latin typeface="Arial" panose="020B0704020202020204" pitchFamily="34" charset="0"/>
                 <a:ea typeface="Times New Roman" panose="02020603050405020304" pitchFamily="18" charset="0"/>
               </a:rPr>
               <a:t>Không một phép đo nào có thể cho ta giá trị thực của đại lượng cần đo mà đều có sai số. Làm thế nào để xác định được các sai số này? </a:t>
@@ -17664,7 +17683,7 @@
                 <a:srgbClr val="000000"/>
               </a:solidFill>
               <a:effectLst/>
-              <a:latin typeface="Arial" panose="020B0604020202020204" pitchFamily="34" charset="0"/>
+              <a:latin typeface="Arial" panose="020B0704020202020204" pitchFamily="34" charset="0"/>
               <a:ea typeface="Times New Roman" panose="02020603050405020304" pitchFamily="18" charset="0"/>
             </a:endParaRPr>
           </a:p>
@@ -17683,7 +17702,7 @@
                   <a:srgbClr val="000000"/>
                 </a:solidFill>
                 <a:effectLst/>
-                <a:latin typeface="Arial" panose="020B0604020202020204" pitchFamily="34" charset="0"/>
+                <a:latin typeface="Arial" panose="020B0704020202020204" pitchFamily="34" charset="0"/>
                 <a:ea typeface="Times New Roman" panose="02020603050405020304" pitchFamily="18" charset="0"/>
               </a:rPr>
               <a:t>Nguyên nhân gây ra các sai số là gì và cách khắc phục như thế nào?</a:t>
@@ -17957,7 +17976,7 @@
                 <a:solidFill>
                   <a:srgbClr val="000000"/>
                 </a:solidFill>
-                <a:latin typeface="Arial" panose="020B0604020202020204" pitchFamily="34" charset="0"/>
+                <a:latin typeface="Arial" panose="020B0704020202020204" pitchFamily="34" charset="0"/>
               </a:rPr>
               <a:t>Đo chu vi thân cây</a:t>
             </a:r>
@@ -17993,7 +18012,7 @@
                 <a:solidFill>
                   <a:srgbClr val="000000"/>
                 </a:solidFill>
-                <a:latin typeface="Arial" panose="020B0604020202020204" pitchFamily="34" charset="0"/>
+                <a:latin typeface="Arial" panose="020B0704020202020204" pitchFamily="34" charset="0"/>
               </a:rPr>
               <a:t>Đo nhiệt độ</a:t>
             </a:r>
@@ -18029,7 +18048,7 @@
                 <a:solidFill>
                   <a:srgbClr val="000000"/>
                 </a:solidFill>
-                <a:latin typeface="Arial" panose="020B0604020202020204" pitchFamily="34" charset="0"/>
+                <a:latin typeface="Arial" panose="020B0704020202020204" pitchFamily="34" charset="0"/>
               </a:rPr>
               <a:t>Đo điện áp</a:t>
             </a:r>
@@ -18453,9 +18472,9 @@
                     <a:srgbClr val="FF0000"/>
                   </a:solidFill>
                   <a:effectLst/>
-                  <a:latin typeface="Arial" panose="020B0604020202020204" pitchFamily="34" charset="0"/>
+                  <a:latin typeface="Arial" panose="020B0704020202020204" pitchFamily="34" charset="0"/>
                   <a:ea typeface="Times New Roman" panose="02020603050405020304" pitchFamily="18" charset="0"/>
-                  <a:cs typeface="Arial" panose="020B0604020202020204" pitchFamily="34" charset="0"/>
+                  <a:cs typeface="Arial" panose="020B0704020202020204" pitchFamily="34" charset="0"/>
                 </a:rPr>
                 <a:t>Phép đo các đại lượng vật lí</a:t>
               </a:r>
@@ -18464,9 +18483,9 @@
                   <a:srgbClr val="FF0000"/>
                 </a:solidFill>
                 <a:effectLst/>
-                <a:latin typeface="Arial" panose="020B0604020202020204" pitchFamily="34" charset="0"/>
+                <a:latin typeface="Arial" panose="020B0704020202020204" pitchFamily="34" charset="0"/>
                 <a:ea typeface="Times New Roman" panose="02020603050405020304" pitchFamily="18" charset="0"/>
-                <a:cs typeface="Arial" panose="020B0604020202020204" pitchFamily="34" charset="0"/>
+                <a:cs typeface="Arial" panose="020B0704020202020204" pitchFamily="34" charset="0"/>
               </a:endParaRPr>
             </a:p>
             <a:p>
@@ -18481,9 +18500,9 @@
                     <a:srgbClr val="000000"/>
                   </a:solidFill>
                   <a:effectLst/>
-                  <a:latin typeface="Arial" panose="020B0604020202020204" pitchFamily="34" charset="0"/>
+                  <a:latin typeface="Arial" panose="020B0704020202020204" pitchFamily="34" charset="0"/>
                   <a:ea typeface="Times New Roman" panose="02020603050405020304" pitchFamily="18" charset="0"/>
-                  <a:cs typeface="Arial" panose="020B0604020202020204" pitchFamily="34" charset="0"/>
+                  <a:cs typeface="Arial" panose="020B0704020202020204" pitchFamily="34" charset="0"/>
                 </a:rPr>
                 <a:t> là phép so sánh chúng với đại lượng cùng loại được quy ước làm đơn vị. </a:t>
               </a:r>
@@ -18492,9 +18511,9 @@
                   <a:srgbClr val="000000"/>
                 </a:solidFill>
                 <a:effectLst/>
-                <a:latin typeface="Arial" panose="020B0604020202020204" pitchFamily="34" charset="0"/>
+                <a:latin typeface="Arial" panose="020B0704020202020204" pitchFamily="34" charset="0"/>
                 <a:ea typeface="Times New Roman" panose="02020603050405020304" pitchFamily="18" charset="0"/>
-                <a:cs typeface="Arial" panose="020B0604020202020204" pitchFamily="34" charset="0"/>
+                <a:cs typeface="Arial" panose="020B0704020202020204" pitchFamily="34" charset="0"/>
               </a:endParaRPr>
             </a:p>
           </p:txBody>
@@ -18533,9 +18552,9 @@
                   <a:srgbClr val="000000"/>
                 </a:solidFill>
                 <a:effectLst/>
-                <a:latin typeface="Arial" panose="020B0604020202020204" pitchFamily="34" charset="0"/>
+                <a:latin typeface="Arial" panose="020B0704020202020204" pitchFamily="34" charset="0"/>
                 <a:ea typeface="Times New Roman" panose="02020603050405020304" pitchFamily="18" charset="0"/>
-                <a:cs typeface="Arial" panose="020B0604020202020204" pitchFamily="34" charset="0"/>
+                <a:cs typeface="Arial" panose="020B0704020202020204" pitchFamily="34" charset="0"/>
               </a:rPr>
               <a:t>giá trị của đại lượng cần đo được đọc trực tiếp trên dụng cụ đo</a:t>
             </a:r>
@@ -18544,9 +18563,9 @@
                 <a:srgbClr val="000000"/>
               </a:solidFill>
               <a:effectLst/>
-              <a:latin typeface="Arial" panose="020B0604020202020204" pitchFamily="34" charset="0"/>
+              <a:latin typeface="Arial" panose="020B0704020202020204" pitchFamily="34" charset="0"/>
               <a:ea typeface="Times New Roman" panose="02020603050405020304" pitchFamily="18" charset="0"/>
-              <a:cs typeface="Arial" panose="020B0604020202020204" pitchFamily="34" charset="0"/>
+              <a:cs typeface="Arial" panose="020B0704020202020204" pitchFamily="34" charset="0"/>
             </a:endParaRPr>
           </a:p>
         </p:txBody>
@@ -18584,17 +18603,17 @@
                   <a:srgbClr val="000000"/>
                 </a:solidFill>
                 <a:effectLst/>
-                <a:latin typeface="Arial" panose="020B0604020202020204" pitchFamily="34" charset="0"/>
+                <a:latin typeface="Arial" panose="020B0704020202020204" pitchFamily="34" charset="0"/>
                 <a:ea typeface="Times New Roman" panose="02020603050405020304" pitchFamily="18" charset="0"/>
-                <a:cs typeface="Arial" panose="020B0604020202020204" pitchFamily="34" charset="0"/>
+                <a:cs typeface="Arial" panose="020B0704020202020204" pitchFamily="34" charset="0"/>
               </a:rPr>
               <a:t>giá trị của đại lượng cần đo được xác định thông qua các đại lượng được đo trực tiếp</a:t>
             </a:r>
             <a:endParaRPr lang="en-US" sz="2200" i="1">
               <a:effectLst/>
-              <a:latin typeface="Arial" panose="020B0604020202020204" pitchFamily="34" charset="0"/>
+              <a:latin typeface="Arial" panose="020B0704020202020204" pitchFamily="34" charset="0"/>
               <a:ea typeface="游明朝" panose="02020400000000000000" pitchFamily="18" charset="-128"/>
-              <a:cs typeface="Arial" panose="020B0604020202020204" pitchFamily="34" charset="0"/>
+              <a:cs typeface="Arial" panose="020B0704020202020204" pitchFamily="34" charset="0"/>
             </a:endParaRPr>
           </a:p>
         </p:txBody>
@@ -18626,9 +18645,9 @@
                 <a:solidFill>
                   <a:srgbClr val="000000"/>
                 </a:solidFill>
-                <a:latin typeface="Arial" panose="020B0604020202020204" pitchFamily="34" charset="0"/>
+                <a:latin typeface="Arial" panose="020B0704020202020204" pitchFamily="34" charset="0"/>
                 <a:ea typeface="Times New Roman" panose="02020603050405020304" pitchFamily="18" charset="0"/>
-                <a:cs typeface="Arial" panose="020B0604020202020204" pitchFamily="34" charset="0"/>
+                <a:cs typeface="Arial" panose="020B0704020202020204" pitchFamily="34" charset="0"/>
               </a:rPr>
               <a:t>Đ</a:t>
             </a:r>
@@ -18638,9 +18657,9 @@
                   <a:srgbClr val="000000"/>
                 </a:solidFill>
                 <a:effectLst/>
-                <a:latin typeface="Arial" panose="020B0604020202020204" pitchFamily="34" charset="0"/>
+                <a:latin typeface="Arial" panose="020B0704020202020204" pitchFamily="34" charset="0"/>
                 <a:ea typeface="Times New Roman" panose="02020603050405020304" pitchFamily="18" charset="0"/>
-                <a:cs typeface="Arial" panose="020B0604020202020204" pitchFamily="34" charset="0"/>
+                <a:cs typeface="Arial" panose="020B0704020202020204" pitchFamily="34" charset="0"/>
               </a:rPr>
               <a:t>o khối lượng bằng cân</a:t>
             </a:r>
@@ -18725,14 +18744,14 @@
               <a:pPr algn="ctr"/>
               <a:r>
                 <a:rPr lang="en-US" sz="2500">
-                  <a:latin typeface="Arial" panose="020B0604020202020204" pitchFamily="34" charset="0"/>
-                  <a:cs typeface="Arial" panose="020B0604020202020204" pitchFamily="34" charset="0"/>
+                  <a:latin typeface="Arial" panose="020B0704020202020204" pitchFamily="34" charset="0"/>
+                  <a:cs typeface="Arial" panose="020B0704020202020204" pitchFamily="34" charset="0"/>
                 </a:rPr>
                 <a:t>Phép đo trực tiếp</a:t>
               </a:r>
               <a:endParaRPr lang="en-US" sz="2500">
-                <a:latin typeface="Arial" panose="020B0604020202020204" pitchFamily="34" charset="0"/>
-                <a:cs typeface="Arial" panose="020B0604020202020204" pitchFamily="34" charset="0"/>
+                <a:latin typeface="Arial" panose="020B0704020202020204" pitchFamily="34" charset="0"/>
+                <a:cs typeface="Arial" panose="020B0704020202020204" pitchFamily="34" charset="0"/>
               </a:endParaRPr>
             </a:p>
           </p:txBody>
@@ -18800,14 +18819,14 @@
               <a:pPr algn="ctr"/>
               <a:r>
                 <a:rPr lang="en-US" sz="2500">
-                  <a:latin typeface="Arial" panose="020B0604020202020204" pitchFamily="34" charset="0"/>
-                  <a:cs typeface="Arial" panose="020B0604020202020204" pitchFamily="34" charset="0"/>
+                  <a:latin typeface="Arial" panose="020B0704020202020204" pitchFamily="34" charset="0"/>
+                  <a:cs typeface="Arial" panose="020B0704020202020204" pitchFamily="34" charset="0"/>
                 </a:rPr>
                 <a:t>Phép đo gián tiếp</a:t>
               </a:r>
               <a:endParaRPr lang="en-US" sz="2500">
-                <a:latin typeface="Arial" panose="020B0604020202020204" pitchFamily="34" charset="0"/>
-                <a:cs typeface="Arial" panose="020B0604020202020204" pitchFamily="34" charset="0"/>
+                <a:latin typeface="Arial" panose="020B0704020202020204" pitchFamily="34" charset="0"/>
+                <a:cs typeface="Arial" panose="020B0704020202020204" pitchFamily="34" charset="0"/>
               </a:endParaRPr>
             </a:p>
           </p:txBody>
@@ -18909,9 +18928,9 @@
                 <a:solidFill>
                   <a:srgbClr val="000000"/>
                 </a:solidFill>
-                <a:latin typeface="Arial" panose="020B0604020202020204" pitchFamily="34" charset="0"/>
+                <a:latin typeface="Arial" panose="020B0704020202020204" pitchFamily="34" charset="0"/>
                 <a:ea typeface="Times New Roman" panose="02020603050405020304" pitchFamily="18" charset="0"/>
-                <a:cs typeface="Arial" panose="020B0604020202020204" pitchFamily="34" charset="0"/>
+                <a:cs typeface="Arial" panose="020B0704020202020204" pitchFamily="34" charset="0"/>
               </a:rPr>
               <a:t>Đ</a:t>
             </a:r>
@@ -18921,9 +18940,9 @@
                   <a:srgbClr val="000000"/>
                 </a:solidFill>
                 <a:effectLst/>
-                <a:latin typeface="Arial" panose="020B0604020202020204" pitchFamily="34" charset="0"/>
+                <a:latin typeface="Arial" panose="020B0704020202020204" pitchFamily="34" charset="0"/>
                 <a:ea typeface="Times New Roman" panose="02020603050405020304" pitchFamily="18" charset="0"/>
-                <a:cs typeface="Arial" panose="020B0604020202020204" pitchFamily="34" charset="0"/>
+                <a:cs typeface="Arial" panose="020B0704020202020204" pitchFamily="34" charset="0"/>
               </a:rPr>
               <a:t>o khối lượng riêng</a:t>
             </a:r>
@@ -18959,9 +18978,9 @@
                   <a:srgbClr val="000000"/>
                 </a:solidFill>
                 <a:effectLst/>
-                <a:latin typeface="Arial" panose="020B0604020202020204" pitchFamily="34" charset="0"/>
+                <a:latin typeface="Arial" panose="020B0704020202020204" pitchFamily="34" charset="0"/>
                 <a:ea typeface="Times New Roman" panose="02020603050405020304" pitchFamily="18" charset="0"/>
-                <a:cs typeface="Arial" panose="020B0604020202020204" pitchFamily="34" charset="0"/>
+                <a:cs typeface="Arial" panose="020B0704020202020204" pitchFamily="34" charset="0"/>
               </a:rPr>
               <a:t>Đo thể tích bằng bình chia độ </a:t>
             </a:r>
@@ -19126,9 +19145,9 @@
                     <a:srgbClr val="000000"/>
                   </a:solidFill>
                   <a:effectLst/>
-                  <a:latin typeface="Arial" panose="020B0604020202020204" pitchFamily="34" charset="0"/>
+                  <a:latin typeface="Arial" panose="020B0704020202020204" pitchFamily="34" charset="0"/>
                   <a:ea typeface="Times New Roman" panose="02020603050405020304" pitchFamily="18" charset="0"/>
-                  <a:cs typeface="Arial" panose="020B0604020202020204" pitchFamily="34" charset="0"/>
+                  <a:cs typeface="Arial" panose="020B0704020202020204" pitchFamily="34" charset="0"/>
                 </a:rPr>
                 <a:t>m</a:t>
               </a:r>
@@ -19280,9 +19299,9 @@
                     <a:srgbClr val="000000"/>
                   </a:solidFill>
                   <a:effectLst/>
-                  <a:latin typeface="Arial" panose="020B0604020202020204" pitchFamily="34" charset="0"/>
+                  <a:latin typeface="Arial" panose="020B0704020202020204" pitchFamily="34" charset="0"/>
                   <a:ea typeface="Times New Roman" panose="02020603050405020304" pitchFamily="18" charset="0"/>
-                  <a:cs typeface="Arial" panose="020B0604020202020204" pitchFamily="34" charset="0"/>
+                  <a:cs typeface="Arial" panose="020B0704020202020204" pitchFamily="34" charset="0"/>
                   <a:sym typeface="Symbol" panose="05050102010706020507" pitchFamily="18" charset="2"/>
                 </a:rPr>
                 <a:t></a:t>
@@ -19389,9 +19408,9 @@
                     <a:srgbClr val="000000"/>
                   </a:solidFill>
                   <a:effectLst/>
-                  <a:latin typeface="Arial" panose="020B0604020202020204" pitchFamily="34" charset="0"/>
+                  <a:latin typeface="Arial" panose="020B0704020202020204" pitchFamily="34" charset="0"/>
                   <a:ea typeface="Times New Roman" panose="02020603050405020304" pitchFamily="18" charset="0"/>
-                  <a:cs typeface="Arial" panose="020B0604020202020204" pitchFamily="34" charset="0"/>
+                  <a:cs typeface="Arial" panose="020B0704020202020204" pitchFamily="34" charset="0"/>
                 </a:rPr>
                 <a:t>V</a:t>
               </a:r>
@@ -19586,8 +19605,8 @@
                       </a:srgbClr>
                     </a:outerShdw>
                   </a:effectLst>
-                  <a:latin typeface="Arial" panose="020B0604020202020204" pitchFamily="34" charset="0"/>
-                  <a:cs typeface="Arial" panose="020B0604020202020204" pitchFamily="34" charset="0"/>
+                  <a:latin typeface="Arial" panose="020B0704020202020204" pitchFamily="34" charset="0"/>
+                  <a:cs typeface="Arial" panose="020B0704020202020204" pitchFamily="34" charset="0"/>
                 </a:rPr>
                 <a:t>I</a:t>
               </a:r>
@@ -19614,8 +19633,8 @@
                     </a:srgbClr>
                   </a:outerShdw>
                 </a:effectLst>
-                <a:latin typeface="Arial" panose="020B0604020202020204" pitchFamily="34" charset="0"/>
-                <a:cs typeface="Arial" panose="020B0604020202020204" pitchFamily="34" charset="0"/>
+                <a:latin typeface="Arial" panose="020B0704020202020204" pitchFamily="34" charset="0"/>
+                <a:cs typeface="Arial" panose="020B0704020202020204" pitchFamily="34" charset="0"/>
               </a:endParaRPr>
             </a:p>
           </p:txBody>
@@ -19652,7 +19671,7 @@
                   <a:solidFill>
                     <a:schemeClr val="tx1"/>
                   </a:solidFill>
-                  <a:latin typeface="Arial" panose="020B0604020202020204" pitchFamily="34" charset="0"/>
+                  <a:latin typeface="Arial" panose="020B0704020202020204" pitchFamily="34" charset="0"/>
                 </a:defRPr>
               </a:lvl1pPr>
               <a:lvl2pPr marL="742950" indent="-285750" defTabSz="1095375">
@@ -19660,7 +19679,7 @@
                   <a:solidFill>
                     <a:schemeClr val="tx1"/>
                   </a:solidFill>
-                  <a:latin typeface="Arial" panose="020B0604020202020204" pitchFamily="34" charset="0"/>
+                  <a:latin typeface="Arial" panose="020B0704020202020204" pitchFamily="34" charset="0"/>
                 </a:defRPr>
               </a:lvl2pPr>
               <a:lvl3pPr marL="1143000" indent="-228600" defTabSz="1095375">
@@ -19668,7 +19687,7 @@
                   <a:solidFill>
                     <a:schemeClr val="tx1"/>
                   </a:solidFill>
-                  <a:latin typeface="Arial" panose="020B0604020202020204" pitchFamily="34" charset="0"/>
+                  <a:latin typeface="Arial" panose="020B0704020202020204" pitchFamily="34" charset="0"/>
                 </a:defRPr>
               </a:lvl3pPr>
               <a:lvl4pPr marL="1600200" indent="-228600" defTabSz="1095375">
@@ -19676,7 +19695,7 @@
                   <a:solidFill>
                     <a:schemeClr val="tx1"/>
                   </a:solidFill>
-                  <a:latin typeface="Arial" panose="020B0604020202020204" pitchFamily="34" charset="0"/>
+                  <a:latin typeface="Arial" panose="020B0704020202020204" pitchFamily="34" charset="0"/>
                 </a:defRPr>
               </a:lvl4pPr>
               <a:lvl5pPr marL="2057400" indent="-228600" defTabSz="1095375">
@@ -19684,7 +19703,7 @@
                   <a:solidFill>
                     <a:schemeClr val="tx1"/>
                   </a:solidFill>
-                  <a:latin typeface="Arial" panose="020B0604020202020204" pitchFamily="34" charset="0"/>
+                  <a:latin typeface="Arial" panose="020B0704020202020204" pitchFamily="34" charset="0"/>
                 </a:defRPr>
               </a:lvl5pPr>
               <a:lvl6pPr marL="2514600" indent="-228600" defTabSz="1095375" fontAlgn="base">
@@ -19698,7 +19717,7 @@
                   <a:solidFill>
                     <a:schemeClr val="tx1"/>
                   </a:solidFill>
-                  <a:latin typeface="Arial" panose="020B0604020202020204" pitchFamily="34" charset="0"/>
+                  <a:latin typeface="Arial" panose="020B0704020202020204" pitchFamily="34" charset="0"/>
                 </a:defRPr>
               </a:lvl6pPr>
               <a:lvl7pPr marL="2971800" indent="-228600" defTabSz="1095375" fontAlgn="base">
@@ -19712,7 +19731,7 @@
                   <a:solidFill>
                     <a:schemeClr val="tx1"/>
                   </a:solidFill>
-                  <a:latin typeface="Arial" panose="020B0604020202020204" pitchFamily="34" charset="0"/>
+                  <a:latin typeface="Arial" panose="020B0704020202020204" pitchFamily="34" charset="0"/>
                 </a:defRPr>
               </a:lvl7pPr>
               <a:lvl8pPr marL="3429000" indent="-228600" defTabSz="1095375" fontAlgn="base">
@@ -19726,7 +19745,7 @@
                   <a:solidFill>
                     <a:schemeClr val="tx1"/>
                   </a:solidFill>
-                  <a:latin typeface="Arial" panose="020B0604020202020204" pitchFamily="34" charset="0"/>
+                  <a:latin typeface="Arial" panose="020B0704020202020204" pitchFamily="34" charset="0"/>
                 </a:defRPr>
               </a:lvl8pPr>
               <a:lvl9pPr marL="3886200" indent="-228600" defTabSz="1095375" fontAlgn="base">
@@ -19740,7 +19759,7 @@
                   <a:solidFill>
                     <a:schemeClr val="tx1"/>
                   </a:solidFill>
-                  <a:latin typeface="Arial" panose="020B0604020202020204" pitchFamily="34" charset="0"/>
+                  <a:latin typeface="Arial" panose="020B0704020202020204" pitchFamily="34" charset="0"/>
                 </a:defRPr>
               </a:lvl9pPr>
             </a:lstStyle>
@@ -19754,12 +19773,12 @@
               </a:pPr>
               <a:r>
                 <a:rPr lang="en-US" sz="2800" i="1">
-                  <a:cs typeface="Arial" panose="020B0604020202020204" pitchFamily="34" charset="0"/>
+                  <a:cs typeface="Arial" panose="020B0704020202020204" pitchFamily="34" charset="0"/>
                 </a:rPr>
                 <a:t>Phép đo trực tiếp và phép đo gián tiếp</a:t>
               </a:r>
               <a:endParaRPr lang="en-US" sz="2800" dirty="0">
-                <a:cs typeface="Arial" panose="020B0604020202020204" pitchFamily="34" charset="0"/>
+                <a:cs typeface="Arial" panose="020B0704020202020204" pitchFamily="34" charset="0"/>
               </a:endParaRPr>
             </a:p>
           </p:txBody>
@@ -20400,14 +20419,14 @@
               </a:pPr>
               <a:r>
                 <a:rPr lang="en-US" sz="2600" b="1">
-                  <a:latin typeface="Arial" panose="020B0604020202020204" pitchFamily="34" charset="0"/>
-                  <a:cs typeface="Arial" panose="020B0604020202020204" pitchFamily="34" charset="0"/>
+                  <a:latin typeface="Arial" panose="020B0704020202020204" pitchFamily="34" charset="0"/>
+                  <a:cs typeface="Arial" panose="020B0704020202020204" pitchFamily="34" charset="0"/>
                 </a:rPr>
                 <a:t>Câu hỏi</a:t>
               </a:r>
               <a:endParaRPr lang="en-US" sz="2600" b="1">
-                <a:latin typeface="Arial" panose="020B0604020202020204" pitchFamily="34" charset="0"/>
-                <a:cs typeface="Arial" panose="020B0604020202020204" pitchFamily="34" charset="0"/>
+                <a:latin typeface="Arial" panose="020B0704020202020204" pitchFamily="34" charset="0"/>
+                <a:cs typeface="Arial" panose="020B0704020202020204" pitchFamily="34" charset="0"/>
               </a:endParaRPr>
             </a:p>
           </p:txBody>
@@ -20532,7 +20551,7 @@
                   <a:srgbClr val="000000"/>
                 </a:solidFill>
                 <a:effectLst/>
-                <a:latin typeface="Arial" panose="020B0604020202020204" pitchFamily="34" charset="0"/>
+                <a:latin typeface="Arial" panose="020B0704020202020204" pitchFamily="34" charset="0"/>
                 <a:ea typeface="游明朝" panose="02020400000000000000" pitchFamily="18" charset="-128"/>
               </a:rPr>
               <a:t>Em hãy lập phương án đo tốc độ chuyển động của chiếc xe ô tô đồ chơi chỉ dùng thước; đồng hồ bấm giây và trả lời các câu hỏi sau:</a:t>
@@ -20542,7 +20561,7 @@
                 <a:srgbClr val="000000"/>
               </a:solidFill>
               <a:effectLst/>
-              <a:latin typeface="Arial" panose="020B0604020202020204" pitchFamily="34" charset="0"/>
+              <a:latin typeface="Arial" panose="020B0704020202020204" pitchFamily="34" charset="0"/>
               <a:ea typeface="游明朝" panose="02020400000000000000" pitchFamily="18" charset="-128"/>
             </a:endParaRPr>
           </a:p>
@@ -20873,7 +20892,7 @@
                   <a:srgbClr val="000000"/>
                 </a:solidFill>
                 <a:effectLst/>
-                <a:latin typeface="Arial" panose="020B0604020202020204" pitchFamily="34" charset="0"/>
+                <a:latin typeface="Arial" panose="020B0704020202020204" pitchFamily="34" charset="0"/>
                 <a:ea typeface="游明朝" panose="02020400000000000000" pitchFamily="18" charset="-128"/>
               </a:rPr>
               <a:t>Để đo tốc độ chuyển động của chiếc xe cần đo đại lượng nào? </a:t>
@@ -20883,7 +20902,7 @@
                 <a:srgbClr val="000000"/>
               </a:solidFill>
               <a:effectLst/>
-              <a:latin typeface="Arial" panose="020B0604020202020204" pitchFamily="34" charset="0"/>
+              <a:latin typeface="Arial" panose="020B0704020202020204" pitchFamily="34" charset="0"/>
               <a:ea typeface="游明朝" panose="02020400000000000000" pitchFamily="18" charset="-128"/>
             </a:endParaRPr>
           </a:p>
@@ -20903,7 +20922,7 @@
                   <a:srgbClr val="000000"/>
                 </a:solidFill>
                 <a:effectLst/>
-                <a:latin typeface="Arial" panose="020B0604020202020204" pitchFamily="34" charset="0"/>
+                <a:latin typeface="Arial" panose="020B0704020202020204" pitchFamily="34" charset="0"/>
                 <a:ea typeface="游明朝" panose="02020400000000000000" pitchFamily="18" charset="-128"/>
               </a:rPr>
               <a:t>Xác định tốc độ chuyển động của xe theo công thức nào? </a:t>
@@ -20913,7 +20932,7 @@
                 <a:srgbClr val="000000"/>
               </a:solidFill>
               <a:effectLst/>
-              <a:latin typeface="Arial" panose="020B0604020202020204" pitchFamily="34" charset="0"/>
+              <a:latin typeface="Arial" panose="020B0704020202020204" pitchFamily="34" charset="0"/>
               <a:ea typeface="游明朝" panose="02020400000000000000" pitchFamily="18" charset="-128"/>
             </a:endParaRPr>
           </a:p>
@@ -20992,7 +21011,7 @@
                   <a:srgbClr val="000000"/>
                 </a:solidFill>
                 <a:effectLst/>
-                <a:latin typeface="Arial" panose="020B0604020202020204" pitchFamily="34" charset="0"/>
+                <a:latin typeface="Arial" panose="020B0704020202020204" pitchFamily="34" charset="0"/>
                 <a:ea typeface="游明朝" panose="02020400000000000000" pitchFamily="18" charset="-128"/>
               </a:rPr>
               <a:t>c) </a:t>
@@ -21003,7 +21022,7 @@
                   <a:srgbClr val="000000"/>
                 </a:solidFill>
                 <a:effectLst/>
-                <a:latin typeface="Arial" panose="020B0604020202020204" pitchFamily="34" charset="0"/>
+                <a:latin typeface="Arial" panose="020B0704020202020204" pitchFamily="34" charset="0"/>
                 <a:ea typeface="游明朝" panose="02020400000000000000" pitchFamily="18" charset="-128"/>
               </a:rPr>
               <a:t>Phép</a:t>
@@ -21014,7 +21033,7 @@
                   <a:srgbClr val="000000"/>
                 </a:solidFill>
                 <a:effectLst/>
-                <a:latin typeface="Arial" panose="020B0604020202020204" pitchFamily="34" charset="0"/>
+                <a:latin typeface="Arial" panose="020B0704020202020204" pitchFamily="34" charset="0"/>
                 <a:ea typeface="游明朝" panose="02020400000000000000" pitchFamily="18" charset="-128"/>
               </a:rPr>
               <a:t> </a:t>
@@ -21025,7 +21044,7 @@
                   <a:srgbClr val="000000"/>
                 </a:solidFill>
                 <a:effectLst/>
-                <a:latin typeface="Arial" panose="020B0604020202020204" pitchFamily="34" charset="0"/>
+                <a:latin typeface="Arial" panose="020B0704020202020204" pitchFamily="34" charset="0"/>
                 <a:ea typeface="游明朝" panose="02020400000000000000" pitchFamily="18" charset="-128"/>
               </a:rPr>
               <a:t>đo</a:t>
@@ -21036,7 +21055,7 @@
                   <a:srgbClr val="000000"/>
                 </a:solidFill>
                 <a:effectLst/>
-                <a:latin typeface="Arial" panose="020B0604020202020204" pitchFamily="34" charset="0"/>
+                <a:latin typeface="Arial" panose="020B0704020202020204" pitchFamily="34" charset="0"/>
                 <a:ea typeface="游明朝" panose="02020400000000000000" pitchFamily="18" charset="-128"/>
               </a:rPr>
               <a:t> </a:t>
@@ -21047,7 +21066,7 @@
                   <a:srgbClr val="000000"/>
                 </a:solidFill>
                 <a:effectLst/>
-                <a:latin typeface="Arial" panose="020B0604020202020204" pitchFamily="34" charset="0"/>
+                <a:latin typeface="Arial" panose="020B0704020202020204" pitchFamily="34" charset="0"/>
                 <a:ea typeface="游明朝" panose="02020400000000000000" pitchFamily="18" charset="-128"/>
               </a:rPr>
               <a:t>nào</a:t>
@@ -21058,7 +21077,7 @@
                   <a:srgbClr val="000000"/>
                 </a:solidFill>
                 <a:effectLst/>
-                <a:latin typeface="Arial" panose="020B0604020202020204" pitchFamily="34" charset="0"/>
+                <a:latin typeface="Arial" panose="020B0704020202020204" pitchFamily="34" charset="0"/>
                 <a:ea typeface="游明朝" panose="02020400000000000000" pitchFamily="18" charset="-128"/>
               </a:rPr>
               <a:t> </a:t>
@@ -21069,7 +21088,7 @@
                   <a:srgbClr val="000000"/>
                 </a:solidFill>
                 <a:effectLst/>
-                <a:latin typeface="Arial" panose="020B0604020202020204" pitchFamily="34" charset="0"/>
+                <a:latin typeface="Arial" panose="020B0704020202020204" pitchFamily="34" charset="0"/>
                 <a:ea typeface="游明朝" panose="02020400000000000000" pitchFamily="18" charset="-128"/>
               </a:rPr>
               <a:t>là</a:t>
@@ -21080,7 +21099,7 @@
                   <a:srgbClr val="000000"/>
                 </a:solidFill>
                 <a:effectLst/>
-                <a:latin typeface="Arial" panose="020B0604020202020204" pitchFamily="34" charset="0"/>
+                <a:latin typeface="Arial" panose="020B0704020202020204" pitchFamily="34" charset="0"/>
                 <a:ea typeface="游明朝" panose="02020400000000000000" pitchFamily="18" charset="-128"/>
               </a:rPr>
               <a:t> </a:t>
@@ -21091,7 +21110,7 @@
                   <a:srgbClr val="000000"/>
                 </a:solidFill>
                 <a:effectLst/>
-                <a:latin typeface="Arial" panose="020B0604020202020204" pitchFamily="34" charset="0"/>
+                <a:latin typeface="Arial" panose="020B0704020202020204" pitchFamily="34" charset="0"/>
                 <a:ea typeface="游明朝" panose="02020400000000000000" pitchFamily="18" charset="-128"/>
               </a:rPr>
               <a:t>phép</a:t>
@@ -21102,7 +21121,7 @@
                   <a:srgbClr val="000000"/>
                 </a:solidFill>
                 <a:effectLst/>
-                <a:latin typeface="Arial" panose="020B0604020202020204" pitchFamily="34" charset="0"/>
+                <a:latin typeface="Arial" panose="020B0704020202020204" pitchFamily="34" charset="0"/>
                 <a:ea typeface="游明朝" panose="02020400000000000000" pitchFamily="18" charset="-128"/>
               </a:rPr>
               <a:t> </a:t>
@@ -21113,7 +21132,7 @@
                   <a:srgbClr val="000000"/>
                 </a:solidFill>
                 <a:effectLst/>
-                <a:latin typeface="Arial" panose="020B0604020202020204" pitchFamily="34" charset="0"/>
+                <a:latin typeface="Arial" panose="020B0704020202020204" pitchFamily="34" charset="0"/>
                 <a:ea typeface="游明朝" panose="02020400000000000000" pitchFamily="18" charset="-128"/>
               </a:rPr>
               <a:t>đo</a:t>
@@ -21124,7 +21143,7 @@
                   <a:srgbClr val="000000"/>
                 </a:solidFill>
                 <a:effectLst/>
-                <a:latin typeface="Arial" panose="020B0604020202020204" pitchFamily="34" charset="0"/>
+                <a:latin typeface="Arial" panose="020B0704020202020204" pitchFamily="34" charset="0"/>
                 <a:ea typeface="游明朝" panose="02020400000000000000" pitchFamily="18" charset="-128"/>
               </a:rPr>
               <a:t> </a:t>
@@ -21135,7 +21154,7 @@
                   <a:srgbClr val="000000"/>
                 </a:solidFill>
                 <a:effectLst/>
-                <a:latin typeface="Arial" panose="020B0604020202020204" pitchFamily="34" charset="0"/>
+                <a:latin typeface="Arial" panose="020B0704020202020204" pitchFamily="34" charset="0"/>
                 <a:ea typeface="游明朝" panose="02020400000000000000" pitchFamily="18" charset="-128"/>
               </a:rPr>
               <a:t>trực</a:t>
@@ -21146,7 +21165,7 @@
                   <a:srgbClr val="000000"/>
                 </a:solidFill>
                 <a:effectLst/>
-                <a:latin typeface="Arial" panose="020B0604020202020204" pitchFamily="34" charset="0"/>
+                <a:latin typeface="Arial" panose="020B0704020202020204" pitchFamily="34" charset="0"/>
                 <a:ea typeface="游明朝" panose="02020400000000000000" pitchFamily="18" charset="-128"/>
               </a:rPr>
               <a:t> </a:t>
@@ -21157,7 +21176,7 @@
                   <a:srgbClr val="000000"/>
                 </a:solidFill>
                 <a:effectLst/>
-                <a:latin typeface="Arial" panose="020B0604020202020204" pitchFamily="34" charset="0"/>
+                <a:latin typeface="Arial" panose="020B0704020202020204" pitchFamily="34" charset="0"/>
                 <a:ea typeface="游明朝" panose="02020400000000000000" pitchFamily="18" charset="-128"/>
               </a:rPr>
               <a:t>tiếp</a:t>
@@ -21168,7 +21187,7 @@
                   <a:srgbClr val="000000"/>
                 </a:solidFill>
                 <a:effectLst/>
-                <a:latin typeface="Arial" panose="020B0604020202020204" pitchFamily="34" charset="0"/>
+                <a:latin typeface="Arial" panose="020B0704020202020204" pitchFamily="34" charset="0"/>
                 <a:ea typeface="游明朝" panose="02020400000000000000" pitchFamily="18" charset="-128"/>
               </a:rPr>
               <a:t>? </a:t>
@@ -21179,7 +21198,7 @@
                   <a:srgbClr val="000000"/>
                 </a:solidFill>
                 <a:effectLst/>
-                <a:latin typeface="Arial" panose="020B0604020202020204" pitchFamily="34" charset="0"/>
+                <a:latin typeface="Arial" panose="020B0704020202020204" pitchFamily="34" charset="0"/>
                 <a:ea typeface="游明朝" panose="02020400000000000000" pitchFamily="18" charset="-128"/>
               </a:rPr>
               <a:t>Tại</a:t>
@@ -21190,7 +21209,7 @@
                   <a:srgbClr val="000000"/>
                 </a:solidFill>
                 <a:effectLst/>
-                <a:latin typeface="Arial" panose="020B0604020202020204" pitchFamily="34" charset="0"/>
+                <a:latin typeface="Arial" panose="020B0704020202020204" pitchFamily="34" charset="0"/>
                 <a:ea typeface="游明朝" panose="02020400000000000000" pitchFamily="18" charset="-128"/>
               </a:rPr>
               <a:t> </a:t>
@@ -21201,7 +21220,7 @@
                   <a:srgbClr val="000000"/>
                 </a:solidFill>
                 <a:effectLst/>
-                <a:latin typeface="Arial" panose="020B0604020202020204" pitchFamily="34" charset="0"/>
+                <a:latin typeface="Arial" panose="020B0704020202020204" pitchFamily="34" charset="0"/>
                 <a:ea typeface="游明朝" panose="02020400000000000000" pitchFamily="18" charset="-128"/>
               </a:rPr>
               <a:t>sao</a:t>
@@ -21212,7 +21231,7 @@
                   <a:srgbClr val="000000"/>
                 </a:solidFill>
                 <a:effectLst/>
-                <a:latin typeface="Arial" panose="020B0604020202020204" pitchFamily="34" charset="0"/>
+                <a:latin typeface="Arial" panose="020B0704020202020204" pitchFamily="34" charset="0"/>
                 <a:ea typeface="游明朝" panose="02020400000000000000" pitchFamily="18" charset="-128"/>
               </a:rPr>
               <a:t>? </a:t>
@@ -21222,7 +21241,7 @@
                 <a:srgbClr val="000000"/>
               </a:solidFill>
               <a:effectLst/>
-              <a:latin typeface="Arial" panose="020B0604020202020204" pitchFamily="34" charset="0"/>
+              <a:latin typeface="Arial" panose="020B0704020202020204" pitchFamily="34" charset="0"/>
               <a:ea typeface="游明朝" panose="02020400000000000000" pitchFamily="18" charset="-128"/>
             </a:endParaRPr>
           </a:p>
@@ -21241,7 +21260,7 @@
                   <a:srgbClr val="000000"/>
                 </a:solidFill>
                 <a:effectLst/>
-                <a:latin typeface="Arial" panose="020B0604020202020204" pitchFamily="34" charset="0"/>
+                <a:latin typeface="Arial" panose="020B0704020202020204" pitchFamily="34" charset="0"/>
                 <a:ea typeface="游明朝" panose="02020400000000000000" pitchFamily="18" charset="-128"/>
               </a:rPr>
               <a:t>d) </a:t>
@@ -21252,7 +21271,7 @@
                   <a:srgbClr val="000000"/>
                 </a:solidFill>
                 <a:effectLst/>
-                <a:latin typeface="Arial" panose="020B0604020202020204" pitchFamily="34" charset="0"/>
+                <a:latin typeface="Arial" panose="020B0704020202020204" pitchFamily="34" charset="0"/>
                 <a:ea typeface="游明朝" panose="02020400000000000000" pitchFamily="18" charset="-128"/>
               </a:rPr>
               <a:t>Phép</a:t>
@@ -21263,7 +21282,7 @@
                   <a:srgbClr val="000000"/>
                 </a:solidFill>
                 <a:effectLst/>
-                <a:latin typeface="Arial" panose="020B0604020202020204" pitchFamily="34" charset="0"/>
+                <a:latin typeface="Arial" panose="020B0704020202020204" pitchFamily="34" charset="0"/>
                 <a:ea typeface="游明朝" panose="02020400000000000000" pitchFamily="18" charset="-128"/>
               </a:rPr>
               <a:t> </a:t>
@@ -21274,7 +21293,7 @@
                   <a:srgbClr val="000000"/>
                 </a:solidFill>
                 <a:effectLst/>
-                <a:latin typeface="Arial" panose="020B0604020202020204" pitchFamily="34" charset="0"/>
+                <a:latin typeface="Arial" panose="020B0704020202020204" pitchFamily="34" charset="0"/>
                 <a:ea typeface="游明朝" panose="02020400000000000000" pitchFamily="18" charset="-128"/>
               </a:rPr>
               <a:t>đo</a:t>
@@ -21285,7 +21304,7 @@
                   <a:srgbClr val="000000"/>
                 </a:solidFill>
                 <a:effectLst/>
-                <a:latin typeface="Arial" panose="020B0604020202020204" pitchFamily="34" charset="0"/>
+                <a:latin typeface="Arial" panose="020B0704020202020204" pitchFamily="34" charset="0"/>
                 <a:ea typeface="游明朝" panose="02020400000000000000" pitchFamily="18" charset="-128"/>
               </a:rPr>
               <a:t> </a:t>
@@ -21296,7 +21315,7 @@
                   <a:srgbClr val="000000"/>
                 </a:solidFill>
                 <a:effectLst/>
-                <a:latin typeface="Arial" panose="020B0604020202020204" pitchFamily="34" charset="0"/>
+                <a:latin typeface="Arial" panose="020B0704020202020204" pitchFamily="34" charset="0"/>
                 <a:ea typeface="游明朝" panose="02020400000000000000" pitchFamily="18" charset="-128"/>
               </a:rPr>
               <a:t>nào</a:t>
@@ -21307,7 +21326,7 @@
                   <a:srgbClr val="000000"/>
                 </a:solidFill>
                 <a:effectLst/>
-                <a:latin typeface="Arial" panose="020B0604020202020204" pitchFamily="34" charset="0"/>
+                <a:latin typeface="Arial" panose="020B0704020202020204" pitchFamily="34" charset="0"/>
                 <a:ea typeface="游明朝" panose="02020400000000000000" pitchFamily="18" charset="-128"/>
               </a:rPr>
               <a:t> </a:t>
@@ -21318,7 +21337,7 @@
                   <a:srgbClr val="000000"/>
                 </a:solidFill>
                 <a:effectLst/>
-                <a:latin typeface="Arial" panose="020B0604020202020204" pitchFamily="34" charset="0"/>
+                <a:latin typeface="Arial" panose="020B0704020202020204" pitchFamily="34" charset="0"/>
                 <a:ea typeface="游明朝" panose="02020400000000000000" pitchFamily="18" charset="-128"/>
               </a:rPr>
               <a:t>là</a:t>
@@ -21329,7 +21348,7 @@
                   <a:srgbClr val="000000"/>
                 </a:solidFill>
                 <a:effectLst/>
-                <a:latin typeface="Arial" panose="020B0604020202020204" pitchFamily="34" charset="0"/>
+                <a:latin typeface="Arial" panose="020B0704020202020204" pitchFamily="34" charset="0"/>
                 <a:ea typeface="游明朝" panose="02020400000000000000" pitchFamily="18" charset="-128"/>
               </a:rPr>
               <a:t> </a:t>
@@ -21340,7 +21359,7 @@
                   <a:srgbClr val="000000"/>
                 </a:solidFill>
                 <a:effectLst/>
-                <a:latin typeface="Arial" panose="020B0604020202020204" pitchFamily="34" charset="0"/>
+                <a:latin typeface="Arial" panose="020B0704020202020204" pitchFamily="34" charset="0"/>
                 <a:ea typeface="游明朝" panose="02020400000000000000" pitchFamily="18" charset="-128"/>
               </a:rPr>
               <a:t>phép</a:t>
@@ -21351,7 +21370,7 @@
                   <a:srgbClr val="000000"/>
                 </a:solidFill>
                 <a:effectLst/>
-                <a:latin typeface="Arial" panose="020B0604020202020204" pitchFamily="34" charset="0"/>
+                <a:latin typeface="Arial" panose="020B0704020202020204" pitchFamily="34" charset="0"/>
                 <a:ea typeface="游明朝" panose="02020400000000000000" pitchFamily="18" charset="-128"/>
               </a:rPr>
               <a:t> </a:t>
@@ -21362,7 +21381,7 @@
                   <a:srgbClr val="000000"/>
                 </a:solidFill>
                 <a:effectLst/>
-                <a:latin typeface="Arial" panose="020B0604020202020204" pitchFamily="34" charset="0"/>
+                <a:latin typeface="Arial" panose="020B0704020202020204" pitchFamily="34" charset="0"/>
                 <a:ea typeface="游明朝" panose="02020400000000000000" pitchFamily="18" charset="-128"/>
               </a:rPr>
               <a:t>đo</a:t>
@@ -21373,7 +21392,7 @@
                   <a:srgbClr val="000000"/>
                 </a:solidFill>
                 <a:effectLst/>
-                <a:latin typeface="Arial" panose="020B0604020202020204" pitchFamily="34" charset="0"/>
+                <a:latin typeface="Arial" panose="020B0704020202020204" pitchFamily="34" charset="0"/>
                 <a:ea typeface="游明朝" panose="02020400000000000000" pitchFamily="18" charset="-128"/>
               </a:rPr>
               <a:t> </a:t>
@@ -21384,7 +21403,7 @@
                   <a:srgbClr val="000000"/>
                 </a:solidFill>
                 <a:effectLst/>
-                <a:latin typeface="Arial" panose="020B0604020202020204" pitchFamily="34" charset="0"/>
+                <a:latin typeface="Arial" panose="020B0704020202020204" pitchFamily="34" charset="0"/>
                 <a:ea typeface="游明朝" panose="02020400000000000000" pitchFamily="18" charset="-128"/>
               </a:rPr>
               <a:t>gián</a:t>
@@ -21395,7 +21414,7 @@
                   <a:srgbClr val="000000"/>
                 </a:solidFill>
                 <a:effectLst/>
-                <a:latin typeface="Arial" panose="020B0604020202020204" pitchFamily="34" charset="0"/>
+                <a:latin typeface="Arial" panose="020B0704020202020204" pitchFamily="34" charset="0"/>
                 <a:ea typeface="游明朝" panose="02020400000000000000" pitchFamily="18" charset="-128"/>
               </a:rPr>
               <a:t> </a:t>
@@ -21406,7 +21425,7 @@
                   <a:srgbClr val="000000"/>
                 </a:solidFill>
                 <a:effectLst/>
-                <a:latin typeface="Arial" panose="020B0604020202020204" pitchFamily="34" charset="0"/>
+                <a:latin typeface="Arial" panose="020B0704020202020204" pitchFamily="34" charset="0"/>
                 <a:ea typeface="游明朝" panose="02020400000000000000" pitchFamily="18" charset="-128"/>
               </a:rPr>
               <a:t>tiếp</a:t>
@@ -21417,7 +21436,7 @@
                   <a:srgbClr val="000000"/>
                 </a:solidFill>
                 <a:effectLst/>
-                <a:latin typeface="Arial" panose="020B0604020202020204" pitchFamily="34" charset="0"/>
+                <a:latin typeface="Arial" panose="020B0704020202020204" pitchFamily="34" charset="0"/>
                 <a:ea typeface="游明朝" panose="02020400000000000000" pitchFamily="18" charset="-128"/>
               </a:rPr>
               <a:t>? </a:t>
@@ -21428,7 +21447,7 @@
                   <a:srgbClr val="000000"/>
                 </a:solidFill>
                 <a:effectLst/>
-                <a:latin typeface="Arial" panose="020B0604020202020204" pitchFamily="34" charset="0"/>
+                <a:latin typeface="Arial" panose="020B0704020202020204" pitchFamily="34" charset="0"/>
                 <a:ea typeface="游明朝" panose="02020400000000000000" pitchFamily="18" charset="-128"/>
               </a:rPr>
               <a:t>Tại</a:t>
@@ -21439,7 +21458,7 @@
                   <a:srgbClr val="000000"/>
                 </a:solidFill>
                 <a:effectLst/>
-                <a:latin typeface="Arial" panose="020B0604020202020204" pitchFamily="34" charset="0"/>
+                <a:latin typeface="Arial" panose="020B0704020202020204" pitchFamily="34" charset="0"/>
                 <a:ea typeface="游明朝" panose="02020400000000000000" pitchFamily="18" charset="-128"/>
               </a:rPr>
               <a:t> </a:t>
@@ -21450,7 +21469,7 @@
                   <a:srgbClr val="000000"/>
                 </a:solidFill>
                 <a:effectLst/>
-                <a:latin typeface="Arial" panose="020B0604020202020204" pitchFamily="34" charset="0"/>
+                <a:latin typeface="Arial" panose="020B0704020202020204" pitchFamily="34" charset="0"/>
                 <a:ea typeface="游明朝" panose="02020400000000000000" pitchFamily="18" charset="-128"/>
               </a:rPr>
               <a:t>sao</a:t>
@@ -21461,16 +21480,16 @@
                   <a:srgbClr val="000000"/>
                 </a:solidFill>
                 <a:effectLst/>
-                <a:latin typeface="Arial" panose="020B0604020202020204" pitchFamily="34" charset="0"/>
+                <a:latin typeface="Arial" panose="020B0704020202020204" pitchFamily="34" charset="0"/>
                 <a:ea typeface="游明朝" panose="02020400000000000000" pitchFamily="18" charset="-128"/>
               </a:rPr>
               <a:t>?</a:t>
             </a:r>
             <a:endParaRPr lang="en-US" sz="2500" dirty="0">
               <a:effectLst/>
-              <a:latin typeface="Arial" panose="020B0604020202020204" pitchFamily="34" charset="0"/>
+              <a:latin typeface="Arial" panose="020B0704020202020204" pitchFamily="34" charset="0"/>
               <a:ea typeface="游明朝" panose="02020400000000000000" pitchFamily="18" charset="-128"/>
-              <a:cs typeface="Arial" panose="020B0604020202020204" pitchFamily="34" charset="0"/>
+              <a:cs typeface="Arial" panose="020B0704020202020204" pitchFamily="34" charset="0"/>
             </a:endParaRPr>
           </a:p>
         </p:txBody>
@@ -21731,9 +21750,9 @@
                     <a:srgbClr val="000000"/>
                   </a:solidFill>
                   <a:effectLst/>
-                  <a:latin typeface="Arial" panose="020B0604020202020204" pitchFamily="34" charset="0"/>
+                  <a:latin typeface="Arial" panose="020B0704020202020204" pitchFamily="34" charset="0"/>
                   <a:ea typeface="Times New Roman" panose="02020603050405020304" pitchFamily="18" charset="0"/>
-                  <a:cs typeface="Arial" panose="020B0604020202020204" pitchFamily="34" charset="0"/>
+                  <a:cs typeface="Arial" panose="020B0704020202020204" pitchFamily="34" charset="0"/>
                 </a:rPr>
                 <a:t>Khi thực hiện phép đo, chúng ta không thể tránh khỏi sự chênh lệnh giữa giá trị thật và số đo (giá trị đo được). </a:t>
               </a:r>
@@ -21743,9 +21762,9 @@
                     <a:srgbClr val="000000"/>
                   </a:solidFill>
                   <a:effectLst/>
-                  <a:latin typeface="Arial" panose="020B0604020202020204" pitchFamily="34" charset="0"/>
+                  <a:latin typeface="Arial" panose="020B0704020202020204" pitchFamily="34" charset="0"/>
                   <a:ea typeface="Times New Roman" panose="02020603050405020304" pitchFamily="18" charset="0"/>
-                  <a:cs typeface="Arial" panose="020B0604020202020204" pitchFamily="34" charset="0"/>
+                  <a:cs typeface="Arial" panose="020B0704020202020204" pitchFamily="34" charset="0"/>
                 </a:rPr>
                 <a:t>Độ chênh lệch này gọi là sai số</a:t>
               </a:r>
@@ -21755,9 +21774,9 @@
                     <a:srgbClr val="000000"/>
                   </a:solidFill>
                   <a:effectLst/>
-                  <a:latin typeface="Arial" panose="020B0604020202020204" pitchFamily="34" charset="0"/>
+                  <a:latin typeface="Arial" panose="020B0704020202020204" pitchFamily="34" charset="0"/>
                   <a:ea typeface="Times New Roman" panose="02020603050405020304" pitchFamily="18" charset="0"/>
-                  <a:cs typeface="Arial" panose="020B0604020202020204" pitchFamily="34" charset="0"/>
+                  <a:cs typeface="Arial" panose="020B0704020202020204" pitchFamily="34" charset="0"/>
                 </a:rPr>
                 <a:t>. Như vậy, mọi phép đo đều tồn tại sai số. </a:t>
               </a:r>
@@ -21766,9 +21785,9 @@
                   <a:srgbClr val="000000"/>
                 </a:solidFill>
                 <a:effectLst/>
-                <a:latin typeface="Arial" panose="020B0604020202020204" pitchFamily="34" charset="0"/>
+                <a:latin typeface="Arial" panose="020B0704020202020204" pitchFamily="34" charset="0"/>
                 <a:ea typeface="Times New Roman" panose="02020603050405020304" pitchFamily="18" charset="0"/>
-                <a:cs typeface="Arial" panose="020B0604020202020204" pitchFamily="34" charset="0"/>
+                <a:cs typeface="Arial" panose="020B0704020202020204" pitchFamily="34" charset="0"/>
               </a:endParaRPr>
             </a:p>
           </p:txBody>
@@ -21851,14 +21870,14 @@
               <a:pPr algn="ctr"/>
               <a:r>
                 <a:rPr lang="en-US" sz="2500">
-                  <a:latin typeface="Arial" panose="020B0604020202020204" pitchFamily="34" charset="0"/>
-                  <a:cs typeface="Arial" panose="020B0604020202020204" pitchFamily="34" charset="0"/>
+                  <a:latin typeface="Arial" panose="020B0704020202020204" pitchFamily="34" charset="0"/>
+                  <a:cs typeface="Arial" panose="020B0704020202020204" pitchFamily="34" charset="0"/>
                 </a:rPr>
                 <a:t>Sai số hệ thống</a:t>
               </a:r>
               <a:endParaRPr lang="en-US" sz="2500">
-                <a:latin typeface="Arial" panose="020B0604020202020204" pitchFamily="34" charset="0"/>
-                <a:cs typeface="Arial" panose="020B0604020202020204" pitchFamily="34" charset="0"/>
+                <a:latin typeface="Arial" panose="020B0704020202020204" pitchFamily="34" charset="0"/>
+                <a:cs typeface="Arial" panose="020B0704020202020204" pitchFamily="34" charset="0"/>
               </a:endParaRPr>
             </a:p>
           </p:txBody>
@@ -21926,14 +21945,14 @@
               <a:pPr algn="ctr"/>
               <a:r>
                 <a:rPr lang="en-US" sz="2500">
-                  <a:latin typeface="Arial" panose="020B0604020202020204" pitchFamily="34" charset="0"/>
-                  <a:cs typeface="Arial" panose="020B0604020202020204" pitchFamily="34" charset="0"/>
+                  <a:latin typeface="Arial" panose="020B0704020202020204" pitchFamily="34" charset="0"/>
+                  <a:cs typeface="Arial" panose="020B0704020202020204" pitchFamily="34" charset="0"/>
                 </a:rPr>
                 <a:t>Sai số ngẫu nhiên</a:t>
               </a:r>
               <a:endParaRPr lang="en-US" sz="2500">
-                <a:latin typeface="Arial" panose="020B0604020202020204" pitchFamily="34" charset="0"/>
-                <a:cs typeface="Arial" panose="020B0604020202020204" pitchFamily="34" charset="0"/>
+                <a:latin typeface="Arial" panose="020B0704020202020204" pitchFamily="34" charset="0"/>
+                <a:cs typeface="Arial" panose="020B0704020202020204" pitchFamily="34" charset="0"/>
               </a:endParaRPr>
             </a:p>
           </p:txBody>
@@ -22070,14 +22089,14 @@
             <a:pPr algn="ctr"/>
             <a:r>
               <a:rPr lang="en-US" sz="3000">
-                <a:latin typeface="Arial" panose="020B0604020202020204" pitchFamily="34" charset="0"/>
-                <a:cs typeface="Arial" panose="020B0604020202020204" pitchFamily="34" charset="0"/>
+                <a:latin typeface="Arial" panose="020B0704020202020204" pitchFamily="34" charset="0"/>
+                <a:cs typeface="Arial" panose="020B0704020202020204" pitchFamily="34" charset="0"/>
               </a:rPr>
               <a:t>Sai số</a:t>
             </a:r>
             <a:endParaRPr lang="en-US" sz="3000">
-              <a:latin typeface="Arial" panose="020B0604020202020204" pitchFamily="34" charset="0"/>
-              <a:cs typeface="Arial" panose="020B0604020202020204" pitchFamily="34" charset="0"/>
+              <a:latin typeface="Arial" panose="020B0704020202020204" pitchFamily="34" charset="0"/>
+              <a:cs typeface="Arial" panose="020B0704020202020204" pitchFamily="34" charset="0"/>
             </a:endParaRPr>
           </a:p>
         </p:txBody>
@@ -22268,8 +22287,8 @@
                       </a:srgbClr>
                     </a:outerShdw>
                   </a:effectLst>
-                  <a:latin typeface="Arial" panose="020B0604020202020204" pitchFamily="34" charset="0"/>
-                  <a:cs typeface="Arial" panose="020B0604020202020204" pitchFamily="34" charset="0"/>
+                  <a:latin typeface="Arial" panose="020B0704020202020204" pitchFamily="34" charset="0"/>
+                  <a:cs typeface="Arial" panose="020B0704020202020204" pitchFamily="34" charset="0"/>
                 </a:rPr>
                 <a:t>II</a:t>
               </a:r>
@@ -22296,8 +22315,8 @@
                     </a:srgbClr>
                   </a:outerShdw>
                 </a:effectLst>
-                <a:latin typeface="Arial" panose="020B0604020202020204" pitchFamily="34" charset="0"/>
-                <a:cs typeface="Arial" panose="020B0604020202020204" pitchFamily="34" charset="0"/>
+                <a:latin typeface="Arial" panose="020B0704020202020204" pitchFamily="34" charset="0"/>
+                <a:cs typeface="Arial" panose="020B0704020202020204" pitchFamily="34" charset="0"/>
               </a:endParaRPr>
             </a:p>
           </p:txBody>
@@ -22334,7 +22353,7 @@
                   <a:solidFill>
                     <a:schemeClr val="tx1"/>
                   </a:solidFill>
-                  <a:latin typeface="Arial" panose="020B0604020202020204" pitchFamily="34" charset="0"/>
+                  <a:latin typeface="Arial" panose="020B0704020202020204" pitchFamily="34" charset="0"/>
                 </a:defRPr>
               </a:lvl1pPr>
               <a:lvl2pPr marL="742950" indent="-285750" defTabSz="1095375">
@@ -22342,7 +22361,7 @@
                   <a:solidFill>
                     <a:schemeClr val="tx1"/>
                   </a:solidFill>
-                  <a:latin typeface="Arial" panose="020B0604020202020204" pitchFamily="34" charset="0"/>
+                  <a:latin typeface="Arial" panose="020B0704020202020204" pitchFamily="34" charset="0"/>
                 </a:defRPr>
               </a:lvl2pPr>
               <a:lvl3pPr marL="1143000" indent="-228600" defTabSz="1095375">
@@ -22350,7 +22369,7 @@
                   <a:solidFill>
                     <a:schemeClr val="tx1"/>
                   </a:solidFill>
-                  <a:latin typeface="Arial" panose="020B0604020202020204" pitchFamily="34" charset="0"/>
+                  <a:latin typeface="Arial" panose="020B0704020202020204" pitchFamily="34" charset="0"/>
                 </a:defRPr>
               </a:lvl3pPr>
               <a:lvl4pPr marL="1600200" indent="-228600" defTabSz="1095375">
@@ -22358,7 +22377,7 @@
                   <a:solidFill>
                     <a:schemeClr val="tx1"/>
                   </a:solidFill>
-                  <a:latin typeface="Arial" panose="020B0604020202020204" pitchFamily="34" charset="0"/>
+                  <a:latin typeface="Arial" panose="020B0704020202020204" pitchFamily="34" charset="0"/>
                 </a:defRPr>
               </a:lvl4pPr>
               <a:lvl5pPr marL="2057400" indent="-228600" defTabSz="1095375">
@@ -22366,7 +22385,7 @@
                   <a:solidFill>
                     <a:schemeClr val="tx1"/>
                   </a:solidFill>
-                  <a:latin typeface="Arial" panose="020B0604020202020204" pitchFamily="34" charset="0"/>
+                  <a:latin typeface="Arial" panose="020B0704020202020204" pitchFamily="34" charset="0"/>
                 </a:defRPr>
               </a:lvl5pPr>
               <a:lvl6pPr marL="2514600" indent="-228600" defTabSz="1095375" fontAlgn="base">
@@ -22380,7 +22399,7 @@
                   <a:solidFill>
                     <a:schemeClr val="tx1"/>
                   </a:solidFill>
-                  <a:latin typeface="Arial" panose="020B0604020202020204" pitchFamily="34" charset="0"/>
+                  <a:latin typeface="Arial" panose="020B0704020202020204" pitchFamily="34" charset="0"/>
                 </a:defRPr>
               </a:lvl6pPr>
               <a:lvl7pPr marL="2971800" indent="-228600" defTabSz="1095375" fontAlgn="base">
@@ -22394,7 +22413,7 @@
                   <a:solidFill>
                     <a:schemeClr val="tx1"/>
                   </a:solidFill>
-                  <a:latin typeface="Arial" panose="020B0604020202020204" pitchFamily="34" charset="0"/>
+                  <a:latin typeface="Arial" panose="020B0704020202020204" pitchFamily="34" charset="0"/>
                 </a:defRPr>
               </a:lvl7pPr>
               <a:lvl8pPr marL="3429000" indent="-228600" defTabSz="1095375" fontAlgn="base">
@@ -22408,7 +22427,7 @@
                   <a:solidFill>
                     <a:schemeClr val="tx1"/>
                   </a:solidFill>
-                  <a:latin typeface="Arial" panose="020B0604020202020204" pitchFamily="34" charset="0"/>
+                  <a:latin typeface="Arial" panose="020B0704020202020204" pitchFamily="34" charset="0"/>
                 </a:defRPr>
               </a:lvl8pPr>
               <a:lvl9pPr marL="3886200" indent="-228600" defTabSz="1095375" fontAlgn="base">
@@ -22422,7 +22441,7 @@
                   <a:solidFill>
                     <a:schemeClr val="tx1"/>
                   </a:solidFill>
-                  <a:latin typeface="Arial" panose="020B0604020202020204" pitchFamily="34" charset="0"/>
+                  <a:latin typeface="Arial" panose="020B0704020202020204" pitchFamily="34" charset="0"/>
                 </a:defRPr>
               </a:lvl9pPr>
             </a:lstStyle>
@@ -22436,12 +22455,12 @@
               </a:pPr>
               <a:r>
                 <a:rPr lang="en-US" sz="2800" i="1">
-                  <a:cs typeface="Arial" panose="020B0604020202020204" pitchFamily="34" charset="0"/>
+                  <a:cs typeface="Arial" panose="020B0704020202020204" pitchFamily="34" charset="0"/>
                 </a:rPr>
                 <a:t>Sai số phép đo</a:t>
               </a:r>
               <a:endParaRPr lang="en-US" sz="2800" dirty="0">
-                <a:cs typeface="Arial" panose="020B0604020202020204" pitchFamily="34" charset="0"/>
+                <a:cs typeface="Arial" panose="020B0704020202020204" pitchFamily="34" charset="0"/>
               </a:endParaRPr>
             </a:p>
           </p:txBody>
@@ -22501,7 +22520,7 @@
                 <a:solidFill>
                   <a:schemeClr val="tx1"/>
                 </a:solidFill>
-                <a:latin typeface="Arial" panose="020B0604020202020204" pitchFamily="34" charset="0"/>
+                <a:latin typeface="Arial" panose="020B0704020202020204" pitchFamily="34" charset="0"/>
               </a:defRPr>
             </a:lvl1pPr>
             <a:lvl2pPr marL="742950" indent="-285750">
@@ -22513,7 +22532,7 @@
                 <a:solidFill>
                   <a:schemeClr val="tx1"/>
                 </a:solidFill>
-                <a:latin typeface="Arial" panose="020B0604020202020204" pitchFamily="34" charset="0"/>
+                <a:latin typeface="Arial" panose="020B0704020202020204" pitchFamily="34" charset="0"/>
               </a:defRPr>
             </a:lvl2pPr>
             <a:lvl3pPr marL="1143000" indent="-228600">
@@ -22525,7 +22544,7 @@
                 <a:solidFill>
                   <a:schemeClr val="tx1"/>
                 </a:solidFill>
-                <a:latin typeface="Arial" panose="020B0604020202020204" pitchFamily="34" charset="0"/>
+                <a:latin typeface="Arial" panose="020B0704020202020204" pitchFamily="34" charset="0"/>
               </a:defRPr>
             </a:lvl3pPr>
             <a:lvl4pPr marL="1600200" indent="-228600">
@@ -22537,7 +22556,7 @@
                 <a:solidFill>
                   <a:schemeClr val="tx1"/>
                 </a:solidFill>
-                <a:latin typeface="Arial" panose="020B0604020202020204" pitchFamily="34" charset="0"/>
+                <a:latin typeface="Arial" panose="020B0704020202020204" pitchFamily="34" charset="0"/>
               </a:defRPr>
             </a:lvl4pPr>
             <a:lvl5pPr marL="2057400" indent="-228600">
@@ -22549,7 +22568,7 @@
                 <a:solidFill>
                   <a:schemeClr val="tx1"/>
                 </a:solidFill>
-                <a:latin typeface="Arial" panose="020B0604020202020204" pitchFamily="34" charset="0"/>
+                <a:latin typeface="Arial" panose="020B0704020202020204" pitchFamily="34" charset="0"/>
               </a:defRPr>
             </a:lvl5pPr>
             <a:lvl6pPr marL="2514600" indent="-228600" eaLnBrk="0" fontAlgn="base" hangingPunct="0">
@@ -22564,7 +22583,7 @@
                 <a:solidFill>
                   <a:schemeClr val="tx1"/>
                 </a:solidFill>
-                <a:latin typeface="Arial" panose="020B0604020202020204" pitchFamily="34" charset="0"/>
+                <a:latin typeface="Arial" panose="020B0704020202020204" pitchFamily="34" charset="0"/>
               </a:defRPr>
             </a:lvl6pPr>
             <a:lvl7pPr marL="2971800" indent="-228600" eaLnBrk="0" fontAlgn="base" hangingPunct="0">
@@ -22579,7 +22598,7 @@
                 <a:solidFill>
                   <a:schemeClr val="tx1"/>
                 </a:solidFill>
-                <a:latin typeface="Arial" panose="020B0604020202020204" pitchFamily="34" charset="0"/>
+                <a:latin typeface="Arial" panose="020B0704020202020204" pitchFamily="34" charset="0"/>
               </a:defRPr>
             </a:lvl7pPr>
             <a:lvl8pPr marL="3429000" indent="-228600" eaLnBrk="0" fontAlgn="base" hangingPunct="0">
@@ -22594,7 +22613,7 @@
                 <a:solidFill>
                   <a:schemeClr val="tx1"/>
                 </a:solidFill>
-                <a:latin typeface="Arial" panose="020B0604020202020204" pitchFamily="34" charset="0"/>
+                <a:latin typeface="Arial" panose="020B0704020202020204" pitchFamily="34" charset="0"/>
               </a:defRPr>
             </a:lvl8pPr>
             <a:lvl9pPr marL="3886200" indent="-228600" eaLnBrk="0" fontAlgn="base" hangingPunct="0">
@@ -22609,7 +22628,7 @@
                 <a:solidFill>
                   <a:schemeClr val="tx1"/>
                 </a:solidFill>
-                <a:latin typeface="Arial" panose="020B0604020202020204" pitchFamily="34" charset="0"/>
+                <a:latin typeface="Arial" panose="020B0704020202020204" pitchFamily="34" charset="0"/>
               </a:defRPr>
             </a:lvl9pPr>
           </a:lstStyle>
@@ -22627,7 +22646,7 @@
                 <a:solidFill>
                   <a:srgbClr val="0070C0"/>
                 </a:solidFill>
-                <a:cs typeface="Arial" panose="020B0604020202020204" pitchFamily="34" charset="0"/>
+                <a:cs typeface="Arial" panose="020B0704020202020204" pitchFamily="34" charset="0"/>
               </a:rPr>
               <a:t>1. Phân loại sai số</a:t>
             </a:r>
@@ -22635,7 +22654,7 @@
               <a:solidFill>
                 <a:srgbClr val="0070C0"/>
               </a:solidFill>
-              <a:cs typeface="Arial" panose="020B0604020202020204" pitchFamily="34" charset="0"/>
+              <a:cs typeface="Arial" panose="020B0704020202020204" pitchFamily="34" charset="0"/>
             </a:endParaRPr>
           </a:p>
         </p:txBody>
@@ -22908,7 +22927,7 @@
                   <a:srgbClr val="000000"/>
                 </a:solidFill>
                 <a:effectLst/>
-                <a:latin typeface="Arial" panose="020B0604020202020204" pitchFamily="34" charset="0"/>
+                <a:latin typeface="Arial" panose="020B0704020202020204" pitchFamily="34" charset="0"/>
                 <a:ea typeface="Times New Roman" panose="02020603050405020304" pitchFamily="18" charset="0"/>
               </a:rPr>
               <a:t>Khi sử dụng dụng cụ đo để đo các đại lượng vật lí luôn có sự sai lệch do đặc điểm và cấu tạo của dụng cụ gây ra.</a:t>
@@ -22948,7 +22967,7 @@
                 <a:solidFill>
                   <a:srgbClr val="00B050"/>
                 </a:solidFill>
-                <a:latin typeface="Arial" panose="020B0604020202020204" pitchFamily="34" charset="0"/>
+                <a:latin typeface="Arial" panose="020B0704020202020204" pitchFamily="34" charset="0"/>
                 <a:ea typeface="Times New Roman" panose="02020603050405020304" pitchFamily="18" charset="0"/>
                 <a:cs typeface="Times New Roman" panose="02020603050405020304" pitchFamily="18" charset="0"/>
               </a:rPr>
@@ -22960,7 +22979,7 @@
                   <a:srgbClr val="00B050"/>
                 </a:solidFill>
                 <a:effectLst/>
-                <a:latin typeface="Arial" panose="020B0604020202020204" pitchFamily="34" charset="0"/>
+                <a:latin typeface="Arial" panose="020B0704020202020204" pitchFamily="34" charset="0"/>
                 <a:ea typeface="Times New Roman" panose="02020603050405020304" pitchFamily="18" charset="0"/>
                 <a:cs typeface="Times New Roman" panose="02020603050405020304" pitchFamily="18" charset="0"/>
               </a:rPr>
@@ -23013,7 +23032,7 @@
                   <a:srgbClr val="000000"/>
                 </a:solidFill>
                 <a:effectLst/>
-                <a:latin typeface="Arial" panose="020B0604020202020204" pitchFamily="34" charset="0"/>
+                <a:latin typeface="Arial" panose="020B0704020202020204" pitchFamily="34" charset="0"/>
                 <a:ea typeface="Times New Roman" panose="02020603050405020304" pitchFamily="18" charset="0"/>
                 <a:cs typeface="Times New Roman" panose="02020603050405020304" pitchFamily="18" charset="0"/>
               </a:rPr>
@@ -23244,8 +23263,8 @@
                       </a:srgbClr>
                     </a:outerShdw>
                   </a:effectLst>
-                  <a:latin typeface="Arial" panose="020B0604020202020204" pitchFamily="34" charset="0"/>
-                  <a:cs typeface="Arial" panose="020B0604020202020204" pitchFamily="34" charset="0"/>
+                  <a:latin typeface="Arial" panose="020B0704020202020204" pitchFamily="34" charset="0"/>
+                  <a:cs typeface="Arial" panose="020B0704020202020204" pitchFamily="34" charset="0"/>
                 </a:rPr>
                 <a:t>II</a:t>
               </a:r>
@@ -23272,8 +23291,8 @@
                     </a:srgbClr>
                   </a:outerShdw>
                 </a:effectLst>
-                <a:latin typeface="Arial" panose="020B0604020202020204" pitchFamily="34" charset="0"/>
-                <a:cs typeface="Arial" panose="020B0604020202020204" pitchFamily="34" charset="0"/>
+                <a:latin typeface="Arial" panose="020B0704020202020204" pitchFamily="34" charset="0"/>
+                <a:cs typeface="Arial" panose="020B0704020202020204" pitchFamily="34" charset="0"/>
               </a:endParaRPr>
             </a:p>
           </p:txBody>
@@ -23310,7 +23329,7 @@
                   <a:solidFill>
                     <a:schemeClr val="tx1"/>
                   </a:solidFill>
-                  <a:latin typeface="Arial" panose="020B0604020202020204" pitchFamily="34" charset="0"/>
+                  <a:latin typeface="Arial" panose="020B0704020202020204" pitchFamily="34" charset="0"/>
                 </a:defRPr>
               </a:lvl1pPr>
               <a:lvl2pPr marL="742950" indent="-285750" defTabSz="1095375">
@@ -23318,7 +23337,7 @@
                   <a:solidFill>
                     <a:schemeClr val="tx1"/>
                   </a:solidFill>
-                  <a:latin typeface="Arial" panose="020B0604020202020204" pitchFamily="34" charset="0"/>
+                  <a:latin typeface="Arial" panose="020B0704020202020204" pitchFamily="34" charset="0"/>
                 </a:defRPr>
               </a:lvl2pPr>
               <a:lvl3pPr marL="1143000" indent="-228600" defTabSz="1095375">
@@ -23326,7 +23345,7 @@
                   <a:solidFill>
                     <a:schemeClr val="tx1"/>
                   </a:solidFill>
-                  <a:latin typeface="Arial" panose="020B0604020202020204" pitchFamily="34" charset="0"/>
+                  <a:latin typeface="Arial" panose="020B0704020202020204" pitchFamily="34" charset="0"/>
                 </a:defRPr>
               </a:lvl3pPr>
               <a:lvl4pPr marL="1600200" indent="-228600" defTabSz="1095375">
@@ -23334,7 +23353,7 @@
                   <a:solidFill>
                     <a:schemeClr val="tx1"/>
                   </a:solidFill>
-                  <a:latin typeface="Arial" panose="020B0604020202020204" pitchFamily="34" charset="0"/>
+                  <a:latin typeface="Arial" panose="020B0704020202020204" pitchFamily="34" charset="0"/>
                 </a:defRPr>
               </a:lvl4pPr>
               <a:lvl5pPr marL="2057400" indent="-228600" defTabSz="1095375">
@@ -23342,7 +23361,7 @@
                   <a:solidFill>
                     <a:schemeClr val="tx1"/>
                   </a:solidFill>
-                  <a:latin typeface="Arial" panose="020B0604020202020204" pitchFamily="34" charset="0"/>
+                  <a:latin typeface="Arial" panose="020B0704020202020204" pitchFamily="34" charset="0"/>
                 </a:defRPr>
               </a:lvl5pPr>
               <a:lvl6pPr marL="2514600" indent="-228600" defTabSz="1095375" fontAlgn="base">
@@ -23356,7 +23375,7 @@
                   <a:solidFill>
                     <a:schemeClr val="tx1"/>
                   </a:solidFill>
-                  <a:latin typeface="Arial" panose="020B0604020202020204" pitchFamily="34" charset="0"/>
+                  <a:latin typeface="Arial" panose="020B0704020202020204" pitchFamily="34" charset="0"/>
                 </a:defRPr>
               </a:lvl6pPr>
               <a:lvl7pPr marL="2971800" indent="-228600" defTabSz="1095375" fontAlgn="base">
@@ -23370,7 +23389,7 @@
                   <a:solidFill>
                     <a:schemeClr val="tx1"/>
                   </a:solidFill>
-                  <a:latin typeface="Arial" panose="020B0604020202020204" pitchFamily="34" charset="0"/>
+                  <a:latin typeface="Arial" panose="020B0704020202020204" pitchFamily="34" charset="0"/>
                 </a:defRPr>
               </a:lvl7pPr>
               <a:lvl8pPr marL="3429000" indent="-228600" defTabSz="1095375" fontAlgn="base">
@@ -23384,7 +23403,7 @@
                   <a:solidFill>
                     <a:schemeClr val="tx1"/>
                   </a:solidFill>
-                  <a:latin typeface="Arial" panose="020B0604020202020204" pitchFamily="34" charset="0"/>
+                  <a:latin typeface="Arial" panose="020B0704020202020204" pitchFamily="34" charset="0"/>
                 </a:defRPr>
               </a:lvl8pPr>
               <a:lvl9pPr marL="3886200" indent="-228600" defTabSz="1095375" fontAlgn="base">
@@ -23398,7 +23417,7 @@
                   <a:solidFill>
                     <a:schemeClr val="tx1"/>
                   </a:solidFill>
-                  <a:latin typeface="Arial" panose="020B0604020202020204" pitchFamily="34" charset="0"/>
+                  <a:latin typeface="Arial" panose="020B0704020202020204" pitchFamily="34" charset="0"/>
                 </a:defRPr>
               </a:lvl9pPr>
             </a:lstStyle>
@@ -23412,12 +23431,12 @@
               </a:pPr>
               <a:r>
                 <a:rPr lang="en-US" sz="2800" i="1">
-                  <a:cs typeface="Arial" panose="020B0604020202020204" pitchFamily="34" charset="0"/>
+                  <a:cs typeface="Arial" panose="020B0704020202020204" pitchFamily="34" charset="0"/>
                 </a:rPr>
                 <a:t>Sai số phép đo</a:t>
               </a:r>
               <a:endParaRPr lang="en-US" sz="2800" dirty="0">
-                <a:cs typeface="Arial" panose="020B0604020202020204" pitchFamily="34" charset="0"/>
+                <a:cs typeface="Arial" panose="020B0704020202020204" pitchFamily="34" charset="0"/>
               </a:endParaRPr>
             </a:p>
           </p:txBody>
@@ -23477,7 +23496,7 @@
                 <a:solidFill>
                   <a:schemeClr val="tx1"/>
                 </a:solidFill>
-                <a:latin typeface="Arial" panose="020B0604020202020204" pitchFamily="34" charset="0"/>
+                <a:latin typeface="Arial" panose="020B0704020202020204" pitchFamily="34" charset="0"/>
               </a:defRPr>
             </a:lvl1pPr>
             <a:lvl2pPr marL="742950" indent="-285750">
@@ -23489,7 +23508,7 @@
                 <a:solidFill>
                   <a:schemeClr val="tx1"/>
                 </a:solidFill>
-                <a:latin typeface="Arial" panose="020B0604020202020204" pitchFamily="34" charset="0"/>
+                <a:latin typeface="Arial" panose="020B0704020202020204" pitchFamily="34" charset="0"/>
               </a:defRPr>
             </a:lvl2pPr>
             <a:lvl3pPr marL="1143000" indent="-228600">
@@ -23501,7 +23520,7 @@
                 <a:solidFill>
                   <a:schemeClr val="tx1"/>
                 </a:solidFill>
-                <a:latin typeface="Arial" panose="020B0604020202020204" pitchFamily="34" charset="0"/>
+                <a:latin typeface="Arial" panose="020B0704020202020204" pitchFamily="34" charset="0"/>
               </a:defRPr>
             </a:lvl3pPr>
             <a:lvl4pPr marL="1600200" indent="-228600">
@@ -23513,7 +23532,7 @@
                 <a:solidFill>
                   <a:schemeClr val="tx1"/>
                 </a:solidFill>
-                <a:latin typeface="Arial" panose="020B0604020202020204" pitchFamily="34" charset="0"/>
+                <a:latin typeface="Arial" panose="020B0704020202020204" pitchFamily="34" charset="0"/>
               </a:defRPr>
             </a:lvl4pPr>
             <a:lvl5pPr marL="2057400" indent="-228600">
@@ -23525,7 +23544,7 @@
                 <a:solidFill>
                   <a:schemeClr val="tx1"/>
                 </a:solidFill>
-                <a:latin typeface="Arial" panose="020B0604020202020204" pitchFamily="34" charset="0"/>
+                <a:latin typeface="Arial" panose="020B0704020202020204" pitchFamily="34" charset="0"/>
               </a:defRPr>
             </a:lvl5pPr>
             <a:lvl6pPr marL="2514600" indent="-228600" eaLnBrk="0" fontAlgn="base" hangingPunct="0">
@@ -23540,7 +23559,7 @@
                 <a:solidFill>
                   <a:schemeClr val="tx1"/>
                 </a:solidFill>
-                <a:latin typeface="Arial" panose="020B0604020202020204" pitchFamily="34" charset="0"/>
+                <a:latin typeface="Arial" panose="020B0704020202020204" pitchFamily="34" charset="0"/>
               </a:defRPr>
             </a:lvl6pPr>
             <a:lvl7pPr marL="2971800" indent="-228600" eaLnBrk="0" fontAlgn="base" hangingPunct="0">
@@ -23555,7 +23574,7 @@
                 <a:solidFill>
                   <a:schemeClr val="tx1"/>
                 </a:solidFill>
-                <a:latin typeface="Arial" panose="020B0604020202020204" pitchFamily="34" charset="0"/>
+                <a:latin typeface="Arial" panose="020B0704020202020204" pitchFamily="34" charset="0"/>
               </a:defRPr>
             </a:lvl7pPr>
             <a:lvl8pPr marL="3429000" indent="-228600" eaLnBrk="0" fontAlgn="base" hangingPunct="0">
@@ -23570,7 +23589,7 @@
                 <a:solidFill>
                   <a:schemeClr val="tx1"/>
                 </a:solidFill>
-                <a:latin typeface="Arial" panose="020B0604020202020204" pitchFamily="34" charset="0"/>
+                <a:latin typeface="Arial" panose="020B0704020202020204" pitchFamily="34" charset="0"/>
               </a:defRPr>
             </a:lvl8pPr>
             <a:lvl9pPr marL="3886200" indent="-228600" eaLnBrk="0" fontAlgn="base" hangingPunct="0">
@@ -23585,7 +23604,7 @@
                 <a:solidFill>
                   <a:schemeClr val="tx1"/>
                 </a:solidFill>
-                <a:latin typeface="Arial" panose="020B0604020202020204" pitchFamily="34" charset="0"/>
+                <a:latin typeface="Arial" panose="020B0704020202020204" pitchFamily="34" charset="0"/>
               </a:defRPr>
             </a:lvl9pPr>
           </a:lstStyle>
@@ -23603,7 +23622,7 @@
                 <a:solidFill>
                   <a:srgbClr val="0070C0"/>
                 </a:solidFill>
-                <a:cs typeface="Arial" panose="020B0604020202020204" pitchFamily="34" charset="0"/>
+                <a:cs typeface="Arial" panose="020B0704020202020204" pitchFamily="34" charset="0"/>
               </a:rPr>
               <a:t>1. Phân loại sai số</a:t>
             </a:r>
@@ -23611,7 +23630,7 @@
               <a:solidFill>
                 <a:srgbClr val="0070C0"/>
               </a:solidFill>
-              <a:cs typeface="Arial" panose="020B0604020202020204" pitchFamily="34" charset="0"/>
+              <a:cs typeface="Arial" panose="020B0704020202020204" pitchFamily="34" charset="0"/>
             </a:endParaRPr>
           </a:p>
         </p:txBody>
@@ -23654,7 +23673,7 @@
                   <a:srgbClr val="000000"/>
                 </a:solidFill>
                 <a:effectLst/>
-                <a:latin typeface="Arial" panose="020B0604020202020204" pitchFamily="34" charset="0"/>
+                <a:latin typeface="Arial" panose="020B0704020202020204" pitchFamily="34" charset="0"/>
                 <a:ea typeface="Times New Roman" panose="02020603050405020304" pitchFamily="18" charset="0"/>
               </a:rPr>
               <a:t>Sự sai lệch này gọi là </a:t>
@@ -23665,7 +23684,7 @@
                   <a:srgbClr val="000000"/>
                 </a:solidFill>
                 <a:effectLst/>
-                <a:latin typeface="Arial" panose="020B0604020202020204" pitchFamily="34" charset="0"/>
+                <a:latin typeface="Arial" panose="020B0704020202020204" pitchFamily="34" charset="0"/>
                 <a:ea typeface="Times New Roman" panose="02020603050405020304" pitchFamily="18" charset="0"/>
               </a:rPr>
               <a:t>sai số dụng cụ </a:t>
@@ -23676,7 +23695,7 @@
                   <a:srgbClr val="000000"/>
                 </a:solidFill>
                 <a:effectLst/>
-                <a:latin typeface="Arial" panose="020B0604020202020204" pitchFamily="34" charset="0"/>
+                <a:latin typeface="Arial" panose="020B0704020202020204" pitchFamily="34" charset="0"/>
                 <a:ea typeface="Times New Roman" panose="02020603050405020304" pitchFamily="18" charset="0"/>
               </a:rPr>
               <a:t>hoặc </a:t>
@@ -23687,7 +23706,7 @@
                   <a:srgbClr val="000000"/>
                 </a:solidFill>
                 <a:effectLst/>
-                <a:latin typeface="Arial" panose="020B0604020202020204" pitchFamily="34" charset="0"/>
+                <a:latin typeface="Arial" panose="020B0704020202020204" pitchFamily="34" charset="0"/>
                 <a:ea typeface="Times New Roman" panose="02020603050405020304" pitchFamily="18" charset="0"/>
               </a:rPr>
               <a:t>sai số hệ thống</a:t>
@@ -23738,7 +23757,7 @@
                   <a:srgbClr val="000000"/>
                 </a:solidFill>
                 <a:effectLst/>
-                <a:latin typeface="Arial" panose="020B0604020202020204" pitchFamily="34" charset="0"/>
+                <a:latin typeface="Arial" panose="020B0704020202020204" pitchFamily="34" charset="0"/>
                 <a:ea typeface="Times New Roman" panose="02020603050405020304" pitchFamily="18" charset="0"/>
               </a:rPr>
               <a:t>Sai số hệ thống có nguyên nhân khách quan (do dụng cụ),</a:t>
@@ -23757,7 +23776,7 @@
                   <a:srgbClr val="000000"/>
                 </a:solidFill>
                 <a:effectLst/>
-                <a:latin typeface="Arial" panose="020B0604020202020204" pitchFamily="34" charset="0"/>
+                <a:latin typeface="Arial" panose="020B0704020202020204" pitchFamily="34" charset="0"/>
                 <a:ea typeface="Times New Roman" panose="02020603050405020304" pitchFamily="18" charset="0"/>
               </a:rPr>
               <a:t>nguyên nhân chủ quan do người đo (cần loại bỏ).</a:t>
@@ -24157,7 +24176,7 @@
                   <a:srgbClr val="000000"/>
                 </a:solidFill>
                 <a:effectLst/>
-                <a:latin typeface="Arial" panose="020B0604020202020204" pitchFamily="34" charset="0"/>
+                <a:latin typeface="Arial" panose="020B0704020202020204" pitchFamily="34" charset="0"/>
                 <a:ea typeface="Times New Roman" panose="02020603050405020304" pitchFamily="18" charset="0"/>
               </a:rPr>
               <a:t>Khi lặp lại các phép đo, ta nhận được các giá trị khác nhau, sự sai lệch này không có nguyên nhân rõ ràng nên gọi là </a:t>
@@ -24168,7 +24187,7 @@
                   <a:srgbClr val="000000"/>
                 </a:solidFill>
                 <a:effectLst/>
-                <a:latin typeface="Arial" panose="020B0604020202020204" pitchFamily="34" charset="0"/>
+                <a:latin typeface="Arial" panose="020B0704020202020204" pitchFamily="34" charset="0"/>
                 <a:ea typeface="Times New Roman" panose="02020603050405020304" pitchFamily="18" charset="0"/>
               </a:rPr>
               <a:t>sai số ngẫu nhiên</a:t>
@@ -24178,7 +24197,7 @@
                 <a:srgbClr val="000000"/>
               </a:solidFill>
               <a:effectLst/>
-              <a:latin typeface="Arial" panose="020B0604020202020204" pitchFamily="34" charset="0"/>
+              <a:latin typeface="Arial" panose="020B0704020202020204" pitchFamily="34" charset="0"/>
               <a:ea typeface="Times New Roman" panose="02020603050405020304" pitchFamily="18" charset="0"/>
             </a:endParaRPr>
           </a:p>
@@ -24212,7 +24231,7 @@
                   <a:srgbClr val="00B050"/>
                 </a:solidFill>
                 <a:effectLst/>
-                <a:latin typeface="Arial" panose="020B0604020202020204" pitchFamily="34" charset="0"/>
+                <a:latin typeface="Arial" panose="020B0704020202020204" pitchFamily="34" charset="0"/>
                 <a:ea typeface="Times New Roman" panose="02020603050405020304" pitchFamily="18" charset="0"/>
                 <a:cs typeface="Times New Roman" panose="02020603050405020304" pitchFamily="18" charset="0"/>
               </a:rPr>
@@ -24265,7 +24284,7 @@
                   <a:srgbClr val="7030A0"/>
                 </a:solidFill>
                 <a:effectLst/>
-                <a:latin typeface="Arial" panose="020B0604020202020204" pitchFamily="34" charset="0"/>
+                <a:latin typeface="Arial" panose="020B0704020202020204" pitchFamily="34" charset="0"/>
                 <a:ea typeface="Times New Roman" panose="02020603050405020304" pitchFamily="18" charset="0"/>
                 <a:cs typeface="Times New Roman" panose="02020603050405020304" pitchFamily="18" charset="0"/>
                 <a:sym typeface="Symbol" panose="05050102010706020507" pitchFamily="18" charset="2"/>
@@ -24277,7 +24296,7 @@
                 <a:solidFill>
                   <a:srgbClr val="7030A0"/>
                 </a:solidFill>
-                <a:latin typeface="Arial" panose="020B0604020202020204" pitchFamily="34" charset="0"/>
+                <a:latin typeface="Arial" panose="020B0704020202020204" pitchFamily="34" charset="0"/>
                 <a:ea typeface="Times New Roman" panose="02020603050405020304" pitchFamily="18" charset="0"/>
                 <a:cs typeface="Times New Roman" panose="02020603050405020304" pitchFamily="18" charset="0"/>
                 <a:sym typeface="Symbol" panose="05050102010706020507" pitchFamily="18" charset="2"/>
@@ -24290,7 +24309,7 @@
                   <a:srgbClr val="7030A0"/>
                 </a:solidFill>
                 <a:effectLst/>
-                <a:latin typeface="Arial" panose="020B0604020202020204" pitchFamily="34" charset="0"/>
+                <a:latin typeface="Arial" panose="020B0704020202020204" pitchFamily="34" charset="0"/>
                 <a:ea typeface="Times New Roman" panose="02020603050405020304" pitchFamily="18" charset="0"/>
                 <a:cs typeface="Times New Roman" panose="02020603050405020304" pitchFamily="18" charset="0"/>
               </a:rPr>
@@ -24347,7 +24366,7 @@
                   <a:srgbClr val="000000"/>
                 </a:solidFill>
                 <a:effectLst/>
-                <a:latin typeface="Arial" panose="020B0604020202020204" pitchFamily="34" charset="0"/>
+                <a:latin typeface="Arial" panose="020B0704020202020204" pitchFamily="34" charset="0"/>
                 <a:ea typeface="Times New Roman" panose="02020603050405020304" pitchFamily="18" charset="0"/>
                 <a:cs typeface="Times New Roman" panose="02020603050405020304" pitchFamily="18" charset="0"/>
               </a:rPr>
@@ -24579,8 +24598,8 @@
                       </a:srgbClr>
                     </a:outerShdw>
                   </a:effectLst>
-                  <a:latin typeface="Arial" panose="020B0604020202020204" pitchFamily="34" charset="0"/>
-                  <a:cs typeface="Arial" panose="020B0604020202020204" pitchFamily="34" charset="0"/>
+                  <a:latin typeface="Arial" panose="020B0704020202020204" pitchFamily="34" charset="0"/>
+                  <a:cs typeface="Arial" panose="020B0704020202020204" pitchFamily="34" charset="0"/>
                 </a:rPr>
                 <a:t>II</a:t>
               </a:r>
@@ -24607,8 +24626,8 @@
                     </a:srgbClr>
                   </a:outerShdw>
                 </a:effectLst>
-                <a:latin typeface="Arial" panose="020B0604020202020204" pitchFamily="34" charset="0"/>
-                <a:cs typeface="Arial" panose="020B0604020202020204" pitchFamily="34" charset="0"/>
+                <a:latin typeface="Arial" panose="020B0704020202020204" pitchFamily="34" charset="0"/>
+                <a:cs typeface="Arial" panose="020B0704020202020204" pitchFamily="34" charset="0"/>
               </a:endParaRPr>
             </a:p>
           </p:txBody>
@@ -24645,7 +24664,7 @@
                   <a:solidFill>
                     <a:schemeClr val="tx1"/>
                   </a:solidFill>
-                  <a:latin typeface="Arial" panose="020B0604020202020204" pitchFamily="34" charset="0"/>
+                  <a:latin typeface="Arial" panose="020B0704020202020204" pitchFamily="34" charset="0"/>
                 </a:defRPr>
               </a:lvl1pPr>
               <a:lvl2pPr marL="742950" indent="-285750" defTabSz="1095375">
@@ -24653,7 +24672,7 @@
                   <a:solidFill>
                     <a:schemeClr val="tx1"/>
                   </a:solidFill>
-                  <a:latin typeface="Arial" panose="020B0604020202020204" pitchFamily="34" charset="0"/>
+                  <a:latin typeface="Arial" panose="020B0704020202020204" pitchFamily="34" charset="0"/>
                 </a:defRPr>
               </a:lvl2pPr>
               <a:lvl3pPr marL="1143000" indent="-228600" defTabSz="1095375">
@@ -24661,7 +24680,7 @@
                   <a:solidFill>
                     <a:schemeClr val="tx1"/>
                   </a:solidFill>
-                  <a:latin typeface="Arial" panose="020B0604020202020204" pitchFamily="34" charset="0"/>
+                  <a:latin typeface="Arial" panose="020B0704020202020204" pitchFamily="34" charset="0"/>
                 </a:defRPr>
               </a:lvl3pPr>
               <a:lvl4pPr marL="1600200" indent="-228600" defTabSz="1095375">
@@ -24669,7 +24688,7 @@
                   <a:solidFill>
                     <a:schemeClr val="tx1"/>
                   </a:solidFill>
-                  <a:latin typeface="Arial" panose="020B0604020202020204" pitchFamily="34" charset="0"/>
+                  <a:latin typeface="Arial" panose="020B0704020202020204" pitchFamily="34" charset="0"/>
                 </a:defRPr>
               </a:lvl4pPr>
               <a:lvl5pPr marL="2057400" indent="-228600" defTabSz="1095375">
@@ -24677,7 +24696,7 @@
                   <a:solidFill>
                     <a:schemeClr val="tx1"/>
                   </a:solidFill>
-                  <a:latin typeface="Arial" panose="020B0604020202020204" pitchFamily="34" charset="0"/>
+                  <a:latin typeface="Arial" panose="020B0704020202020204" pitchFamily="34" charset="0"/>
                 </a:defRPr>
               </a:lvl5pPr>
               <a:lvl6pPr marL="2514600" indent="-228600" defTabSz="1095375" fontAlgn="base">
@@ -24691,7 +24710,7 @@
                   <a:solidFill>
                     <a:schemeClr val="tx1"/>
                   </a:solidFill>
-                  <a:latin typeface="Arial" panose="020B0604020202020204" pitchFamily="34" charset="0"/>
+                  <a:latin typeface="Arial" panose="020B0704020202020204" pitchFamily="34" charset="0"/>
                 </a:defRPr>
               </a:lvl6pPr>
               <a:lvl7pPr marL="2971800" indent="-228600" defTabSz="1095375" fontAlgn="base">
@@ -24705,7 +24724,7 @@
                   <a:solidFill>
                     <a:schemeClr val="tx1"/>
                   </a:solidFill>
-                  <a:latin typeface="Arial" panose="020B0604020202020204" pitchFamily="34" charset="0"/>
+                  <a:latin typeface="Arial" panose="020B0704020202020204" pitchFamily="34" charset="0"/>
                 </a:defRPr>
               </a:lvl7pPr>
               <a:lvl8pPr marL="3429000" indent="-228600" defTabSz="1095375" fontAlgn="base">
@@ -24719,7 +24738,7 @@
                   <a:solidFill>
                     <a:schemeClr val="tx1"/>
                   </a:solidFill>
-                  <a:latin typeface="Arial" panose="020B0604020202020204" pitchFamily="34" charset="0"/>
+                  <a:latin typeface="Arial" panose="020B0704020202020204" pitchFamily="34" charset="0"/>
                 </a:defRPr>
               </a:lvl8pPr>
               <a:lvl9pPr marL="3886200" indent="-228600" defTabSz="1095375" fontAlgn="base">
@@ -24733,7 +24752,7 @@
                   <a:solidFill>
                     <a:schemeClr val="tx1"/>
                   </a:solidFill>
-                  <a:latin typeface="Arial" panose="020B0604020202020204" pitchFamily="34" charset="0"/>
+                  <a:latin typeface="Arial" panose="020B0704020202020204" pitchFamily="34" charset="0"/>
                 </a:defRPr>
               </a:lvl9pPr>
             </a:lstStyle>
@@ -24747,12 +24766,12 @@
               </a:pPr>
               <a:r>
                 <a:rPr lang="en-US" sz="2800" i="1">
-                  <a:cs typeface="Arial" panose="020B0604020202020204" pitchFamily="34" charset="0"/>
+                  <a:cs typeface="Arial" panose="020B0704020202020204" pitchFamily="34" charset="0"/>
                 </a:rPr>
                 <a:t>Sai số phép đo</a:t>
               </a:r>
               <a:endParaRPr lang="en-US" sz="2800" dirty="0">
-                <a:cs typeface="Arial" panose="020B0604020202020204" pitchFamily="34" charset="0"/>
+                <a:cs typeface="Arial" panose="020B0704020202020204" pitchFamily="34" charset="0"/>
               </a:endParaRPr>
             </a:p>
           </p:txBody>
@@ -24812,7 +24831,7 @@
                 <a:solidFill>
                   <a:schemeClr val="tx1"/>
                 </a:solidFill>
-                <a:latin typeface="Arial" panose="020B0604020202020204" pitchFamily="34" charset="0"/>
+                <a:latin typeface="Arial" panose="020B0704020202020204" pitchFamily="34" charset="0"/>
               </a:defRPr>
             </a:lvl1pPr>
             <a:lvl2pPr marL="742950" indent="-285750">
@@ -24824,7 +24843,7 @@
                 <a:solidFill>
                   <a:schemeClr val="tx1"/>
                 </a:solidFill>
-                <a:latin typeface="Arial" panose="020B0604020202020204" pitchFamily="34" charset="0"/>
+                <a:latin typeface="Arial" panose="020B0704020202020204" pitchFamily="34" charset="0"/>
               </a:defRPr>
             </a:lvl2pPr>
             <a:lvl3pPr marL="1143000" indent="-228600">
@@ -24836,7 +24855,7 @@
                 <a:solidFill>
                   <a:schemeClr val="tx1"/>
                 </a:solidFill>
-                <a:latin typeface="Arial" panose="020B0604020202020204" pitchFamily="34" charset="0"/>
+                <a:latin typeface="Arial" panose="020B0704020202020204" pitchFamily="34" charset="0"/>
               </a:defRPr>
             </a:lvl3pPr>
             <a:lvl4pPr marL="1600200" indent="-228600">
@@ -24848,7 +24867,7 @@
                 <a:solidFill>
                   <a:schemeClr val="tx1"/>
                 </a:solidFill>
-                <a:latin typeface="Arial" panose="020B0604020202020204" pitchFamily="34" charset="0"/>
+                <a:latin typeface="Arial" panose="020B0704020202020204" pitchFamily="34" charset="0"/>
               </a:defRPr>
             </a:lvl4pPr>
             <a:lvl5pPr marL="2057400" indent="-228600">
@@ -24860,7 +24879,7 @@
                 <a:solidFill>
                   <a:schemeClr val="tx1"/>
                 </a:solidFill>
-                <a:latin typeface="Arial" panose="020B0604020202020204" pitchFamily="34" charset="0"/>
+                <a:latin typeface="Arial" panose="020B0704020202020204" pitchFamily="34" charset="0"/>
               </a:defRPr>
             </a:lvl5pPr>
             <a:lvl6pPr marL="2514600" indent="-228600" eaLnBrk="0" fontAlgn="base" hangingPunct="0">
@@ -24875,7 +24894,7 @@
                 <a:solidFill>
                   <a:schemeClr val="tx1"/>
                 </a:solidFill>
-                <a:latin typeface="Arial" panose="020B0604020202020204" pitchFamily="34" charset="0"/>
+                <a:latin typeface="Arial" panose="020B0704020202020204" pitchFamily="34" charset="0"/>
               </a:defRPr>
             </a:lvl6pPr>
             <a:lvl7pPr marL="2971800" indent="-228600" eaLnBrk="0" fontAlgn="base" hangingPunct="0">
@@ -24890,7 +24909,7 @@
                 <a:solidFill>
                   <a:schemeClr val="tx1"/>
                 </a:solidFill>
-                <a:latin typeface="Arial" panose="020B0604020202020204" pitchFamily="34" charset="0"/>
+                <a:latin typeface="Arial" panose="020B0704020202020204" pitchFamily="34" charset="0"/>
               </a:defRPr>
             </a:lvl7pPr>
             <a:lvl8pPr marL="3429000" indent="-228600" eaLnBrk="0" fontAlgn="base" hangingPunct="0">
@@ -24905,7 +24924,7 @@
                 <a:solidFill>
                   <a:schemeClr val="tx1"/>
                 </a:solidFill>
-                <a:latin typeface="Arial" panose="020B0604020202020204" pitchFamily="34" charset="0"/>
+                <a:latin typeface="Arial" panose="020B0704020202020204" pitchFamily="34" charset="0"/>
               </a:defRPr>
             </a:lvl8pPr>
             <a:lvl9pPr marL="3886200" indent="-228600" eaLnBrk="0" fontAlgn="base" hangingPunct="0">
@@ -24920,7 +24939,7 @@
                 <a:solidFill>
                   <a:schemeClr val="tx1"/>
                 </a:solidFill>
-                <a:latin typeface="Arial" panose="020B0604020202020204" pitchFamily="34" charset="0"/>
+                <a:latin typeface="Arial" panose="020B0704020202020204" pitchFamily="34" charset="0"/>
               </a:defRPr>
             </a:lvl9pPr>
           </a:lstStyle>
@@ -24938,7 +24957,7 @@
                 <a:solidFill>
                   <a:srgbClr val="0070C0"/>
                 </a:solidFill>
-                <a:cs typeface="Arial" panose="020B0604020202020204" pitchFamily="34" charset="0"/>
+                <a:cs typeface="Arial" panose="020B0704020202020204" pitchFamily="34" charset="0"/>
               </a:rPr>
               <a:t>1. Phân loại sai số</a:t>
             </a:r>
@@ -24946,7 +24965,7 @@
               <a:solidFill>
                 <a:srgbClr val="0070C0"/>
               </a:solidFill>
-              <a:cs typeface="Arial" panose="020B0604020202020204" pitchFamily="34" charset="0"/>
+              <a:cs typeface="Arial" panose="020B0704020202020204" pitchFamily="34" charset="0"/>
             </a:endParaRPr>
           </a:p>
         </p:txBody>
@@ -24988,7 +25007,7 @@
                 <a:solidFill>
                   <a:srgbClr val="000000"/>
                 </a:solidFill>
-                <a:latin typeface="Arial" panose="020B0604020202020204" pitchFamily="34" charset="0"/>
+                <a:latin typeface="Arial" panose="020B0704020202020204" pitchFamily="34" charset="0"/>
                 <a:ea typeface="Times New Roman" panose="02020603050405020304" pitchFamily="18" charset="0"/>
               </a:rPr>
               <a:t>C</a:t>
@@ -24999,7 +25018,7 @@
                   <a:srgbClr val="000000"/>
                 </a:solidFill>
                 <a:effectLst/>
-                <a:latin typeface="Arial" panose="020B0604020202020204" pitchFamily="34" charset="0"/>
+                <a:latin typeface="Arial" panose="020B0704020202020204" pitchFamily="34" charset="0"/>
                 <a:ea typeface="Times New Roman" panose="02020603050405020304" pitchFamily="18" charset="0"/>
               </a:rPr>
               <a:t>ó thể do thao tác đo không chuẩn, điều kiện làm thí nghiệm không ổn định hoặc hạn chế về giác quan,... </a:t>
@@ -25429,14 +25448,14 @@
               </a:pPr>
               <a:r>
                 <a:rPr lang="en-US" sz="2600" b="1">
-                  <a:latin typeface="Arial" panose="020B0604020202020204" pitchFamily="34" charset="0"/>
-                  <a:cs typeface="Arial" panose="020B0604020202020204" pitchFamily="34" charset="0"/>
+                  <a:latin typeface="Arial" panose="020B0704020202020204" pitchFamily="34" charset="0"/>
+                  <a:cs typeface="Arial" panose="020B0704020202020204" pitchFamily="34" charset="0"/>
                 </a:rPr>
                 <a:t>Lưu ý</a:t>
               </a:r>
               <a:endParaRPr lang="en-US" sz="2600" b="1">
-                <a:latin typeface="Arial" panose="020B0604020202020204" pitchFamily="34" charset="0"/>
-                <a:cs typeface="Arial" panose="020B0604020202020204" pitchFamily="34" charset="0"/>
+                <a:latin typeface="Arial" panose="020B0704020202020204" pitchFamily="34" charset="0"/>
+                <a:cs typeface="Arial" panose="020B0704020202020204" pitchFamily="34" charset="0"/>
               </a:endParaRPr>
             </a:p>
           </p:txBody>
@@ -25569,7 +25588,7 @@
                   <a:srgbClr val="000000"/>
                 </a:solidFill>
                 <a:effectLst/>
-                <a:latin typeface="Arial" panose="020B0604020202020204" pitchFamily="34" charset="0"/>
+                <a:latin typeface="Arial" panose="020B0704020202020204" pitchFamily="34" charset="0"/>
                 <a:ea typeface="Times New Roman" panose="02020603050405020304" pitchFamily="18" charset="0"/>
               </a:rPr>
               <a:t>Sai số gây bởi dụng cụ có thể lấy bằng một nửa độ chia nhỏ nhất trên dụng cụ</a:t>
@@ -25580,7 +25599,7 @@
                   <a:srgbClr val="000000"/>
                 </a:solidFill>
                 <a:effectLst/>
-                <a:latin typeface="Arial" panose="020B0604020202020204" pitchFamily="34" charset="0"/>
+                <a:latin typeface="Arial" panose="020B0704020202020204" pitchFamily="34" charset="0"/>
                 <a:ea typeface="游明朝" panose="02020400000000000000" pitchFamily="18" charset="-128"/>
               </a:rPr>
               <a:t>, hoặc được ghi trực tiếp trên dụng cụ do nhà sản xuất xác định</a:t>
@@ -25715,7 +25734,7 @@
             </a:pPr>
             <a:r>
               <a:rPr lang="en-US" sz="2700">
-                <a:latin typeface="Arial" panose="020B0604020202020204" pitchFamily="34" charset="0"/>
+                <a:latin typeface="Arial" panose="020B0704020202020204" pitchFamily="34" charset="0"/>
                 <a:ea typeface="Times New Roman" panose="02020603050405020304" pitchFamily="18" charset="0"/>
               </a:rPr>
               <a:t>T</a:t>
@@ -25723,7 +25742,7 @@
             <a:r>
               <a:rPr lang="en-US" sz="2700">
                 <a:effectLst/>
-                <a:latin typeface="Arial" panose="020B0604020202020204" pitchFamily="34" charset="0"/>
+                <a:latin typeface="Arial" panose="020B0704020202020204" pitchFamily="34" charset="0"/>
                 <a:ea typeface="Times New Roman" panose="02020603050405020304" pitchFamily="18" charset="0"/>
               </a:rPr>
               <a:t>hước đo chiều dài có </a:t>
@@ -25731,7 +25750,7 @@
             <a:r>
               <a:rPr lang="en-US" sz="2700" b="1">
                 <a:effectLst/>
-                <a:latin typeface="Arial" panose="020B0604020202020204" pitchFamily="34" charset="0"/>
+                <a:latin typeface="Arial" panose="020B0704020202020204" pitchFamily="34" charset="0"/>
                 <a:ea typeface="Times New Roman" panose="02020603050405020304" pitchFamily="18" charset="0"/>
               </a:rPr>
               <a:t>độ chia nhỏ nhất </a:t>
@@ -25739,7 +25758,7 @@
             <a:r>
               <a:rPr lang="en-US" sz="2700">
                 <a:effectLst/>
-                <a:latin typeface="Arial" panose="020B0604020202020204" pitchFamily="34" charset="0"/>
+                <a:latin typeface="Arial" panose="020B0704020202020204" pitchFamily="34" charset="0"/>
                 <a:ea typeface="Times New Roman" panose="02020603050405020304" pitchFamily="18" charset="0"/>
               </a:rPr>
               <a:t>là: </a:t>
@@ -25747,14 +25766,14 @@
             <a:r>
               <a:rPr lang="en-US" sz="2700" b="1">
                 <a:effectLst/>
-                <a:latin typeface="Arial" panose="020B0604020202020204" pitchFamily="34" charset="0"/>
+                <a:latin typeface="Arial" panose="020B0704020202020204" pitchFamily="34" charset="0"/>
                 <a:ea typeface="游明朝" panose="02020400000000000000" pitchFamily="18" charset="-128"/>
               </a:rPr>
               <a:t>1 mm</a:t>
             </a:r>
             <a:endParaRPr lang="en-US" sz="2700" b="1">
               <a:effectLst/>
-              <a:latin typeface="Arial" panose="020B0604020202020204" pitchFamily="34" charset="0"/>
+              <a:latin typeface="Arial" panose="020B0704020202020204" pitchFamily="34" charset="0"/>
               <a:ea typeface="游明朝" panose="02020400000000000000" pitchFamily="18" charset="-128"/>
             </a:endParaRPr>
           </a:p>
@@ -25765,7 +25784,7 @@
             </a:pPr>
             <a:r>
               <a:rPr lang="en-US" sz="2700" b="1">
-                <a:latin typeface="Arial" panose="020B0604020202020204" pitchFamily="34" charset="0"/>
+                <a:latin typeface="Arial" panose="020B0704020202020204" pitchFamily="34" charset="0"/>
                 <a:ea typeface="游明朝" panose="02020400000000000000" pitchFamily="18" charset="-128"/>
               </a:rPr>
               <a:t>S</a:t>
@@ -25773,7 +25792,7 @@
             <a:r>
               <a:rPr lang="en-US" sz="2700" b="1">
                 <a:effectLst/>
-                <a:latin typeface="Arial" panose="020B0604020202020204" pitchFamily="34" charset="0"/>
+                <a:latin typeface="Arial" panose="020B0704020202020204" pitchFamily="34" charset="0"/>
                 <a:ea typeface="游明朝" panose="02020400000000000000" pitchFamily="18" charset="-128"/>
               </a:rPr>
               <a:t>ai số dụng cụ </a:t>
@@ -25781,7 +25800,7 @@
             <a:r>
               <a:rPr lang="en-US" sz="2700">
                 <a:effectLst/>
-                <a:latin typeface="Arial" panose="020B0604020202020204" pitchFamily="34" charset="0"/>
+                <a:latin typeface="Arial" panose="020B0704020202020204" pitchFamily="34" charset="0"/>
                 <a:ea typeface="游明朝" panose="02020400000000000000" pitchFamily="18" charset="-128"/>
               </a:rPr>
               <a:t>là:  </a:t>
@@ -25789,7 +25808,7 @@
             <a:r>
               <a:rPr lang="en-US" sz="2700" b="1">
                 <a:effectLst/>
-                <a:latin typeface="Arial" panose="020B0604020202020204" pitchFamily="34" charset="0"/>
+                <a:latin typeface="Arial" panose="020B0704020202020204" pitchFamily="34" charset="0"/>
                 <a:ea typeface="游明朝" panose="02020400000000000000" pitchFamily="18" charset="-128"/>
               </a:rPr>
               <a:t>0,5 mm</a:t>
@@ -26025,9 +26044,9 @@
                   <a:srgbClr val="000000"/>
                 </a:solidFill>
                 <a:effectLst/>
-                <a:latin typeface="Arial" panose="020B0604020202020204" pitchFamily="34" charset="0"/>
+                <a:latin typeface="Arial" panose="020B0704020202020204" pitchFamily="34" charset="0"/>
                 <a:ea typeface="Times New Roman" panose="02020603050405020304" pitchFamily="18" charset="0"/>
-                <a:cs typeface="Arial" panose="020B0604020202020204" pitchFamily="34" charset="0"/>
+                <a:cs typeface="Arial" panose="020B0704020202020204" pitchFamily="34" charset="0"/>
               </a:rPr>
               <a:t>Sai số ngẫu nhiên tuyệt đối </a:t>
             </a:r>
@@ -26037,9 +26056,9 @@
                   <a:srgbClr val="000000"/>
                 </a:solidFill>
                 <a:effectLst/>
-                <a:latin typeface="Arial" panose="020B0604020202020204" pitchFamily="34" charset="0"/>
+                <a:latin typeface="Arial" panose="020B0704020202020204" pitchFamily="34" charset="0"/>
                 <a:ea typeface="Times New Roman" panose="02020603050405020304" pitchFamily="18" charset="0"/>
-                <a:cs typeface="Arial" panose="020B0604020202020204" pitchFamily="34" charset="0"/>
+                <a:cs typeface="Arial" panose="020B0704020202020204" pitchFamily="34" charset="0"/>
               </a:rPr>
               <a:t>của từng lần đo là trị tuyệt đối của hiệu số giữa giá trị trung bình các lần đo và giá trị của mỗi lần đo. </a:t>
             </a:r>
@@ -26048,9 +26067,9 @@
                 <a:srgbClr val="000000"/>
               </a:solidFill>
               <a:effectLst/>
-              <a:latin typeface="Arial" panose="020B0604020202020204" pitchFamily="34" charset="0"/>
+              <a:latin typeface="Arial" panose="020B0704020202020204" pitchFamily="34" charset="0"/>
               <a:ea typeface="Times New Roman" panose="02020603050405020304" pitchFamily="18" charset="0"/>
-              <a:cs typeface="Arial" panose="020B0604020202020204" pitchFamily="34" charset="0"/>
+              <a:cs typeface="Arial" panose="020B0704020202020204" pitchFamily="34" charset="0"/>
             </a:endParaRPr>
           </a:p>
         </p:txBody>
@@ -26241,8 +26260,8 @@
                       </a:srgbClr>
                     </a:outerShdw>
                   </a:effectLst>
-                  <a:latin typeface="Arial" panose="020B0604020202020204" pitchFamily="34" charset="0"/>
-                  <a:cs typeface="Arial" panose="020B0604020202020204" pitchFamily="34" charset="0"/>
+                  <a:latin typeface="Arial" panose="020B0704020202020204" pitchFamily="34" charset="0"/>
+                  <a:cs typeface="Arial" panose="020B0704020202020204" pitchFamily="34" charset="0"/>
                 </a:rPr>
                 <a:t>II</a:t>
               </a:r>
@@ -26269,8 +26288,8 @@
                     </a:srgbClr>
                   </a:outerShdw>
                 </a:effectLst>
-                <a:latin typeface="Arial" panose="020B0604020202020204" pitchFamily="34" charset="0"/>
-                <a:cs typeface="Arial" panose="020B0604020202020204" pitchFamily="34" charset="0"/>
+                <a:latin typeface="Arial" panose="020B0704020202020204" pitchFamily="34" charset="0"/>
+                <a:cs typeface="Arial" panose="020B0704020202020204" pitchFamily="34" charset="0"/>
               </a:endParaRPr>
             </a:p>
           </p:txBody>
@@ -26307,7 +26326,7 @@
                   <a:solidFill>
                     <a:schemeClr val="tx1"/>
                   </a:solidFill>
-                  <a:latin typeface="Arial" panose="020B0604020202020204" pitchFamily="34" charset="0"/>
+                  <a:latin typeface="Arial" panose="020B0704020202020204" pitchFamily="34" charset="0"/>
                 </a:defRPr>
               </a:lvl1pPr>
               <a:lvl2pPr marL="742950" indent="-285750" defTabSz="1095375">
@@ -26315,7 +26334,7 @@
                   <a:solidFill>
                     <a:schemeClr val="tx1"/>
                   </a:solidFill>
-                  <a:latin typeface="Arial" panose="020B0604020202020204" pitchFamily="34" charset="0"/>
+                  <a:latin typeface="Arial" panose="020B0704020202020204" pitchFamily="34" charset="0"/>
                 </a:defRPr>
               </a:lvl2pPr>
               <a:lvl3pPr marL="1143000" indent="-228600" defTabSz="1095375">
@@ -26323,7 +26342,7 @@
                   <a:solidFill>
                     <a:schemeClr val="tx1"/>
                   </a:solidFill>
-                  <a:latin typeface="Arial" panose="020B0604020202020204" pitchFamily="34" charset="0"/>
+                  <a:latin typeface="Arial" panose="020B0704020202020204" pitchFamily="34" charset="0"/>
                 </a:defRPr>
               </a:lvl3pPr>
               <a:lvl4pPr marL="1600200" indent="-228600" defTabSz="1095375">
@@ -26331,7 +26350,7 @@
                   <a:solidFill>
                     <a:schemeClr val="tx1"/>
                   </a:solidFill>
-                  <a:latin typeface="Arial" panose="020B0604020202020204" pitchFamily="34" charset="0"/>
+                  <a:latin typeface="Arial" panose="020B0704020202020204" pitchFamily="34" charset="0"/>
                 </a:defRPr>
               </a:lvl4pPr>
               <a:lvl5pPr marL="2057400" indent="-228600" defTabSz="1095375">
@@ -26339,7 +26358,7 @@
                   <a:solidFill>
                     <a:schemeClr val="tx1"/>
                   </a:solidFill>
-                  <a:latin typeface="Arial" panose="020B0604020202020204" pitchFamily="34" charset="0"/>
+                  <a:latin typeface="Arial" panose="020B0704020202020204" pitchFamily="34" charset="0"/>
                 </a:defRPr>
               </a:lvl5pPr>
               <a:lvl6pPr marL="2514600" indent="-228600" defTabSz="1095375" fontAlgn="base">
@@ -26353,7 +26372,7 @@
                   <a:solidFill>
                     <a:schemeClr val="tx1"/>
                   </a:solidFill>
-                  <a:latin typeface="Arial" panose="020B0604020202020204" pitchFamily="34" charset="0"/>
+                  <a:latin typeface="Arial" panose="020B0704020202020204" pitchFamily="34" charset="0"/>
                 </a:defRPr>
               </a:lvl6pPr>
               <a:lvl7pPr marL="2971800" indent="-228600" defTabSz="1095375" fontAlgn="base">
@@ -26367,7 +26386,7 @@
                   <a:solidFill>
                     <a:schemeClr val="tx1"/>
                   </a:solidFill>
-                  <a:latin typeface="Arial" panose="020B0604020202020204" pitchFamily="34" charset="0"/>
+                  <a:latin typeface="Arial" panose="020B0704020202020204" pitchFamily="34" charset="0"/>
                 </a:defRPr>
               </a:lvl7pPr>
               <a:lvl8pPr marL="3429000" indent="-228600" defTabSz="1095375" fontAlgn="base">
@@ -26381,7 +26400,7 @@
                   <a:solidFill>
                     <a:schemeClr val="tx1"/>
                   </a:solidFill>
-                  <a:latin typeface="Arial" panose="020B0604020202020204" pitchFamily="34" charset="0"/>
+                  <a:latin typeface="Arial" panose="020B0704020202020204" pitchFamily="34" charset="0"/>
                 </a:defRPr>
               </a:lvl8pPr>
               <a:lvl9pPr marL="3886200" indent="-228600" defTabSz="1095375" fontAlgn="base">
@@ -26395,7 +26414,7 @@
                   <a:solidFill>
                     <a:schemeClr val="tx1"/>
                   </a:solidFill>
-                  <a:latin typeface="Arial" panose="020B0604020202020204" pitchFamily="34" charset="0"/>
+                  <a:latin typeface="Arial" panose="020B0704020202020204" pitchFamily="34" charset="0"/>
                 </a:defRPr>
               </a:lvl9pPr>
             </a:lstStyle>
@@ -26409,12 +26428,12 @@
               </a:pPr>
               <a:r>
                 <a:rPr lang="en-US" sz="2800" i="1">
-                  <a:cs typeface="Arial" panose="020B0604020202020204" pitchFamily="34" charset="0"/>
+                  <a:cs typeface="Arial" panose="020B0704020202020204" pitchFamily="34" charset="0"/>
                 </a:rPr>
                 <a:t>Sai số phép đo</a:t>
               </a:r>
               <a:endParaRPr lang="en-US" sz="2800" dirty="0">
-                <a:cs typeface="Arial" panose="020B0604020202020204" pitchFamily="34" charset="0"/>
+                <a:cs typeface="Arial" panose="020B0704020202020204" pitchFamily="34" charset="0"/>
               </a:endParaRPr>
             </a:p>
           </p:txBody>
@@ -26474,7 +26493,7 @@
                 <a:solidFill>
                   <a:schemeClr val="tx1"/>
                 </a:solidFill>
-                <a:latin typeface="Arial" panose="020B0604020202020204" pitchFamily="34" charset="0"/>
+                <a:latin typeface="Arial" panose="020B0704020202020204" pitchFamily="34" charset="0"/>
               </a:defRPr>
             </a:lvl1pPr>
             <a:lvl2pPr marL="742950" indent="-285750">
@@ -26486,7 +26505,7 @@
                 <a:solidFill>
                   <a:schemeClr val="tx1"/>
                 </a:solidFill>
-                <a:latin typeface="Arial" panose="020B0604020202020204" pitchFamily="34" charset="0"/>
+                <a:latin typeface="Arial" panose="020B0704020202020204" pitchFamily="34" charset="0"/>
               </a:defRPr>
             </a:lvl2pPr>
             <a:lvl3pPr marL="1143000" indent="-228600">
@@ -26498,7 +26517,7 @@
                 <a:solidFill>
                   <a:schemeClr val="tx1"/>
                 </a:solidFill>
-                <a:latin typeface="Arial" panose="020B0604020202020204" pitchFamily="34" charset="0"/>
+                <a:latin typeface="Arial" panose="020B0704020202020204" pitchFamily="34" charset="0"/>
               </a:defRPr>
             </a:lvl3pPr>
             <a:lvl4pPr marL="1600200" indent="-228600">
@@ -26510,7 +26529,7 @@
                 <a:solidFill>
                   <a:schemeClr val="tx1"/>
                 </a:solidFill>
-                <a:latin typeface="Arial" panose="020B0604020202020204" pitchFamily="34" charset="0"/>
+                <a:latin typeface="Arial" panose="020B0704020202020204" pitchFamily="34" charset="0"/>
               </a:defRPr>
             </a:lvl4pPr>
             <a:lvl5pPr marL="2057400" indent="-228600">
@@ -26522,7 +26541,7 @@
                 <a:solidFill>
                   <a:schemeClr val="tx1"/>
                 </a:solidFill>
-                <a:latin typeface="Arial" panose="020B0604020202020204" pitchFamily="34" charset="0"/>
+                <a:latin typeface="Arial" panose="020B0704020202020204" pitchFamily="34" charset="0"/>
               </a:defRPr>
             </a:lvl5pPr>
             <a:lvl6pPr marL="2514600" indent="-228600" eaLnBrk="0" fontAlgn="base" hangingPunct="0">
@@ -26537,7 +26556,7 @@
                 <a:solidFill>
                   <a:schemeClr val="tx1"/>
                 </a:solidFill>
-                <a:latin typeface="Arial" panose="020B0604020202020204" pitchFamily="34" charset="0"/>
+                <a:latin typeface="Arial" panose="020B0704020202020204" pitchFamily="34" charset="0"/>
               </a:defRPr>
             </a:lvl6pPr>
             <a:lvl7pPr marL="2971800" indent="-228600" eaLnBrk="0" fontAlgn="base" hangingPunct="0">
@@ -26552,7 +26571,7 @@
                 <a:solidFill>
                   <a:schemeClr val="tx1"/>
                 </a:solidFill>
-                <a:latin typeface="Arial" panose="020B0604020202020204" pitchFamily="34" charset="0"/>
+                <a:latin typeface="Arial" panose="020B0704020202020204" pitchFamily="34" charset="0"/>
               </a:defRPr>
             </a:lvl7pPr>
             <a:lvl8pPr marL="3429000" indent="-228600" eaLnBrk="0" fontAlgn="base" hangingPunct="0">
@@ -26567,7 +26586,7 @@
                 <a:solidFill>
                   <a:schemeClr val="tx1"/>
                 </a:solidFill>
-                <a:latin typeface="Arial" panose="020B0604020202020204" pitchFamily="34" charset="0"/>
+                <a:latin typeface="Arial" panose="020B0704020202020204" pitchFamily="34" charset="0"/>
               </a:defRPr>
             </a:lvl8pPr>
             <a:lvl9pPr marL="3886200" indent="-228600" eaLnBrk="0" fontAlgn="base" hangingPunct="0">
@@ -26582,7 +26601,7 @@
                 <a:solidFill>
                   <a:schemeClr val="tx1"/>
                 </a:solidFill>
-                <a:latin typeface="Arial" panose="020B0604020202020204" pitchFamily="34" charset="0"/>
+                <a:latin typeface="Arial" panose="020B0704020202020204" pitchFamily="34" charset="0"/>
               </a:defRPr>
             </a:lvl9pPr>
           </a:lstStyle>
@@ -26600,7 +26619,7 @@
                 <a:solidFill>
                   <a:srgbClr val="0070C0"/>
                 </a:solidFill>
-                <a:cs typeface="Arial" panose="020B0604020202020204" pitchFamily="34" charset="0"/>
+                <a:cs typeface="Arial" panose="020B0704020202020204" pitchFamily="34" charset="0"/>
               </a:rPr>
               <a:t>2. Cách xác định sai số</a:t>
             </a:r>
@@ -26608,7 +26627,7 @@
               <a:solidFill>
                 <a:srgbClr val="0070C0"/>
               </a:solidFill>
-              <a:cs typeface="Arial" panose="020B0604020202020204" pitchFamily="34" charset="0"/>
+              <a:cs typeface="Arial" panose="020B0704020202020204" pitchFamily="34" charset="0"/>
             </a:endParaRPr>
           </a:p>
         </p:txBody>
@@ -26654,9 +26673,9 @@
                   <a:srgbClr val="000000"/>
                 </a:solidFill>
                 <a:effectLst/>
-                <a:latin typeface="Arial" panose="020B0604020202020204" pitchFamily="34" charset="0"/>
+                <a:latin typeface="Arial" panose="020B0704020202020204" pitchFamily="34" charset="0"/>
                 <a:ea typeface="Times New Roman" panose="02020603050405020304" pitchFamily="18" charset="0"/>
-                <a:cs typeface="Arial" panose="020B0604020202020204" pitchFamily="34" charset="0"/>
+                <a:cs typeface="Arial" panose="020B0704020202020204" pitchFamily="34" charset="0"/>
               </a:rPr>
               <a:t>Giá trị trung bình</a:t>
             </a:r>
@@ -26666,9 +26685,9 @@
                   <a:srgbClr val="000000"/>
                 </a:solidFill>
                 <a:effectLst/>
-                <a:latin typeface="Arial" panose="020B0604020202020204" pitchFamily="34" charset="0"/>
+                <a:latin typeface="Arial" panose="020B0704020202020204" pitchFamily="34" charset="0"/>
                 <a:ea typeface="Times New Roman" panose="02020603050405020304" pitchFamily="18" charset="0"/>
-                <a:cs typeface="Arial" panose="020B0604020202020204" pitchFamily="34" charset="0"/>
+                <a:cs typeface="Arial" panose="020B0704020202020204" pitchFamily="34" charset="0"/>
               </a:rPr>
               <a:t>:</a:t>
             </a:r>
@@ -26677,9 +26696,9 @@
                 <a:srgbClr val="000000"/>
               </a:solidFill>
               <a:effectLst/>
-              <a:latin typeface="Arial" panose="020B0604020202020204" pitchFamily="34" charset="0"/>
+              <a:latin typeface="Arial" panose="020B0704020202020204" pitchFamily="34" charset="0"/>
               <a:ea typeface="Times New Roman" panose="02020603050405020304" pitchFamily="18" charset="0"/>
-              <a:cs typeface="Arial" panose="020B0604020202020204" pitchFamily="34" charset="0"/>
+              <a:cs typeface="Arial" panose="020B0704020202020204" pitchFamily="34" charset="0"/>
             </a:endParaRPr>
           </a:p>
         </p:txBody>
@@ -26725,9 +26744,9 @@
                   <a:srgbClr val="000000"/>
                 </a:solidFill>
                 <a:effectLst/>
-                <a:latin typeface="Arial" panose="020B0604020202020204" pitchFamily="34" charset="0"/>
+                <a:latin typeface="Arial" panose="020B0704020202020204" pitchFamily="34" charset="0"/>
                 <a:ea typeface="Times New Roman" panose="02020603050405020304" pitchFamily="18" charset="0"/>
-                <a:cs typeface="Arial" panose="020B0604020202020204" pitchFamily="34" charset="0"/>
+                <a:cs typeface="Arial" panose="020B0704020202020204" pitchFamily="34" charset="0"/>
               </a:rPr>
               <a:t>Sai số ngẫu nhiên tuyệt đối trung bình </a:t>
             </a:r>
@@ -26737,9 +26756,9 @@
                   <a:srgbClr val="000000"/>
                 </a:solidFill>
                 <a:effectLst/>
-                <a:latin typeface="Arial" panose="020B0604020202020204" pitchFamily="34" charset="0"/>
+                <a:latin typeface="Arial" panose="020B0704020202020204" pitchFamily="34" charset="0"/>
                 <a:ea typeface="Times New Roman" panose="02020603050405020304" pitchFamily="18" charset="0"/>
-                <a:cs typeface="Arial" panose="020B0604020202020204" pitchFamily="34" charset="0"/>
+                <a:cs typeface="Arial" panose="020B0704020202020204" pitchFamily="34" charset="0"/>
               </a:rPr>
               <a:t>của n lần đo:</a:t>
             </a:r>
@@ -26748,9 +26767,9 @@
                 <a:srgbClr val="000000"/>
               </a:solidFill>
               <a:effectLst/>
-              <a:latin typeface="Arial" panose="020B0604020202020204" pitchFamily="34" charset="0"/>
+              <a:latin typeface="Arial" panose="020B0704020202020204" pitchFamily="34" charset="0"/>
               <a:ea typeface="Times New Roman" panose="02020603050405020304" pitchFamily="18" charset="0"/>
-              <a:cs typeface="Arial" panose="020B0604020202020204" pitchFamily="34" charset="0"/>
+              <a:cs typeface="Arial" panose="020B0704020202020204" pitchFamily="34" charset="0"/>
             </a:endParaRPr>
           </a:p>
         </p:txBody>
@@ -26854,7 +26873,7 @@
                         <a:srgbClr val="000000"/>
                       </a:solidFill>
                       <a:effectLst/>
-                      <a:cs typeface="Arial" panose="020B0604020202020204" pitchFamily="34" charset="0"/>
+                      <a:cs typeface="Arial" panose="020B0704020202020204" pitchFamily="34" charset="0"/>
                       <a:sym typeface="Symbol" panose="05050102010706020507" pitchFamily="18" charset="2"/>
                     </a:rPr>
                     <a:t></a:t>
@@ -26864,7 +26883,7 @@
                       <a:solidFill>
                         <a:srgbClr val="000000"/>
                       </a:solidFill>
-                      <a:cs typeface="Arial" panose="020B0604020202020204" pitchFamily="34" charset="0"/>
+                      <a:cs typeface="Arial" panose="020B0704020202020204" pitchFamily="34" charset="0"/>
                       <a:sym typeface="Symbol" panose="05050102010706020507" pitchFamily="18" charset="2"/>
                     </a:rPr>
                     <a:t>A</a:t>
@@ -26874,7 +26893,7 @@
                       <a:solidFill>
                         <a:srgbClr val="000000"/>
                       </a:solidFill>
-                      <a:cs typeface="Arial" panose="020B0604020202020204" pitchFamily="34" charset="0"/>
+                      <a:cs typeface="Arial" panose="020B0704020202020204" pitchFamily="34" charset="0"/>
                       <a:sym typeface="Symbol" panose="05050102010706020507" pitchFamily="18" charset="2"/>
                     </a:rPr>
                     <a:t>1</a:t>
@@ -26885,7 +26904,7 @@
                         <a:srgbClr val="000000"/>
                       </a:solidFill>
                       <a:effectLst/>
-                      <a:cs typeface="Arial" panose="020B0604020202020204" pitchFamily="34" charset="0"/>
+                      <a:cs typeface="Arial" panose="020B0704020202020204" pitchFamily="34" charset="0"/>
                     </a:rPr>
                     <a:t> = </a:t>
                   </a:r>
@@ -26902,7 +26921,7 @@
                               </a:solidFill>
                               <a:effectLst/>
                               <a:latin typeface="Cambria Math" panose="02040503050406030204"/>
-                              <a:cs typeface="Arial" panose="020B0604020202020204" pitchFamily="34" charset="0"/>
+                              <a:cs typeface="Arial" panose="020B0704020202020204" pitchFamily="34" charset="0"/>
                             </a:rPr>
                           </m:ctrlPr>
                         </m:dPr>
@@ -26916,7 +26935,7 @@
                                     <a:srgbClr val="000000"/>
                                   </a:solidFill>
                                   <a:latin typeface="Cambria Math" panose="02040503050406030204"/>
-                                  <a:cs typeface="Arial" panose="020B0604020202020204" pitchFamily="34" charset="0"/>
+                                  <a:cs typeface="Arial" panose="020B0704020202020204" pitchFamily="34" charset="0"/>
                                 </a:rPr>
                               </m:ctrlPr>
                             </m:accPr>
@@ -26927,7 +26946,7 @@
                                     <a:srgbClr val="000000"/>
                                   </a:solidFill>
                                   <a:latin typeface="Cambria Math" panose="02040503050406030204" pitchFamily="18" charset="0"/>
-                                  <a:cs typeface="Arial" panose="020B0604020202020204" pitchFamily="34" charset="0"/>
+                                  <a:cs typeface="Arial" panose="020B0704020202020204" pitchFamily="34" charset="0"/>
                                 </a:rPr>
                                 <m:t>𝐴</m:t>
                               </m:r>
@@ -26939,7 +26958,7 @@
                                 <a:srgbClr val="000000"/>
                               </a:solidFill>
                               <a:latin typeface="Cambria Math" panose="02040503050406030204" pitchFamily="18" charset="0"/>
-                              <a:cs typeface="Arial" panose="020B0604020202020204" pitchFamily="34" charset="0"/>
+                              <a:cs typeface="Arial" panose="020B0704020202020204" pitchFamily="34" charset="0"/>
                             </a:rPr>
                             <m:t>−</m:t>
                           </m:r>
@@ -26951,7 +26970,7 @@
                                     <a:srgbClr val="000000"/>
                                   </a:solidFill>
                                   <a:latin typeface="Cambria Math" panose="02040503050406030204"/>
-                                  <a:cs typeface="Arial" panose="020B0604020202020204" pitchFamily="34" charset="0"/>
+                                  <a:cs typeface="Arial" panose="020B0704020202020204" pitchFamily="34" charset="0"/>
                                 </a:rPr>
                               </m:ctrlPr>
                             </m:sSubPr>
@@ -26962,7 +26981,7 @@
                                     <a:srgbClr val="000000"/>
                                   </a:solidFill>
                                   <a:latin typeface="Cambria Math" panose="02040503050406030204" pitchFamily="18" charset="0"/>
-                                  <a:cs typeface="Arial" panose="020B0604020202020204" pitchFamily="34" charset="0"/>
+                                  <a:cs typeface="Arial" panose="020B0704020202020204" pitchFamily="34" charset="0"/>
                                 </a:rPr>
                                 <m:t>𝐴</m:t>
                               </m:r>
@@ -26974,7 +26993,7 @@
                                     <a:srgbClr val="000000"/>
                                   </a:solidFill>
                                   <a:latin typeface="Cambria Math" panose="02040503050406030204" pitchFamily="18" charset="0"/>
-                                  <a:cs typeface="Arial" panose="020B0604020202020204" pitchFamily="34" charset="0"/>
+                                  <a:cs typeface="Arial" panose="020B0704020202020204" pitchFamily="34" charset="0"/>
                                 </a:rPr>
                                 <m:t>1</m:t>
                               </m:r>
@@ -26990,9 +27009,9 @@
                         <a:schemeClr val="tx1"/>
                       </a:solidFill>
                       <a:effectLst/>
-                      <a:latin typeface="Arial" panose="020B0604020202020204" pitchFamily="34" charset="0"/>
+                      <a:latin typeface="Arial" panose="020B0704020202020204" pitchFamily="34" charset="0"/>
                       <a:ea typeface="Calibri" panose="020F0502020204030204" pitchFamily="34" charset="0"/>
-                      <a:cs typeface="Arial" panose="020B0604020202020204" pitchFamily="34" charset="0"/>
+                      <a:cs typeface="Arial" panose="020B0704020202020204" pitchFamily="34" charset="0"/>
                     </a:rPr>
                     <a:t>; </a:t>
                   </a:r>
@@ -27001,7 +27020,7 @@
                       <a:solidFill>
                         <a:srgbClr val="000000"/>
                       </a:solidFill>
-                      <a:cs typeface="Arial" panose="020B0604020202020204" pitchFamily="34" charset="0"/>
+                      <a:cs typeface="Arial" panose="020B0704020202020204" pitchFamily="34" charset="0"/>
                       <a:sym typeface="Symbol" panose="05050102010706020507" pitchFamily="18" charset="2"/>
                     </a:rPr>
                     <a:t>A</a:t>
@@ -27011,7 +27030,7 @@
                       <a:solidFill>
                         <a:srgbClr val="000000"/>
                       </a:solidFill>
-                      <a:cs typeface="Arial" panose="020B0604020202020204" pitchFamily="34" charset="0"/>
+                      <a:cs typeface="Arial" panose="020B0704020202020204" pitchFamily="34" charset="0"/>
                       <a:sym typeface="Symbol" panose="05050102010706020507" pitchFamily="18" charset="2"/>
                     </a:rPr>
                     <a:t>2</a:t>
@@ -27021,7 +27040,7 @@
                       <a:solidFill>
                         <a:srgbClr val="000000"/>
                       </a:solidFill>
-                      <a:cs typeface="Arial" panose="020B0604020202020204" pitchFamily="34" charset="0"/>
+                      <a:cs typeface="Arial" panose="020B0704020202020204" pitchFamily="34" charset="0"/>
                     </a:rPr>
                     <a:t> = </a:t>
                   </a:r>
@@ -27037,7 +27056,7 @@
                                 <a:srgbClr val="000000"/>
                               </a:solidFill>
                               <a:latin typeface="Cambria Math" panose="02040503050406030204"/>
-                              <a:cs typeface="Arial" panose="020B0604020202020204" pitchFamily="34" charset="0"/>
+                              <a:cs typeface="Arial" panose="020B0704020202020204" pitchFamily="34" charset="0"/>
                             </a:rPr>
                           </m:ctrlPr>
                         </m:dPr>
@@ -27051,7 +27070,7 @@
                                     <a:srgbClr val="000000"/>
                                   </a:solidFill>
                                   <a:latin typeface="Cambria Math" panose="02040503050406030204"/>
-                                  <a:cs typeface="Arial" panose="020B0604020202020204" pitchFamily="34" charset="0"/>
+                                  <a:cs typeface="Arial" panose="020B0704020202020204" pitchFamily="34" charset="0"/>
                                 </a:rPr>
                               </m:ctrlPr>
                             </m:accPr>
@@ -27062,7 +27081,7 @@
                                     <a:srgbClr val="000000"/>
                                   </a:solidFill>
                                   <a:latin typeface="Cambria Math" panose="02040503050406030204" pitchFamily="18" charset="0"/>
-                                  <a:cs typeface="Arial" panose="020B0604020202020204" pitchFamily="34" charset="0"/>
+                                  <a:cs typeface="Arial" panose="020B0704020202020204" pitchFamily="34" charset="0"/>
                                 </a:rPr>
                                 <m:t>𝐴</m:t>
                               </m:r>
@@ -27074,7 +27093,7 @@
                                 <a:srgbClr val="000000"/>
                               </a:solidFill>
                               <a:latin typeface="Cambria Math" panose="02040503050406030204" pitchFamily="18" charset="0"/>
-                              <a:cs typeface="Arial" panose="020B0604020202020204" pitchFamily="34" charset="0"/>
+                              <a:cs typeface="Arial" panose="020B0704020202020204" pitchFamily="34" charset="0"/>
                             </a:rPr>
                             <m:t>−</m:t>
                           </m:r>
@@ -27086,7 +27105,7 @@
                                     <a:srgbClr val="000000"/>
                                   </a:solidFill>
                                   <a:latin typeface="Cambria Math" panose="02040503050406030204"/>
-                                  <a:cs typeface="Arial" panose="020B0604020202020204" pitchFamily="34" charset="0"/>
+                                  <a:cs typeface="Arial" panose="020B0704020202020204" pitchFamily="34" charset="0"/>
                                 </a:rPr>
                               </m:ctrlPr>
                             </m:sSubPr>
@@ -27097,7 +27116,7 @@
                                     <a:srgbClr val="000000"/>
                                   </a:solidFill>
                                   <a:latin typeface="Cambria Math" panose="02040503050406030204" pitchFamily="18" charset="0"/>
-                                  <a:cs typeface="Arial" panose="020B0604020202020204" pitchFamily="34" charset="0"/>
+                                  <a:cs typeface="Arial" panose="020B0704020202020204" pitchFamily="34" charset="0"/>
                                 </a:rPr>
                                 <m:t>𝐴</m:t>
                               </m:r>
@@ -27109,7 +27128,7 @@
                                     <a:srgbClr val="000000"/>
                                   </a:solidFill>
                                   <a:latin typeface="Cambria Math" panose="02040503050406030204" pitchFamily="18" charset="0"/>
-                                  <a:cs typeface="Arial" panose="020B0604020202020204" pitchFamily="34" charset="0"/>
+                                  <a:cs typeface="Arial" panose="020B0704020202020204" pitchFamily="34" charset="0"/>
                                 </a:rPr>
                                 <m:t>2</m:t>
                               </m:r>
@@ -27121,9 +27140,9 @@
                   </a14:m>
                   <a:r>
                     <a:rPr lang="en-US" sz="2500">
-                      <a:latin typeface="Arial" panose="020B0604020202020204" pitchFamily="34" charset="0"/>
+                      <a:latin typeface="Arial" panose="020B0704020202020204" pitchFamily="34" charset="0"/>
                       <a:ea typeface="Calibri" panose="020F0502020204030204" pitchFamily="34" charset="0"/>
-                      <a:cs typeface="Arial" panose="020B0604020202020204" pitchFamily="34" charset="0"/>
+                      <a:cs typeface="Arial" panose="020B0704020202020204" pitchFamily="34" charset="0"/>
                     </a:rPr>
                     <a:t>; </a:t>
                   </a:r>
@@ -27132,7 +27151,7 @@
                       <a:solidFill>
                         <a:srgbClr val="000000"/>
                       </a:solidFill>
-                      <a:cs typeface="Arial" panose="020B0604020202020204" pitchFamily="34" charset="0"/>
+                      <a:cs typeface="Arial" panose="020B0704020202020204" pitchFamily="34" charset="0"/>
                       <a:sym typeface="Symbol" panose="05050102010706020507" pitchFamily="18" charset="2"/>
                     </a:rPr>
                     <a:t>A</a:t>
@@ -27142,7 +27161,7 @@
                       <a:solidFill>
                         <a:srgbClr val="000000"/>
                       </a:solidFill>
-                      <a:cs typeface="Arial" panose="020B0604020202020204" pitchFamily="34" charset="0"/>
+                      <a:cs typeface="Arial" panose="020B0704020202020204" pitchFamily="34" charset="0"/>
                       <a:sym typeface="Symbol" panose="05050102010706020507" pitchFamily="18" charset="2"/>
                     </a:rPr>
                     <a:t>3</a:t>
@@ -27152,7 +27171,7 @@
                       <a:solidFill>
                         <a:srgbClr val="000000"/>
                       </a:solidFill>
-                      <a:cs typeface="Arial" panose="020B0604020202020204" pitchFamily="34" charset="0"/>
+                      <a:cs typeface="Arial" panose="020B0704020202020204" pitchFamily="34" charset="0"/>
                     </a:rPr>
                     <a:t> = </a:t>
                   </a:r>
@@ -27168,7 +27187,7 @@
                                 <a:srgbClr val="000000"/>
                               </a:solidFill>
                               <a:latin typeface="Cambria Math" panose="02040503050406030204"/>
-                              <a:cs typeface="Arial" panose="020B0604020202020204" pitchFamily="34" charset="0"/>
+                              <a:cs typeface="Arial" panose="020B0704020202020204" pitchFamily="34" charset="0"/>
                             </a:rPr>
                           </m:ctrlPr>
                         </m:dPr>
@@ -27182,7 +27201,7 @@
                                     <a:srgbClr val="000000"/>
                                   </a:solidFill>
                                   <a:latin typeface="Cambria Math" panose="02040503050406030204"/>
-                                  <a:cs typeface="Arial" panose="020B0604020202020204" pitchFamily="34" charset="0"/>
+                                  <a:cs typeface="Arial" panose="020B0704020202020204" pitchFamily="34" charset="0"/>
                                 </a:rPr>
                               </m:ctrlPr>
                             </m:accPr>
@@ -27193,7 +27212,7 @@
                                     <a:srgbClr val="000000"/>
                                   </a:solidFill>
                                   <a:latin typeface="Cambria Math" panose="02040503050406030204" pitchFamily="18" charset="0"/>
-                                  <a:cs typeface="Arial" panose="020B0604020202020204" pitchFamily="34" charset="0"/>
+                                  <a:cs typeface="Arial" panose="020B0704020202020204" pitchFamily="34" charset="0"/>
                                 </a:rPr>
                                 <m:t>𝐴</m:t>
                               </m:r>
@@ -27205,7 +27224,7 @@
                                 <a:srgbClr val="000000"/>
                               </a:solidFill>
                               <a:latin typeface="Cambria Math" panose="02040503050406030204" pitchFamily="18" charset="0"/>
-                              <a:cs typeface="Arial" panose="020B0604020202020204" pitchFamily="34" charset="0"/>
+                              <a:cs typeface="Arial" panose="020B0704020202020204" pitchFamily="34" charset="0"/>
                             </a:rPr>
                             <m:t>−</m:t>
                           </m:r>
@@ -27217,7 +27236,7 @@
                                     <a:srgbClr val="000000"/>
                                   </a:solidFill>
                                   <a:latin typeface="Cambria Math" panose="02040503050406030204"/>
-                                  <a:cs typeface="Arial" panose="020B0604020202020204" pitchFamily="34" charset="0"/>
+                                  <a:cs typeface="Arial" panose="020B0704020202020204" pitchFamily="34" charset="0"/>
                                 </a:rPr>
                               </m:ctrlPr>
                             </m:sSubPr>
@@ -27228,7 +27247,7 @@
                                     <a:srgbClr val="000000"/>
                                   </a:solidFill>
                                   <a:latin typeface="Cambria Math" panose="02040503050406030204" pitchFamily="18" charset="0"/>
-                                  <a:cs typeface="Arial" panose="020B0604020202020204" pitchFamily="34" charset="0"/>
+                                  <a:cs typeface="Arial" panose="020B0704020202020204" pitchFamily="34" charset="0"/>
                                 </a:rPr>
                                 <m:t>𝐴</m:t>
                               </m:r>
@@ -27240,7 +27259,7 @@
                                     <a:srgbClr val="000000"/>
                                   </a:solidFill>
                                   <a:latin typeface="Cambria Math" panose="02040503050406030204" pitchFamily="18" charset="0"/>
-                                  <a:cs typeface="Arial" panose="020B0604020202020204" pitchFamily="34" charset="0"/>
+                                  <a:cs typeface="Arial" panose="020B0704020202020204" pitchFamily="34" charset="0"/>
                                 </a:rPr>
                                 <m:t>3</m:t>
                               </m:r>
@@ -27254,7 +27273,7 @@
                             <a:srgbClr val="000000"/>
                           </a:solidFill>
                           <a:latin typeface="Cambria Math" panose="02040503050406030204" pitchFamily="18" charset="0"/>
-                          <a:cs typeface="Arial" panose="020B0604020202020204" pitchFamily="34" charset="0"/>
+                          <a:cs typeface="Arial" panose="020B0704020202020204" pitchFamily="34" charset="0"/>
                         </a:rPr>
                         <m:t>…</m:t>
                       </m:r>
@@ -27262,7 +27281,7 @@
                   </a14:m>
                   <a:endParaRPr lang="vi-VN" sz="2500">
                     <a:ea typeface="Calibri" panose="020F0502020204030204" pitchFamily="34" charset="0"/>
-                    <a:cs typeface="Arial" panose="020B0604020202020204" pitchFamily="34" charset="0"/>
+                    <a:cs typeface="Arial" panose="020B0704020202020204" pitchFamily="34" charset="0"/>
                   </a:endParaRPr>
                 </a:p>
               </p:txBody>
@@ -27410,7 +27429,7 @@
                               </a:solidFill>
                               <a:effectLst/>
                               <a:latin typeface="Cambria Math" panose="02040503050406030204"/>
-                              <a:cs typeface="Arial" panose="020B0604020202020204" pitchFamily="34" charset="0"/>
+                              <a:cs typeface="Arial" panose="020B0704020202020204" pitchFamily="34" charset="0"/>
                             </a:rPr>
                           </m:ctrlPr>
                         </m:accPr>
@@ -27422,7 +27441,7 @@
                               </a:solidFill>
                               <a:effectLst/>
                               <a:latin typeface="Cambria Math" panose="02040503050406030204" pitchFamily="18" charset="0"/>
-                              <a:cs typeface="Arial" panose="020B0604020202020204" pitchFamily="34" charset="0"/>
+                              <a:cs typeface="Arial" panose="020B0704020202020204" pitchFamily="34" charset="0"/>
                             </a:rPr>
                             <m:t>𝐴</m:t>
                           </m:r>
@@ -27436,9 +27455,9 @@
                         <a:srgbClr val="000000"/>
                       </a:solidFill>
                       <a:effectLst/>
-                      <a:latin typeface="Arial" panose="020B0604020202020204" pitchFamily="34" charset="0"/>
+                      <a:latin typeface="Arial" panose="020B0704020202020204" pitchFamily="34" charset="0"/>
                       <a:ea typeface="Times New Roman" panose="02020603050405020304" pitchFamily="18" charset="0"/>
-                      <a:cs typeface="Arial" panose="020B0604020202020204" pitchFamily="34" charset="0"/>
+                      <a:cs typeface="Arial" panose="020B0704020202020204" pitchFamily="34" charset="0"/>
                     </a:rPr>
                     <a:t> = </a:t>
                   </a:r>
@@ -27453,7 +27472,7 @@
                               </a:solidFill>
                               <a:effectLst/>
                               <a:latin typeface="Cambria Math" panose="02040503050406030204"/>
-                              <a:cs typeface="Arial" panose="020B0604020202020204" pitchFamily="34" charset="0"/>
+                              <a:cs typeface="Arial" panose="020B0704020202020204" pitchFamily="34" charset="0"/>
                             </a:rPr>
                           </m:ctrlPr>
                         </m:fPr>
@@ -27467,7 +27486,7 @@
                                   </a:solidFill>
                                   <a:effectLst/>
                                   <a:latin typeface="Cambria Math" panose="02040503050406030204"/>
-                                  <a:cs typeface="Arial" panose="020B0604020202020204" pitchFamily="34" charset="0"/>
+                                  <a:cs typeface="Arial" panose="020B0704020202020204" pitchFamily="34" charset="0"/>
                                 </a:rPr>
                               </m:ctrlPr>
                             </m:sSubPr>
@@ -27479,7 +27498,7 @@
                                   </a:solidFill>
                                   <a:effectLst/>
                                   <a:latin typeface="Cambria Math" panose="02040503050406030204" pitchFamily="18" charset="0"/>
-                                  <a:cs typeface="Arial" panose="020B0604020202020204" pitchFamily="34" charset="0"/>
+                                  <a:cs typeface="Arial" panose="020B0704020202020204" pitchFamily="34" charset="0"/>
                                 </a:rPr>
                                 <m:t>𝐴</m:t>
                               </m:r>
@@ -27492,7 +27511,7 @@
                                   </a:solidFill>
                                   <a:effectLst/>
                                   <a:latin typeface="Cambria Math" panose="02040503050406030204" pitchFamily="18" charset="0"/>
-                                  <a:cs typeface="Arial" panose="020B0604020202020204" pitchFamily="34" charset="0"/>
+                                  <a:cs typeface="Arial" panose="020B0704020202020204" pitchFamily="34" charset="0"/>
                                 </a:rPr>
                                 <m:t>1</m:t>
                               </m:r>
@@ -27505,7 +27524,7 @@
                               </a:solidFill>
                               <a:effectLst/>
                               <a:latin typeface="Cambria Math" panose="02040503050406030204" pitchFamily="18" charset="0"/>
-                              <a:cs typeface="Arial" panose="020B0604020202020204" pitchFamily="34" charset="0"/>
+                              <a:cs typeface="Arial" panose="020B0704020202020204" pitchFamily="34" charset="0"/>
                             </a:rPr>
                             <m:t>+</m:t>
                           </m:r>
@@ -27517,7 +27536,7 @@
                                     <a:srgbClr val="000000"/>
                                   </a:solidFill>
                                   <a:latin typeface="Cambria Math" panose="02040503050406030204"/>
-                                  <a:cs typeface="Arial" panose="020B0604020202020204" pitchFamily="34" charset="0"/>
+                                  <a:cs typeface="Arial" panose="020B0704020202020204" pitchFamily="34" charset="0"/>
                                 </a:rPr>
                               </m:ctrlPr>
                             </m:sSubPr>
@@ -27528,7 +27547,7 @@
                                     <a:srgbClr val="000000"/>
                                   </a:solidFill>
                                   <a:latin typeface="Cambria Math" panose="02040503050406030204" pitchFamily="18" charset="0"/>
-                                  <a:cs typeface="Arial" panose="020B0604020202020204" pitchFamily="34" charset="0"/>
+                                  <a:cs typeface="Arial" panose="020B0704020202020204" pitchFamily="34" charset="0"/>
                                 </a:rPr>
                                 <m:t>𝐴</m:t>
                               </m:r>
@@ -27540,7 +27559,7 @@
                                     <a:srgbClr val="000000"/>
                                   </a:solidFill>
                                   <a:latin typeface="Cambria Math" panose="02040503050406030204" pitchFamily="18" charset="0"/>
-                                  <a:cs typeface="Arial" panose="020B0604020202020204" pitchFamily="34" charset="0"/>
+                                  <a:cs typeface="Arial" panose="020B0704020202020204" pitchFamily="34" charset="0"/>
                                 </a:rPr>
                                 <m:t>2</m:t>
                               </m:r>
@@ -27552,7 +27571,7 @@
                                 <a:srgbClr val="000000"/>
                               </a:solidFill>
                               <a:latin typeface="Cambria Math" panose="02040503050406030204" pitchFamily="18" charset="0"/>
-                              <a:cs typeface="Arial" panose="020B0604020202020204" pitchFamily="34" charset="0"/>
+                              <a:cs typeface="Arial" panose="020B0704020202020204" pitchFamily="34" charset="0"/>
                             </a:rPr>
                             <m:t>+</m:t>
                           </m:r>
@@ -27562,7 +27581,7 @@
                                 <a:srgbClr val="000000"/>
                               </a:solidFill>
                               <a:latin typeface="Cambria Math" panose="02040503050406030204" pitchFamily="18" charset="0"/>
-                              <a:cs typeface="Arial" panose="020B0604020202020204" pitchFamily="34" charset="0"/>
+                              <a:cs typeface="Arial" panose="020B0704020202020204" pitchFamily="34" charset="0"/>
                             </a:rPr>
                             <m:t>…</m:t>
                           </m:r>
@@ -27572,7 +27591,7 @@
                                 <a:srgbClr val="000000"/>
                               </a:solidFill>
                               <a:latin typeface="Cambria Math" panose="02040503050406030204" pitchFamily="18" charset="0"/>
-                              <a:cs typeface="Arial" panose="020B0604020202020204" pitchFamily="34" charset="0"/>
+                              <a:cs typeface="Arial" panose="020B0704020202020204" pitchFamily="34" charset="0"/>
                             </a:rPr>
                             <m:t>+</m:t>
                           </m:r>
@@ -27584,7 +27603,7 @@
                                     <a:srgbClr val="000000"/>
                                   </a:solidFill>
                                   <a:latin typeface="Cambria Math" panose="02040503050406030204"/>
-                                  <a:cs typeface="Arial" panose="020B0604020202020204" pitchFamily="34" charset="0"/>
+                                  <a:cs typeface="Arial" panose="020B0704020202020204" pitchFamily="34" charset="0"/>
                                 </a:rPr>
                               </m:ctrlPr>
                             </m:sSubPr>
@@ -27595,7 +27614,7 @@
                                     <a:srgbClr val="000000"/>
                                   </a:solidFill>
                                   <a:latin typeface="Cambria Math" panose="02040503050406030204" pitchFamily="18" charset="0"/>
-                                  <a:cs typeface="Arial" panose="020B0604020202020204" pitchFamily="34" charset="0"/>
+                                  <a:cs typeface="Arial" panose="020B0704020202020204" pitchFamily="34" charset="0"/>
                                 </a:rPr>
                                 <m:t>𝐴</m:t>
                               </m:r>
@@ -27607,7 +27626,7 @@
                                     <a:srgbClr val="000000"/>
                                   </a:solidFill>
                                   <a:latin typeface="Cambria Math" panose="02040503050406030204" pitchFamily="18" charset="0"/>
-                                  <a:cs typeface="Arial" panose="020B0604020202020204" pitchFamily="34" charset="0"/>
+                                  <a:cs typeface="Arial" panose="020B0704020202020204" pitchFamily="34" charset="0"/>
                                 </a:rPr>
                                 <m:t>𝑛</m:t>
                               </m:r>
@@ -27622,7 +27641,7 @@
                               </a:solidFill>
                               <a:effectLst/>
                               <a:latin typeface="Cambria Math" panose="02040503050406030204" pitchFamily="18" charset="0"/>
-                              <a:cs typeface="Arial" panose="020B0604020202020204" pitchFamily="34" charset="0"/>
+                              <a:cs typeface="Arial" panose="020B0704020202020204" pitchFamily="34" charset="0"/>
                             </a:rPr>
                             <m:t>𝑛</m:t>
                           </m:r>
@@ -27636,9 +27655,9 @@
                         <a:srgbClr val="000000"/>
                       </a:solidFill>
                       <a:effectLst/>
-                      <a:latin typeface="Arial" panose="020B0604020202020204" pitchFamily="34" charset="0"/>
+                      <a:latin typeface="Arial" panose="020B0704020202020204" pitchFamily="34" charset="0"/>
                       <a:ea typeface="Times New Roman" panose="02020603050405020304" pitchFamily="18" charset="0"/>
-                      <a:cs typeface="Arial" panose="020B0604020202020204" pitchFamily="34" charset="0"/>
+                      <a:cs typeface="Arial" panose="020B0704020202020204" pitchFamily="34" charset="0"/>
                     </a:rPr>
                     <a:t> </a:t>
                   </a:r>
@@ -27789,7 +27808,7 @@
                               </a:solidFill>
                               <a:effectLst/>
                               <a:latin typeface="Cambria Math" panose="02040503050406030204"/>
-                              <a:cs typeface="Arial" panose="020B0604020202020204" pitchFamily="34" charset="0"/>
+                              <a:cs typeface="Arial" panose="020B0704020202020204" pitchFamily="34" charset="0"/>
                             </a:rPr>
                           </m:ctrlPr>
                         </m:accPr>
@@ -27801,7 +27820,7 @@
                               </a:solidFill>
                               <a:effectLst/>
                               <a:latin typeface="Cambria Math" panose="02040503050406030204" pitchFamily="18" charset="0"/>
-                              <a:cs typeface="Arial" panose="020B0604020202020204" pitchFamily="34" charset="0"/>
+                              <a:cs typeface="Arial" panose="020B0704020202020204" pitchFamily="34" charset="0"/>
                               <a:sym typeface="Symbol" panose="05050102010706020507" pitchFamily="18" charset="2"/>
                             </a:rPr>
                             <m:t></m:t>
@@ -27813,7 +27832,7 @@
                               </a:solidFill>
                               <a:effectLst/>
                               <a:latin typeface="Cambria Math" panose="02040503050406030204" pitchFamily="18" charset="0"/>
-                              <a:cs typeface="Arial" panose="020B0604020202020204" pitchFamily="34" charset="0"/>
+                              <a:cs typeface="Arial" panose="020B0704020202020204" pitchFamily="34" charset="0"/>
                             </a:rPr>
                             <m:t>𝐴</m:t>
                           </m:r>
@@ -27827,9 +27846,9 @@
                         <a:srgbClr val="000000"/>
                       </a:solidFill>
                       <a:effectLst/>
-                      <a:latin typeface="Arial" panose="020B0604020202020204" pitchFamily="34" charset="0"/>
+                      <a:latin typeface="Arial" panose="020B0704020202020204" pitchFamily="34" charset="0"/>
                       <a:ea typeface="Times New Roman" panose="02020603050405020304" pitchFamily="18" charset="0"/>
-                      <a:cs typeface="Arial" panose="020B0604020202020204" pitchFamily="34" charset="0"/>
+                      <a:cs typeface="Arial" panose="020B0704020202020204" pitchFamily="34" charset="0"/>
                     </a:rPr>
                     <a:t> = </a:t>
                   </a:r>
@@ -27844,7 +27863,7 @@
                               </a:solidFill>
                               <a:effectLst/>
                               <a:latin typeface="Cambria Math" panose="02040503050406030204"/>
-                              <a:cs typeface="Arial" panose="020B0604020202020204" pitchFamily="34" charset="0"/>
+                              <a:cs typeface="Arial" panose="020B0704020202020204" pitchFamily="34" charset="0"/>
                             </a:rPr>
                           </m:ctrlPr>
                         </m:fPr>
@@ -27858,7 +27877,7 @@
                                   </a:solidFill>
                                   <a:effectLst/>
                                   <a:latin typeface="Cambria Math" panose="02040503050406030204"/>
-                                  <a:cs typeface="Arial" panose="020B0604020202020204" pitchFamily="34" charset="0"/>
+                                  <a:cs typeface="Arial" panose="020B0704020202020204" pitchFamily="34" charset="0"/>
                                 </a:rPr>
                               </m:ctrlPr>
                             </m:sSubPr>
@@ -27869,7 +27888,7 @@
                                     <a:srgbClr val="000000"/>
                                   </a:solidFill>
                                   <a:latin typeface="Cambria Math" panose="02040503050406030204" pitchFamily="18" charset="0"/>
-                                  <a:cs typeface="Arial" panose="020B0604020202020204" pitchFamily="34" charset="0"/>
+                                  <a:cs typeface="Arial" panose="020B0704020202020204" pitchFamily="34" charset="0"/>
                                   <a:sym typeface="Symbol" panose="05050102010706020507" pitchFamily="18" charset="2"/>
                                 </a:rPr>
                                 <m:t></m:t>
@@ -27881,7 +27900,7 @@
                                   </a:solidFill>
                                   <a:effectLst/>
                                   <a:latin typeface="Cambria Math" panose="02040503050406030204" pitchFamily="18" charset="0"/>
-                                  <a:cs typeface="Arial" panose="020B0604020202020204" pitchFamily="34" charset="0"/>
+                                  <a:cs typeface="Arial" panose="020B0704020202020204" pitchFamily="34" charset="0"/>
                                 </a:rPr>
                                 <m:t>𝐴</m:t>
                               </m:r>
@@ -27894,7 +27913,7 @@
                                   </a:solidFill>
                                   <a:effectLst/>
                                   <a:latin typeface="Cambria Math" panose="02040503050406030204" pitchFamily="18" charset="0"/>
-                                  <a:cs typeface="Arial" panose="020B0604020202020204" pitchFamily="34" charset="0"/>
+                                  <a:cs typeface="Arial" panose="020B0704020202020204" pitchFamily="34" charset="0"/>
                                 </a:rPr>
                                 <m:t>1</m:t>
                               </m:r>
@@ -27907,7 +27926,7 @@
                               </a:solidFill>
                               <a:effectLst/>
                               <a:latin typeface="Cambria Math" panose="02040503050406030204" pitchFamily="18" charset="0"/>
-                              <a:cs typeface="Arial" panose="020B0604020202020204" pitchFamily="34" charset="0"/>
+                              <a:cs typeface="Arial" panose="020B0704020202020204" pitchFamily="34" charset="0"/>
                             </a:rPr>
                             <m:t>+</m:t>
                           </m:r>
@@ -27919,7 +27938,7 @@
                                     <a:srgbClr val="000000"/>
                                   </a:solidFill>
                                   <a:latin typeface="Cambria Math" panose="02040503050406030204"/>
-                                  <a:cs typeface="Arial" panose="020B0604020202020204" pitchFamily="34" charset="0"/>
+                                  <a:cs typeface="Arial" panose="020B0704020202020204" pitchFamily="34" charset="0"/>
                                 </a:rPr>
                               </m:ctrlPr>
                             </m:sSubPr>
@@ -27930,7 +27949,7 @@
                                     <a:srgbClr val="000000"/>
                                   </a:solidFill>
                                   <a:latin typeface="Cambria Math" panose="02040503050406030204" pitchFamily="18" charset="0"/>
-                                  <a:cs typeface="Arial" panose="020B0604020202020204" pitchFamily="34" charset="0"/>
+                                  <a:cs typeface="Arial" panose="020B0704020202020204" pitchFamily="34" charset="0"/>
                                   <a:sym typeface="Symbol" panose="05050102010706020507" pitchFamily="18" charset="2"/>
                                 </a:rPr>
                                 <m:t></m:t>
@@ -27941,7 +27960,7 @@
                                     <a:srgbClr val="000000"/>
                                   </a:solidFill>
                                   <a:latin typeface="Cambria Math" panose="02040503050406030204" pitchFamily="18" charset="0"/>
-                                  <a:cs typeface="Arial" panose="020B0604020202020204" pitchFamily="34" charset="0"/>
+                                  <a:cs typeface="Arial" panose="020B0704020202020204" pitchFamily="34" charset="0"/>
                                 </a:rPr>
                                 <m:t>𝐴</m:t>
                               </m:r>
@@ -27953,7 +27972,7 @@
                                     <a:srgbClr val="000000"/>
                                   </a:solidFill>
                                   <a:latin typeface="Cambria Math" panose="02040503050406030204" pitchFamily="18" charset="0"/>
-                                  <a:cs typeface="Arial" panose="020B0604020202020204" pitchFamily="34" charset="0"/>
+                                  <a:cs typeface="Arial" panose="020B0704020202020204" pitchFamily="34" charset="0"/>
                                 </a:rPr>
                                 <m:t>2</m:t>
                               </m:r>
@@ -27965,7 +27984,7 @@
                                 <a:srgbClr val="000000"/>
                               </a:solidFill>
                               <a:latin typeface="Cambria Math" panose="02040503050406030204" pitchFamily="18" charset="0"/>
-                              <a:cs typeface="Arial" panose="020B0604020202020204" pitchFamily="34" charset="0"/>
+                              <a:cs typeface="Arial" panose="020B0704020202020204" pitchFamily="34" charset="0"/>
                             </a:rPr>
                             <m:t>+</m:t>
                           </m:r>
@@ -27975,7 +27994,7 @@
                                 <a:srgbClr val="000000"/>
                               </a:solidFill>
                               <a:latin typeface="Cambria Math" panose="02040503050406030204" pitchFamily="18" charset="0"/>
-                              <a:cs typeface="Arial" panose="020B0604020202020204" pitchFamily="34" charset="0"/>
+                              <a:cs typeface="Arial" panose="020B0704020202020204" pitchFamily="34" charset="0"/>
                             </a:rPr>
                             <m:t>…</m:t>
                           </m:r>
@@ -27985,7 +28004,7 @@
                                 <a:srgbClr val="000000"/>
                               </a:solidFill>
                               <a:latin typeface="Cambria Math" panose="02040503050406030204" pitchFamily="18" charset="0"/>
-                              <a:cs typeface="Arial" panose="020B0604020202020204" pitchFamily="34" charset="0"/>
+                              <a:cs typeface="Arial" panose="020B0704020202020204" pitchFamily="34" charset="0"/>
                             </a:rPr>
                             <m:t>+</m:t>
                           </m:r>
@@ -27997,7 +28016,7 @@
                                     <a:srgbClr val="000000"/>
                                   </a:solidFill>
                                   <a:latin typeface="Cambria Math" panose="02040503050406030204"/>
-                                  <a:cs typeface="Arial" panose="020B0604020202020204" pitchFamily="34" charset="0"/>
+                                  <a:cs typeface="Arial" panose="020B0704020202020204" pitchFamily="34" charset="0"/>
                                 </a:rPr>
                               </m:ctrlPr>
                             </m:sSubPr>
@@ -28008,7 +28027,7 @@
                                     <a:srgbClr val="000000"/>
                                   </a:solidFill>
                                   <a:latin typeface="Cambria Math" panose="02040503050406030204" pitchFamily="18" charset="0"/>
-                                  <a:cs typeface="Arial" panose="020B0604020202020204" pitchFamily="34" charset="0"/>
+                                  <a:cs typeface="Arial" panose="020B0704020202020204" pitchFamily="34" charset="0"/>
                                   <a:sym typeface="Symbol" panose="05050102010706020507" pitchFamily="18" charset="2"/>
                                 </a:rPr>
                                 <m:t></m:t>
@@ -28019,7 +28038,7 @@
                                     <a:srgbClr val="000000"/>
                                   </a:solidFill>
                                   <a:latin typeface="Cambria Math" panose="02040503050406030204" pitchFamily="18" charset="0"/>
-                                  <a:cs typeface="Arial" panose="020B0604020202020204" pitchFamily="34" charset="0"/>
+                                  <a:cs typeface="Arial" panose="020B0704020202020204" pitchFamily="34" charset="0"/>
                                 </a:rPr>
                                 <m:t>𝐴</m:t>
                               </m:r>
@@ -28031,7 +28050,7 @@
                                     <a:srgbClr val="000000"/>
                                   </a:solidFill>
                                   <a:latin typeface="Cambria Math" panose="02040503050406030204" pitchFamily="18" charset="0"/>
-                                  <a:cs typeface="Arial" panose="020B0604020202020204" pitchFamily="34" charset="0"/>
+                                  <a:cs typeface="Arial" panose="020B0704020202020204" pitchFamily="34" charset="0"/>
                                 </a:rPr>
                                 <m:t>𝑛</m:t>
                               </m:r>
@@ -28046,7 +28065,7 @@
                               </a:solidFill>
                               <a:effectLst/>
                               <a:latin typeface="Cambria Math" panose="02040503050406030204" pitchFamily="18" charset="0"/>
-                              <a:cs typeface="Arial" panose="020B0604020202020204" pitchFamily="34" charset="0"/>
+                              <a:cs typeface="Arial" panose="020B0704020202020204" pitchFamily="34" charset="0"/>
                             </a:rPr>
                             <m:t>𝑛</m:t>
                           </m:r>
@@ -28060,9 +28079,9 @@
                         <a:srgbClr val="000000"/>
                       </a:solidFill>
                       <a:effectLst/>
-                      <a:latin typeface="Arial" panose="020B0604020202020204" pitchFamily="34" charset="0"/>
+                      <a:latin typeface="Arial" panose="020B0704020202020204" pitchFamily="34" charset="0"/>
                       <a:ea typeface="Times New Roman" panose="02020603050405020304" pitchFamily="18" charset="0"/>
-                      <a:cs typeface="Arial" panose="020B0604020202020204" pitchFamily="34" charset="0"/>
+                      <a:cs typeface="Arial" panose="020B0704020202020204" pitchFamily="34" charset="0"/>
                     </a:rPr>
                     <a:t> </a:t>
                   </a:r>
